--- a/manuscript/Figures/Blattabacterium HGT_figures-working.pptx
+++ b/manuscript/Figures/Blattabacterium HGT_figures-working.pptx
@@ -4,10 +4,15 @@
   <p:sldMasterIdLst>
     <p:sldMasterId id="2147483648" r:id="rId1"/>
   </p:sldMasterIdLst>
+  <p:notesMasterIdLst>
+    <p:notesMasterId r:id="rId7"/>
+  </p:notesMasterIdLst>
   <p:sldIdLst>
     <p:sldId id="256" r:id="rId2"/>
     <p:sldId id="258" r:id="rId3"/>
     <p:sldId id="257" r:id="rId4"/>
+    <p:sldId id="259" r:id="rId5"/>
+    <p:sldId id="260" r:id="rId6"/>
   </p:sldIdLst>
   <p:sldSz cx="12192000" cy="6858000"/>
   <p:notesSz cx="6858000" cy="9144000"/>
@@ -114,6 +119,495 @@
 </p:presentation>
 </file>
 
+<file path=ppt/notesMasters/notesMaster1.xml><?xml version="1.0" encoding="utf-8"?>
+<p:notesMaster xmlns:a="http://schemas.openxmlformats.org/drawingml/2006/main" xmlns:r="http://schemas.openxmlformats.org/officeDocument/2006/relationships" xmlns:p="http://schemas.openxmlformats.org/presentationml/2006/main">
+  <p:cSld>
+    <p:bg>
+      <p:bgRef idx="1001">
+        <a:schemeClr val="bg1"/>
+      </p:bgRef>
+    </p:bg>
+    <p:spTree>
+      <p:nvGrpSpPr>
+        <p:cNvPr id="1" name=""/>
+        <p:cNvGrpSpPr/>
+        <p:nvPr/>
+      </p:nvGrpSpPr>
+      <p:grpSpPr>
+        <a:xfrm>
+          <a:off x="0" y="0"/>
+          <a:ext cx="0" cy="0"/>
+          <a:chOff x="0" y="0"/>
+          <a:chExt cx="0" cy="0"/>
+        </a:xfrm>
+      </p:grpSpPr>
+      <p:sp>
+        <p:nvSpPr>
+          <p:cNvPr id="2" name="Header Placeholder 1"/>
+          <p:cNvSpPr>
+            <a:spLocks noGrp="1"/>
+          </p:cNvSpPr>
+          <p:nvPr>
+            <p:ph type="hdr" sz="quarter"/>
+          </p:nvPr>
+        </p:nvSpPr>
+        <p:spPr>
+          <a:xfrm>
+            <a:off x="0" y="0"/>
+            <a:ext cx="2971800" cy="458788"/>
+          </a:xfrm>
+          <a:prstGeom prst="rect">
+            <a:avLst/>
+          </a:prstGeom>
+        </p:spPr>
+        <p:txBody>
+          <a:bodyPr vert="horz" lIns="91440" tIns="45720" rIns="91440" bIns="45720" rtlCol="0"/>
+          <a:lstStyle>
+            <a:lvl1pPr algn="l">
+              <a:defRPr sz="1200"/>
+            </a:lvl1pPr>
+          </a:lstStyle>
+          <a:p>
+            <a:endParaRPr lang="en-US"/>
+          </a:p>
+        </p:txBody>
+      </p:sp>
+      <p:sp>
+        <p:nvSpPr>
+          <p:cNvPr id="3" name="Date Placeholder 2"/>
+          <p:cNvSpPr>
+            <a:spLocks noGrp="1"/>
+          </p:cNvSpPr>
+          <p:nvPr>
+            <p:ph type="dt" idx="1"/>
+          </p:nvPr>
+        </p:nvSpPr>
+        <p:spPr>
+          <a:xfrm>
+            <a:off x="3884613" y="0"/>
+            <a:ext cx="2971800" cy="458788"/>
+          </a:xfrm>
+          <a:prstGeom prst="rect">
+            <a:avLst/>
+          </a:prstGeom>
+        </p:spPr>
+        <p:txBody>
+          <a:bodyPr vert="horz" lIns="91440" tIns="45720" rIns="91440" bIns="45720" rtlCol="0"/>
+          <a:lstStyle>
+            <a:lvl1pPr algn="r">
+              <a:defRPr sz="1200"/>
+            </a:lvl1pPr>
+          </a:lstStyle>
+          <a:p>
+            <a:fld id="{C4FC65C6-6085-4244-82B2-63B076D03E9C}" type="datetimeFigureOut">
+              <a:rPr lang="en-US" smtClean="0"/>
+              <a:t>10/27/25</a:t>
+            </a:fld>
+            <a:endParaRPr lang="en-US"/>
+          </a:p>
+        </p:txBody>
+      </p:sp>
+      <p:sp>
+        <p:nvSpPr>
+          <p:cNvPr id="4" name="Slide Image Placeholder 3"/>
+          <p:cNvSpPr>
+            <a:spLocks noGrp="1" noRot="1" noChangeAspect="1"/>
+          </p:cNvSpPr>
+          <p:nvPr>
+            <p:ph type="sldImg" idx="2"/>
+          </p:nvPr>
+        </p:nvSpPr>
+        <p:spPr>
+          <a:xfrm>
+            <a:off x="685800" y="1143000"/>
+            <a:ext cx="5486400" cy="3086100"/>
+          </a:xfrm>
+          <a:prstGeom prst="rect">
+            <a:avLst/>
+          </a:prstGeom>
+          <a:noFill/>
+          <a:ln w="12700">
+            <a:solidFill>
+              <a:prstClr val="black"/>
+            </a:solidFill>
+          </a:ln>
+        </p:spPr>
+        <p:txBody>
+          <a:bodyPr vert="horz" lIns="91440" tIns="45720" rIns="91440" bIns="45720" rtlCol="0" anchor="ctr"/>
+          <a:lstStyle/>
+          <a:p>
+            <a:endParaRPr lang="en-US"/>
+          </a:p>
+        </p:txBody>
+      </p:sp>
+      <p:sp>
+        <p:nvSpPr>
+          <p:cNvPr id="5" name="Notes Placeholder 4"/>
+          <p:cNvSpPr>
+            <a:spLocks noGrp="1"/>
+          </p:cNvSpPr>
+          <p:nvPr>
+            <p:ph type="body" sz="quarter" idx="3"/>
+          </p:nvPr>
+        </p:nvSpPr>
+        <p:spPr>
+          <a:xfrm>
+            <a:off x="685800" y="4400550"/>
+            <a:ext cx="5486400" cy="3600450"/>
+          </a:xfrm>
+          <a:prstGeom prst="rect">
+            <a:avLst/>
+          </a:prstGeom>
+        </p:spPr>
+        <p:txBody>
+          <a:bodyPr vert="horz" lIns="91440" tIns="45720" rIns="91440" bIns="45720" rtlCol="0"/>
+          <a:lstStyle/>
+          <a:p>
+            <a:pPr lvl="0"/>
+            <a:r>
+              <a:rPr lang="en-US"/>
+              <a:t>Edit Master text styles</a:t>
+            </a:r>
+          </a:p>
+          <a:p>
+            <a:pPr lvl="1"/>
+            <a:r>
+              <a:rPr lang="en-US"/>
+              <a:t>Second level</a:t>
+            </a:r>
+          </a:p>
+          <a:p>
+            <a:pPr lvl="2"/>
+            <a:r>
+              <a:rPr lang="en-US"/>
+              <a:t>Third level</a:t>
+            </a:r>
+          </a:p>
+          <a:p>
+            <a:pPr lvl="3"/>
+            <a:r>
+              <a:rPr lang="en-US"/>
+              <a:t>Fourth level</a:t>
+            </a:r>
+          </a:p>
+          <a:p>
+            <a:pPr lvl="4"/>
+            <a:r>
+              <a:rPr lang="en-US"/>
+              <a:t>Fifth level</a:t>
+            </a:r>
+          </a:p>
+        </p:txBody>
+      </p:sp>
+      <p:sp>
+        <p:nvSpPr>
+          <p:cNvPr id="6" name="Footer Placeholder 5"/>
+          <p:cNvSpPr>
+            <a:spLocks noGrp="1"/>
+          </p:cNvSpPr>
+          <p:nvPr>
+            <p:ph type="ftr" sz="quarter" idx="4"/>
+          </p:nvPr>
+        </p:nvSpPr>
+        <p:spPr>
+          <a:xfrm>
+            <a:off x="0" y="8685213"/>
+            <a:ext cx="2971800" cy="458787"/>
+          </a:xfrm>
+          <a:prstGeom prst="rect">
+            <a:avLst/>
+          </a:prstGeom>
+        </p:spPr>
+        <p:txBody>
+          <a:bodyPr vert="horz" lIns="91440" tIns="45720" rIns="91440" bIns="45720" rtlCol="0" anchor="b"/>
+          <a:lstStyle>
+            <a:lvl1pPr algn="l">
+              <a:defRPr sz="1200"/>
+            </a:lvl1pPr>
+          </a:lstStyle>
+          <a:p>
+            <a:endParaRPr lang="en-US"/>
+          </a:p>
+        </p:txBody>
+      </p:sp>
+      <p:sp>
+        <p:nvSpPr>
+          <p:cNvPr id="7" name="Slide Number Placeholder 6"/>
+          <p:cNvSpPr>
+            <a:spLocks noGrp="1"/>
+          </p:cNvSpPr>
+          <p:nvPr>
+            <p:ph type="sldNum" sz="quarter" idx="5"/>
+          </p:nvPr>
+        </p:nvSpPr>
+        <p:spPr>
+          <a:xfrm>
+            <a:off x="3884613" y="8685213"/>
+            <a:ext cx="2971800" cy="458787"/>
+          </a:xfrm>
+          <a:prstGeom prst="rect">
+            <a:avLst/>
+          </a:prstGeom>
+        </p:spPr>
+        <p:txBody>
+          <a:bodyPr vert="horz" lIns="91440" tIns="45720" rIns="91440" bIns="45720" rtlCol="0" anchor="b"/>
+          <a:lstStyle>
+            <a:lvl1pPr algn="r">
+              <a:defRPr sz="1200"/>
+            </a:lvl1pPr>
+          </a:lstStyle>
+          <a:p>
+            <a:fld id="{AFCB7D11-0DA4-4649-ACEB-1F19D5C36BF9}" type="slidenum">
+              <a:rPr lang="en-US" smtClean="0"/>
+              <a:t>‹#›</a:t>
+            </a:fld>
+            <a:endParaRPr lang="en-US"/>
+          </a:p>
+        </p:txBody>
+      </p:sp>
+    </p:spTree>
+    <p:extLst>
+      <p:ext uri="{BB962C8B-B14F-4D97-AF65-F5344CB8AC3E}">
+        <p14:creationId xmlns:p14="http://schemas.microsoft.com/office/powerpoint/2010/main" val="4147835937"/>
+      </p:ext>
+    </p:extLst>
+  </p:cSld>
+  <p:clrMap bg1="lt1" tx1="dk1" bg2="lt2" tx2="dk2" accent1="accent1" accent2="accent2" accent3="accent3" accent4="accent4" accent5="accent5" accent6="accent6" hlink="hlink" folHlink="folHlink"/>
+  <p:notesStyle>
+    <a:lvl1pPr marL="0" algn="l" defTabSz="914400" rtl="0" eaLnBrk="1" latinLnBrk="0" hangingPunct="1">
+      <a:defRPr sz="1200" kern="1200">
+        <a:solidFill>
+          <a:schemeClr val="tx1"/>
+        </a:solidFill>
+        <a:latin typeface="+mn-lt"/>
+        <a:ea typeface="+mn-ea"/>
+        <a:cs typeface="+mn-cs"/>
+      </a:defRPr>
+    </a:lvl1pPr>
+    <a:lvl2pPr marL="457200" algn="l" defTabSz="914400" rtl="0" eaLnBrk="1" latinLnBrk="0" hangingPunct="1">
+      <a:defRPr sz="1200" kern="1200">
+        <a:solidFill>
+          <a:schemeClr val="tx1"/>
+        </a:solidFill>
+        <a:latin typeface="+mn-lt"/>
+        <a:ea typeface="+mn-ea"/>
+        <a:cs typeface="+mn-cs"/>
+      </a:defRPr>
+    </a:lvl2pPr>
+    <a:lvl3pPr marL="914400" algn="l" defTabSz="914400" rtl="0" eaLnBrk="1" latinLnBrk="0" hangingPunct="1">
+      <a:defRPr sz="1200" kern="1200">
+        <a:solidFill>
+          <a:schemeClr val="tx1"/>
+        </a:solidFill>
+        <a:latin typeface="+mn-lt"/>
+        <a:ea typeface="+mn-ea"/>
+        <a:cs typeface="+mn-cs"/>
+      </a:defRPr>
+    </a:lvl3pPr>
+    <a:lvl4pPr marL="1371600" algn="l" defTabSz="914400" rtl="0" eaLnBrk="1" latinLnBrk="0" hangingPunct="1">
+      <a:defRPr sz="1200" kern="1200">
+        <a:solidFill>
+          <a:schemeClr val="tx1"/>
+        </a:solidFill>
+        <a:latin typeface="+mn-lt"/>
+        <a:ea typeface="+mn-ea"/>
+        <a:cs typeface="+mn-cs"/>
+      </a:defRPr>
+    </a:lvl4pPr>
+    <a:lvl5pPr marL="1828800" algn="l" defTabSz="914400" rtl="0" eaLnBrk="1" latinLnBrk="0" hangingPunct="1">
+      <a:defRPr sz="1200" kern="1200">
+        <a:solidFill>
+          <a:schemeClr val="tx1"/>
+        </a:solidFill>
+        <a:latin typeface="+mn-lt"/>
+        <a:ea typeface="+mn-ea"/>
+        <a:cs typeface="+mn-cs"/>
+      </a:defRPr>
+    </a:lvl5pPr>
+    <a:lvl6pPr marL="2286000" algn="l" defTabSz="914400" rtl="0" eaLnBrk="1" latinLnBrk="0" hangingPunct="1">
+      <a:defRPr sz="1200" kern="1200">
+        <a:solidFill>
+          <a:schemeClr val="tx1"/>
+        </a:solidFill>
+        <a:latin typeface="+mn-lt"/>
+        <a:ea typeface="+mn-ea"/>
+        <a:cs typeface="+mn-cs"/>
+      </a:defRPr>
+    </a:lvl6pPr>
+    <a:lvl7pPr marL="2743200" algn="l" defTabSz="914400" rtl="0" eaLnBrk="1" latinLnBrk="0" hangingPunct="1">
+      <a:defRPr sz="1200" kern="1200">
+        <a:solidFill>
+          <a:schemeClr val="tx1"/>
+        </a:solidFill>
+        <a:latin typeface="+mn-lt"/>
+        <a:ea typeface="+mn-ea"/>
+        <a:cs typeface="+mn-cs"/>
+      </a:defRPr>
+    </a:lvl7pPr>
+    <a:lvl8pPr marL="3200400" algn="l" defTabSz="914400" rtl="0" eaLnBrk="1" latinLnBrk="0" hangingPunct="1">
+      <a:defRPr sz="1200" kern="1200">
+        <a:solidFill>
+          <a:schemeClr val="tx1"/>
+        </a:solidFill>
+        <a:latin typeface="+mn-lt"/>
+        <a:ea typeface="+mn-ea"/>
+        <a:cs typeface="+mn-cs"/>
+      </a:defRPr>
+    </a:lvl8pPr>
+    <a:lvl9pPr marL="3657600" algn="l" defTabSz="914400" rtl="0" eaLnBrk="1" latinLnBrk="0" hangingPunct="1">
+      <a:defRPr sz="1200" kern="1200">
+        <a:solidFill>
+          <a:schemeClr val="tx1"/>
+        </a:solidFill>
+        <a:latin typeface="+mn-lt"/>
+        <a:ea typeface="+mn-ea"/>
+        <a:cs typeface="+mn-cs"/>
+      </a:defRPr>
+    </a:lvl9pPr>
+  </p:notesStyle>
+</p:notesMaster>
+</file>
+
+<file path=ppt/notesSlides/notesSlide1.xml><?xml version="1.0" encoding="utf-8"?>
+<p:notes xmlns:a="http://schemas.openxmlformats.org/drawingml/2006/main" xmlns:r="http://schemas.openxmlformats.org/officeDocument/2006/relationships" xmlns:p="http://schemas.openxmlformats.org/presentationml/2006/main">
+  <p:cSld>
+    <p:spTree>
+      <p:nvGrpSpPr>
+        <p:cNvPr id="1" name=""/>
+        <p:cNvGrpSpPr/>
+        <p:nvPr/>
+      </p:nvGrpSpPr>
+      <p:grpSpPr>
+        <a:xfrm>
+          <a:off x="0" y="0"/>
+          <a:ext cx="0" cy="0"/>
+          <a:chOff x="0" y="0"/>
+          <a:chExt cx="0" cy="0"/>
+        </a:xfrm>
+      </p:grpSpPr>
+      <p:sp>
+        <p:nvSpPr>
+          <p:cNvPr id="2" name="Slide Image Placeholder 1"/>
+          <p:cNvSpPr>
+            <a:spLocks noGrp="1" noRot="1" noChangeAspect="1"/>
+          </p:cNvSpPr>
+          <p:nvPr>
+            <p:ph type="sldImg"/>
+          </p:nvPr>
+        </p:nvSpPr>
+        <p:spPr/>
+      </p:sp>
+      <p:sp>
+        <p:nvSpPr>
+          <p:cNvPr id="3" name="Notes Placeholder 2"/>
+          <p:cNvSpPr>
+            <a:spLocks noGrp="1"/>
+          </p:cNvSpPr>
+          <p:nvPr>
+            <p:ph type="body" idx="1"/>
+          </p:nvPr>
+        </p:nvSpPr>
+        <p:spPr/>
+        <p:txBody>
+          <a:bodyPr/>
+          <a:lstStyle/>
+          <a:p>
+            <a:r>
+              <a:rPr lang="en-US" dirty="0"/>
+              <a:t>Cladogram of taxa </a:t>
+            </a:r>
+            <a:r>
+              <a:rPr lang="en-US" dirty="0" err="1"/>
+              <a:t>analysed</a:t>
+            </a:r>
+            <a:r>
+              <a:rPr lang="en-US" dirty="0"/>
+              <a:t> for </a:t>
+            </a:r>
+            <a:r>
+              <a:rPr lang="en-US" dirty="0" err="1"/>
+              <a:t>Blattabacterium</a:t>
+            </a:r>
+            <a:r>
+              <a:rPr lang="en-US" dirty="0"/>
+              <a:t> HGT events</a:t>
+            </a:r>
+          </a:p>
+          <a:p>
+            <a:endParaRPr lang="en-US" dirty="0"/>
+          </a:p>
+          <a:p>
+            <a:r>
+              <a:rPr lang="en-US" dirty="0"/>
+              <a:t>Nodes show divergence times (Ma) from Beasley-Hall et al (2021: for nodes internal to top 12 taxa) and Evangelista et al (2019: for nodes internal to remaining 6 taxa). One exception is value between P. </a:t>
+            </a:r>
+            <a:r>
+              <a:rPr lang="en-US" dirty="0" err="1"/>
+              <a:t>lata</a:t>
+            </a:r>
+            <a:endParaRPr lang="en-US" dirty="0"/>
+          </a:p>
+          <a:p>
+            <a:endParaRPr lang="en-US" dirty="0"/>
+          </a:p>
+          <a:p>
+            <a:r>
+              <a:rPr lang="en-US" dirty="0"/>
+              <a:t>and P. </a:t>
+            </a:r>
+            <a:r>
+              <a:rPr lang="en-US" dirty="0" err="1"/>
+              <a:t>cribrata</a:t>
+            </a:r>
+            <a:r>
+              <a:rPr lang="en-US" dirty="0"/>
+              <a:t>, which is from Adams et al 2024. </a:t>
+            </a:r>
+          </a:p>
+          <a:p>
+            <a:endParaRPr lang="en-US" dirty="0"/>
+          </a:p>
+          <a:p>
+            <a:endParaRPr lang="en-US" dirty="0"/>
+          </a:p>
+        </p:txBody>
+      </p:sp>
+      <p:sp>
+        <p:nvSpPr>
+          <p:cNvPr id="4" name="Slide Number Placeholder 3"/>
+          <p:cNvSpPr>
+            <a:spLocks noGrp="1"/>
+          </p:cNvSpPr>
+          <p:nvPr>
+            <p:ph type="sldNum" sz="quarter" idx="5"/>
+          </p:nvPr>
+        </p:nvSpPr>
+        <p:spPr/>
+        <p:txBody>
+          <a:bodyPr/>
+          <a:lstStyle/>
+          <a:p>
+            <a:fld id="{AFCB7D11-0DA4-4649-ACEB-1F19D5C36BF9}" type="slidenum">
+              <a:rPr lang="en-US" smtClean="0"/>
+              <a:t>4</a:t>
+            </a:fld>
+            <a:endParaRPr lang="en-US"/>
+          </a:p>
+        </p:txBody>
+      </p:sp>
+    </p:spTree>
+    <p:extLst>
+      <p:ext uri="{BB962C8B-B14F-4D97-AF65-F5344CB8AC3E}">
+        <p14:creationId xmlns:p14="http://schemas.microsoft.com/office/powerpoint/2010/main" val="3423067043"/>
+      </p:ext>
+    </p:extLst>
+  </p:cSld>
+  <p:clrMapOvr>
+    <a:masterClrMapping/>
+  </p:clrMapOvr>
+</p:notes>
+</file>
+
 <file path=ppt/slideLayouts/slideLayout1.xml><?xml version="1.0" encoding="utf-8"?>
 <p:sldLayout xmlns:a="http://schemas.openxmlformats.org/drawingml/2006/main" xmlns:r="http://schemas.openxmlformats.org/officeDocument/2006/relationships" xmlns:p="http://schemas.openxmlformats.org/presentationml/2006/main" type="title" preserve="1">
   <p:cSld name="Title Slide">
@@ -261,7 +755,7 @@
           <a:p>
             <a:fld id="{C2B98897-90D8-9D4D-95EE-51EF37A9743C}" type="datetimeFigureOut">
               <a:rPr lang="en-US" smtClean="0"/>
-              <a:t>7/20/25</a:t>
+              <a:t>10/27/25</a:t>
             </a:fld>
             <a:endParaRPr lang="en-US"/>
           </a:p>
@@ -459,7 +953,7 @@
           <a:p>
             <a:fld id="{C2B98897-90D8-9D4D-95EE-51EF37A9743C}" type="datetimeFigureOut">
               <a:rPr lang="en-US" smtClean="0"/>
-              <a:t>7/20/25</a:t>
+              <a:t>10/27/25</a:t>
             </a:fld>
             <a:endParaRPr lang="en-US"/>
           </a:p>
@@ -667,7 +1161,7 @@
           <a:p>
             <a:fld id="{C2B98897-90D8-9D4D-95EE-51EF37A9743C}" type="datetimeFigureOut">
               <a:rPr lang="en-US" smtClean="0"/>
-              <a:t>7/20/25</a:t>
+              <a:t>10/27/25</a:t>
             </a:fld>
             <a:endParaRPr lang="en-US"/>
           </a:p>
@@ -865,7 +1359,7 @@
           <a:p>
             <a:fld id="{C2B98897-90D8-9D4D-95EE-51EF37A9743C}" type="datetimeFigureOut">
               <a:rPr lang="en-US" smtClean="0"/>
-              <a:t>7/20/25</a:t>
+              <a:t>10/27/25</a:t>
             </a:fld>
             <a:endParaRPr lang="en-US"/>
           </a:p>
@@ -1140,7 +1634,7 @@
           <a:p>
             <a:fld id="{C2B98897-90D8-9D4D-95EE-51EF37A9743C}" type="datetimeFigureOut">
               <a:rPr lang="en-US" smtClean="0"/>
-              <a:t>7/20/25</a:t>
+              <a:t>10/27/25</a:t>
             </a:fld>
             <a:endParaRPr lang="en-US"/>
           </a:p>
@@ -1405,7 +1899,7 @@
           <a:p>
             <a:fld id="{C2B98897-90D8-9D4D-95EE-51EF37A9743C}" type="datetimeFigureOut">
               <a:rPr lang="en-US" smtClean="0"/>
-              <a:t>7/20/25</a:t>
+              <a:t>10/27/25</a:t>
             </a:fld>
             <a:endParaRPr lang="en-US"/>
           </a:p>
@@ -1817,7 +2311,7 @@
           <a:p>
             <a:fld id="{C2B98897-90D8-9D4D-95EE-51EF37A9743C}" type="datetimeFigureOut">
               <a:rPr lang="en-US" smtClean="0"/>
-              <a:t>7/20/25</a:t>
+              <a:t>10/27/25</a:t>
             </a:fld>
             <a:endParaRPr lang="en-US"/>
           </a:p>
@@ -1958,7 +2452,7 @@
           <a:p>
             <a:fld id="{C2B98897-90D8-9D4D-95EE-51EF37A9743C}" type="datetimeFigureOut">
               <a:rPr lang="en-US" smtClean="0"/>
-              <a:t>7/20/25</a:t>
+              <a:t>10/27/25</a:t>
             </a:fld>
             <a:endParaRPr lang="en-US"/>
           </a:p>
@@ -2071,7 +2565,7 @@
           <a:p>
             <a:fld id="{C2B98897-90D8-9D4D-95EE-51EF37A9743C}" type="datetimeFigureOut">
               <a:rPr lang="en-US" smtClean="0"/>
-              <a:t>7/20/25</a:t>
+              <a:t>10/27/25</a:t>
             </a:fld>
             <a:endParaRPr lang="en-US"/>
           </a:p>
@@ -2382,7 +2876,7 @@
           <a:p>
             <a:fld id="{C2B98897-90D8-9D4D-95EE-51EF37A9743C}" type="datetimeFigureOut">
               <a:rPr lang="en-US" smtClean="0"/>
-              <a:t>7/20/25</a:t>
+              <a:t>10/27/25</a:t>
             </a:fld>
             <a:endParaRPr lang="en-US"/>
           </a:p>
@@ -2670,7 +3164,7 @@
           <a:p>
             <a:fld id="{C2B98897-90D8-9D4D-95EE-51EF37A9743C}" type="datetimeFigureOut">
               <a:rPr lang="en-US" smtClean="0"/>
-              <a:t>7/20/25</a:t>
+              <a:t>10/27/25</a:t>
             </a:fld>
             <a:endParaRPr lang="en-US"/>
           </a:p>
@@ -2911,7 +3405,7 @@
           <a:p>
             <a:fld id="{C2B98897-90D8-9D4D-95EE-51EF37A9743C}" type="datetimeFigureOut">
               <a:rPr lang="en-US" smtClean="0"/>
-              <a:t>7/20/25</a:t>
+              <a:t>10/27/25</a:t>
             </a:fld>
             <a:endParaRPr lang="en-US"/>
           </a:p>
@@ -7860,7 +8354,7 @@
                 <a:latin typeface="Arial" panose="020B0604020202020204" pitchFamily="34" charset="0"/>
                 <a:cs typeface="Arial" panose="020B0604020202020204" pitchFamily="34" charset="0"/>
               </a:rPr>
-              <a:t>8</a:t>
+              <a:t>0</a:t>
             </a:r>
           </a:p>
         </p:txBody>
@@ -7974,7 +8468,7 @@
                 <a:latin typeface="Arial" panose="020B0604020202020204" pitchFamily="34" charset="0"/>
                 <a:cs typeface="Arial" panose="020B0604020202020204" pitchFamily="34" charset="0"/>
               </a:rPr>
-              <a:t>1-74</a:t>
+              <a:t>1</a:t>
             </a:r>
           </a:p>
         </p:txBody>
@@ -8404,6 +8898,4956 @@
     <p:extLst>
       <p:ext uri="{BB962C8B-B14F-4D97-AF65-F5344CB8AC3E}">
         <p14:creationId xmlns:p14="http://schemas.microsoft.com/office/powerpoint/2010/main" val="3086575844"/>
+      </p:ext>
+    </p:extLst>
+  </p:cSld>
+  <p:clrMapOvr>
+    <a:masterClrMapping/>
+  </p:clrMapOvr>
+</p:sld>
+</file>
+
+<file path=ppt/slides/slide4.xml><?xml version="1.0" encoding="utf-8"?>
+<p:sld xmlns:a="http://schemas.openxmlformats.org/drawingml/2006/main" xmlns:r="http://schemas.openxmlformats.org/officeDocument/2006/relationships" xmlns:p="http://schemas.openxmlformats.org/presentationml/2006/main">
+  <p:cSld>
+    <p:spTree>
+      <p:nvGrpSpPr>
+        <p:cNvPr id="1" name=""/>
+        <p:cNvGrpSpPr/>
+        <p:nvPr/>
+      </p:nvGrpSpPr>
+      <p:grpSpPr>
+        <a:xfrm>
+          <a:off x="0" y="0"/>
+          <a:ext cx="0" cy="0"/>
+          <a:chOff x="0" y="0"/>
+          <a:chExt cx="0" cy="0"/>
+        </a:xfrm>
+      </p:grpSpPr>
+      <p:sp>
+        <p:nvSpPr>
+          <p:cNvPr id="7" name="TextBox 6">
+            <a:extLst>
+              <a:ext uri="{FF2B5EF4-FFF2-40B4-BE49-F238E27FC236}">
+                <a16:creationId xmlns:a16="http://schemas.microsoft.com/office/drawing/2014/main" id="{2836DD86-B9DF-36C9-A98F-CA5E1FB96A50}"/>
+              </a:ext>
+            </a:extLst>
+          </p:cNvPr>
+          <p:cNvSpPr txBox="1"/>
+          <p:nvPr/>
+        </p:nvSpPr>
+        <p:spPr>
+          <a:xfrm>
+            <a:off x="5140510" y="615171"/>
+            <a:ext cx="3710354" cy="307777"/>
+          </a:xfrm>
+          <a:prstGeom prst="rect">
+            <a:avLst/>
+          </a:prstGeom>
+          <a:noFill/>
+        </p:spPr>
+        <p:txBody>
+          <a:bodyPr wrap="square">
+            <a:spAutoFit/>
+          </a:bodyPr>
+          <a:lstStyle/>
+          <a:p>
+            <a:r>
+              <a:rPr lang="en-US" sz="1400" i="1" dirty="0" err="1">
+                <a:latin typeface="Arial" panose="020B0604020202020204" pitchFamily="34" charset="0"/>
+                <a:cs typeface="Arial" panose="020B0604020202020204" pitchFamily="34" charset="0"/>
+              </a:rPr>
+              <a:t>Macropanesthia</a:t>
+            </a:r>
+            <a:r>
+              <a:rPr lang="en-US" sz="1400" i="1" dirty="0">
+                <a:latin typeface="Arial" panose="020B0604020202020204" pitchFamily="34" charset="0"/>
+                <a:cs typeface="Arial" panose="020B0604020202020204" pitchFamily="34" charset="0"/>
+              </a:rPr>
+              <a:t> </a:t>
+            </a:r>
+            <a:r>
+              <a:rPr lang="en-US" sz="1400" i="1" dirty="0" err="1">
+                <a:latin typeface="Arial" panose="020B0604020202020204" pitchFamily="34" charset="0"/>
+                <a:cs typeface="Arial" panose="020B0604020202020204" pitchFamily="34" charset="0"/>
+              </a:rPr>
+              <a:t>lithgowae</a:t>
+            </a:r>
+            <a:r>
+              <a:rPr lang="en-US" sz="1400" i="1" dirty="0">
+                <a:latin typeface="Arial" panose="020B0604020202020204" pitchFamily="34" charset="0"/>
+                <a:cs typeface="Arial" panose="020B0604020202020204" pitchFamily="34" charset="0"/>
+              </a:rPr>
+              <a:t> </a:t>
+            </a:r>
+            <a:r>
+              <a:rPr lang="en-US" sz="1400" dirty="0">
+                <a:latin typeface="Arial" panose="020B0604020202020204" pitchFamily="34" charset="0"/>
+                <a:cs typeface="Arial" panose="020B0604020202020204" pitchFamily="34" charset="0"/>
+              </a:rPr>
+              <a:t>Z004 (</a:t>
+            </a:r>
+            <a:r>
+              <a:rPr lang="en-US" sz="1400" dirty="0" err="1">
+                <a:latin typeface="Arial" panose="020B0604020202020204" pitchFamily="34" charset="0"/>
+                <a:cs typeface="Arial" panose="020B0604020202020204" pitchFamily="34" charset="0"/>
+              </a:rPr>
+              <a:t>Murgon</a:t>
+            </a:r>
+            <a:r>
+              <a:rPr lang="en-US" sz="1400" dirty="0">
+                <a:latin typeface="Arial" panose="020B0604020202020204" pitchFamily="34" charset="0"/>
+                <a:cs typeface="Arial" panose="020B0604020202020204" pitchFamily="34" charset="0"/>
+              </a:rPr>
+              <a:t>)</a:t>
+            </a:r>
+          </a:p>
+        </p:txBody>
+      </p:sp>
+      <p:sp>
+        <p:nvSpPr>
+          <p:cNvPr id="10" name="TextBox 9">
+            <a:extLst>
+              <a:ext uri="{FF2B5EF4-FFF2-40B4-BE49-F238E27FC236}">
+                <a16:creationId xmlns:a16="http://schemas.microsoft.com/office/drawing/2014/main" id="{685EC0A9-B9BD-963F-C5A6-E62991557B95}"/>
+              </a:ext>
+            </a:extLst>
+          </p:cNvPr>
+          <p:cNvSpPr txBox="1"/>
+          <p:nvPr/>
+        </p:nvSpPr>
+        <p:spPr>
+          <a:xfrm>
+            <a:off x="5140510" y="957898"/>
+            <a:ext cx="4561450" cy="307777"/>
+          </a:xfrm>
+          <a:prstGeom prst="rect">
+            <a:avLst/>
+          </a:prstGeom>
+          <a:noFill/>
+        </p:spPr>
+        <p:txBody>
+          <a:bodyPr wrap="square">
+            <a:spAutoFit/>
+          </a:bodyPr>
+          <a:lstStyle/>
+          <a:p>
+            <a:r>
+              <a:rPr lang="en-US" sz="1400" i="1" dirty="0" err="1">
+                <a:latin typeface="Arial" panose="020B0604020202020204" pitchFamily="34" charset="0"/>
+                <a:cs typeface="Arial" panose="020B0604020202020204" pitchFamily="34" charset="0"/>
+              </a:rPr>
+              <a:t>Panesthia</a:t>
+            </a:r>
+            <a:r>
+              <a:rPr lang="en-US" sz="1400" i="1" dirty="0">
+                <a:latin typeface="Arial" panose="020B0604020202020204" pitchFamily="34" charset="0"/>
+                <a:cs typeface="Arial" panose="020B0604020202020204" pitchFamily="34" charset="0"/>
+              </a:rPr>
+              <a:t> </a:t>
+            </a:r>
+            <a:r>
+              <a:rPr lang="en-US" sz="1400" i="1" dirty="0" err="1">
+                <a:latin typeface="Arial" panose="020B0604020202020204" pitchFamily="34" charset="0"/>
+                <a:cs typeface="Arial" panose="020B0604020202020204" pitchFamily="34" charset="0"/>
+              </a:rPr>
+              <a:t>tryoni</a:t>
+            </a:r>
+            <a:r>
+              <a:rPr lang="en-US" sz="1400" i="1" dirty="0">
+                <a:latin typeface="Arial" panose="020B0604020202020204" pitchFamily="34" charset="0"/>
+                <a:cs typeface="Arial" panose="020B0604020202020204" pitchFamily="34" charset="0"/>
+              </a:rPr>
+              <a:t> </a:t>
+            </a:r>
+            <a:r>
+              <a:rPr lang="en-US" sz="1400" i="1" dirty="0" err="1">
+                <a:latin typeface="Arial" panose="020B0604020202020204" pitchFamily="34" charset="0"/>
+                <a:cs typeface="Arial" panose="020B0604020202020204" pitchFamily="34" charset="0"/>
+              </a:rPr>
+              <a:t>tryoni</a:t>
+            </a:r>
+            <a:r>
+              <a:rPr lang="en-US" sz="1400" i="1" dirty="0">
+                <a:latin typeface="Arial" panose="020B0604020202020204" pitchFamily="34" charset="0"/>
+                <a:cs typeface="Arial" panose="020B0604020202020204" pitchFamily="34" charset="0"/>
+              </a:rPr>
+              <a:t> </a:t>
+            </a:r>
+            <a:r>
+              <a:rPr lang="en-US" sz="1400" dirty="0">
+                <a:latin typeface="Arial" panose="020B0604020202020204" pitchFamily="34" charset="0"/>
+                <a:cs typeface="Arial" panose="020B0604020202020204" pitchFamily="34" charset="0"/>
+              </a:rPr>
+              <a:t>Z005</a:t>
+            </a:r>
+            <a:r>
+              <a:rPr lang="en-US" sz="1400" i="1" dirty="0">
+                <a:latin typeface="Arial" panose="020B0604020202020204" pitchFamily="34" charset="0"/>
+                <a:cs typeface="Arial" panose="020B0604020202020204" pitchFamily="34" charset="0"/>
+              </a:rPr>
+              <a:t> </a:t>
+            </a:r>
+            <a:r>
+              <a:rPr lang="en-US" sz="1400" dirty="0">
+                <a:latin typeface="Arial" panose="020B0604020202020204" pitchFamily="34" charset="0"/>
+                <a:cs typeface="Arial" panose="020B0604020202020204" pitchFamily="34" charset="0"/>
+              </a:rPr>
+              <a:t>(</a:t>
+            </a:r>
+            <a:r>
+              <a:rPr lang="en-US" sz="1400" dirty="0" err="1">
+                <a:latin typeface="Arial" panose="020B0604020202020204" pitchFamily="34" charset="0"/>
+                <a:cs typeface="Arial" panose="020B0604020202020204" pitchFamily="34" charset="0"/>
+              </a:rPr>
+              <a:t>Kroombit</a:t>
+            </a:r>
+            <a:r>
+              <a:rPr lang="en-US" sz="1400" dirty="0">
+                <a:latin typeface="Arial" panose="020B0604020202020204" pitchFamily="34" charset="0"/>
+                <a:cs typeface="Arial" panose="020B0604020202020204" pitchFamily="34" charset="0"/>
+              </a:rPr>
+              <a:t> Tops)</a:t>
+            </a:r>
+          </a:p>
+        </p:txBody>
+      </p:sp>
+      <p:sp>
+        <p:nvSpPr>
+          <p:cNvPr id="12" name="TextBox 11">
+            <a:extLst>
+              <a:ext uri="{FF2B5EF4-FFF2-40B4-BE49-F238E27FC236}">
+                <a16:creationId xmlns:a16="http://schemas.microsoft.com/office/drawing/2014/main" id="{FEB833C6-5059-3F2B-0656-649BB2D62B48}"/>
+              </a:ext>
+            </a:extLst>
+          </p:cNvPr>
+          <p:cNvSpPr txBox="1"/>
+          <p:nvPr/>
+        </p:nvSpPr>
+        <p:spPr>
+          <a:xfrm>
+            <a:off x="5140509" y="1300625"/>
+            <a:ext cx="4225162" cy="307777"/>
+          </a:xfrm>
+          <a:prstGeom prst="rect">
+            <a:avLst/>
+          </a:prstGeom>
+          <a:noFill/>
+        </p:spPr>
+        <p:txBody>
+          <a:bodyPr wrap="square">
+            <a:spAutoFit/>
+          </a:bodyPr>
+          <a:lstStyle/>
+          <a:p>
+            <a:r>
+              <a:rPr lang="en-US" sz="1400" i="1" dirty="0" err="1">
+                <a:latin typeface="Arial" panose="020B0604020202020204" pitchFamily="34" charset="0"/>
+                <a:cs typeface="Arial" panose="020B0604020202020204" pitchFamily="34" charset="0"/>
+              </a:rPr>
+              <a:t>Panesthia</a:t>
+            </a:r>
+            <a:r>
+              <a:rPr lang="en-US" sz="1400" i="1" dirty="0">
+                <a:latin typeface="Arial" panose="020B0604020202020204" pitchFamily="34" charset="0"/>
+                <a:cs typeface="Arial" panose="020B0604020202020204" pitchFamily="34" charset="0"/>
+              </a:rPr>
+              <a:t> gigantea </a:t>
+            </a:r>
+            <a:r>
+              <a:rPr lang="en-US" sz="1400" dirty="0">
+                <a:latin typeface="Arial" panose="020B0604020202020204" pitchFamily="34" charset="0"/>
+                <a:cs typeface="Arial" panose="020B0604020202020204" pitchFamily="34" charset="0"/>
+              </a:rPr>
+              <a:t>Z020</a:t>
+            </a:r>
+            <a:r>
+              <a:rPr lang="en-US" sz="1400" i="1" dirty="0">
+                <a:latin typeface="Arial" panose="020B0604020202020204" pitchFamily="34" charset="0"/>
+                <a:cs typeface="Arial" panose="020B0604020202020204" pitchFamily="34" charset="0"/>
+              </a:rPr>
+              <a:t> </a:t>
+            </a:r>
+            <a:r>
+              <a:rPr lang="en-US" sz="1400" dirty="0">
+                <a:latin typeface="Arial" panose="020B0604020202020204" pitchFamily="34" charset="0"/>
+                <a:cs typeface="Arial" panose="020B0604020202020204" pitchFamily="34" charset="0"/>
+              </a:rPr>
+              <a:t>(location TBD)</a:t>
+            </a:r>
+          </a:p>
+        </p:txBody>
+      </p:sp>
+      <p:sp>
+        <p:nvSpPr>
+          <p:cNvPr id="13" name="TextBox 12">
+            <a:extLst>
+              <a:ext uri="{FF2B5EF4-FFF2-40B4-BE49-F238E27FC236}">
+                <a16:creationId xmlns:a16="http://schemas.microsoft.com/office/drawing/2014/main" id="{096740E5-743E-5429-BBA3-695337967929}"/>
+              </a:ext>
+            </a:extLst>
+          </p:cNvPr>
+          <p:cNvSpPr txBox="1"/>
+          <p:nvPr/>
+        </p:nvSpPr>
+        <p:spPr>
+          <a:xfrm>
+            <a:off x="5140509" y="1643352"/>
+            <a:ext cx="4561450" cy="307777"/>
+          </a:xfrm>
+          <a:prstGeom prst="rect">
+            <a:avLst/>
+          </a:prstGeom>
+          <a:noFill/>
+        </p:spPr>
+        <p:txBody>
+          <a:bodyPr wrap="square">
+            <a:spAutoFit/>
+          </a:bodyPr>
+          <a:lstStyle/>
+          <a:p>
+            <a:r>
+              <a:rPr lang="en-US" sz="1400" i="1" dirty="0" err="1">
+                <a:latin typeface="Arial" panose="020B0604020202020204" pitchFamily="34" charset="0"/>
+                <a:cs typeface="Arial" panose="020B0604020202020204" pitchFamily="34" charset="0"/>
+              </a:rPr>
+              <a:t>Panesthia</a:t>
+            </a:r>
+            <a:r>
+              <a:rPr lang="en-US" sz="1400" i="1" dirty="0">
+                <a:latin typeface="Arial" panose="020B0604020202020204" pitchFamily="34" charset="0"/>
+                <a:cs typeface="Arial" panose="020B0604020202020204" pitchFamily="34" charset="0"/>
+              </a:rPr>
+              <a:t> </a:t>
+            </a:r>
+            <a:r>
+              <a:rPr lang="en-US" sz="1400" i="1" dirty="0" err="1">
+                <a:latin typeface="Arial" panose="020B0604020202020204" pitchFamily="34" charset="0"/>
+                <a:cs typeface="Arial" panose="020B0604020202020204" pitchFamily="34" charset="0"/>
+              </a:rPr>
+              <a:t>tryoni</a:t>
+            </a:r>
+            <a:r>
+              <a:rPr lang="en-US" sz="1400" i="1" dirty="0">
+                <a:latin typeface="Arial" panose="020B0604020202020204" pitchFamily="34" charset="0"/>
+                <a:cs typeface="Arial" panose="020B0604020202020204" pitchFamily="34" charset="0"/>
+              </a:rPr>
+              <a:t> </a:t>
+            </a:r>
+            <a:r>
+              <a:rPr lang="en-US" sz="1400" i="1" dirty="0" err="1">
+                <a:latin typeface="Arial" panose="020B0604020202020204" pitchFamily="34" charset="0"/>
+                <a:cs typeface="Arial" panose="020B0604020202020204" pitchFamily="34" charset="0"/>
+              </a:rPr>
+              <a:t>tegminifera</a:t>
+            </a:r>
+            <a:r>
+              <a:rPr lang="en-US" sz="1400" i="1" dirty="0">
+                <a:latin typeface="Arial" panose="020B0604020202020204" pitchFamily="34" charset="0"/>
+                <a:cs typeface="Arial" panose="020B0604020202020204" pitchFamily="34" charset="0"/>
+              </a:rPr>
+              <a:t> </a:t>
+            </a:r>
+            <a:r>
+              <a:rPr lang="en-US" sz="1400" dirty="0">
+                <a:latin typeface="Arial" panose="020B0604020202020204" pitchFamily="34" charset="0"/>
+                <a:cs typeface="Arial" panose="020B0604020202020204" pitchFamily="34" charset="0"/>
+              </a:rPr>
+              <a:t>Z011 (Washpool)</a:t>
+            </a:r>
+          </a:p>
+        </p:txBody>
+      </p:sp>
+      <p:sp>
+        <p:nvSpPr>
+          <p:cNvPr id="14" name="TextBox 13">
+            <a:extLst>
+              <a:ext uri="{FF2B5EF4-FFF2-40B4-BE49-F238E27FC236}">
+                <a16:creationId xmlns:a16="http://schemas.microsoft.com/office/drawing/2014/main" id="{10F5AD9C-C18A-14DD-6E16-FC6090ABF16E}"/>
+              </a:ext>
+            </a:extLst>
+          </p:cNvPr>
+          <p:cNvSpPr txBox="1"/>
+          <p:nvPr/>
+        </p:nvSpPr>
+        <p:spPr>
+          <a:xfrm>
+            <a:off x="5140509" y="1986079"/>
+            <a:ext cx="4561450" cy="307777"/>
+          </a:xfrm>
+          <a:prstGeom prst="rect">
+            <a:avLst/>
+          </a:prstGeom>
+          <a:noFill/>
+        </p:spPr>
+        <p:txBody>
+          <a:bodyPr wrap="square">
+            <a:spAutoFit/>
+          </a:bodyPr>
+          <a:lstStyle/>
+          <a:p>
+            <a:r>
+              <a:rPr lang="en-US" sz="1400" i="1" dirty="0" err="1">
+                <a:latin typeface="Arial" panose="020B0604020202020204" pitchFamily="34" charset="0"/>
+                <a:cs typeface="Arial" panose="020B0604020202020204" pitchFamily="34" charset="0"/>
+              </a:rPr>
+              <a:t>Neogeoscapheus</a:t>
+            </a:r>
+            <a:r>
+              <a:rPr lang="en-US" sz="1400" i="1" dirty="0">
+                <a:latin typeface="Arial" panose="020B0604020202020204" pitchFamily="34" charset="0"/>
+                <a:cs typeface="Arial" panose="020B0604020202020204" pitchFamily="34" charset="0"/>
+              </a:rPr>
+              <a:t> </a:t>
+            </a:r>
+            <a:r>
+              <a:rPr lang="en-US" sz="1400" i="1" dirty="0" err="1">
+                <a:latin typeface="Arial" panose="020B0604020202020204" pitchFamily="34" charset="0"/>
+                <a:cs typeface="Arial" panose="020B0604020202020204" pitchFamily="34" charset="0"/>
+              </a:rPr>
+              <a:t>dahmsi</a:t>
+            </a:r>
+            <a:r>
+              <a:rPr lang="en-US" sz="1400" i="1" dirty="0">
+                <a:latin typeface="Arial" panose="020B0604020202020204" pitchFamily="34" charset="0"/>
+                <a:cs typeface="Arial" panose="020B0604020202020204" pitchFamily="34" charset="0"/>
+              </a:rPr>
+              <a:t> </a:t>
+            </a:r>
+            <a:r>
+              <a:rPr lang="en-US" sz="1400" dirty="0">
+                <a:latin typeface="Arial" panose="020B0604020202020204" pitchFamily="34" charset="0"/>
+                <a:cs typeface="Arial" panose="020B0604020202020204" pitchFamily="34" charset="0"/>
+              </a:rPr>
+              <a:t>Z014 (location TBD)</a:t>
+            </a:r>
+          </a:p>
+        </p:txBody>
+      </p:sp>
+      <p:sp>
+        <p:nvSpPr>
+          <p:cNvPr id="15" name="TextBox 14">
+            <a:extLst>
+              <a:ext uri="{FF2B5EF4-FFF2-40B4-BE49-F238E27FC236}">
+                <a16:creationId xmlns:a16="http://schemas.microsoft.com/office/drawing/2014/main" id="{817760B7-E7B6-A6CC-CB23-02C2A3B68B86}"/>
+              </a:ext>
+            </a:extLst>
+          </p:cNvPr>
+          <p:cNvSpPr txBox="1"/>
+          <p:nvPr/>
+        </p:nvSpPr>
+        <p:spPr>
+          <a:xfrm>
+            <a:off x="5140509" y="2328806"/>
+            <a:ext cx="4561450" cy="307777"/>
+          </a:xfrm>
+          <a:prstGeom prst="rect">
+            <a:avLst/>
+          </a:prstGeom>
+          <a:noFill/>
+        </p:spPr>
+        <p:txBody>
+          <a:bodyPr wrap="square">
+            <a:spAutoFit/>
+          </a:bodyPr>
+          <a:lstStyle/>
+          <a:p>
+            <a:r>
+              <a:rPr lang="en-US" sz="1400" i="1" dirty="0" err="1">
+                <a:latin typeface="Arial" panose="020B0604020202020204" pitchFamily="34" charset="0"/>
+                <a:cs typeface="Arial" panose="020B0604020202020204" pitchFamily="34" charset="0"/>
+              </a:rPr>
+              <a:t>Panesthia</a:t>
+            </a:r>
+            <a:r>
+              <a:rPr lang="en-US" sz="1400" i="1" dirty="0">
+                <a:latin typeface="Arial" panose="020B0604020202020204" pitchFamily="34" charset="0"/>
+                <a:cs typeface="Arial" panose="020B0604020202020204" pitchFamily="34" charset="0"/>
+              </a:rPr>
+              <a:t> </a:t>
+            </a:r>
+            <a:r>
+              <a:rPr lang="en-US" sz="1400" i="1" dirty="0" err="1">
+                <a:latin typeface="Arial" panose="020B0604020202020204" pitchFamily="34" charset="0"/>
+                <a:cs typeface="Arial" panose="020B0604020202020204" pitchFamily="34" charset="0"/>
+              </a:rPr>
+              <a:t>tryoni</a:t>
+            </a:r>
+            <a:r>
+              <a:rPr lang="en-US" sz="1400" i="1" dirty="0">
+                <a:latin typeface="Arial" panose="020B0604020202020204" pitchFamily="34" charset="0"/>
+                <a:cs typeface="Arial" panose="020B0604020202020204" pitchFamily="34" charset="0"/>
+              </a:rPr>
+              <a:t> </a:t>
+            </a:r>
+            <a:r>
+              <a:rPr lang="en-US" sz="1400" i="1" dirty="0" err="1">
+                <a:latin typeface="Arial" panose="020B0604020202020204" pitchFamily="34" charset="0"/>
+                <a:cs typeface="Arial" panose="020B0604020202020204" pitchFamily="34" charset="0"/>
+              </a:rPr>
+              <a:t>tryoni</a:t>
+            </a:r>
+            <a:r>
+              <a:rPr lang="en-US" sz="1400" i="1" dirty="0">
+                <a:latin typeface="Arial" panose="020B0604020202020204" pitchFamily="34" charset="0"/>
+                <a:cs typeface="Arial" panose="020B0604020202020204" pitchFamily="34" charset="0"/>
+              </a:rPr>
+              <a:t> </a:t>
+            </a:r>
+            <a:r>
+              <a:rPr lang="en-US" sz="1400" dirty="0">
+                <a:latin typeface="Arial" panose="020B0604020202020204" pitchFamily="34" charset="0"/>
+                <a:cs typeface="Arial" panose="020B0604020202020204" pitchFamily="34" charset="0"/>
+              </a:rPr>
+              <a:t>Z012 (</a:t>
+            </a:r>
+            <a:r>
+              <a:rPr lang="en-US" sz="1400" dirty="0" err="1">
+                <a:latin typeface="Arial" panose="020B0604020202020204" pitchFamily="34" charset="0"/>
+                <a:cs typeface="Arial" panose="020B0604020202020204" pitchFamily="34" charset="0"/>
+              </a:rPr>
+              <a:t>Eungella</a:t>
+            </a:r>
+            <a:r>
+              <a:rPr lang="en-US" sz="1400" dirty="0">
+                <a:latin typeface="Arial" panose="020B0604020202020204" pitchFamily="34" charset="0"/>
+                <a:cs typeface="Arial" panose="020B0604020202020204" pitchFamily="34" charset="0"/>
+              </a:rPr>
+              <a:t>)</a:t>
+            </a:r>
+          </a:p>
+        </p:txBody>
+      </p:sp>
+      <p:sp>
+        <p:nvSpPr>
+          <p:cNvPr id="17" name="TextBox 16">
+            <a:extLst>
+              <a:ext uri="{FF2B5EF4-FFF2-40B4-BE49-F238E27FC236}">
+                <a16:creationId xmlns:a16="http://schemas.microsoft.com/office/drawing/2014/main" id="{BE564D44-043D-94C7-F6C3-1DEF21E8E660}"/>
+              </a:ext>
+            </a:extLst>
+          </p:cNvPr>
+          <p:cNvSpPr txBox="1"/>
+          <p:nvPr/>
+        </p:nvSpPr>
+        <p:spPr>
+          <a:xfrm>
+            <a:off x="5140509" y="2671533"/>
+            <a:ext cx="3241313" cy="307777"/>
+          </a:xfrm>
+          <a:prstGeom prst="rect">
+            <a:avLst/>
+          </a:prstGeom>
+          <a:noFill/>
+        </p:spPr>
+        <p:txBody>
+          <a:bodyPr wrap="square">
+            <a:spAutoFit/>
+          </a:bodyPr>
+          <a:lstStyle/>
+          <a:p>
+            <a:r>
+              <a:rPr lang="en-US" sz="1400" i="1" dirty="0" err="1">
+                <a:latin typeface="Arial" panose="020B0604020202020204" pitchFamily="34" charset="0"/>
+                <a:cs typeface="Arial" panose="020B0604020202020204" pitchFamily="34" charset="0"/>
+              </a:rPr>
+              <a:t>Geoscapheus</a:t>
+            </a:r>
+            <a:r>
+              <a:rPr lang="en-US" sz="1400" i="1" dirty="0">
+                <a:latin typeface="Arial" panose="020B0604020202020204" pitchFamily="34" charset="0"/>
+                <a:cs typeface="Arial" panose="020B0604020202020204" pitchFamily="34" charset="0"/>
+              </a:rPr>
+              <a:t> </a:t>
+            </a:r>
+            <a:r>
+              <a:rPr lang="en-US" sz="1400" i="1" dirty="0" err="1">
+                <a:latin typeface="Arial" panose="020B0604020202020204" pitchFamily="34" charset="0"/>
+                <a:cs typeface="Arial" panose="020B0604020202020204" pitchFamily="34" charset="0"/>
+              </a:rPr>
+              <a:t>dilatatus</a:t>
+            </a:r>
+            <a:r>
+              <a:rPr lang="en-US" sz="1400" i="1" dirty="0">
+                <a:latin typeface="Arial" panose="020B0604020202020204" pitchFamily="34" charset="0"/>
+                <a:cs typeface="Arial" panose="020B0604020202020204" pitchFamily="34" charset="0"/>
+              </a:rPr>
+              <a:t> </a:t>
+            </a:r>
+            <a:r>
+              <a:rPr lang="en-US" sz="1400" dirty="0">
+                <a:latin typeface="Arial" panose="020B0604020202020204" pitchFamily="34" charset="0"/>
+                <a:cs typeface="Arial" panose="020B0604020202020204" pitchFamily="34" charset="0"/>
+              </a:rPr>
+              <a:t>(</a:t>
+            </a:r>
+            <a:r>
+              <a:rPr lang="en-US" sz="1400" dirty="0" err="1">
+                <a:latin typeface="Arial" panose="020B0604020202020204" pitchFamily="34" charset="0"/>
+                <a:cs typeface="Arial" panose="020B0604020202020204" pitchFamily="34" charset="0"/>
+              </a:rPr>
+              <a:t>Gilgandra</a:t>
+            </a:r>
+            <a:r>
+              <a:rPr lang="en-US" sz="1400" dirty="0">
+                <a:latin typeface="Arial" panose="020B0604020202020204" pitchFamily="34" charset="0"/>
+                <a:cs typeface="Arial" panose="020B0604020202020204" pitchFamily="34" charset="0"/>
+              </a:rPr>
+              <a:t>)</a:t>
+            </a:r>
+          </a:p>
+        </p:txBody>
+      </p:sp>
+      <p:sp>
+        <p:nvSpPr>
+          <p:cNvPr id="18" name="TextBox 17">
+            <a:extLst>
+              <a:ext uri="{FF2B5EF4-FFF2-40B4-BE49-F238E27FC236}">
+                <a16:creationId xmlns:a16="http://schemas.microsoft.com/office/drawing/2014/main" id="{D39F0262-3654-66DD-1C1E-3D0830C06A73}"/>
+              </a:ext>
+            </a:extLst>
+          </p:cNvPr>
+          <p:cNvSpPr txBox="1"/>
+          <p:nvPr/>
+        </p:nvSpPr>
+        <p:spPr>
+          <a:xfrm>
+            <a:off x="5140509" y="3014260"/>
+            <a:ext cx="4561450" cy="307777"/>
+          </a:xfrm>
+          <a:prstGeom prst="rect">
+            <a:avLst/>
+          </a:prstGeom>
+          <a:noFill/>
+        </p:spPr>
+        <p:txBody>
+          <a:bodyPr wrap="square">
+            <a:spAutoFit/>
+          </a:bodyPr>
+          <a:lstStyle/>
+          <a:p>
+            <a:r>
+              <a:rPr lang="en-US" sz="1400" i="1" dirty="0" err="1">
+                <a:latin typeface="Arial" panose="020B0604020202020204" pitchFamily="34" charset="0"/>
+                <a:cs typeface="Arial" panose="020B0604020202020204" pitchFamily="34" charset="0"/>
+              </a:rPr>
+              <a:t>Panesthia</a:t>
+            </a:r>
+            <a:r>
+              <a:rPr lang="en-US" sz="1400" i="1" dirty="0">
+                <a:latin typeface="Arial" panose="020B0604020202020204" pitchFamily="34" charset="0"/>
+                <a:cs typeface="Arial" panose="020B0604020202020204" pitchFamily="34" charset="0"/>
+              </a:rPr>
+              <a:t> </a:t>
+            </a:r>
+            <a:r>
+              <a:rPr lang="en-US" sz="1400" i="1" dirty="0" err="1">
+                <a:latin typeface="Arial" panose="020B0604020202020204" pitchFamily="34" charset="0"/>
+                <a:cs typeface="Arial" panose="020B0604020202020204" pitchFamily="34" charset="0"/>
+              </a:rPr>
+              <a:t>sloanei</a:t>
+            </a:r>
+            <a:r>
+              <a:rPr lang="en-US" sz="1400" i="1" dirty="0">
+                <a:latin typeface="Arial" panose="020B0604020202020204" pitchFamily="34" charset="0"/>
+                <a:cs typeface="Arial" panose="020B0604020202020204" pitchFamily="34" charset="0"/>
+              </a:rPr>
+              <a:t> </a:t>
+            </a:r>
+            <a:r>
+              <a:rPr lang="en-US" sz="1400" dirty="0">
+                <a:latin typeface="Arial" panose="020B0604020202020204" pitchFamily="34" charset="0"/>
+                <a:cs typeface="Arial" panose="020B0604020202020204" pitchFamily="34" charset="0"/>
+              </a:rPr>
+              <a:t>Z001</a:t>
+            </a:r>
+            <a:r>
+              <a:rPr lang="en-US" sz="1400" i="1" dirty="0">
+                <a:latin typeface="Arial" panose="020B0604020202020204" pitchFamily="34" charset="0"/>
+                <a:cs typeface="Arial" panose="020B0604020202020204" pitchFamily="34" charset="0"/>
+              </a:rPr>
+              <a:t> </a:t>
+            </a:r>
+            <a:r>
+              <a:rPr lang="en-US" sz="1400" dirty="0">
+                <a:latin typeface="Arial" panose="020B0604020202020204" pitchFamily="34" charset="0"/>
+                <a:cs typeface="Arial" panose="020B0604020202020204" pitchFamily="34" charset="0"/>
+              </a:rPr>
+              <a:t>(Mt Baldy)</a:t>
+            </a:r>
+          </a:p>
+        </p:txBody>
+      </p:sp>
+      <p:sp>
+        <p:nvSpPr>
+          <p:cNvPr id="19" name="TextBox 18">
+            <a:extLst>
+              <a:ext uri="{FF2B5EF4-FFF2-40B4-BE49-F238E27FC236}">
+                <a16:creationId xmlns:a16="http://schemas.microsoft.com/office/drawing/2014/main" id="{15F0AD8B-8964-B84F-96E9-2261FEEA69BE}"/>
+              </a:ext>
+            </a:extLst>
+          </p:cNvPr>
+          <p:cNvSpPr txBox="1"/>
+          <p:nvPr/>
+        </p:nvSpPr>
+        <p:spPr>
+          <a:xfrm>
+            <a:off x="5140509" y="3356987"/>
+            <a:ext cx="4561450" cy="307777"/>
+          </a:xfrm>
+          <a:prstGeom prst="rect">
+            <a:avLst/>
+          </a:prstGeom>
+          <a:noFill/>
+        </p:spPr>
+        <p:txBody>
+          <a:bodyPr wrap="square">
+            <a:spAutoFit/>
+          </a:bodyPr>
+          <a:lstStyle/>
+          <a:p>
+            <a:r>
+              <a:rPr lang="en-US" sz="1400" i="1" dirty="0" err="1">
+                <a:latin typeface="Arial" panose="020B0604020202020204" pitchFamily="34" charset="0"/>
+                <a:cs typeface="Arial" panose="020B0604020202020204" pitchFamily="34" charset="0"/>
+              </a:rPr>
+              <a:t>Neogeoscapheus</a:t>
+            </a:r>
+            <a:r>
+              <a:rPr lang="en-US" sz="1400" i="1" dirty="0">
+                <a:latin typeface="Arial" panose="020B0604020202020204" pitchFamily="34" charset="0"/>
+                <a:cs typeface="Arial" panose="020B0604020202020204" pitchFamily="34" charset="0"/>
+              </a:rPr>
+              <a:t> </a:t>
+            </a:r>
+            <a:r>
+              <a:rPr lang="en-US" sz="1400" i="1" dirty="0" err="1">
+                <a:latin typeface="Arial" panose="020B0604020202020204" pitchFamily="34" charset="0"/>
+                <a:cs typeface="Arial" panose="020B0604020202020204" pitchFamily="34" charset="0"/>
+              </a:rPr>
+              <a:t>hanni</a:t>
+            </a:r>
+            <a:r>
+              <a:rPr lang="en-US" sz="1400" i="1" dirty="0">
+                <a:latin typeface="Arial" panose="020B0604020202020204" pitchFamily="34" charset="0"/>
+                <a:cs typeface="Arial" panose="020B0604020202020204" pitchFamily="34" charset="0"/>
+              </a:rPr>
+              <a:t> </a:t>
+            </a:r>
+            <a:r>
+              <a:rPr lang="en-US" sz="1400" dirty="0">
+                <a:latin typeface="Arial" panose="020B0604020202020204" pitchFamily="34" charset="0"/>
+                <a:cs typeface="Arial" panose="020B0604020202020204" pitchFamily="34" charset="0"/>
+              </a:rPr>
+              <a:t>(Mt Molloy)</a:t>
+            </a:r>
+          </a:p>
+        </p:txBody>
+      </p:sp>
+      <p:sp>
+        <p:nvSpPr>
+          <p:cNvPr id="20" name="TextBox 19">
+            <a:extLst>
+              <a:ext uri="{FF2B5EF4-FFF2-40B4-BE49-F238E27FC236}">
+                <a16:creationId xmlns:a16="http://schemas.microsoft.com/office/drawing/2014/main" id="{82CB6B5D-5983-112E-8D51-3581BE2E0683}"/>
+              </a:ext>
+            </a:extLst>
+          </p:cNvPr>
+          <p:cNvSpPr txBox="1"/>
+          <p:nvPr/>
+        </p:nvSpPr>
+        <p:spPr>
+          <a:xfrm>
+            <a:off x="5128732" y="4042441"/>
+            <a:ext cx="4561450" cy="307777"/>
+          </a:xfrm>
+          <a:prstGeom prst="rect">
+            <a:avLst/>
+          </a:prstGeom>
+          <a:noFill/>
+        </p:spPr>
+        <p:txBody>
+          <a:bodyPr wrap="square">
+            <a:spAutoFit/>
+          </a:bodyPr>
+          <a:lstStyle/>
+          <a:p>
+            <a:r>
+              <a:rPr lang="en-US" sz="1400" i="1" dirty="0" err="1">
+                <a:latin typeface="Arial" panose="020B0604020202020204" pitchFamily="34" charset="0"/>
+                <a:cs typeface="Arial" panose="020B0604020202020204" pitchFamily="34" charset="0"/>
+              </a:rPr>
+              <a:t>Panesthia</a:t>
+            </a:r>
+            <a:r>
+              <a:rPr lang="en-US" sz="1400" i="1" dirty="0">
+                <a:latin typeface="Arial" panose="020B0604020202020204" pitchFamily="34" charset="0"/>
+                <a:cs typeface="Arial" panose="020B0604020202020204" pitchFamily="34" charset="0"/>
+              </a:rPr>
+              <a:t> </a:t>
+            </a:r>
+            <a:r>
+              <a:rPr lang="en-US" sz="1400" i="1" dirty="0" err="1">
+                <a:latin typeface="Arial" panose="020B0604020202020204" pitchFamily="34" charset="0"/>
+                <a:cs typeface="Arial" panose="020B0604020202020204" pitchFamily="34" charset="0"/>
+              </a:rPr>
+              <a:t>lata</a:t>
+            </a:r>
+            <a:r>
+              <a:rPr lang="en-US" sz="1400" i="1" dirty="0">
+                <a:latin typeface="Arial" panose="020B0604020202020204" pitchFamily="34" charset="0"/>
+                <a:cs typeface="Arial" panose="020B0604020202020204" pitchFamily="34" charset="0"/>
+              </a:rPr>
+              <a:t> </a:t>
+            </a:r>
+            <a:r>
+              <a:rPr lang="en-US" sz="1400" dirty="0">
+                <a:latin typeface="Arial" panose="020B0604020202020204" pitchFamily="34" charset="0"/>
+                <a:cs typeface="Arial" panose="020B0604020202020204" pitchFamily="34" charset="0"/>
+              </a:rPr>
+              <a:t>M001</a:t>
+            </a:r>
+            <a:r>
+              <a:rPr lang="en-US" sz="1400" i="1" dirty="0">
+                <a:latin typeface="Arial" panose="020B0604020202020204" pitchFamily="34" charset="0"/>
+                <a:cs typeface="Arial" panose="020B0604020202020204" pitchFamily="34" charset="0"/>
+              </a:rPr>
+              <a:t> </a:t>
+            </a:r>
+            <a:r>
+              <a:rPr lang="en-US" sz="1400" dirty="0">
+                <a:latin typeface="Arial" panose="020B0604020202020204" pitchFamily="34" charset="0"/>
+                <a:cs typeface="Arial" panose="020B0604020202020204" pitchFamily="34" charset="0"/>
+              </a:rPr>
+              <a:t>(Lord Howe Island)</a:t>
+            </a:r>
+          </a:p>
+        </p:txBody>
+      </p:sp>
+      <p:sp>
+        <p:nvSpPr>
+          <p:cNvPr id="21" name="TextBox 20">
+            <a:extLst>
+              <a:ext uri="{FF2B5EF4-FFF2-40B4-BE49-F238E27FC236}">
+                <a16:creationId xmlns:a16="http://schemas.microsoft.com/office/drawing/2014/main" id="{FCEC9C75-BCC4-4F7F-6F62-1CF25357A908}"/>
+              </a:ext>
+            </a:extLst>
+          </p:cNvPr>
+          <p:cNvSpPr txBox="1"/>
+          <p:nvPr/>
+        </p:nvSpPr>
+        <p:spPr>
+          <a:xfrm>
+            <a:off x="5140509" y="3699714"/>
+            <a:ext cx="4561450" cy="307777"/>
+          </a:xfrm>
+          <a:prstGeom prst="rect">
+            <a:avLst/>
+          </a:prstGeom>
+          <a:noFill/>
+        </p:spPr>
+        <p:txBody>
+          <a:bodyPr wrap="square">
+            <a:spAutoFit/>
+          </a:bodyPr>
+          <a:lstStyle/>
+          <a:p>
+            <a:r>
+              <a:rPr lang="en-US" sz="1400" i="1" dirty="0" err="1">
+                <a:latin typeface="Arial" panose="020B0604020202020204" pitchFamily="34" charset="0"/>
+                <a:cs typeface="Arial" panose="020B0604020202020204" pitchFamily="34" charset="0"/>
+              </a:rPr>
+              <a:t>Panesthia</a:t>
+            </a:r>
+            <a:r>
+              <a:rPr lang="en-US" sz="1400" i="1" dirty="0">
+                <a:latin typeface="Arial" panose="020B0604020202020204" pitchFamily="34" charset="0"/>
+                <a:cs typeface="Arial" panose="020B0604020202020204" pitchFamily="34" charset="0"/>
+              </a:rPr>
+              <a:t> </a:t>
+            </a:r>
+            <a:r>
+              <a:rPr lang="en-US" sz="1400" i="1" dirty="0" err="1">
+                <a:latin typeface="Arial" panose="020B0604020202020204" pitchFamily="34" charset="0"/>
+                <a:cs typeface="Arial" panose="020B0604020202020204" pitchFamily="34" charset="0"/>
+              </a:rPr>
+              <a:t>cribrata</a:t>
+            </a:r>
+            <a:r>
+              <a:rPr lang="en-US" sz="1400" i="1" dirty="0">
+                <a:latin typeface="Arial" panose="020B0604020202020204" pitchFamily="34" charset="0"/>
+                <a:cs typeface="Arial" panose="020B0604020202020204" pitchFamily="34" charset="0"/>
+              </a:rPr>
+              <a:t> </a:t>
+            </a:r>
+            <a:r>
+              <a:rPr lang="en-US" sz="1400" dirty="0">
+                <a:latin typeface="Arial" panose="020B0604020202020204" pitchFamily="34" charset="0"/>
+                <a:cs typeface="Arial" panose="020B0604020202020204" pitchFamily="34" charset="0"/>
+              </a:rPr>
+              <a:t>(North Manly)</a:t>
+            </a:r>
+          </a:p>
+        </p:txBody>
+      </p:sp>
+      <p:sp>
+        <p:nvSpPr>
+          <p:cNvPr id="22" name="TextBox 21">
+            <a:extLst>
+              <a:ext uri="{FF2B5EF4-FFF2-40B4-BE49-F238E27FC236}">
+                <a16:creationId xmlns:a16="http://schemas.microsoft.com/office/drawing/2014/main" id="{57CB6A99-6B82-8092-E383-80A2B09639C6}"/>
+              </a:ext>
+            </a:extLst>
+          </p:cNvPr>
+          <p:cNvSpPr txBox="1"/>
+          <p:nvPr/>
+        </p:nvSpPr>
+        <p:spPr>
+          <a:xfrm>
+            <a:off x="5140509" y="4385168"/>
+            <a:ext cx="4561450" cy="307777"/>
+          </a:xfrm>
+          <a:prstGeom prst="rect">
+            <a:avLst/>
+          </a:prstGeom>
+          <a:noFill/>
+        </p:spPr>
+        <p:txBody>
+          <a:bodyPr wrap="square">
+            <a:spAutoFit/>
+          </a:bodyPr>
+          <a:lstStyle/>
+          <a:p>
+            <a:r>
+              <a:rPr lang="en-US" sz="1400" i="1" dirty="0" err="1">
+                <a:latin typeface="Arial" panose="020B0604020202020204" pitchFamily="34" charset="0"/>
+                <a:cs typeface="Arial" panose="020B0604020202020204" pitchFamily="34" charset="0"/>
+              </a:rPr>
+              <a:t>Diploptera</a:t>
+            </a:r>
+            <a:r>
+              <a:rPr lang="en-US" sz="1400" i="1" dirty="0">
+                <a:latin typeface="Arial" panose="020B0604020202020204" pitchFamily="34" charset="0"/>
+                <a:cs typeface="Arial" panose="020B0604020202020204" pitchFamily="34" charset="0"/>
+              </a:rPr>
+              <a:t> punctata</a:t>
+            </a:r>
+          </a:p>
+        </p:txBody>
+      </p:sp>
+      <p:sp>
+        <p:nvSpPr>
+          <p:cNvPr id="23" name="TextBox 22">
+            <a:extLst>
+              <a:ext uri="{FF2B5EF4-FFF2-40B4-BE49-F238E27FC236}">
+                <a16:creationId xmlns:a16="http://schemas.microsoft.com/office/drawing/2014/main" id="{28B647CD-7360-2693-9879-0191701FE355}"/>
+              </a:ext>
+            </a:extLst>
+          </p:cNvPr>
+          <p:cNvSpPr txBox="1"/>
+          <p:nvPr/>
+        </p:nvSpPr>
+        <p:spPr>
+          <a:xfrm>
+            <a:off x="5140509" y="4727895"/>
+            <a:ext cx="4561450" cy="307777"/>
+          </a:xfrm>
+          <a:prstGeom prst="rect">
+            <a:avLst/>
+          </a:prstGeom>
+          <a:noFill/>
+        </p:spPr>
+        <p:txBody>
+          <a:bodyPr wrap="square">
+            <a:spAutoFit/>
+          </a:bodyPr>
+          <a:lstStyle/>
+          <a:p>
+            <a:r>
+              <a:rPr lang="en-US" sz="1400" i="1" dirty="0">
+                <a:latin typeface="Arial" panose="020B0604020202020204" pitchFamily="34" charset="0"/>
+                <a:cs typeface="Arial" panose="020B0604020202020204" pitchFamily="34" charset="0"/>
+              </a:rPr>
+              <a:t>Blattella germanica</a:t>
+            </a:r>
+          </a:p>
+        </p:txBody>
+      </p:sp>
+      <p:sp>
+        <p:nvSpPr>
+          <p:cNvPr id="24" name="TextBox 23">
+            <a:extLst>
+              <a:ext uri="{FF2B5EF4-FFF2-40B4-BE49-F238E27FC236}">
+                <a16:creationId xmlns:a16="http://schemas.microsoft.com/office/drawing/2014/main" id="{7F774CDA-2EB5-1A9F-0EE1-84B0F338E848}"/>
+              </a:ext>
+            </a:extLst>
+          </p:cNvPr>
+          <p:cNvSpPr txBox="1"/>
+          <p:nvPr/>
+        </p:nvSpPr>
+        <p:spPr>
+          <a:xfrm>
+            <a:off x="5128732" y="6392527"/>
+            <a:ext cx="4561450" cy="307777"/>
+          </a:xfrm>
+          <a:prstGeom prst="rect">
+            <a:avLst/>
+          </a:prstGeom>
+          <a:noFill/>
+        </p:spPr>
+        <p:txBody>
+          <a:bodyPr wrap="square">
+            <a:spAutoFit/>
+          </a:bodyPr>
+          <a:lstStyle/>
+          <a:p>
+            <a:r>
+              <a:rPr lang="en-US" sz="1400" i="1" dirty="0" err="1">
+                <a:latin typeface="Arial" panose="020B0604020202020204" pitchFamily="34" charset="0"/>
+                <a:cs typeface="Arial" panose="020B0604020202020204" pitchFamily="34" charset="0"/>
+              </a:rPr>
+              <a:t>Periplaneta</a:t>
+            </a:r>
+            <a:r>
+              <a:rPr lang="en-US" sz="1400" i="1" dirty="0">
+                <a:latin typeface="Arial" panose="020B0604020202020204" pitchFamily="34" charset="0"/>
+                <a:cs typeface="Arial" panose="020B0604020202020204" pitchFamily="34" charset="0"/>
+              </a:rPr>
+              <a:t> americana</a:t>
+            </a:r>
+          </a:p>
+        </p:txBody>
+      </p:sp>
+      <p:sp>
+        <p:nvSpPr>
+          <p:cNvPr id="25" name="TextBox 24">
+            <a:extLst>
+              <a:ext uri="{FF2B5EF4-FFF2-40B4-BE49-F238E27FC236}">
+                <a16:creationId xmlns:a16="http://schemas.microsoft.com/office/drawing/2014/main" id="{2A4EB622-B3AA-5B0D-366F-31EC8D2C1CB9}"/>
+              </a:ext>
+            </a:extLst>
+          </p:cNvPr>
+          <p:cNvSpPr txBox="1"/>
+          <p:nvPr/>
+        </p:nvSpPr>
+        <p:spPr>
+          <a:xfrm>
+            <a:off x="5128732" y="6065621"/>
+            <a:ext cx="4561450" cy="307777"/>
+          </a:xfrm>
+          <a:prstGeom prst="rect">
+            <a:avLst/>
+          </a:prstGeom>
+          <a:noFill/>
+        </p:spPr>
+        <p:txBody>
+          <a:bodyPr wrap="square">
+            <a:spAutoFit/>
+          </a:bodyPr>
+          <a:lstStyle/>
+          <a:p>
+            <a:r>
+              <a:rPr lang="en-US" sz="1400" i="1" dirty="0" err="1">
+                <a:latin typeface="Arial" panose="020B0604020202020204" pitchFamily="34" charset="0"/>
+                <a:cs typeface="Arial" panose="020B0604020202020204" pitchFamily="34" charset="0"/>
+              </a:rPr>
+              <a:t>Zootermopsis</a:t>
+            </a:r>
+            <a:r>
+              <a:rPr lang="en-US" sz="1400" i="1" dirty="0">
+                <a:latin typeface="Arial" panose="020B0604020202020204" pitchFamily="34" charset="0"/>
+                <a:cs typeface="Arial" panose="020B0604020202020204" pitchFamily="34" charset="0"/>
+              </a:rPr>
+              <a:t> </a:t>
+            </a:r>
+            <a:r>
+              <a:rPr lang="en-US" sz="1400" i="1" dirty="0" err="1">
+                <a:latin typeface="Arial" panose="020B0604020202020204" pitchFamily="34" charset="0"/>
+                <a:cs typeface="Arial" panose="020B0604020202020204" pitchFamily="34" charset="0"/>
+              </a:rPr>
+              <a:t>nevadensis</a:t>
+            </a:r>
+            <a:endParaRPr lang="en-US" sz="1400" i="1" dirty="0">
+              <a:latin typeface="Arial" panose="020B0604020202020204" pitchFamily="34" charset="0"/>
+              <a:cs typeface="Arial" panose="020B0604020202020204" pitchFamily="34" charset="0"/>
+            </a:endParaRPr>
+          </a:p>
+        </p:txBody>
+      </p:sp>
+      <p:sp>
+        <p:nvSpPr>
+          <p:cNvPr id="26" name="TextBox 25">
+            <a:extLst>
+              <a:ext uri="{FF2B5EF4-FFF2-40B4-BE49-F238E27FC236}">
+                <a16:creationId xmlns:a16="http://schemas.microsoft.com/office/drawing/2014/main" id="{B4480A82-EF6D-319E-1593-C6D1CB86013C}"/>
+              </a:ext>
+            </a:extLst>
+          </p:cNvPr>
+          <p:cNvSpPr txBox="1"/>
+          <p:nvPr/>
+        </p:nvSpPr>
+        <p:spPr>
+          <a:xfrm>
+            <a:off x="5127526" y="5070848"/>
+            <a:ext cx="4561450" cy="307777"/>
+          </a:xfrm>
+          <a:prstGeom prst="rect">
+            <a:avLst/>
+          </a:prstGeom>
+          <a:noFill/>
+        </p:spPr>
+        <p:txBody>
+          <a:bodyPr wrap="square">
+            <a:spAutoFit/>
+          </a:bodyPr>
+          <a:lstStyle/>
+          <a:p>
+            <a:r>
+              <a:rPr lang="en-US" sz="1400" i="1" dirty="0">
+                <a:latin typeface="Arial" panose="020B0604020202020204" pitchFamily="34" charset="0"/>
+                <a:cs typeface="Arial" panose="020B0604020202020204" pitchFamily="34" charset="0"/>
+              </a:rPr>
+              <a:t>Reticulitermes </a:t>
+            </a:r>
+            <a:r>
+              <a:rPr lang="en-US" sz="1400" i="1" dirty="0" err="1">
+                <a:latin typeface="Arial" panose="020B0604020202020204" pitchFamily="34" charset="0"/>
+                <a:cs typeface="Arial" panose="020B0604020202020204" pitchFamily="34" charset="0"/>
+              </a:rPr>
+              <a:t>lucifugus</a:t>
+            </a:r>
+            <a:endParaRPr lang="en-US" sz="1400" i="1" dirty="0">
+              <a:latin typeface="Arial" panose="020B0604020202020204" pitchFamily="34" charset="0"/>
+              <a:cs typeface="Arial" panose="020B0604020202020204" pitchFamily="34" charset="0"/>
+            </a:endParaRPr>
+          </a:p>
+        </p:txBody>
+      </p:sp>
+      <p:sp>
+        <p:nvSpPr>
+          <p:cNvPr id="27" name="TextBox 26">
+            <a:extLst>
+              <a:ext uri="{FF2B5EF4-FFF2-40B4-BE49-F238E27FC236}">
+                <a16:creationId xmlns:a16="http://schemas.microsoft.com/office/drawing/2014/main" id="{8894FF59-47EB-CB15-6976-165828DFD838}"/>
+              </a:ext>
+            </a:extLst>
+          </p:cNvPr>
+          <p:cNvSpPr txBox="1"/>
+          <p:nvPr/>
+        </p:nvSpPr>
+        <p:spPr>
+          <a:xfrm>
+            <a:off x="5125974" y="5738715"/>
+            <a:ext cx="4561450" cy="307777"/>
+          </a:xfrm>
+          <a:prstGeom prst="rect">
+            <a:avLst/>
+          </a:prstGeom>
+          <a:noFill/>
+        </p:spPr>
+        <p:txBody>
+          <a:bodyPr wrap="square">
+            <a:spAutoFit/>
+          </a:bodyPr>
+          <a:lstStyle/>
+          <a:p>
+            <a:r>
+              <a:rPr lang="en-US" sz="1400" i="1" dirty="0" err="1">
+                <a:latin typeface="Arial" panose="020B0604020202020204" pitchFamily="34" charset="0"/>
+                <a:cs typeface="Arial" panose="020B0604020202020204" pitchFamily="34" charset="0"/>
+              </a:rPr>
+              <a:t>Cryptotermes</a:t>
+            </a:r>
+            <a:r>
+              <a:rPr lang="en-US" sz="1400" i="1" dirty="0">
+                <a:latin typeface="Arial" panose="020B0604020202020204" pitchFamily="34" charset="0"/>
+                <a:cs typeface="Arial" panose="020B0604020202020204" pitchFamily="34" charset="0"/>
+              </a:rPr>
+              <a:t> </a:t>
+            </a:r>
+            <a:r>
+              <a:rPr lang="en-US" sz="1400" i="1" dirty="0" err="1">
+                <a:latin typeface="Arial" panose="020B0604020202020204" pitchFamily="34" charset="0"/>
+                <a:cs typeface="Arial" panose="020B0604020202020204" pitchFamily="34" charset="0"/>
+              </a:rPr>
+              <a:t>secundus</a:t>
+            </a:r>
+            <a:endParaRPr lang="en-US" sz="1400" i="1" dirty="0">
+              <a:latin typeface="Arial" panose="020B0604020202020204" pitchFamily="34" charset="0"/>
+              <a:cs typeface="Arial" panose="020B0604020202020204" pitchFamily="34" charset="0"/>
+            </a:endParaRPr>
+          </a:p>
+        </p:txBody>
+      </p:sp>
+      <p:sp>
+        <p:nvSpPr>
+          <p:cNvPr id="28" name="TextBox 27">
+            <a:extLst>
+              <a:ext uri="{FF2B5EF4-FFF2-40B4-BE49-F238E27FC236}">
+                <a16:creationId xmlns:a16="http://schemas.microsoft.com/office/drawing/2014/main" id="{B26547CA-71D1-6886-0C25-B7C568AE0661}"/>
+              </a:ext>
+            </a:extLst>
+          </p:cNvPr>
+          <p:cNvSpPr txBox="1"/>
+          <p:nvPr/>
+        </p:nvSpPr>
+        <p:spPr>
+          <a:xfrm>
+            <a:off x="5121739" y="5388532"/>
+            <a:ext cx="4561450" cy="307777"/>
+          </a:xfrm>
+          <a:prstGeom prst="rect">
+            <a:avLst/>
+          </a:prstGeom>
+          <a:noFill/>
+        </p:spPr>
+        <p:txBody>
+          <a:bodyPr wrap="square">
+            <a:spAutoFit/>
+          </a:bodyPr>
+          <a:lstStyle/>
+          <a:p>
+            <a:r>
+              <a:rPr lang="en-US" sz="1400" i="1" dirty="0" err="1">
+                <a:latin typeface="Arial" panose="020B0604020202020204" pitchFamily="34" charset="0"/>
+                <a:cs typeface="Arial" panose="020B0604020202020204" pitchFamily="34" charset="0"/>
+              </a:rPr>
+              <a:t>Coptotermes</a:t>
+            </a:r>
+            <a:r>
+              <a:rPr lang="en-US" sz="1400" i="1" dirty="0">
+                <a:latin typeface="Arial" panose="020B0604020202020204" pitchFamily="34" charset="0"/>
+                <a:cs typeface="Arial" panose="020B0604020202020204" pitchFamily="34" charset="0"/>
+              </a:rPr>
+              <a:t> </a:t>
+            </a:r>
+            <a:r>
+              <a:rPr lang="en-US" sz="1400" i="1" dirty="0" err="1">
+                <a:latin typeface="Arial" panose="020B0604020202020204" pitchFamily="34" charset="0"/>
+                <a:cs typeface="Arial" panose="020B0604020202020204" pitchFamily="34" charset="0"/>
+              </a:rPr>
+              <a:t>formosanus</a:t>
+            </a:r>
+            <a:endParaRPr lang="en-US" sz="1400" i="1" dirty="0">
+              <a:latin typeface="Arial" panose="020B0604020202020204" pitchFamily="34" charset="0"/>
+              <a:cs typeface="Arial" panose="020B0604020202020204" pitchFamily="34" charset="0"/>
+            </a:endParaRPr>
+          </a:p>
+        </p:txBody>
+      </p:sp>
+      <p:cxnSp>
+        <p:nvCxnSpPr>
+          <p:cNvPr id="30" name="Straight Connector 29">
+            <a:extLst>
+              <a:ext uri="{FF2B5EF4-FFF2-40B4-BE49-F238E27FC236}">
+                <a16:creationId xmlns:a16="http://schemas.microsoft.com/office/drawing/2014/main" id="{BEC0EF28-979B-A325-8EF5-2B8B7233AB03}"/>
+              </a:ext>
+            </a:extLst>
+          </p:cNvPr>
+          <p:cNvCxnSpPr/>
+          <p:nvPr/>
+        </p:nvCxnSpPr>
+        <p:spPr>
+          <a:xfrm flipH="1">
+            <a:off x="4654476" y="780634"/>
+            <a:ext cx="450807" cy="0"/>
+          </a:xfrm>
+          <a:prstGeom prst="line">
+            <a:avLst/>
+          </a:prstGeom>
+          <a:ln w="22225"/>
+        </p:spPr>
+        <p:style>
+          <a:lnRef idx="1">
+            <a:schemeClr val="accent1"/>
+          </a:lnRef>
+          <a:fillRef idx="0">
+            <a:schemeClr val="accent1"/>
+          </a:fillRef>
+          <a:effectRef idx="0">
+            <a:schemeClr val="accent1"/>
+          </a:effectRef>
+          <a:fontRef idx="minor">
+            <a:schemeClr val="tx1"/>
+          </a:fontRef>
+        </p:style>
+      </p:cxnSp>
+      <p:cxnSp>
+        <p:nvCxnSpPr>
+          <p:cNvPr id="31" name="Straight Connector 30">
+            <a:extLst>
+              <a:ext uri="{FF2B5EF4-FFF2-40B4-BE49-F238E27FC236}">
+                <a16:creationId xmlns:a16="http://schemas.microsoft.com/office/drawing/2014/main" id="{0C2AFD39-E062-0327-60C0-F2E3CF01D924}"/>
+              </a:ext>
+            </a:extLst>
+          </p:cNvPr>
+          <p:cNvCxnSpPr/>
+          <p:nvPr/>
+        </p:nvCxnSpPr>
+        <p:spPr>
+          <a:xfrm flipH="1">
+            <a:off x="4654678" y="1123361"/>
+            <a:ext cx="450807" cy="0"/>
+          </a:xfrm>
+          <a:prstGeom prst="line">
+            <a:avLst/>
+          </a:prstGeom>
+          <a:ln w="22225"/>
+        </p:spPr>
+        <p:style>
+          <a:lnRef idx="1">
+            <a:schemeClr val="accent1"/>
+          </a:lnRef>
+          <a:fillRef idx="0">
+            <a:schemeClr val="accent1"/>
+          </a:fillRef>
+          <a:effectRef idx="0">
+            <a:schemeClr val="accent1"/>
+          </a:effectRef>
+          <a:fontRef idx="minor">
+            <a:schemeClr val="tx1"/>
+          </a:fontRef>
+        </p:style>
+      </p:cxnSp>
+      <p:cxnSp>
+        <p:nvCxnSpPr>
+          <p:cNvPr id="32" name="Straight Connector 31">
+            <a:extLst>
+              <a:ext uri="{FF2B5EF4-FFF2-40B4-BE49-F238E27FC236}">
+                <a16:creationId xmlns:a16="http://schemas.microsoft.com/office/drawing/2014/main" id="{D0BB347D-BC4E-BCE2-3003-14AB1293F5FB}"/>
+              </a:ext>
+            </a:extLst>
+          </p:cNvPr>
+          <p:cNvCxnSpPr>
+            <a:cxnSpLocks/>
+          </p:cNvCxnSpPr>
+          <p:nvPr/>
+        </p:nvCxnSpPr>
+        <p:spPr>
+          <a:xfrm>
+            <a:off x="4666350" y="780634"/>
+            <a:ext cx="0" cy="342727"/>
+          </a:xfrm>
+          <a:prstGeom prst="line">
+            <a:avLst/>
+          </a:prstGeom>
+          <a:ln w="22225"/>
+        </p:spPr>
+        <p:style>
+          <a:lnRef idx="1">
+            <a:schemeClr val="accent1"/>
+          </a:lnRef>
+          <a:fillRef idx="0">
+            <a:schemeClr val="accent1"/>
+          </a:fillRef>
+          <a:effectRef idx="0">
+            <a:schemeClr val="accent1"/>
+          </a:effectRef>
+          <a:fontRef idx="minor">
+            <a:schemeClr val="tx1"/>
+          </a:fontRef>
+        </p:style>
+      </p:cxnSp>
+      <p:cxnSp>
+        <p:nvCxnSpPr>
+          <p:cNvPr id="35" name="Straight Connector 34">
+            <a:extLst>
+              <a:ext uri="{FF2B5EF4-FFF2-40B4-BE49-F238E27FC236}">
+                <a16:creationId xmlns:a16="http://schemas.microsoft.com/office/drawing/2014/main" id="{41EE4A04-0AD1-3FFA-73FD-35E40215007A}"/>
+              </a:ext>
+            </a:extLst>
+          </p:cNvPr>
+          <p:cNvCxnSpPr/>
+          <p:nvPr/>
+        </p:nvCxnSpPr>
+        <p:spPr>
+          <a:xfrm flipH="1">
+            <a:off x="4654476" y="1454513"/>
+            <a:ext cx="450807" cy="0"/>
+          </a:xfrm>
+          <a:prstGeom prst="line">
+            <a:avLst/>
+          </a:prstGeom>
+          <a:ln w="22225"/>
+        </p:spPr>
+        <p:style>
+          <a:lnRef idx="1">
+            <a:schemeClr val="accent1"/>
+          </a:lnRef>
+          <a:fillRef idx="0">
+            <a:schemeClr val="accent1"/>
+          </a:fillRef>
+          <a:effectRef idx="0">
+            <a:schemeClr val="accent1"/>
+          </a:effectRef>
+          <a:fontRef idx="minor">
+            <a:schemeClr val="tx1"/>
+          </a:fontRef>
+        </p:style>
+      </p:cxnSp>
+      <p:cxnSp>
+        <p:nvCxnSpPr>
+          <p:cNvPr id="36" name="Straight Connector 35">
+            <a:extLst>
+              <a:ext uri="{FF2B5EF4-FFF2-40B4-BE49-F238E27FC236}">
+                <a16:creationId xmlns:a16="http://schemas.microsoft.com/office/drawing/2014/main" id="{151A284F-D12D-72B4-03C2-5080BAF0D390}"/>
+              </a:ext>
+            </a:extLst>
+          </p:cNvPr>
+          <p:cNvCxnSpPr/>
+          <p:nvPr/>
+        </p:nvCxnSpPr>
+        <p:spPr>
+          <a:xfrm flipH="1">
+            <a:off x="4654678" y="1797240"/>
+            <a:ext cx="450807" cy="0"/>
+          </a:xfrm>
+          <a:prstGeom prst="line">
+            <a:avLst/>
+          </a:prstGeom>
+          <a:ln w="22225"/>
+        </p:spPr>
+        <p:style>
+          <a:lnRef idx="1">
+            <a:schemeClr val="accent1"/>
+          </a:lnRef>
+          <a:fillRef idx="0">
+            <a:schemeClr val="accent1"/>
+          </a:fillRef>
+          <a:effectRef idx="0">
+            <a:schemeClr val="accent1"/>
+          </a:effectRef>
+          <a:fontRef idx="minor">
+            <a:schemeClr val="tx1"/>
+          </a:fontRef>
+        </p:style>
+      </p:cxnSp>
+      <p:cxnSp>
+        <p:nvCxnSpPr>
+          <p:cNvPr id="37" name="Straight Connector 36">
+            <a:extLst>
+              <a:ext uri="{FF2B5EF4-FFF2-40B4-BE49-F238E27FC236}">
+                <a16:creationId xmlns:a16="http://schemas.microsoft.com/office/drawing/2014/main" id="{1F9DC3AF-162E-2E3F-9A7F-1411BA44DF34}"/>
+              </a:ext>
+            </a:extLst>
+          </p:cNvPr>
+          <p:cNvCxnSpPr>
+            <a:cxnSpLocks/>
+          </p:cNvCxnSpPr>
+          <p:nvPr/>
+        </p:nvCxnSpPr>
+        <p:spPr>
+          <a:xfrm>
+            <a:off x="4666350" y="1454513"/>
+            <a:ext cx="0" cy="342727"/>
+          </a:xfrm>
+          <a:prstGeom prst="line">
+            <a:avLst/>
+          </a:prstGeom>
+          <a:ln w="22225"/>
+        </p:spPr>
+        <p:style>
+          <a:lnRef idx="1">
+            <a:schemeClr val="accent1"/>
+          </a:lnRef>
+          <a:fillRef idx="0">
+            <a:schemeClr val="accent1"/>
+          </a:fillRef>
+          <a:effectRef idx="0">
+            <a:schemeClr val="accent1"/>
+          </a:effectRef>
+          <a:fontRef idx="minor">
+            <a:schemeClr val="tx1"/>
+          </a:fontRef>
+        </p:style>
+      </p:cxnSp>
+      <p:cxnSp>
+        <p:nvCxnSpPr>
+          <p:cNvPr id="38" name="Straight Connector 37">
+            <a:extLst>
+              <a:ext uri="{FF2B5EF4-FFF2-40B4-BE49-F238E27FC236}">
+                <a16:creationId xmlns:a16="http://schemas.microsoft.com/office/drawing/2014/main" id="{09F4B79F-5516-BEDC-F3E2-4B0970DC5272}"/>
+              </a:ext>
+            </a:extLst>
+          </p:cNvPr>
+          <p:cNvCxnSpPr/>
+          <p:nvPr/>
+        </p:nvCxnSpPr>
+        <p:spPr>
+          <a:xfrm flipH="1">
+            <a:off x="4215543" y="947164"/>
+            <a:ext cx="450807" cy="0"/>
+          </a:xfrm>
+          <a:prstGeom prst="line">
+            <a:avLst/>
+          </a:prstGeom>
+          <a:ln w="22225"/>
+        </p:spPr>
+        <p:style>
+          <a:lnRef idx="1">
+            <a:schemeClr val="accent1"/>
+          </a:lnRef>
+          <a:fillRef idx="0">
+            <a:schemeClr val="accent1"/>
+          </a:fillRef>
+          <a:effectRef idx="0">
+            <a:schemeClr val="accent1"/>
+          </a:effectRef>
+          <a:fontRef idx="minor">
+            <a:schemeClr val="tx1"/>
+          </a:fontRef>
+        </p:style>
+      </p:cxnSp>
+      <p:cxnSp>
+        <p:nvCxnSpPr>
+          <p:cNvPr id="39" name="Straight Connector 38">
+            <a:extLst>
+              <a:ext uri="{FF2B5EF4-FFF2-40B4-BE49-F238E27FC236}">
+                <a16:creationId xmlns:a16="http://schemas.microsoft.com/office/drawing/2014/main" id="{08E464AB-0C35-26A0-8F2C-8E556D6BFD02}"/>
+              </a:ext>
+            </a:extLst>
+          </p:cNvPr>
+          <p:cNvCxnSpPr/>
+          <p:nvPr/>
+        </p:nvCxnSpPr>
+        <p:spPr>
+          <a:xfrm flipH="1">
+            <a:off x="4223963" y="1612360"/>
+            <a:ext cx="450807" cy="0"/>
+          </a:xfrm>
+          <a:prstGeom prst="line">
+            <a:avLst/>
+          </a:prstGeom>
+          <a:ln w="22225"/>
+        </p:spPr>
+        <p:style>
+          <a:lnRef idx="1">
+            <a:schemeClr val="accent1"/>
+          </a:lnRef>
+          <a:fillRef idx="0">
+            <a:schemeClr val="accent1"/>
+          </a:fillRef>
+          <a:effectRef idx="0">
+            <a:schemeClr val="accent1"/>
+          </a:effectRef>
+          <a:fontRef idx="minor">
+            <a:schemeClr val="tx1"/>
+          </a:fontRef>
+        </p:style>
+      </p:cxnSp>
+      <p:cxnSp>
+        <p:nvCxnSpPr>
+          <p:cNvPr id="40" name="Straight Connector 39">
+            <a:extLst>
+              <a:ext uri="{FF2B5EF4-FFF2-40B4-BE49-F238E27FC236}">
+                <a16:creationId xmlns:a16="http://schemas.microsoft.com/office/drawing/2014/main" id="{B0FF1D81-4360-3F84-3DAF-D419ECBC0138}"/>
+              </a:ext>
+            </a:extLst>
+          </p:cNvPr>
+          <p:cNvCxnSpPr>
+            <a:cxnSpLocks/>
+          </p:cNvCxnSpPr>
+          <p:nvPr/>
+        </p:nvCxnSpPr>
+        <p:spPr>
+          <a:xfrm>
+            <a:off x="4227417" y="939248"/>
+            <a:ext cx="0" cy="682670"/>
+          </a:xfrm>
+          <a:prstGeom prst="line">
+            <a:avLst/>
+          </a:prstGeom>
+          <a:ln w="22225"/>
+        </p:spPr>
+        <p:style>
+          <a:lnRef idx="1">
+            <a:schemeClr val="accent1"/>
+          </a:lnRef>
+          <a:fillRef idx="0">
+            <a:schemeClr val="accent1"/>
+          </a:fillRef>
+          <a:effectRef idx="0">
+            <a:schemeClr val="accent1"/>
+          </a:effectRef>
+          <a:fontRef idx="minor">
+            <a:schemeClr val="tx1"/>
+          </a:fontRef>
+        </p:style>
+      </p:cxnSp>
+      <p:cxnSp>
+        <p:nvCxnSpPr>
+          <p:cNvPr id="43" name="Straight Connector 42">
+            <a:extLst>
+              <a:ext uri="{FF2B5EF4-FFF2-40B4-BE49-F238E27FC236}">
+                <a16:creationId xmlns:a16="http://schemas.microsoft.com/office/drawing/2014/main" id="{F4DD19CB-F4D7-0B3C-80FC-DC20B48FA646}"/>
+              </a:ext>
+            </a:extLst>
+          </p:cNvPr>
+          <p:cNvCxnSpPr/>
+          <p:nvPr/>
+        </p:nvCxnSpPr>
+        <p:spPr>
+          <a:xfrm flipH="1">
+            <a:off x="4654475" y="2134494"/>
+            <a:ext cx="450807" cy="0"/>
+          </a:xfrm>
+          <a:prstGeom prst="line">
+            <a:avLst/>
+          </a:prstGeom>
+          <a:ln w="22225"/>
+        </p:spPr>
+        <p:style>
+          <a:lnRef idx="1">
+            <a:schemeClr val="accent1"/>
+          </a:lnRef>
+          <a:fillRef idx="0">
+            <a:schemeClr val="accent1"/>
+          </a:fillRef>
+          <a:effectRef idx="0">
+            <a:schemeClr val="accent1"/>
+          </a:effectRef>
+          <a:fontRef idx="minor">
+            <a:schemeClr val="tx1"/>
+          </a:fontRef>
+        </p:style>
+      </p:cxnSp>
+      <p:cxnSp>
+        <p:nvCxnSpPr>
+          <p:cNvPr id="44" name="Straight Connector 43">
+            <a:extLst>
+              <a:ext uri="{FF2B5EF4-FFF2-40B4-BE49-F238E27FC236}">
+                <a16:creationId xmlns:a16="http://schemas.microsoft.com/office/drawing/2014/main" id="{48D676EA-4B4E-2412-A8EE-E31F19D83A4D}"/>
+              </a:ext>
+            </a:extLst>
+          </p:cNvPr>
+          <p:cNvCxnSpPr/>
+          <p:nvPr/>
+        </p:nvCxnSpPr>
+        <p:spPr>
+          <a:xfrm flipH="1">
+            <a:off x="4654677" y="2477221"/>
+            <a:ext cx="450807" cy="0"/>
+          </a:xfrm>
+          <a:prstGeom prst="line">
+            <a:avLst/>
+          </a:prstGeom>
+          <a:ln w="22225"/>
+        </p:spPr>
+        <p:style>
+          <a:lnRef idx="1">
+            <a:schemeClr val="accent1"/>
+          </a:lnRef>
+          <a:fillRef idx="0">
+            <a:schemeClr val="accent1"/>
+          </a:fillRef>
+          <a:effectRef idx="0">
+            <a:schemeClr val="accent1"/>
+          </a:effectRef>
+          <a:fontRef idx="minor">
+            <a:schemeClr val="tx1"/>
+          </a:fontRef>
+        </p:style>
+      </p:cxnSp>
+      <p:cxnSp>
+        <p:nvCxnSpPr>
+          <p:cNvPr id="45" name="Straight Connector 44">
+            <a:extLst>
+              <a:ext uri="{FF2B5EF4-FFF2-40B4-BE49-F238E27FC236}">
+                <a16:creationId xmlns:a16="http://schemas.microsoft.com/office/drawing/2014/main" id="{F2BD446E-FADC-A4E0-C092-817AAD48CEF1}"/>
+              </a:ext>
+            </a:extLst>
+          </p:cNvPr>
+          <p:cNvCxnSpPr>
+            <a:cxnSpLocks/>
+          </p:cNvCxnSpPr>
+          <p:nvPr/>
+        </p:nvCxnSpPr>
+        <p:spPr>
+          <a:xfrm>
+            <a:off x="4666349" y="2134494"/>
+            <a:ext cx="0" cy="342727"/>
+          </a:xfrm>
+          <a:prstGeom prst="line">
+            <a:avLst/>
+          </a:prstGeom>
+          <a:ln w="22225"/>
+        </p:spPr>
+        <p:style>
+          <a:lnRef idx="1">
+            <a:schemeClr val="accent1"/>
+          </a:lnRef>
+          <a:fillRef idx="0">
+            <a:schemeClr val="accent1"/>
+          </a:fillRef>
+          <a:effectRef idx="0">
+            <a:schemeClr val="accent1"/>
+          </a:effectRef>
+          <a:fontRef idx="minor">
+            <a:schemeClr val="tx1"/>
+          </a:fontRef>
+        </p:style>
+      </p:cxnSp>
+      <p:cxnSp>
+        <p:nvCxnSpPr>
+          <p:cNvPr id="46" name="Straight Connector 45">
+            <a:extLst>
+              <a:ext uri="{FF2B5EF4-FFF2-40B4-BE49-F238E27FC236}">
+                <a16:creationId xmlns:a16="http://schemas.microsoft.com/office/drawing/2014/main" id="{CF9093DC-3D88-C855-C957-B287579F821F}"/>
+              </a:ext>
+            </a:extLst>
+          </p:cNvPr>
+          <p:cNvCxnSpPr>
+            <a:cxnSpLocks/>
+          </p:cNvCxnSpPr>
+          <p:nvPr/>
+        </p:nvCxnSpPr>
+        <p:spPr>
+          <a:xfrm flipH="1">
+            <a:off x="3775232" y="2292341"/>
+            <a:ext cx="899537" cy="0"/>
+          </a:xfrm>
+          <a:prstGeom prst="line">
+            <a:avLst/>
+          </a:prstGeom>
+          <a:ln w="22225"/>
+        </p:spPr>
+        <p:style>
+          <a:lnRef idx="1">
+            <a:schemeClr val="accent1"/>
+          </a:lnRef>
+          <a:fillRef idx="0">
+            <a:schemeClr val="accent1"/>
+          </a:fillRef>
+          <a:effectRef idx="0">
+            <a:schemeClr val="accent1"/>
+          </a:effectRef>
+          <a:fontRef idx="minor">
+            <a:schemeClr val="tx1"/>
+          </a:fontRef>
+        </p:style>
+      </p:cxnSp>
+      <p:cxnSp>
+        <p:nvCxnSpPr>
+          <p:cNvPr id="47" name="Straight Connector 46">
+            <a:extLst>
+              <a:ext uri="{FF2B5EF4-FFF2-40B4-BE49-F238E27FC236}">
+                <a16:creationId xmlns:a16="http://schemas.microsoft.com/office/drawing/2014/main" id="{E1609972-DE50-51F8-D08D-392401806B7C}"/>
+              </a:ext>
+            </a:extLst>
+          </p:cNvPr>
+          <p:cNvCxnSpPr/>
+          <p:nvPr/>
+        </p:nvCxnSpPr>
+        <p:spPr>
+          <a:xfrm flipH="1">
+            <a:off x="3764736" y="1257628"/>
+            <a:ext cx="450807" cy="0"/>
+          </a:xfrm>
+          <a:prstGeom prst="line">
+            <a:avLst/>
+          </a:prstGeom>
+          <a:ln w="22225"/>
+        </p:spPr>
+        <p:style>
+          <a:lnRef idx="1">
+            <a:schemeClr val="accent1"/>
+          </a:lnRef>
+          <a:fillRef idx="0">
+            <a:schemeClr val="accent1"/>
+          </a:fillRef>
+          <a:effectRef idx="0">
+            <a:schemeClr val="accent1"/>
+          </a:effectRef>
+          <a:fontRef idx="minor">
+            <a:schemeClr val="tx1"/>
+          </a:fontRef>
+        </p:style>
+      </p:cxnSp>
+      <p:cxnSp>
+        <p:nvCxnSpPr>
+          <p:cNvPr id="48" name="Straight Connector 47">
+            <a:extLst>
+              <a:ext uri="{FF2B5EF4-FFF2-40B4-BE49-F238E27FC236}">
+                <a16:creationId xmlns:a16="http://schemas.microsoft.com/office/drawing/2014/main" id="{76F46BB5-826D-E702-24A5-8F66D2F89E87}"/>
+              </a:ext>
+            </a:extLst>
+          </p:cNvPr>
+          <p:cNvCxnSpPr>
+            <a:cxnSpLocks/>
+          </p:cNvCxnSpPr>
+          <p:nvPr/>
+        </p:nvCxnSpPr>
+        <p:spPr>
+          <a:xfrm>
+            <a:off x="3775232" y="1254203"/>
+            <a:ext cx="0" cy="1038138"/>
+          </a:xfrm>
+          <a:prstGeom prst="line">
+            <a:avLst/>
+          </a:prstGeom>
+          <a:ln w="22225"/>
+        </p:spPr>
+        <p:style>
+          <a:lnRef idx="1">
+            <a:schemeClr val="accent1"/>
+          </a:lnRef>
+          <a:fillRef idx="0">
+            <a:schemeClr val="accent1"/>
+          </a:fillRef>
+          <a:effectRef idx="0">
+            <a:schemeClr val="accent1"/>
+          </a:effectRef>
+          <a:fontRef idx="minor">
+            <a:schemeClr val="tx1"/>
+          </a:fontRef>
+        </p:style>
+      </p:cxnSp>
+      <p:cxnSp>
+        <p:nvCxnSpPr>
+          <p:cNvPr id="51" name="Straight Connector 50">
+            <a:extLst>
+              <a:ext uri="{FF2B5EF4-FFF2-40B4-BE49-F238E27FC236}">
+                <a16:creationId xmlns:a16="http://schemas.microsoft.com/office/drawing/2014/main" id="{0771BCD0-F7CE-9EEB-6846-49F9866014A2}"/>
+              </a:ext>
+            </a:extLst>
+          </p:cNvPr>
+          <p:cNvCxnSpPr/>
+          <p:nvPr/>
+        </p:nvCxnSpPr>
+        <p:spPr>
+          <a:xfrm flipH="1">
+            <a:off x="3313929" y="1773152"/>
+            <a:ext cx="450807" cy="0"/>
+          </a:xfrm>
+          <a:prstGeom prst="line">
+            <a:avLst/>
+          </a:prstGeom>
+          <a:ln w="22225"/>
+        </p:spPr>
+        <p:style>
+          <a:lnRef idx="1">
+            <a:schemeClr val="accent1"/>
+          </a:lnRef>
+          <a:fillRef idx="0">
+            <a:schemeClr val="accent1"/>
+          </a:fillRef>
+          <a:effectRef idx="0">
+            <a:schemeClr val="accent1"/>
+          </a:effectRef>
+          <a:fontRef idx="minor">
+            <a:schemeClr val="tx1"/>
+          </a:fontRef>
+        </p:style>
+      </p:cxnSp>
+      <p:cxnSp>
+        <p:nvCxnSpPr>
+          <p:cNvPr id="52" name="Straight Connector 51">
+            <a:extLst>
+              <a:ext uri="{FF2B5EF4-FFF2-40B4-BE49-F238E27FC236}">
+                <a16:creationId xmlns:a16="http://schemas.microsoft.com/office/drawing/2014/main" id="{F0634F2E-ABC4-1387-E3C1-3ADFBDB69D87}"/>
+              </a:ext>
+            </a:extLst>
+          </p:cNvPr>
+          <p:cNvCxnSpPr>
+            <a:cxnSpLocks/>
+          </p:cNvCxnSpPr>
+          <p:nvPr/>
+        </p:nvCxnSpPr>
+        <p:spPr>
+          <a:xfrm flipH="1">
+            <a:off x="3331290" y="2848667"/>
+            <a:ext cx="1762923" cy="0"/>
+          </a:xfrm>
+          <a:prstGeom prst="line">
+            <a:avLst/>
+          </a:prstGeom>
+          <a:ln w="22225"/>
+        </p:spPr>
+        <p:style>
+          <a:lnRef idx="1">
+            <a:schemeClr val="accent1"/>
+          </a:lnRef>
+          <a:fillRef idx="0">
+            <a:schemeClr val="accent1"/>
+          </a:fillRef>
+          <a:effectRef idx="0">
+            <a:schemeClr val="accent1"/>
+          </a:effectRef>
+          <a:fontRef idx="minor">
+            <a:schemeClr val="tx1"/>
+          </a:fontRef>
+        </p:style>
+      </p:cxnSp>
+      <p:cxnSp>
+        <p:nvCxnSpPr>
+          <p:cNvPr id="53" name="Straight Connector 52">
+            <a:extLst>
+              <a:ext uri="{FF2B5EF4-FFF2-40B4-BE49-F238E27FC236}">
+                <a16:creationId xmlns:a16="http://schemas.microsoft.com/office/drawing/2014/main" id="{441CB6D0-DF9D-C0C2-6593-C2536D00B090}"/>
+              </a:ext>
+            </a:extLst>
+          </p:cNvPr>
+          <p:cNvCxnSpPr>
+            <a:cxnSpLocks/>
+          </p:cNvCxnSpPr>
+          <p:nvPr/>
+        </p:nvCxnSpPr>
+        <p:spPr>
+          <a:xfrm>
+            <a:off x="3325503" y="1761578"/>
+            <a:ext cx="0" cy="1095189"/>
+          </a:xfrm>
+          <a:prstGeom prst="line">
+            <a:avLst/>
+          </a:prstGeom>
+          <a:ln w="22225"/>
+        </p:spPr>
+        <p:style>
+          <a:lnRef idx="1">
+            <a:schemeClr val="accent1"/>
+          </a:lnRef>
+          <a:fillRef idx="0">
+            <a:schemeClr val="accent1"/>
+          </a:fillRef>
+          <a:effectRef idx="0">
+            <a:schemeClr val="accent1"/>
+          </a:effectRef>
+          <a:fontRef idx="minor">
+            <a:schemeClr val="tx1"/>
+          </a:fontRef>
+        </p:style>
+      </p:cxnSp>
+      <p:cxnSp>
+        <p:nvCxnSpPr>
+          <p:cNvPr id="56" name="Straight Connector 55">
+            <a:extLst>
+              <a:ext uri="{FF2B5EF4-FFF2-40B4-BE49-F238E27FC236}">
+                <a16:creationId xmlns:a16="http://schemas.microsoft.com/office/drawing/2014/main" id="{58FAC41C-615E-9A97-2E08-134AE68ABF9E}"/>
+              </a:ext>
+            </a:extLst>
+          </p:cNvPr>
+          <p:cNvCxnSpPr/>
+          <p:nvPr/>
+        </p:nvCxnSpPr>
+        <p:spPr>
+          <a:xfrm flipH="1">
+            <a:off x="4648988" y="3171223"/>
+            <a:ext cx="450807" cy="0"/>
+          </a:xfrm>
+          <a:prstGeom prst="line">
+            <a:avLst/>
+          </a:prstGeom>
+          <a:ln w="22225"/>
+        </p:spPr>
+        <p:style>
+          <a:lnRef idx="1">
+            <a:schemeClr val="accent1"/>
+          </a:lnRef>
+          <a:fillRef idx="0">
+            <a:schemeClr val="accent1"/>
+          </a:fillRef>
+          <a:effectRef idx="0">
+            <a:schemeClr val="accent1"/>
+          </a:effectRef>
+          <a:fontRef idx="minor">
+            <a:schemeClr val="tx1"/>
+          </a:fontRef>
+        </p:style>
+      </p:cxnSp>
+      <p:cxnSp>
+        <p:nvCxnSpPr>
+          <p:cNvPr id="57" name="Straight Connector 56">
+            <a:extLst>
+              <a:ext uri="{FF2B5EF4-FFF2-40B4-BE49-F238E27FC236}">
+                <a16:creationId xmlns:a16="http://schemas.microsoft.com/office/drawing/2014/main" id="{17D43172-B944-DF61-7AE0-EABF62F9ED59}"/>
+              </a:ext>
+            </a:extLst>
+          </p:cNvPr>
+          <p:cNvCxnSpPr/>
+          <p:nvPr/>
+        </p:nvCxnSpPr>
+        <p:spPr>
+          <a:xfrm flipH="1">
+            <a:off x="4649190" y="3513950"/>
+            <a:ext cx="450807" cy="0"/>
+          </a:xfrm>
+          <a:prstGeom prst="line">
+            <a:avLst/>
+          </a:prstGeom>
+          <a:ln w="22225"/>
+        </p:spPr>
+        <p:style>
+          <a:lnRef idx="1">
+            <a:schemeClr val="accent1"/>
+          </a:lnRef>
+          <a:fillRef idx="0">
+            <a:schemeClr val="accent1"/>
+          </a:fillRef>
+          <a:effectRef idx="0">
+            <a:schemeClr val="accent1"/>
+          </a:effectRef>
+          <a:fontRef idx="minor">
+            <a:schemeClr val="tx1"/>
+          </a:fontRef>
+        </p:style>
+      </p:cxnSp>
+      <p:cxnSp>
+        <p:nvCxnSpPr>
+          <p:cNvPr id="58" name="Straight Connector 57">
+            <a:extLst>
+              <a:ext uri="{FF2B5EF4-FFF2-40B4-BE49-F238E27FC236}">
+                <a16:creationId xmlns:a16="http://schemas.microsoft.com/office/drawing/2014/main" id="{BC36FF4A-164D-5627-D50A-16FD2C519317}"/>
+              </a:ext>
+            </a:extLst>
+          </p:cNvPr>
+          <p:cNvCxnSpPr>
+            <a:cxnSpLocks/>
+          </p:cNvCxnSpPr>
+          <p:nvPr/>
+        </p:nvCxnSpPr>
+        <p:spPr>
+          <a:xfrm>
+            <a:off x="4660862" y="3171223"/>
+            <a:ext cx="0" cy="342727"/>
+          </a:xfrm>
+          <a:prstGeom prst="line">
+            <a:avLst/>
+          </a:prstGeom>
+          <a:ln w="22225"/>
+        </p:spPr>
+        <p:style>
+          <a:lnRef idx="1">
+            <a:schemeClr val="accent1"/>
+          </a:lnRef>
+          <a:fillRef idx="0">
+            <a:schemeClr val="accent1"/>
+          </a:fillRef>
+          <a:effectRef idx="0">
+            <a:schemeClr val="accent1"/>
+          </a:effectRef>
+          <a:fontRef idx="minor">
+            <a:schemeClr val="tx1"/>
+          </a:fontRef>
+        </p:style>
+      </p:cxnSp>
+      <p:cxnSp>
+        <p:nvCxnSpPr>
+          <p:cNvPr id="59" name="Straight Connector 58">
+            <a:extLst>
+              <a:ext uri="{FF2B5EF4-FFF2-40B4-BE49-F238E27FC236}">
+                <a16:creationId xmlns:a16="http://schemas.microsoft.com/office/drawing/2014/main" id="{E435C8FB-DC79-6634-2F94-B51B10DBA040}"/>
+              </a:ext>
+            </a:extLst>
+          </p:cNvPr>
+          <p:cNvCxnSpPr>
+            <a:cxnSpLocks/>
+          </p:cNvCxnSpPr>
+          <p:nvPr/>
+        </p:nvCxnSpPr>
+        <p:spPr>
+          <a:xfrm flipH="1">
+            <a:off x="2874696" y="3329070"/>
+            <a:ext cx="1794586" cy="0"/>
+          </a:xfrm>
+          <a:prstGeom prst="line">
+            <a:avLst/>
+          </a:prstGeom>
+          <a:ln w="22225"/>
+        </p:spPr>
+        <p:style>
+          <a:lnRef idx="1">
+            <a:schemeClr val="accent1"/>
+          </a:lnRef>
+          <a:fillRef idx="0">
+            <a:schemeClr val="accent1"/>
+          </a:fillRef>
+          <a:effectRef idx="0">
+            <a:schemeClr val="accent1"/>
+          </a:effectRef>
+          <a:fontRef idx="minor">
+            <a:schemeClr val="tx1"/>
+          </a:fontRef>
+        </p:style>
+      </p:cxnSp>
+      <p:cxnSp>
+        <p:nvCxnSpPr>
+          <p:cNvPr id="61" name="Straight Connector 60">
+            <a:extLst>
+              <a:ext uri="{FF2B5EF4-FFF2-40B4-BE49-F238E27FC236}">
+                <a16:creationId xmlns:a16="http://schemas.microsoft.com/office/drawing/2014/main" id="{B2B7B06D-09C7-F07B-8F08-4845A8F9F37A}"/>
+              </a:ext>
+            </a:extLst>
+          </p:cNvPr>
+          <p:cNvCxnSpPr/>
+          <p:nvPr/>
+        </p:nvCxnSpPr>
+        <p:spPr>
+          <a:xfrm flipH="1">
+            <a:off x="2874696" y="2306405"/>
+            <a:ext cx="450807" cy="0"/>
+          </a:xfrm>
+          <a:prstGeom prst="line">
+            <a:avLst/>
+          </a:prstGeom>
+          <a:ln w="22225"/>
+        </p:spPr>
+        <p:style>
+          <a:lnRef idx="1">
+            <a:schemeClr val="accent1"/>
+          </a:lnRef>
+          <a:fillRef idx="0">
+            <a:schemeClr val="accent1"/>
+          </a:fillRef>
+          <a:effectRef idx="0">
+            <a:schemeClr val="accent1"/>
+          </a:effectRef>
+          <a:fontRef idx="minor">
+            <a:schemeClr val="tx1"/>
+          </a:fontRef>
+        </p:style>
+      </p:cxnSp>
+      <p:cxnSp>
+        <p:nvCxnSpPr>
+          <p:cNvPr id="62" name="Straight Connector 61">
+            <a:extLst>
+              <a:ext uri="{FF2B5EF4-FFF2-40B4-BE49-F238E27FC236}">
+                <a16:creationId xmlns:a16="http://schemas.microsoft.com/office/drawing/2014/main" id="{BBA1BA2D-A026-D535-ACE9-F88774FC17D5}"/>
+              </a:ext>
+            </a:extLst>
+          </p:cNvPr>
+          <p:cNvCxnSpPr>
+            <a:cxnSpLocks/>
+          </p:cNvCxnSpPr>
+          <p:nvPr/>
+        </p:nvCxnSpPr>
+        <p:spPr>
+          <a:xfrm>
+            <a:off x="2880483" y="2295285"/>
+            <a:ext cx="0" cy="1047301"/>
+          </a:xfrm>
+          <a:prstGeom prst="line">
+            <a:avLst/>
+          </a:prstGeom>
+          <a:ln w="22225"/>
+        </p:spPr>
+        <p:style>
+          <a:lnRef idx="1">
+            <a:schemeClr val="accent1"/>
+          </a:lnRef>
+          <a:fillRef idx="0">
+            <a:schemeClr val="accent1"/>
+          </a:fillRef>
+          <a:effectRef idx="0">
+            <a:schemeClr val="accent1"/>
+          </a:effectRef>
+          <a:fontRef idx="minor">
+            <a:schemeClr val="tx1"/>
+          </a:fontRef>
+        </p:style>
+      </p:cxnSp>
+      <p:cxnSp>
+        <p:nvCxnSpPr>
+          <p:cNvPr id="67" name="Straight Connector 66">
+            <a:extLst>
+              <a:ext uri="{FF2B5EF4-FFF2-40B4-BE49-F238E27FC236}">
+                <a16:creationId xmlns:a16="http://schemas.microsoft.com/office/drawing/2014/main" id="{702F7CA6-C30A-2736-8139-446CCFE792C6}"/>
+              </a:ext>
+            </a:extLst>
+          </p:cNvPr>
+          <p:cNvCxnSpPr/>
+          <p:nvPr/>
+        </p:nvCxnSpPr>
+        <p:spPr>
+          <a:xfrm flipH="1">
+            <a:off x="2423889" y="2818935"/>
+            <a:ext cx="450807" cy="0"/>
+          </a:xfrm>
+          <a:prstGeom prst="line">
+            <a:avLst/>
+          </a:prstGeom>
+          <a:ln w="22225"/>
+        </p:spPr>
+        <p:style>
+          <a:lnRef idx="1">
+            <a:schemeClr val="accent1"/>
+          </a:lnRef>
+          <a:fillRef idx="0">
+            <a:schemeClr val="accent1"/>
+          </a:fillRef>
+          <a:effectRef idx="0">
+            <a:schemeClr val="accent1"/>
+          </a:effectRef>
+          <a:fontRef idx="minor">
+            <a:schemeClr val="tx1"/>
+          </a:fontRef>
+        </p:style>
+      </p:cxnSp>
+      <p:cxnSp>
+        <p:nvCxnSpPr>
+          <p:cNvPr id="68" name="Straight Connector 67">
+            <a:extLst>
+              <a:ext uri="{FF2B5EF4-FFF2-40B4-BE49-F238E27FC236}">
+                <a16:creationId xmlns:a16="http://schemas.microsoft.com/office/drawing/2014/main" id="{F0B4BC79-6D06-931F-79C3-CC53482DF973}"/>
+              </a:ext>
+            </a:extLst>
+          </p:cNvPr>
+          <p:cNvCxnSpPr/>
+          <p:nvPr/>
+        </p:nvCxnSpPr>
+        <p:spPr>
+          <a:xfrm flipH="1">
+            <a:off x="4643406" y="3853602"/>
+            <a:ext cx="450807" cy="0"/>
+          </a:xfrm>
+          <a:prstGeom prst="line">
+            <a:avLst/>
+          </a:prstGeom>
+          <a:ln w="22225"/>
+        </p:spPr>
+        <p:style>
+          <a:lnRef idx="1">
+            <a:schemeClr val="accent1"/>
+          </a:lnRef>
+          <a:fillRef idx="0">
+            <a:schemeClr val="accent1"/>
+          </a:fillRef>
+          <a:effectRef idx="0">
+            <a:schemeClr val="accent1"/>
+          </a:effectRef>
+          <a:fontRef idx="minor">
+            <a:schemeClr val="tx1"/>
+          </a:fontRef>
+        </p:style>
+      </p:cxnSp>
+      <p:cxnSp>
+        <p:nvCxnSpPr>
+          <p:cNvPr id="69" name="Straight Connector 68">
+            <a:extLst>
+              <a:ext uri="{FF2B5EF4-FFF2-40B4-BE49-F238E27FC236}">
+                <a16:creationId xmlns:a16="http://schemas.microsoft.com/office/drawing/2014/main" id="{A4AC5993-92EA-B716-6AD6-28691C19AACE}"/>
+              </a:ext>
+            </a:extLst>
+          </p:cNvPr>
+          <p:cNvCxnSpPr/>
+          <p:nvPr/>
+        </p:nvCxnSpPr>
+        <p:spPr>
+          <a:xfrm flipH="1">
+            <a:off x="4643608" y="4196329"/>
+            <a:ext cx="450807" cy="0"/>
+          </a:xfrm>
+          <a:prstGeom prst="line">
+            <a:avLst/>
+          </a:prstGeom>
+          <a:ln w="22225"/>
+        </p:spPr>
+        <p:style>
+          <a:lnRef idx="1">
+            <a:schemeClr val="accent1"/>
+          </a:lnRef>
+          <a:fillRef idx="0">
+            <a:schemeClr val="accent1"/>
+          </a:fillRef>
+          <a:effectRef idx="0">
+            <a:schemeClr val="accent1"/>
+          </a:effectRef>
+          <a:fontRef idx="minor">
+            <a:schemeClr val="tx1"/>
+          </a:fontRef>
+        </p:style>
+      </p:cxnSp>
+      <p:cxnSp>
+        <p:nvCxnSpPr>
+          <p:cNvPr id="70" name="Straight Connector 69">
+            <a:extLst>
+              <a:ext uri="{FF2B5EF4-FFF2-40B4-BE49-F238E27FC236}">
+                <a16:creationId xmlns:a16="http://schemas.microsoft.com/office/drawing/2014/main" id="{C17F5E15-7D22-FC85-663F-5F8E38234C74}"/>
+              </a:ext>
+            </a:extLst>
+          </p:cNvPr>
+          <p:cNvCxnSpPr>
+            <a:cxnSpLocks/>
+          </p:cNvCxnSpPr>
+          <p:nvPr/>
+        </p:nvCxnSpPr>
+        <p:spPr>
+          <a:xfrm>
+            <a:off x="4655280" y="3853602"/>
+            <a:ext cx="0" cy="342727"/>
+          </a:xfrm>
+          <a:prstGeom prst="line">
+            <a:avLst/>
+          </a:prstGeom>
+          <a:ln w="22225"/>
+        </p:spPr>
+        <p:style>
+          <a:lnRef idx="1">
+            <a:schemeClr val="accent1"/>
+          </a:lnRef>
+          <a:fillRef idx="0">
+            <a:schemeClr val="accent1"/>
+          </a:fillRef>
+          <a:effectRef idx="0">
+            <a:schemeClr val="accent1"/>
+          </a:effectRef>
+          <a:fontRef idx="minor">
+            <a:schemeClr val="tx1"/>
+          </a:fontRef>
+        </p:style>
+      </p:cxnSp>
+      <p:cxnSp>
+        <p:nvCxnSpPr>
+          <p:cNvPr id="71" name="Straight Connector 70">
+            <a:extLst>
+              <a:ext uri="{FF2B5EF4-FFF2-40B4-BE49-F238E27FC236}">
+                <a16:creationId xmlns:a16="http://schemas.microsoft.com/office/drawing/2014/main" id="{6404950D-1D25-E336-A20E-524FDF884E5D}"/>
+              </a:ext>
+            </a:extLst>
+          </p:cNvPr>
+          <p:cNvCxnSpPr>
+            <a:cxnSpLocks/>
+          </p:cNvCxnSpPr>
+          <p:nvPr/>
+        </p:nvCxnSpPr>
+        <p:spPr>
+          <a:xfrm flipH="1">
+            <a:off x="2423889" y="4017236"/>
+            <a:ext cx="2239811" cy="0"/>
+          </a:xfrm>
+          <a:prstGeom prst="line">
+            <a:avLst/>
+          </a:prstGeom>
+          <a:ln w="22225"/>
+        </p:spPr>
+        <p:style>
+          <a:lnRef idx="1">
+            <a:schemeClr val="accent1"/>
+          </a:lnRef>
+          <a:fillRef idx="0">
+            <a:schemeClr val="accent1"/>
+          </a:fillRef>
+          <a:effectRef idx="0">
+            <a:schemeClr val="accent1"/>
+          </a:effectRef>
+          <a:fontRef idx="minor">
+            <a:schemeClr val="tx1"/>
+          </a:fontRef>
+        </p:style>
+      </p:cxnSp>
+      <p:cxnSp>
+        <p:nvCxnSpPr>
+          <p:cNvPr id="72" name="Straight Connector 71">
+            <a:extLst>
+              <a:ext uri="{FF2B5EF4-FFF2-40B4-BE49-F238E27FC236}">
+                <a16:creationId xmlns:a16="http://schemas.microsoft.com/office/drawing/2014/main" id="{F2063E2C-C3CB-730E-7B36-D7AB54ECEE57}"/>
+              </a:ext>
+            </a:extLst>
+          </p:cNvPr>
+          <p:cNvCxnSpPr>
+            <a:cxnSpLocks/>
+          </p:cNvCxnSpPr>
+          <p:nvPr/>
+        </p:nvCxnSpPr>
+        <p:spPr>
+          <a:xfrm>
+            <a:off x="2423889" y="2806301"/>
+            <a:ext cx="0" cy="1218664"/>
+          </a:xfrm>
+          <a:prstGeom prst="line">
+            <a:avLst/>
+          </a:prstGeom>
+          <a:ln w="22225"/>
+        </p:spPr>
+        <p:style>
+          <a:lnRef idx="1">
+            <a:schemeClr val="accent1"/>
+          </a:lnRef>
+          <a:fillRef idx="0">
+            <a:schemeClr val="accent1"/>
+          </a:fillRef>
+          <a:effectRef idx="0">
+            <a:schemeClr val="accent1"/>
+          </a:effectRef>
+          <a:fontRef idx="minor">
+            <a:schemeClr val="tx1"/>
+          </a:fontRef>
+        </p:style>
+      </p:cxnSp>
+      <p:cxnSp>
+        <p:nvCxnSpPr>
+          <p:cNvPr id="75" name="Straight Connector 74">
+            <a:extLst>
+              <a:ext uri="{FF2B5EF4-FFF2-40B4-BE49-F238E27FC236}">
+                <a16:creationId xmlns:a16="http://schemas.microsoft.com/office/drawing/2014/main" id="{DDD71891-6A15-7877-8A6C-09F1DB597682}"/>
+              </a:ext>
+            </a:extLst>
+          </p:cNvPr>
+          <p:cNvCxnSpPr>
+            <a:cxnSpLocks/>
+          </p:cNvCxnSpPr>
+          <p:nvPr/>
+        </p:nvCxnSpPr>
+        <p:spPr>
+          <a:xfrm flipH="1">
+            <a:off x="1973082" y="4539056"/>
+            <a:ext cx="3121131" cy="0"/>
+          </a:xfrm>
+          <a:prstGeom prst="line">
+            <a:avLst/>
+          </a:prstGeom>
+          <a:ln w="22225"/>
+        </p:spPr>
+        <p:style>
+          <a:lnRef idx="1">
+            <a:schemeClr val="accent1"/>
+          </a:lnRef>
+          <a:fillRef idx="0">
+            <a:schemeClr val="accent1"/>
+          </a:fillRef>
+          <a:effectRef idx="0">
+            <a:schemeClr val="accent1"/>
+          </a:effectRef>
+          <a:fontRef idx="minor">
+            <a:schemeClr val="tx1"/>
+          </a:fontRef>
+        </p:style>
+      </p:cxnSp>
+      <p:cxnSp>
+        <p:nvCxnSpPr>
+          <p:cNvPr id="76" name="Straight Connector 75">
+            <a:extLst>
+              <a:ext uri="{FF2B5EF4-FFF2-40B4-BE49-F238E27FC236}">
+                <a16:creationId xmlns:a16="http://schemas.microsoft.com/office/drawing/2014/main" id="{357020FE-85EF-F134-AF78-9CF3837A95E9}"/>
+              </a:ext>
+            </a:extLst>
+          </p:cNvPr>
+          <p:cNvCxnSpPr/>
+          <p:nvPr/>
+        </p:nvCxnSpPr>
+        <p:spPr>
+          <a:xfrm flipH="1">
+            <a:off x="1973082" y="3415633"/>
+            <a:ext cx="450807" cy="0"/>
+          </a:xfrm>
+          <a:prstGeom prst="line">
+            <a:avLst/>
+          </a:prstGeom>
+          <a:ln w="22225"/>
+        </p:spPr>
+        <p:style>
+          <a:lnRef idx="1">
+            <a:schemeClr val="accent1"/>
+          </a:lnRef>
+          <a:fillRef idx="0">
+            <a:schemeClr val="accent1"/>
+          </a:fillRef>
+          <a:effectRef idx="0">
+            <a:schemeClr val="accent1"/>
+          </a:effectRef>
+          <a:fontRef idx="minor">
+            <a:schemeClr val="tx1"/>
+          </a:fontRef>
+        </p:style>
+      </p:cxnSp>
+      <p:cxnSp>
+        <p:nvCxnSpPr>
+          <p:cNvPr id="77" name="Straight Connector 76">
+            <a:extLst>
+              <a:ext uri="{FF2B5EF4-FFF2-40B4-BE49-F238E27FC236}">
+                <a16:creationId xmlns:a16="http://schemas.microsoft.com/office/drawing/2014/main" id="{5F7048F2-19EC-B963-A9F3-EB8770954137}"/>
+              </a:ext>
+            </a:extLst>
+          </p:cNvPr>
+          <p:cNvCxnSpPr>
+            <a:cxnSpLocks/>
+          </p:cNvCxnSpPr>
+          <p:nvPr/>
+        </p:nvCxnSpPr>
+        <p:spPr>
+          <a:xfrm>
+            <a:off x="1978039" y="3407904"/>
+            <a:ext cx="0" cy="1131152"/>
+          </a:xfrm>
+          <a:prstGeom prst="line">
+            <a:avLst/>
+          </a:prstGeom>
+          <a:ln w="22225"/>
+        </p:spPr>
+        <p:style>
+          <a:lnRef idx="1">
+            <a:schemeClr val="accent1"/>
+          </a:lnRef>
+          <a:fillRef idx="0">
+            <a:schemeClr val="accent1"/>
+          </a:fillRef>
+          <a:effectRef idx="0">
+            <a:schemeClr val="accent1"/>
+          </a:effectRef>
+          <a:fontRef idx="minor">
+            <a:schemeClr val="tx1"/>
+          </a:fontRef>
+        </p:style>
+      </p:cxnSp>
+      <p:cxnSp>
+        <p:nvCxnSpPr>
+          <p:cNvPr id="80" name="Straight Connector 79">
+            <a:extLst>
+              <a:ext uri="{FF2B5EF4-FFF2-40B4-BE49-F238E27FC236}">
+                <a16:creationId xmlns:a16="http://schemas.microsoft.com/office/drawing/2014/main" id="{3AD06155-6E2D-D8F1-D1A8-EB74A306C7AD}"/>
+              </a:ext>
+            </a:extLst>
+          </p:cNvPr>
+          <p:cNvCxnSpPr/>
+          <p:nvPr/>
+        </p:nvCxnSpPr>
+        <p:spPr>
+          <a:xfrm flipH="1">
+            <a:off x="1522275" y="3973480"/>
+            <a:ext cx="450807" cy="0"/>
+          </a:xfrm>
+          <a:prstGeom prst="line">
+            <a:avLst/>
+          </a:prstGeom>
+          <a:ln w="22225"/>
+        </p:spPr>
+        <p:style>
+          <a:lnRef idx="1">
+            <a:schemeClr val="accent1"/>
+          </a:lnRef>
+          <a:fillRef idx="0">
+            <a:schemeClr val="accent1"/>
+          </a:fillRef>
+          <a:effectRef idx="0">
+            <a:schemeClr val="accent1"/>
+          </a:effectRef>
+          <a:fontRef idx="minor">
+            <a:schemeClr val="tx1"/>
+          </a:fontRef>
+        </p:style>
+      </p:cxnSp>
+      <p:cxnSp>
+        <p:nvCxnSpPr>
+          <p:cNvPr id="81" name="Straight Connector 80">
+            <a:extLst>
+              <a:ext uri="{FF2B5EF4-FFF2-40B4-BE49-F238E27FC236}">
+                <a16:creationId xmlns:a16="http://schemas.microsoft.com/office/drawing/2014/main" id="{AB16C56B-E46B-BC0E-8C75-D22EBDD4DBDB}"/>
+              </a:ext>
+            </a:extLst>
+          </p:cNvPr>
+          <p:cNvCxnSpPr>
+            <a:cxnSpLocks/>
+          </p:cNvCxnSpPr>
+          <p:nvPr/>
+        </p:nvCxnSpPr>
+        <p:spPr>
+          <a:xfrm>
+            <a:off x="1527007" y="3965735"/>
+            <a:ext cx="0" cy="916048"/>
+          </a:xfrm>
+          <a:prstGeom prst="line">
+            <a:avLst/>
+          </a:prstGeom>
+          <a:ln w="22225"/>
+        </p:spPr>
+        <p:style>
+          <a:lnRef idx="1">
+            <a:schemeClr val="accent1"/>
+          </a:lnRef>
+          <a:fillRef idx="0">
+            <a:schemeClr val="accent1"/>
+          </a:fillRef>
+          <a:effectRef idx="0">
+            <a:schemeClr val="accent1"/>
+          </a:effectRef>
+          <a:fontRef idx="minor">
+            <a:schemeClr val="tx1"/>
+          </a:fontRef>
+        </p:style>
+      </p:cxnSp>
+      <p:cxnSp>
+        <p:nvCxnSpPr>
+          <p:cNvPr id="82" name="Straight Connector 81">
+            <a:extLst>
+              <a:ext uri="{FF2B5EF4-FFF2-40B4-BE49-F238E27FC236}">
+                <a16:creationId xmlns:a16="http://schemas.microsoft.com/office/drawing/2014/main" id="{D2F9639B-8589-0084-4BAB-BB29A8D66B12}"/>
+              </a:ext>
+            </a:extLst>
+          </p:cNvPr>
+          <p:cNvCxnSpPr>
+            <a:cxnSpLocks/>
+          </p:cNvCxnSpPr>
+          <p:nvPr/>
+        </p:nvCxnSpPr>
+        <p:spPr>
+          <a:xfrm flipH="1">
+            <a:off x="1522275" y="4881885"/>
+            <a:ext cx="3571938" cy="0"/>
+          </a:xfrm>
+          <a:prstGeom prst="line">
+            <a:avLst/>
+          </a:prstGeom>
+          <a:ln w="22225"/>
+        </p:spPr>
+        <p:style>
+          <a:lnRef idx="1">
+            <a:schemeClr val="accent1"/>
+          </a:lnRef>
+          <a:fillRef idx="0">
+            <a:schemeClr val="accent1"/>
+          </a:fillRef>
+          <a:effectRef idx="0">
+            <a:schemeClr val="accent1"/>
+          </a:effectRef>
+          <a:fontRef idx="minor">
+            <a:schemeClr val="tx1"/>
+          </a:fontRef>
+        </p:style>
+      </p:cxnSp>
+      <p:cxnSp>
+        <p:nvCxnSpPr>
+          <p:cNvPr id="85" name="Straight Connector 84">
+            <a:extLst>
+              <a:ext uri="{FF2B5EF4-FFF2-40B4-BE49-F238E27FC236}">
+                <a16:creationId xmlns:a16="http://schemas.microsoft.com/office/drawing/2014/main" id="{1474AF74-865C-DEE2-A374-01251A4416D8}"/>
+              </a:ext>
+            </a:extLst>
+          </p:cNvPr>
+          <p:cNvCxnSpPr/>
+          <p:nvPr/>
+        </p:nvCxnSpPr>
+        <p:spPr>
+          <a:xfrm flipH="1">
+            <a:off x="1071468" y="4423759"/>
+            <a:ext cx="450807" cy="0"/>
+          </a:xfrm>
+          <a:prstGeom prst="line">
+            <a:avLst/>
+          </a:prstGeom>
+          <a:ln w="22225"/>
+        </p:spPr>
+        <p:style>
+          <a:lnRef idx="1">
+            <a:schemeClr val="accent1"/>
+          </a:lnRef>
+          <a:fillRef idx="0">
+            <a:schemeClr val="accent1"/>
+          </a:fillRef>
+          <a:effectRef idx="0">
+            <a:schemeClr val="accent1"/>
+          </a:effectRef>
+          <a:fontRef idx="minor">
+            <a:schemeClr val="tx1"/>
+          </a:fontRef>
+        </p:style>
+      </p:cxnSp>
+      <p:cxnSp>
+        <p:nvCxnSpPr>
+          <p:cNvPr id="87" name="Straight Connector 86">
+            <a:extLst>
+              <a:ext uri="{FF2B5EF4-FFF2-40B4-BE49-F238E27FC236}">
+                <a16:creationId xmlns:a16="http://schemas.microsoft.com/office/drawing/2014/main" id="{CFD81DDE-CD97-878C-B298-5A162696F8DB}"/>
+              </a:ext>
+            </a:extLst>
+          </p:cNvPr>
+          <p:cNvCxnSpPr/>
+          <p:nvPr/>
+        </p:nvCxnSpPr>
+        <p:spPr>
+          <a:xfrm flipH="1">
+            <a:off x="4633663" y="5224510"/>
+            <a:ext cx="450807" cy="0"/>
+          </a:xfrm>
+          <a:prstGeom prst="line">
+            <a:avLst/>
+          </a:prstGeom>
+          <a:ln w="22225"/>
+        </p:spPr>
+        <p:style>
+          <a:lnRef idx="1">
+            <a:schemeClr val="accent1"/>
+          </a:lnRef>
+          <a:fillRef idx="0">
+            <a:schemeClr val="accent1"/>
+          </a:fillRef>
+          <a:effectRef idx="0">
+            <a:schemeClr val="accent1"/>
+          </a:effectRef>
+          <a:fontRef idx="minor">
+            <a:schemeClr val="tx1"/>
+          </a:fontRef>
+        </p:style>
+      </p:cxnSp>
+      <p:cxnSp>
+        <p:nvCxnSpPr>
+          <p:cNvPr id="88" name="Straight Connector 87">
+            <a:extLst>
+              <a:ext uri="{FF2B5EF4-FFF2-40B4-BE49-F238E27FC236}">
+                <a16:creationId xmlns:a16="http://schemas.microsoft.com/office/drawing/2014/main" id="{DE57728D-04DE-0987-5245-C2A8D9F733A4}"/>
+              </a:ext>
+            </a:extLst>
+          </p:cNvPr>
+          <p:cNvCxnSpPr/>
+          <p:nvPr/>
+        </p:nvCxnSpPr>
+        <p:spPr>
+          <a:xfrm flipH="1">
+            <a:off x="4633865" y="5567237"/>
+            <a:ext cx="450807" cy="0"/>
+          </a:xfrm>
+          <a:prstGeom prst="line">
+            <a:avLst/>
+          </a:prstGeom>
+          <a:ln w="22225"/>
+        </p:spPr>
+        <p:style>
+          <a:lnRef idx="1">
+            <a:schemeClr val="accent1"/>
+          </a:lnRef>
+          <a:fillRef idx="0">
+            <a:schemeClr val="accent1"/>
+          </a:fillRef>
+          <a:effectRef idx="0">
+            <a:schemeClr val="accent1"/>
+          </a:effectRef>
+          <a:fontRef idx="minor">
+            <a:schemeClr val="tx1"/>
+          </a:fontRef>
+        </p:style>
+      </p:cxnSp>
+      <p:cxnSp>
+        <p:nvCxnSpPr>
+          <p:cNvPr id="89" name="Straight Connector 88">
+            <a:extLst>
+              <a:ext uri="{FF2B5EF4-FFF2-40B4-BE49-F238E27FC236}">
+                <a16:creationId xmlns:a16="http://schemas.microsoft.com/office/drawing/2014/main" id="{304B9634-BDB8-B137-B404-F1942C836A75}"/>
+              </a:ext>
+            </a:extLst>
+          </p:cNvPr>
+          <p:cNvCxnSpPr>
+            <a:cxnSpLocks/>
+          </p:cNvCxnSpPr>
+          <p:nvPr/>
+        </p:nvCxnSpPr>
+        <p:spPr>
+          <a:xfrm>
+            <a:off x="4645537" y="5224510"/>
+            <a:ext cx="0" cy="342727"/>
+          </a:xfrm>
+          <a:prstGeom prst="line">
+            <a:avLst/>
+          </a:prstGeom>
+          <a:ln w="22225"/>
+        </p:spPr>
+        <p:style>
+          <a:lnRef idx="1">
+            <a:schemeClr val="accent1"/>
+          </a:lnRef>
+          <a:fillRef idx="0">
+            <a:schemeClr val="accent1"/>
+          </a:fillRef>
+          <a:effectRef idx="0">
+            <a:schemeClr val="accent1"/>
+          </a:effectRef>
+          <a:fontRef idx="minor">
+            <a:schemeClr val="tx1"/>
+          </a:fontRef>
+        </p:style>
+      </p:cxnSp>
+      <p:cxnSp>
+        <p:nvCxnSpPr>
+          <p:cNvPr id="90" name="Straight Connector 89">
+            <a:extLst>
+              <a:ext uri="{FF2B5EF4-FFF2-40B4-BE49-F238E27FC236}">
+                <a16:creationId xmlns:a16="http://schemas.microsoft.com/office/drawing/2014/main" id="{71F5DCE3-8768-DFE2-6F19-54519C387E2F}"/>
+              </a:ext>
+            </a:extLst>
+          </p:cNvPr>
+          <p:cNvCxnSpPr>
+            <a:cxnSpLocks/>
+          </p:cNvCxnSpPr>
+          <p:nvPr/>
+        </p:nvCxnSpPr>
+        <p:spPr>
+          <a:xfrm flipH="1">
+            <a:off x="4193637" y="5892603"/>
+            <a:ext cx="899537" cy="0"/>
+          </a:xfrm>
+          <a:prstGeom prst="line">
+            <a:avLst/>
+          </a:prstGeom>
+          <a:ln w="22225"/>
+        </p:spPr>
+        <p:style>
+          <a:lnRef idx="1">
+            <a:schemeClr val="accent1"/>
+          </a:lnRef>
+          <a:fillRef idx="0">
+            <a:schemeClr val="accent1"/>
+          </a:fillRef>
+          <a:effectRef idx="0">
+            <a:schemeClr val="accent1"/>
+          </a:effectRef>
+          <a:fontRef idx="minor">
+            <a:schemeClr val="tx1"/>
+          </a:fontRef>
+        </p:style>
+      </p:cxnSp>
+      <p:cxnSp>
+        <p:nvCxnSpPr>
+          <p:cNvPr id="91" name="Straight Connector 90">
+            <a:extLst>
+              <a:ext uri="{FF2B5EF4-FFF2-40B4-BE49-F238E27FC236}">
+                <a16:creationId xmlns:a16="http://schemas.microsoft.com/office/drawing/2014/main" id="{85CBC75E-3CD8-8E7A-118E-286EFEDA63FD}"/>
+              </a:ext>
+            </a:extLst>
+          </p:cNvPr>
+          <p:cNvCxnSpPr/>
+          <p:nvPr/>
+        </p:nvCxnSpPr>
+        <p:spPr>
+          <a:xfrm flipH="1">
+            <a:off x="4193637" y="5395873"/>
+            <a:ext cx="450807" cy="0"/>
+          </a:xfrm>
+          <a:prstGeom prst="line">
+            <a:avLst/>
+          </a:prstGeom>
+          <a:ln w="22225"/>
+        </p:spPr>
+        <p:style>
+          <a:lnRef idx="1">
+            <a:schemeClr val="accent1"/>
+          </a:lnRef>
+          <a:fillRef idx="0">
+            <a:schemeClr val="accent1"/>
+          </a:fillRef>
+          <a:effectRef idx="0">
+            <a:schemeClr val="accent1"/>
+          </a:effectRef>
+          <a:fontRef idx="minor">
+            <a:schemeClr val="tx1"/>
+          </a:fontRef>
+        </p:style>
+      </p:cxnSp>
+      <p:cxnSp>
+        <p:nvCxnSpPr>
+          <p:cNvPr id="92" name="Straight Connector 91">
+            <a:extLst>
+              <a:ext uri="{FF2B5EF4-FFF2-40B4-BE49-F238E27FC236}">
+                <a16:creationId xmlns:a16="http://schemas.microsoft.com/office/drawing/2014/main" id="{01D278E5-6C0C-EB8C-1BF2-B7603E3547DA}"/>
+              </a:ext>
+            </a:extLst>
+          </p:cNvPr>
+          <p:cNvCxnSpPr>
+            <a:cxnSpLocks/>
+          </p:cNvCxnSpPr>
+          <p:nvPr/>
+        </p:nvCxnSpPr>
+        <p:spPr>
+          <a:xfrm>
+            <a:off x="4206964" y="5390086"/>
+            <a:ext cx="0" cy="502517"/>
+          </a:xfrm>
+          <a:prstGeom prst="line">
+            <a:avLst/>
+          </a:prstGeom>
+          <a:ln w="22225"/>
+        </p:spPr>
+        <p:style>
+          <a:lnRef idx="1">
+            <a:schemeClr val="accent1"/>
+          </a:lnRef>
+          <a:fillRef idx="0">
+            <a:schemeClr val="accent1"/>
+          </a:fillRef>
+          <a:effectRef idx="0">
+            <a:schemeClr val="accent1"/>
+          </a:effectRef>
+          <a:fontRef idx="minor">
+            <a:schemeClr val="tx1"/>
+          </a:fontRef>
+        </p:style>
+      </p:cxnSp>
+      <p:cxnSp>
+        <p:nvCxnSpPr>
+          <p:cNvPr id="94" name="Straight Connector 93">
+            <a:extLst>
+              <a:ext uri="{FF2B5EF4-FFF2-40B4-BE49-F238E27FC236}">
+                <a16:creationId xmlns:a16="http://schemas.microsoft.com/office/drawing/2014/main" id="{436C4EB4-C78B-22A1-4E53-72B620B7E145}"/>
+              </a:ext>
+            </a:extLst>
+          </p:cNvPr>
+          <p:cNvCxnSpPr/>
+          <p:nvPr/>
+        </p:nvCxnSpPr>
+        <p:spPr>
+          <a:xfrm flipH="1">
+            <a:off x="3742830" y="5653311"/>
+            <a:ext cx="450807" cy="0"/>
+          </a:xfrm>
+          <a:prstGeom prst="line">
+            <a:avLst/>
+          </a:prstGeom>
+          <a:ln w="22225"/>
+        </p:spPr>
+        <p:style>
+          <a:lnRef idx="1">
+            <a:schemeClr val="accent1"/>
+          </a:lnRef>
+          <a:fillRef idx="0">
+            <a:schemeClr val="accent1"/>
+          </a:fillRef>
+          <a:effectRef idx="0">
+            <a:schemeClr val="accent1"/>
+          </a:effectRef>
+          <a:fontRef idx="minor">
+            <a:schemeClr val="tx1"/>
+          </a:fontRef>
+        </p:style>
+      </p:cxnSp>
+      <p:cxnSp>
+        <p:nvCxnSpPr>
+          <p:cNvPr id="95" name="Straight Connector 94">
+            <a:extLst>
+              <a:ext uri="{FF2B5EF4-FFF2-40B4-BE49-F238E27FC236}">
+                <a16:creationId xmlns:a16="http://schemas.microsoft.com/office/drawing/2014/main" id="{979538B3-F42F-BFCD-E1D4-4C515262C169}"/>
+              </a:ext>
+            </a:extLst>
+          </p:cNvPr>
+          <p:cNvCxnSpPr>
+            <a:cxnSpLocks/>
+          </p:cNvCxnSpPr>
+          <p:nvPr/>
+        </p:nvCxnSpPr>
+        <p:spPr>
+          <a:xfrm>
+            <a:off x="3748617" y="5641344"/>
+            <a:ext cx="0" cy="578165"/>
+          </a:xfrm>
+          <a:prstGeom prst="line">
+            <a:avLst/>
+          </a:prstGeom>
+          <a:ln w="22225"/>
+        </p:spPr>
+        <p:style>
+          <a:lnRef idx="1">
+            <a:schemeClr val="accent1"/>
+          </a:lnRef>
+          <a:fillRef idx="0">
+            <a:schemeClr val="accent1"/>
+          </a:fillRef>
+          <a:effectRef idx="0">
+            <a:schemeClr val="accent1"/>
+          </a:effectRef>
+          <a:fontRef idx="minor">
+            <a:schemeClr val="tx1"/>
+          </a:fontRef>
+        </p:style>
+      </p:cxnSp>
+      <p:cxnSp>
+        <p:nvCxnSpPr>
+          <p:cNvPr id="96" name="Straight Connector 95">
+            <a:extLst>
+              <a:ext uri="{FF2B5EF4-FFF2-40B4-BE49-F238E27FC236}">
+                <a16:creationId xmlns:a16="http://schemas.microsoft.com/office/drawing/2014/main" id="{30E79C8B-2315-6E07-8204-ACEF3EDA95B6}"/>
+              </a:ext>
+            </a:extLst>
+          </p:cNvPr>
+          <p:cNvCxnSpPr>
+            <a:cxnSpLocks/>
+          </p:cNvCxnSpPr>
+          <p:nvPr/>
+        </p:nvCxnSpPr>
+        <p:spPr>
+          <a:xfrm flipH="1">
+            <a:off x="3742830" y="6213722"/>
+            <a:ext cx="1340601" cy="0"/>
+          </a:xfrm>
+          <a:prstGeom prst="line">
+            <a:avLst/>
+          </a:prstGeom>
+          <a:ln w="22225"/>
+        </p:spPr>
+        <p:style>
+          <a:lnRef idx="1">
+            <a:schemeClr val="accent1"/>
+          </a:lnRef>
+          <a:fillRef idx="0">
+            <a:schemeClr val="accent1"/>
+          </a:fillRef>
+          <a:effectRef idx="0">
+            <a:schemeClr val="accent1"/>
+          </a:effectRef>
+          <a:fontRef idx="minor">
+            <a:schemeClr val="tx1"/>
+          </a:fontRef>
+        </p:style>
+      </p:cxnSp>
+      <p:cxnSp>
+        <p:nvCxnSpPr>
+          <p:cNvPr id="99" name="Straight Connector 98">
+            <a:extLst>
+              <a:ext uri="{FF2B5EF4-FFF2-40B4-BE49-F238E27FC236}">
+                <a16:creationId xmlns:a16="http://schemas.microsoft.com/office/drawing/2014/main" id="{53684046-E32F-8066-8337-52CF82A91F7F}"/>
+              </a:ext>
+            </a:extLst>
+          </p:cNvPr>
+          <p:cNvCxnSpPr/>
+          <p:nvPr/>
+        </p:nvCxnSpPr>
+        <p:spPr>
+          <a:xfrm flipH="1">
+            <a:off x="3292023" y="5939401"/>
+            <a:ext cx="450807" cy="0"/>
+          </a:xfrm>
+          <a:prstGeom prst="line">
+            <a:avLst/>
+          </a:prstGeom>
+          <a:ln w="22225"/>
+        </p:spPr>
+        <p:style>
+          <a:lnRef idx="1">
+            <a:schemeClr val="accent1"/>
+          </a:lnRef>
+          <a:fillRef idx="0">
+            <a:schemeClr val="accent1"/>
+          </a:fillRef>
+          <a:effectRef idx="0">
+            <a:schemeClr val="accent1"/>
+          </a:effectRef>
+          <a:fontRef idx="minor">
+            <a:schemeClr val="tx1"/>
+          </a:fontRef>
+        </p:style>
+      </p:cxnSp>
+      <p:cxnSp>
+        <p:nvCxnSpPr>
+          <p:cNvPr id="100" name="Straight Connector 99">
+            <a:extLst>
+              <a:ext uri="{FF2B5EF4-FFF2-40B4-BE49-F238E27FC236}">
+                <a16:creationId xmlns:a16="http://schemas.microsoft.com/office/drawing/2014/main" id="{1635BDDC-03E0-94B7-6BA7-083DA9CA0E08}"/>
+              </a:ext>
+            </a:extLst>
+          </p:cNvPr>
+          <p:cNvCxnSpPr>
+            <a:cxnSpLocks/>
+          </p:cNvCxnSpPr>
+          <p:nvPr/>
+        </p:nvCxnSpPr>
+        <p:spPr>
+          <a:xfrm flipH="1">
+            <a:off x="3292023" y="6560216"/>
+            <a:ext cx="1785621" cy="0"/>
+          </a:xfrm>
+          <a:prstGeom prst="line">
+            <a:avLst/>
+          </a:prstGeom>
+          <a:ln w="22225"/>
+        </p:spPr>
+        <p:style>
+          <a:lnRef idx="1">
+            <a:schemeClr val="accent1"/>
+          </a:lnRef>
+          <a:fillRef idx="0">
+            <a:schemeClr val="accent1"/>
+          </a:fillRef>
+          <a:effectRef idx="0">
+            <a:schemeClr val="accent1"/>
+          </a:effectRef>
+          <a:fontRef idx="minor">
+            <a:schemeClr val="tx1"/>
+          </a:fontRef>
+        </p:style>
+      </p:cxnSp>
+      <p:cxnSp>
+        <p:nvCxnSpPr>
+          <p:cNvPr id="102" name="Straight Connector 101">
+            <a:extLst>
+              <a:ext uri="{FF2B5EF4-FFF2-40B4-BE49-F238E27FC236}">
+                <a16:creationId xmlns:a16="http://schemas.microsoft.com/office/drawing/2014/main" id="{9746A96F-4B32-9DFA-196C-19CD864CA964}"/>
+              </a:ext>
+            </a:extLst>
+          </p:cNvPr>
+          <p:cNvCxnSpPr>
+            <a:cxnSpLocks/>
+          </p:cNvCxnSpPr>
+          <p:nvPr/>
+        </p:nvCxnSpPr>
+        <p:spPr>
+          <a:xfrm>
+            <a:off x="3292023" y="5936213"/>
+            <a:ext cx="0" cy="629790"/>
+          </a:xfrm>
+          <a:prstGeom prst="line">
+            <a:avLst/>
+          </a:prstGeom>
+          <a:ln w="22225"/>
+        </p:spPr>
+        <p:style>
+          <a:lnRef idx="1">
+            <a:schemeClr val="accent1"/>
+          </a:lnRef>
+          <a:fillRef idx="0">
+            <a:schemeClr val="accent1"/>
+          </a:fillRef>
+          <a:effectRef idx="0">
+            <a:schemeClr val="accent1"/>
+          </a:effectRef>
+          <a:fontRef idx="minor">
+            <a:schemeClr val="tx1"/>
+          </a:fontRef>
+        </p:style>
+      </p:cxnSp>
+      <p:cxnSp>
+        <p:nvCxnSpPr>
+          <p:cNvPr id="107" name="Straight Connector 106">
+            <a:extLst>
+              <a:ext uri="{FF2B5EF4-FFF2-40B4-BE49-F238E27FC236}">
+                <a16:creationId xmlns:a16="http://schemas.microsoft.com/office/drawing/2014/main" id="{24314760-2F49-D9B2-A82A-2F86248E0347}"/>
+              </a:ext>
+            </a:extLst>
+          </p:cNvPr>
+          <p:cNvCxnSpPr>
+            <a:cxnSpLocks/>
+          </p:cNvCxnSpPr>
+          <p:nvPr/>
+        </p:nvCxnSpPr>
+        <p:spPr>
+          <a:xfrm flipH="1">
+            <a:off x="1071468" y="6245321"/>
+            <a:ext cx="2220555" cy="0"/>
+          </a:xfrm>
+          <a:prstGeom prst="line">
+            <a:avLst/>
+          </a:prstGeom>
+          <a:ln w="22225"/>
+        </p:spPr>
+        <p:style>
+          <a:lnRef idx="1">
+            <a:schemeClr val="accent1"/>
+          </a:lnRef>
+          <a:fillRef idx="0">
+            <a:schemeClr val="accent1"/>
+          </a:fillRef>
+          <a:effectRef idx="0">
+            <a:schemeClr val="accent1"/>
+          </a:effectRef>
+          <a:fontRef idx="minor">
+            <a:schemeClr val="tx1"/>
+          </a:fontRef>
+        </p:style>
+      </p:cxnSp>
+      <p:cxnSp>
+        <p:nvCxnSpPr>
+          <p:cNvPr id="108" name="Straight Connector 107">
+            <a:extLst>
+              <a:ext uri="{FF2B5EF4-FFF2-40B4-BE49-F238E27FC236}">
+                <a16:creationId xmlns:a16="http://schemas.microsoft.com/office/drawing/2014/main" id="{1FE1773A-A3F9-7385-20E7-4D068293FFD7}"/>
+              </a:ext>
+            </a:extLst>
+          </p:cNvPr>
+          <p:cNvCxnSpPr>
+            <a:cxnSpLocks/>
+          </p:cNvCxnSpPr>
+          <p:nvPr/>
+        </p:nvCxnSpPr>
+        <p:spPr>
+          <a:xfrm>
+            <a:off x="1082368" y="4417972"/>
+            <a:ext cx="0" cy="1827349"/>
+          </a:xfrm>
+          <a:prstGeom prst="line">
+            <a:avLst/>
+          </a:prstGeom>
+          <a:ln w="22225"/>
+        </p:spPr>
+        <p:style>
+          <a:lnRef idx="1">
+            <a:schemeClr val="accent1"/>
+          </a:lnRef>
+          <a:fillRef idx="0">
+            <a:schemeClr val="accent1"/>
+          </a:fillRef>
+          <a:effectRef idx="0">
+            <a:schemeClr val="accent1"/>
+          </a:effectRef>
+          <a:fontRef idx="minor">
+            <a:schemeClr val="tx1"/>
+          </a:fontRef>
+        </p:style>
+      </p:cxnSp>
+      <p:cxnSp>
+        <p:nvCxnSpPr>
+          <p:cNvPr id="111" name="Straight Connector 110">
+            <a:extLst>
+              <a:ext uri="{FF2B5EF4-FFF2-40B4-BE49-F238E27FC236}">
+                <a16:creationId xmlns:a16="http://schemas.microsoft.com/office/drawing/2014/main" id="{D51A0027-F4C3-1FC6-3B52-1D6C1D0143CB}"/>
+              </a:ext>
+            </a:extLst>
+          </p:cNvPr>
+          <p:cNvCxnSpPr/>
+          <p:nvPr/>
+        </p:nvCxnSpPr>
+        <p:spPr>
+          <a:xfrm flipH="1">
+            <a:off x="620661" y="5331557"/>
+            <a:ext cx="450807" cy="0"/>
+          </a:xfrm>
+          <a:prstGeom prst="line">
+            <a:avLst/>
+          </a:prstGeom>
+          <a:ln w="22225"/>
+        </p:spPr>
+        <p:style>
+          <a:lnRef idx="1">
+            <a:schemeClr val="accent1"/>
+          </a:lnRef>
+          <a:fillRef idx="0">
+            <a:schemeClr val="accent1"/>
+          </a:fillRef>
+          <a:effectRef idx="0">
+            <a:schemeClr val="accent1"/>
+          </a:effectRef>
+          <a:fontRef idx="minor">
+            <a:schemeClr val="tx1"/>
+          </a:fontRef>
+        </p:style>
+      </p:cxnSp>
+      <p:sp>
+        <p:nvSpPr>
+          <p:cNvPr id="112" name="TextBox 111">
+            <a:extLst>
+              <a:ext uri="{FF2B5EF4-FFF2-40B4-BE49-F238E27FC236}">
+                <a16:creationId xmlns:a16="http://schemas.microsoft.com/office/drawing/2014/main" id="{630C6443-0896-4C49-73E9-F75271C8BA4B}"/>
+              </a:ext>
+            </a:extLst>
+          </p:cNvPr>
+          <p:cNvSpPr txBox="1"/>
+          <p:nvPr/>
+        </p:nvSpPr>
+        <p:spPr>
+          <a:xfrm>
+            <a:off x="8679360" y="240946"/>
+            <a:ext cx="2738185" cy="307777"/>
+          </a:xfrm>
+          <a:prstGeom prst="rect">
+            <a:avLst/>
+          </a:prstGeom>
+          <a:noFill/>
+        </p:spPr>
+        <p:txBody>
+          <a:bodyPr wrap="none" rtlCol="0">
+            <a:spAutoFit/>
+          </a:bodyPr>
+          <a:lstStyle/>
+          <a:p>
+            <a:r>
+              <a:rPr lang="en-US" sz="1400" dirty="0">
+                <a:latin typeface="Arial" panose="020B0604020202020204" pitchFamily="34" charset="0"/>
+                <a:cs typeface="Arial" panose="020B0604020202020204" pitchFamily="34" charset="0"/>
+              </a:rPr>
+              <a:t>Number of HGT inserts / Unique</a:t>
+            </a:r>
+          </a:p>
+        </p:txBody>
+      </p:sp>
+      <p:sp>
+        <p:nvSpPr>
+          <p:cNvPr id="114" name="TextBox 113">
+            <a:extLst>
+              <a:ext uri="{FF2B5EF4-FFF2-40B4-BE49-F238E27FC236}">
+                <a16:creationId xmlns:a16="http://schemas.microsoft.com/office/drawing/2014/main" id="{8112926F-DA14-AC98-06EF-6990303FCF8D}"/>
+              </a:ext>
+            </a:extLst>
+          </p:cNvPr>
+          <p:cNvSpPr txBox="1"/>
+          <p:nvPr/>
+        </p:nvSpPr>
+        <p:spPr>
+          <a:xfrm>
+            <a:off x="518565" y="4962481"/>
+            <a:ext cx="569387" cy="369332"/>
+          </a:xfrm>
+          <a:prstGeom prst="rect">
+            <a:avLst/>
+          </a:prstGeom>
+          <a:noFill/>
+        </p:spPr>
+        <p:txBody>
+          <a:bodyPr wrap="none" rtlCol="0">
+            <a:spAutoFit/>
+          </a:bodyPr>
+          <a:lstStyle/>
+          <a:p>
+            <a:r>
+              <a:rPr lang="en-US" dirty="0">
+                <a:latin typeface="Arial" panose="020B0604020202020204" pitchFamily="34" charset="0"/>
+                <a:cs typeface="Arial" panose="020B0604020202020204" pitchFamily="34" charset="0"/>
+              </a:rPr>
+              <a:t>207</a:t>
+            </a:r>
+          </a:p>
+        </p:txBody>
+      </p:sp>
+      <p:sp>
+        <p:nvSpPr>
+          <p:cNvPr id="115" name="TextBox 114">
+            <a:extLst>
+              <a:ext uri="{FF2B5EF4-FFF2-40B4-BE49-F238E27FC236}">
+                <a16:creationId xmlns:a16="http://schemas.microsoft.com/office/drawing/2014/main" id="{80D04FB6-51C1-8BCF-FAD1-2A973594404A}"/>
+              </a:ext>
+            </a:extLst>
+          </p:cNvPr>
+          <p:cNvSpPr txBox="1"/>
+          <p:nvPr/>
+        </p:nvSpPr>
+        <p:spPr>
+          <a:xfrm>
+            <a:off x="2735087" y="5896332"/>
+            <a:ext cx="569387" cy="369332"/>
+          </a:xfrm>
+          <a:prstGeom prst="rect">
+            <a:avLst/>
+          </a:prstGeom>
+          <a:noFill/>
+        </p:spPr>
+        <p:txBody>
+          <a:bodyPr wrap="none" rtlCol="0">
+            <a:spAutoFit/>
+          </a:bodyPr>
+          <a:lstStyle/>
+          <a:p>
+            <a:r>
+              <a:rPr lang="en-US" dirty="0">
+                <a:latin typeface="Arial" panose="020B0604020202020204" pitchFamily="34" charset="0"/>
+                <a:cs typeface="Arial" panose="020B0604020202020204" pitchFamily="34" charset="0"/>
+              </a:rPr>
+              <a:t>161</a:t>
+            </a:r>
+          </a:p>
+        </p:txBody>
+      </p:sp>
+      <p:sp>
+        <p:nvSpPr>
+          <p:cNvPr id="116" name="TextBox 115">
+            <a:extLst>
+              <a:ext uri="{FF2B5EF4-FFF2-40B4-BE49-F238E27FC236}">
+                <a16:creationId xmlns:a16="http://schemas.microsoft.com/office/drawing/2014/main" id="{560ABBCE-4D37-D9C0-DCAB-F4E4092D4E33}"/>
+              </a:ext>
+            </a:extLst>
+          </p:cNvPr>
+          <p:cNvSpPr txBox="1"/>
+          <p:nvPr/>
+        </p:nvSpPr>
+        <p:spPr>
+          <a:xfrm>
+            <a:off x="3788875" y="5311574"/>
+            <a:ext cx="441146" cy="369332"/>
+          </a:xfrm>
+          <a:prstGeom prst="rect">
+            <a:avLst/>
+          </a:prstGeom>
+          <a:noFill/>
+        </p:spPr>
+        <p:txBody>
+          <a:bodyPr wrap="none" rtlCol="0">
+            <a:spAutoFit/>
+          </a:bodyPr>
+          <a:lstStyle/>
+          <a:p>
+            <a:r>
+              <a:rPr lang="en-US" dirty="0">
+                <a:latin typeface="Arial" panose="020B0604020202020204" pitchFamily="34" charset="0"/>
+                <a:cs typeface="Arial" panose="020B0604020202020204" pitchFamily="34" charset="0"/>
+              </a:rPr>
+              <a:t>98</a:t>
+            </a:r>
+          </a:p>
+        </p:txBody>
+      </p:sp>
+      <p:sp>
+        <p:nvSpPr>
+          <p:cNvPr id="117" name="TextBox 116">
+            <a:extLst>
+              <a:ext uri="{FF2B5EF4-FFF2-40B4-BE49-F238E27FC236}">
+                <a16:creationId xmlns:a16="http://schemas.microsoft.com/office/drawing/2014/main" id="{BA3EB86E-713D-689B-FDC9-AB53D1AC3B3D}"/>
+              </a:ext>
+            </a:extLst>
+          </p:cNvPr>
+          <p:cNvSpPr txBox="1"/>
+          <p:nvPr/>
+        </p:nvSpPr>
+        <p:spPr>
+          <a:xfrm>
+            <a:off x="3225717" y="5617493"/>
+            <a:ext cx="569387" cy="369332"/>
+          </a:xfrm>
+          <a:prstGeom prst="rect">
+            <a:avLst/>
+          </a:prstGeom>
+          <a:noFill/>
+        </p:spPr>
+        <p:txBody>
+          <a:bodyPr wrap="none" rtlCol="0">
+            <a:spAutoFit/>
+          </a:bodyPr>
+          <a:lstStyle/>
+          <a:p>
+            <a:r>
+              <a:rPr lang="en-US" dirty="0">
+                <a:latin typeface="Arial" panose="020B0604020202020204" pitchFamily="34" charset="0"/>
+                <a:cs typeface="Arial" panose="020B0604020202020204" pitchFamily="34" charset="0"/>
+              </a:rPr>
+              <a:t>108</a:t>
+            </a:r>
+          </a:p>
+        </p:txBody>
+      </p:sp>
+      <p:sp>
+        <p:nvSpPr>
+          <p:cNvPr id="118" name="TextBox 117">
+            <a:extLst>
+              <a:ext uri="{FF2B5EF4-FFF2-40B4-BE49-F238E27FC236}">
+                <a16:creationId xmlns:a16="http://schemas.microsoft.com/office/drawing/2014/main" id="{ACF48875-1ECD-1930-C408-D1A9FA508EE8}"/>
+              </a:ext>
+            </a:extLst>
+          </p:cNvPr>
+          <p:cNvSpPr txBox="1"/>
+          <p:nvPr/>
+        </p:nvSpPr>
+        <p:spPr>
+          <a:xfrm>
+            <a:off x="4249207" y="5048861"/>
+            <a:ext cx="441146" cy="369332"/>
+          </a:xfrm>
+          <a:prstGeom prst="rect">
+            <a:avLst/>
+          </a:prstGeom>
+          <a:noFill/>
+        </p:spPr>
+        <p:txBody>
+          <a:bodyPr wrap="none" rtlCol="0">
+            <a:spAutoFit/>
+          </a:bodyPr>
+          <a:lstStyle/>
+          <a:p>
+            <a:r>
+              <a:rPr lang="en-US" dirty="0">
+                <a:latin typeface="Arial" panose="020B0604020202020204" pitchFamily="34" charset="0"/>
+                <a:cs typeface="Arial" panose="020B0604020202020204" pitchFamily="34" charset="0"/>
+              </a:rPr>
+              <a:t>45</a:t>
+            </a:r>
+          </a:p>
+        </p:txBody>
+      </p:sp>
+      <p:sp>
+        <p:nvSpPr>
+          <p:cNvPr id="119" name="TextBox 118">
+            <a:extLst>
+              <a:ext uri="{FF2B5EF4-FFF2-40B4-BE49-F238E27FC236}">
+                <a16:creationId xmlns:a16="http://schemas.microsoft.com/office/drawing/2014/main" id="{F8DBAF0C-DE1B-5940-1730-CECA87CE20F3}"/>
+              </a:ext>
+            </a:extLst>
+          </p:cNvPr>
+          <p:cNvSpPr txBox="1"/>
+          <p:nvPr/>
+        </p:nvSpPr>
+        <p:spPr>
+          <a:xfrm>
+            <a:off x="924853" y="4058527"/>
+            <a:ext cx="569387" cy="369332"/>
+          </a:xfrm>
+          <a:prstGeom prst="rect">
+            <a:avLst/>
+          </a:prstGeom>
+          <a:noFill/>
+        </p:spPr>
+        <p:txBody>
+          <a:bodyPr wrap="none" rtlCol="0">
+            <a:spAutoFit/>
+          </a:bodyPr>
+          <a:lstStyle/>
+          <a:p>
+            <a:r>
+              <a:rPr lang="en-US">
+                <a:latin typeface="Arial" panose="020B0604020202020204" pitchFamily="34" charset="0"/>
+                <a:cs typeface="Arial" panose="020B0604020202020204" pitchFamily="34" charset="0"/>
+              </a:rPr>
+              <a:t>145</a:t>
+            </a:r>
+            <a:endParaRPr lang="en-US" dirty="0">
+              <a:latin typeface="Arial" panose="020B0604020202020204" pitchFamily="34" charset="0"/>
+              <a:cs typeface="Arial" panose="020B0604020202020204" pitchFamily="34" charset="0"/>
+            </a:endParaRPr>
+          </a:p>
+        </p:txBody>
+      </p:sp>
+      <p:sp>
+        <p:nvSpPr>
+          <p:cNvPr id="120" name="TextBox 119">
+            <a:extLst>
+              <a:ext uri="{FF2B5EF4-FFF2-40B4-BE49-F238E27FC236}">
+                <a16:creationId xmlns:a16="http://schemas.microsoft.com/office/drawing/2014/main" id="{5D4F1E75-FE1A-B5AE-4A29-EE9E22E56670}"/>
+              </a:ext>
+            </a:extLst>
+          </p:cNvPr>
+          <p:cNvSpPr txBox="1"/>
+          <p:nvPr/>
+        </p:nvSpPr>
+        <p:spPr>
+          <a:xfrm>
+            <a:off x="1240558" y="3625546"/>
+            <a:ext cx="761747" cy="369332"/>
+          </a:xfrm>
+          <a:prstGeom prst="rect">
+            <a:avLst/>
+          </a:prstGeom>
+          <a:noFill/>
+        </p:spPr>
+        <p:txBody>
+          <a:bodyPr wrap="none" rtlCol="0">
+            <a:spAutoFit/>
+          </a:bodyPr>
+          <a:lstStyle/>
+          <a:p>
+            <a:r>
+              <a:rPr lang="en-US" dirty="0">
+                <a:latin typeface="Arial" panose="020B0604020202020204" pitchFamily="34" charset="0"/>
+                <a:cs typeface="Arial" panose="020B0604020202020204" pitchFamily="34" charset="0"/>
+              </a:rPr>
+              <a:t>63.05</a:t>
+            </a:r>
+          </a:p>
+        </p:txBody>
+      </p:sp>
+      <p:sp>
+        <p:nvSpPr>
+          <p:cNvPr id="121" name="TextBox 120">
+            <a:extLst>
+              <a:ext uri="{FF2B5EF4-FFF2-40B4-BE49-F238E27FC236}">
+                <a16:creationId xmlns:a16="http://schemas.microsoft.com/office/drawing/2014/main" id="{42EB31E3-F3A2-193E-E951-57CD17B1D19A}"/>
+              </a:ext>
+            </a:extLst>
+          </p:cNvPr>
+          <p:cNvSpPr txBox="1"/>
+          <p:nvPr/>
+        </p:nvSpPr>
+        <p:spPr>
+          <a:xfrm>
+            <a:off x="1704005" y="3071084"/>
+            <a:ext cx="761747" cy="369332"/>
+          </a:xfrm>
+          <a:prstGeom prst="rect">
+            <a:avLst/>
+          </a:prstGeom>
+          <a:noFill/>
+        </p:spPr>
+        <p:txBody>
+          <a:bodyPr wrap="none" rtlCol="0">
+            <a:spAutoFit/>
+          </a:bodyPr>
+          <a:lstStyle/>
+          <a:p>
+            <a:r>
+              <a:rPr lang="en-US" dirty="0">
+                <a:latin typeface="Arial" panose="020B0604020202020204" pitchFamily="34" charset="0"/>
+                <a:cs typeface="Arial" panose="020B0604020202020204" pitchFamily="34" charset="0"/>
+              </a:rPr>
+              <a:t>28.71</a:t>
+            </a:r>
+          </a:p>
+        </p:txBody>
+      </p:sp>
+      <p:sp>
+        <p:nvSpPr>
+          <p:cNvPr id="122" name="TextBox 121">
+            <a:extLst>
+              <a:ext uri="{FF2B5EF4-FFF2-40B4-BE49-F238E27FC236}">
+                <a16:creationId xmlns:a16="http://schemas.microsoft.com/office/drawing/2014/main" id="{5E1F08CF-B2EC-5AAD-46A7-3DF09BB2E71E}"/>
+              </a:ext>
+            </a:extLst>
+          </p:cNvPr>
+          <p:cNvSpPr txBox="1"/>
+          <p:nvPr/>
+        </p:nvSpPr>
+        <p:spPr>
+          <a:xfrm>
+            <a:off x="2167252" y="2468599"/>
+            <a:ext cx="761747" cy="369332"/>
+          </a:xfrm>
+          <a:prstGeom prst="rect">
+            <a:avLst/>
+          </a:prstGeom>
+          <a:noFill/>
+        </p:spPr>
+        <p:txBody>
+          <a:bodyPr wrap="none" rtlCol="0">
+            <a:spAutoFit/>
+          </a:bodyPr>
+          <a:lstStyle/>
+          <a:p>
+            <a:r>
+              <a:rPr lang="en-US" dirty="0">
+                <a:latin typeface="Arial" panose="020B0604020202020204" pitchFamily="34" charset="0"/>
+                <a:cs typeface="Arial" panose="020B0604020202020204" pitchFamily="34" charset="0"/>
+              </a:rPr>
+              <a:t>22.84</a:t>
+            </a:r>
+          </a:p>
+        </p:txBody>
+      </p:sp>
+      <p:sp>
+        <p:nvSpPr>
+          <p:cNvPr id="123" name="TextBox 122">
+            <a:extLst>
+              <a:ext uri="{FF2B5EF4-FFF2-40B4-BE49-F238E27FC236}">
+                <a16:creationId xmlns:a16="http://schemas.microsoft.com/office/drawing/2014/main" id="{767B46F5-F5BC-6F41-7DE8-51BF156964F2}"/>
+              </a:ext>
+            </a:extLst>
+          </p:cNvPr>
+          <p:cNvSpPr txBox="1"/>
+          <p:nvPr/>
+        </p:nvSpPr>
+        <p:spPr>
+          <a:xfrm>
+            <a:off x="3897845" y="2979995"/>
+            <a:ext cx="1015279" cy="369332"/>
+          </a:xfrm>
+          <a:prstGeom prst="rect">
+            <a:avLst/>
+          </a:prstGeom>
+          <a:noFill/>
+        </p:spPr>
+        <p:txBody>
+          <a:bodyPr wrap="square" rtlCol="0">
+            <a:spAutoFit/>
+          </a:bodyPr>
+          <a:lstStyle/>
+          <a:p>
+            <a:r>
+              <a:rPr lang="en-US" dirty="0">
+                <a:latin typeface="Arial" panose="020B0604020202020204" pitchFamily="34" charset="0"/>
+                <a:cs typeface="Arial" panose="020B0604020202020204" pitchFamily="34" charset="0"/>
+              </a:rPr>
+              <a:t>17.35</a:t>
+            </a:r>
+          </a:p>
+        </p:txBody>
+      </p:sp>
+      <p:sp>
+        <p:nvSpPr>
+          <p:cNvPr id="125" name="TextBox 124">
+            <a:extLst>
+              <a:ext uri="{FF2B5EF4-FFF2-40B4-BE49-F238E27FC236}">
+                <a16:creationId xmlns:a16="http://schemas.microsoft.com/office/drawing/2014/main" id="{35830280-30EE-CDCD-DC54-E266E4F845BA}"/>
+              </a:ext>
+            </a:extLst>
+          </p:cNvPr>
+          <p:cNvSpPr txBox="1"/>
+          <p:nvPr/>
+        </p:nvSpPr>
+        <p:spPr>
+          <a:xfrm>
+            <a:off x="2627323" y="1967415"/>
+            <a:ext cx="946010" cy="369332"/>
+          </a:xfrm>
+          <a:prstGeom prst="rect">
+            <a:avLst/>
+          </a:prstGeom>
+          <a:noFill/>
+        </p:spPr>
+        <p:txBody>
+          <a:bodyPr wrap="square" rtlCol="0">
+            <a:spAutoFit/>
+          </a:bodyPr>
+          <a:lstStyle/>
+          <a:p>
+            <a:r>
+              <a:rPr lang="en-US" dirty="0">
+                <a:latin typeface="Arial" panose="020B0604020202020204" pitchFamily="34" charset="0"/>
+                <a:cs typeface="Arial" panose="020B0604020202020204" pitchFamily="34" charset="0"/>
+              </a:rPr>
+              <a:t>20.91</a:t>
+            </a:r>
+          </a:p>
+        </p:txBody>
+      </p:sp>
+      <p:sp>
+        <p:nvSpPr>
+          <p:cNvPr id="126" name="TextBox 125">
+            <a:extLst>
+              <a:ext uri="{FF2B5EF4-FFF2-40B4-BE49-F238E27FC236}">
+                <a16:creationId xmlns:a16="http://schemas.microsoft.com/office/drawing/2014/main" id="{9B6760DB-3A75-08BC-0811-66EF473E2A03}"/>
+              </a:ext>
+            </a:extLst>
+          </p:cNvPr>
+          <p:cNvSpPr txBox="1"/>
+          <p:nvPr/>
+        </p:nvSpPr>
+        <p:spPr>
+          <a:xfrm>
+            <a:off x="3046635" y="1416298"/>
+            <a:ext cx="848111" cy="369332"/>
+          </a:xfrm>
+          <a:prstGeom prst="rect">
+            <a:avLst/>
+          </a:prstGeom>
+          <a:noFill/>
+        </p:spPr>
+        <p:txBody>
+          <a:bodyPr wrap="square" rtlCol="0">
+            <a:spAutoFit/>
+          </a:bodyPr>
+          <a:lstStyle/>
+          <a:p>
+            <a:r>
+              <a:rPr lang="en-US" dirty="0">
+                <a:latin typeface="Arial" panose="020B0604020202020204" pitchFamily="34" charset="0"/>
+                <a:cs typeface="Arial" panose="020B0604020202020204" pitchFamily="34" charset="0"/>
+              </a:rPr>
+              <a:t>14.12</a:t>
+            </a:r>
+          </a:p>
+        </p:txBody>
+      </p:sp>
+      <p:sp>
+        <p:nvSpPr>
+          <p:cNvPr id="127" name="TextBox 126">
+            <a:extLst>
+              <a:ext uri="{FF2B5EF4-FFF2-40B4-BE49-F238E27FC236}">
+                <a16:creationId xmlns:a16="http://schemas.microsoft.com/office/drawing/2014/main" id="{007731A2-076A-D072-05B2-9021E0300168}"/>
+              </a:ext>
+            </a:extLst>
+          </p:cNvPr>
+          <p:cNvSpPr txBox="1"/>
+          <p:nvPr/>
+        </p:nvSpPr>
+        <p:spPr>
+          <a:xfrm>
+            <a:off x="3903836" y="1948261"/>
+            <a:ext cx="914487" cy="369332"/>
+          </a:xfrm>
+          <a:prstGeom prst="rect">
+            <a:avLst/>
+          </a:prstGeom>
+          <a:noFill/>
+        </p:spPr>
+        <p:txBody>
+          <a:bodyPr wrap="square" rtlCol="0">
+            <a:spAutoFit/>
+          </a:bodyPr>
+          <a:lstStyle/>
+          <a:p>
+            <a:r>
+              <a:rPr lang="en-US" dirty="0">
+                <a:latin typeface="Arial" panose="020B0604020202020204" pitchFamily="34" charset="0"/>
+                <a:cs typeface="Arial" panose="020B0604020202020204" pitchFamily="34" charset="0"/>
+              </a:rPr>
+              <a:t>13.17</a:t>
+            </a:r>
+          </a:p>
+        </p:txBody>
+      </p:sp>
+      <p:sp>
+        <p:nvSpPr>
+          <p:cNvPr id="128" name="TextBox 127">
+            <a:extLst>
+              <a:ext uri="{FF2B5EF4-FFF2-40B4-BE49-F238E27FC236}">
+                <a16:creationId xmlns:a16="http://schemas.microsoft.com/office/drawing/2014/main" id="{D6F1794A-4466-00E7-27F9-25EEE6AFF812}"/>
+              </a:ext>
+            </a:extLst>
+          </p:cNvPr>
+          <p:cNvSpPr txBox="1"/>
+          <p:nvPr/>
+        </p:nvSpPr>
+        <p:spPr>
+          <a:xfrm>
+            <a:off x="4132940" y="1272527"/>
+            <a:ext cx="794253" cy="369332"/>
+          </a:xfrm>
+          <a:prstGeom prst="rect">
+            <a:avLst/>
+          </a:prstGeom>
+          <a:noFill/>
+        </p:spPr>
+        <p:txBody>
+          <a:bodyPr wrap="square" rtlCol="0">
+            <a:spAutoFit/>
+          </a:bodyPr>
+          <a:lstStyle/>
+          <a:p>
+            <a:r>
+              <a:rPr lang="en-US" dirty="0">
+                <a:latin typeface="Arial" panose="020B0604020202020204" pitchFamily="34" charset="0"/>
+                <a:cs typeface="Arial" panose="020B0604020202020204" pitchFamily="34" charset="0"/>
+              </a:rPr>
+              <a:t>5.84</a:t>
+            </a:r>
+          </a:p>
+        </p:txBody>
+      </p:sp>
+      <p:sp>
+        <p:nvSpPr>
+          <p:cNvPr id="129" name="TextBox 128">
+            <a:extLst>
+              <a:ext uri="{FF2B5EF4-FFF2-40B4-BE49-F238E27FC236}">
+                <a16:creationId xmlns:a16="http://schemas.microsoft.com/office/drawing/2014/main" id="{506C3FF6-BBE2-2617-F185-86A592661691}"/>
+              </a:ext>
+            </a:extLst>
+          </p:cNvPr>
+          <p:cNvSpPr txBox="1"/>
+          <p:nvPr/>
+        </p:nvSpPr>
+        <p:spPr>
+          <a:xfrm>
+            <a:off x="4110248" y="614046"/>
+            <a:ext cx="899536" cy="369332"/>
+          </a:xfrm>
+          <a:prstGeom prst="rect">
+            <a:avLst/>
+          </a:prstGeom>
+          <a:noFill/>
+        </p:spPr>
+        <p:txBody>
+          <a:bodyPr wrap="square" rtlCol="0">
+            <a:spAutoFit/>
+          </a:bodyPr>
+          <a:lstStyle/>
+          <a:p>
+            <a:r>
+              <a:rPr lang="en-US" dirty="0">
+                <a:latin typeface="Arial" panose="020B0604020202020204" pitchFamily="34" charset="0"/>
+                <a:cs typeface="Arial" panose="020B0604020202020204" pitchFamily="34" charset="0"/>
+              </a:rPr>
+              <a:t>6.67</a:t>
+            </a:r>
+          </a:p>
+        </p:txBody>
+      </p:sp>
+      <p:sp>
+        <p:nvSpPr>
+          <p:cNvPr id="130" name="TextBox 129">
+            <a:extLst>
+              <a:ext uri="{FF2B5EF4-FFF2-40B4-BE49-F238E27FC236}">
+                <a16:creationId xmlns:a16="http://schemas.microsoft.com/office/drawing/2014/main" id="{56CBF744-6F90-77DF-92DB-750E7F4E6A0A}"/>
+              </a:ext>
+            </a:extLst>
+          </p:cNvPr>
+          <p:cNvSpPr txBox="1"/>
+          <p:nvPr/>
+        </p:nvSpPr>
+        <p:spPr>
+          <a:xfrm>
+            <a:off x="3447118" y="916436"/>
+            <a:ext cx="777088" cy="369332"/>
+          </a:xfrm>
+          <a:prstGeom prst="rect">
+            <a:avLst/>
+          </a:prstGeom>
+          <a:noFill/>
+        </p:spPr>
+        <p:txBody>
+          <a:bodyPr wrap="square" rtlCol="0">
+            <a:spAutoFit/>
+          </a:bodyPr>
+          <a:lstStyle/>
+          <a:p>
+            <a:r>
+              <a:rPr lang="en-US" dirty="0">
+                <a:latin typeface="Arial" panose="020B0604020202020204" pitchFamily="34" charset="0"/>
+                <a:cs typeface="Arial" panose="020B0604020202020204" pitchFamily="34" charset="0"/>
+              </a:rPr>
+              <a:t>12.73</a:t>
+            </a:r>
+          </a:p>
+        </p:txBody>
+      </p:sp>
+      <p:sp>
+        <p:nvSpPr>
+          <p:cNvPr id="2" name="TextBox 1">
+            <a:extLst>
+              <a:ext uri="{FF2B5EF4-FFF2-40B4-BE49-F238E27FC236}">
+                <a16:creationId xmlns:a16="http://schemas.microsoft.com/office/drawing/2014/main" id="{68764550-166B-E5A4-F2E5-A30016FD82E6}"/>
+              </a:ext>
+            </a:extLst>
+          </p:cNvPr>
+          <p:cNvSpPr txBox="1"/>
+          <p:nvPr/>
+        </p:nvSpPr>
+        <p:spPr>
+          <a:xfrm>
+            <a:off x="9360656" y="614046"/>
+            <a:ext cx="1340348" cy="307777"/>
+          </a:xfrm>
+          <a:prstGeom prst="rect">
+            <a:avLst/>
+          </a:prstGeom>
+          <a:noFill/>
+        </p:spPr>
+        <p:txBody>
+          <a:bodyPr wrap="square">
+            <a:spAutoFit/>
+          </a:bodyPr>
+          <a:lstStyle/>
+          <a:p>
+            <a:r>
+              <a:rPr lang="en-US" sz="1400" dirty="0">
+                <a:latin typeface="Arial" panose="020B0604020202020204" pitchFamily="34" charset="0"/>
+                <a:cs typeface="Arial" panose="020B0604020202020204" pitchFamily="34" charset="0"/>
+              </a:rPr>
+              <a:t>5037 / ##</a:t>
+            </a:r>
+          </a:p>
+        </p:txBody>
+      </p:sp>
+      <p:sp>
+        <p:nvSpPr>
+          <p:cNvPr id="3" name="TextBox 2">
+            <a:extLst>
+              <a:ext uri="{FF2B5EF4-FFF2-40B4-BE49-F238E27FC236}">
+                <a16:creationId xmlns:a16="http://schemas.microsoft.com/office/drawing/2014/main" id="{4355DFB3-F47C-F92A-D6E7-835912EB4AB5}"/>
+              </a:ext>
+            </a:extLst>
+          </p:cNvPr>
+          <p:cNvSpPr txBox="1"/>
+          <p:nvPr/>
+        </p:nvSpPr>
+        <p:spPr>
+          <a:xfrm>
+            <a:off x="9360656" y="955047"/>
+            <a:ext cx="914490" cy="307777"/>
+          </a:xfrm>
+          <a:prstGeom prst="rect">
+            <a:avLst/>
+          </a:prstGeom>
+          <a:noFill/>
+        </p:spPr>
+        <p:txBody>
+          <a:bodyPr wrap="square">
+            <a:spAutoFit/>
+          </a:bodyPr>
+          <a:lstStyle/>
+          <a:p>
+            <a:r>
+              <a:rPr lang="en-US" sz="1400" dirty="0">
+                <a:latin typeface="Arial" panose="020B0604020202020204" pitchFamily="34" charset="0"/>
+                <a:cs typeface="Arial" panose="020B0604020202020204" pitchFamily="34" charset="0"/>
+              </a:rPr>
+              <a:t>4252</a:t>
+            </a:r>
+          </a:p>
+        </p:txBody>
+      </p:sp>
+      <p:sp>
+        <p:nvSpPr>
+          <p:cNvPr id="4" name="TextBox 3">
+            <a:extLst>
+              <a:ext uri="{FF2B5EF4-FFF2-40B4-BE49-F238E27FC236}">
+                <a16:creationId xmlns:a16="http://schemas.microsoft.com/office/drawing/2014/main" id="{8A310815-8202-F883-DDD1-68D008A082C2}"/>
+              </a:ext>
+            </a:extLst>
+          </p:cNvPr>
+          <p:cNvSpPr txBox="1"/>
+          <p:nvPr/>
+        </p:nvSpPr>
+        <p:spPr>
+          <a:xfrm>
+            <a:off x="9360656" y="1296048"/>
+            <a:ext cx="914490" cy="307777"/>
+          </a:xfrm>
+          <a:prstGeom prst="rect">
+            <a:avLst/>
+          </a:prstGeom>
+          <a:noFill/>
+        </p:spPr>
+        <p:txBody>
+          <a:bodyPr wrap="square">
+            <a:spAutoFit/>
+          </a:bodyPr>
+          <a:lstStyle/>
+          <a:p>
+            <a:r>
+              <a:rPr lang="en-US" sz="1400" dirty="0">
+                <a:latin typeface="Arial" panose="020B0604020202020204" pitchFamily="34" charset="0"/>
+                <a:cs typeface="Arial" panose="020B0604020202020204" pitchFamily="34" charset="0"/>
+              </a:rPr>
+              <a:t>3852</a:t>
+            </a:r>
+          </a:p>
+        </p:txBody>
+      </p:sp>
+      <p:sp>
+        <p:nvSpPr>
+          <p:cNvPr id="5" name="TextBox 4">
+            <a:extLst>
+              <a:ext uri="{FF2B5EF4-FFF2-40B4-BE49-F238E27FC236}">
+                <a16:creationId xmlns:a16="http://schemas.microsoft.com/office/drawing/2014/main" id="{C6080BCB-E65A-ABC2-0CD5-1DB2C1558CDF}"/>
+              </a:ext>
+            </a:extLst>
+          </p:cNvPr>
+          <p:cNvSpPr txBox="1"/>
+          <p:nvPr/>
+        </p:nvSpPr>
+        <p:spPr>
+          <a:xfrm>
+            <a:off x="9365913" y="1637049"/>
+            <a:ext cx="914490" cy="307777"/>
+          </a:xfrm>
+          <a:prstGeom prst="rect">
+            <a:avLst/>
+          </a:prstGeom>
+          <a:noFill/>
+        </p:spPr>
+        <p:txBody>
+          <a:bodyPr wrap="square">
+            <a:spAutoFit/>
+          </a:bodyPr>
+          <a:lstStyle/>
+          <a:p>
+            <a:r>
+              <a:rPr lang="en-US" sz="1400" dirty="0">
+                <a:latin typeface="Arial" panose="020B0604020202020204" pitchFamily="34" charset="0"/>
+                <a:cs typeface="Arial" panose="020B0604020202020204" pitchFamily="34" charset="0"/>
+              </a:rPr>
+              <a:t>3702</a:t>
+            </a:r>
+          </a:p>
+        </p:txBody>
+      </p:sp>
+      <p:sp>
+        <p:nvSpPr>
+          <p:cNvPr id="6" name="TextBox 5">
+            <a:extLst>
+              <a:ext uri="{FF2B5EF4-FFF2-40B4-BE49-F238E27FC236}">
+                <a16:creationId xmlns:a16="http://schemas.microsoft.com/office/drawing/2014/main" id="{4008A9A4-0E16-64AB-B929-DFF119DB3382}"/>
+              </a:ext>
+            </a:extLst>
+          </p:cNvPr>
+          <p:cNvSpPr txBox="1"/>
+          <p:nvPr/>
+        </p:nvSpPr>
+        <p:spPr>
+          <a:xfrm>
+            <a:off x="9365913" y="1978050"/>
+            <a:ext cx="914490" cy="307777"/>
+          </a:xfrm>
+          <a:prstGeom prst="rect">
+            <a:avLst/>
+          </a:prstGeom>
+          <a:noFill/>
+        </p:spPr>
+        <p:txBody>
+          <a:bodyPr wrap="square">
+            <a:spAutoFit/>
+          </a:bodyPr>
+          <a:lstStyle/>
+          <a:p>
+            <a:r>
+              <a:rPr lang="en-US" sz="1400" dirty="0">
+                <a:latin typeface="Arial" panose="020B0604020202020204" pitchFamily="34" charset="0"/>
+                <a:cs typeface="Arial" panose="020B0604020202020204" pitchFamily="34" charset="0"/>
+              </a:rPr>
+              <a:t>4716</a:t>
+            </a:r>
+          </a:p>
+        </p:txBody>
+      </p:sp>
+      <p:sp>
+        <p:nvSpPr>
+          <p:cNvPr id="8" name="TextBox 7">
+            <a:extLst>
+              <a:ext uri="{FF2B5EF4-FFF2-40B4-BE49-F238E27FC236}">
+                <a16:creationId xmlns:a16="http://schemas.microsoft.com/office/drawing/2014/main" id="{39A1408E-19EF-E791-3B84-B5617B71BAFF}"/>
+              </a:ext>
+            </a:extLst>
+          </p:cNvPr>
+          <p:cNvSpPr txBox="1"/>
+          <p:nvPr/>
+        </p:nvSpPr>
+        <p:spPr>
+          <a:xfrm>
+            <a:off x="9365913" y="2319051"/>
+            <a:ext cx="914490" cy="307777"/>
+          </a:xfrm>
+          <a:prstGeom prst="rect">
+            <a:avLst/>
+          </a:prstGeom>
+          <a:noFill/>
+        </p:spPr>
+        <p:txBody>
+          <a:bodyPr wrap="square">
+            <a:spAutoFit/>
+          </a:bodyPr>
+          <a:lstStyle/>
+          <a:p>
+            <a:r>
+              <a:rPr lang="en-US" sz="1400" dirty="0">
+                <a:latin typeface="Arial" panose="020B0604020202020204" pitchFamily="34" charset="0"/>
+                <a:cs typeface="Arial" panose="020B0604020202020204" pitchFamily="34" charset="0"/>
+              </a:rPr>
+              <a:t>4086</a:t>
+            </a:r>
+          </a:p>
+        </p:txBody>
+      </p:sp>
+      <p:sp>
+        <p:nvSpPr>
+          <p:cNvPr id="9" name="TextBox 8">
+            <a:extLst>
+              <a:ext uri="{FF2B5EF4-FFF2-40B4-BE49-F238E27FC236}">
+                <a16:creationId xmlns:a16="http://schemas.microsoft.com/office/drawing/2014/main" id="{02D5CA33-643F-ECC4-D25E-7F0EA2AEBBC2}"/>
+              </a:ext>
+            </a:extLst>
+          </p:cNvPr>
+          <p:cNvSpPr txBox="1"/>
+          <p:nvPr/>
+        </p:nvSpPr>
+        <p:spPr>
+          <a:xfrm>
+            <a:off x="9376423" y="2660052"/>
+            <a:ext cx="914490" cy="307777"/>
+          </a:xfrm>
+          <a:prstGeom prst="rect">
+            <a:avLst/>
+          </a:prstGeom>
+          <a:noFill/>
+        </p:spPr>
+        <p:txBody>
+          <a:bodyPr wrap="square">
+            <a:spAutoFit/>
+          </a:bodyPr>
+          <a:lstStyle/>
+          <a:p>
+            <a:r>
+              <a:rPr lang="en-US" sz="1400" dirty="0">
+                <a:latin typeface="Arial" panose="020B0604020202020204" pitchFamily="34" charset="0"/>
+                <a:cs typeface="Arial" panose="020B0604020202020204" pitchFamily="34" charset="0"/>
+              </a:rPr>
+              <a:t>4396</a:t>
+            </a:r>
+          </a:p>
+        </p:txBody>
+      </p:sp>
+      <p:sp>
+        <p:nvSpPr>
+          <p:cNvPr id="11" name="TextBox 10">
+            <a:extLst>
+              <a:ext uri="{FF2B5EF4-FFF2-40B4-BE49-F238E27FC236}">
+                <a16:creationId xmlns:a16="http://schemas.microsoft.com/office/drawing/2014/main" id="{E021EB57-3141-35C9-C4C3-3B4BF946BE22}"/>
+              </a:ext>
+            </a:extLst>
+          </p:cNvPr>
+          <p:cNvSpPr txBox="1"/>
+          <p:nvPr/>
+        </p:nvSpPr>
+        <p:spPr>
+          <a:xfrm>
+            <a:off x="9376423" y="3001053"/>
+            <a:ext cx="914490" cy="307777"/>
+          </a:xfrm>
+          <a:prstGeom prst="rect">
+            <a:avLst/>
+          </a:prstGeom>
+          <a:noFill/>
+        </p:spPr>
+        <p:txBody>
+          <a:bodyPr wrap="square">
+            <a:spAutoFit/>
+          </a:bodyPr>
+          <a:lstStyle/>
+          <a:p>
+            <a:r>
+              <a:rPr lang="en-US" sz="1400" dirty="0">
+                <a:latin typeface="Arial" panose="020B0604020202020204" pitchFamily="34" charset="0"/>
+                <a:cs typeface="Arial" panose="020B0604020202020204" pitchFamily="34" charset="0"/>
+              </a:rPr>
+              <a:t>2964</a:t>
+            </a:r>
+          </a:p>
+        </p:txBody>
+      </p:sp>
+      <p:sp>
+        <p:nvSpPr>
+          <p:cNvPr id="16" name="TextBox 15">
+            <a:extLst>
+              <a:ext uri="{FF2B5EF4-FFF2-40B4-BE49-F238E27FC236}">
+                <a16:creationId xmlns:a16="http://schemas.microsoft.com/office/drawing/2014/main" id="{D67027FF-DEB3-B4F8-66B9-C16B533C434C}"/>
+              </a:ext>
+            </a:extLst>
+          </p:cNvPr>
+          <p:cNvSpPr txBox="1"/>
+          <p:nvPr/>
+        </p:nvSpPr>
+        <p:spPr>
+          <a:xfrm>
+            <a:off x="9376423" y="3342054"/>
+            <a:ext cx="914490" cy="307777"/>
+          </a:xfrm>
+          <a:prstGeom prst="rect">
+            <a:avLst/>
+          </a:prstGeom>
+          <a:noFill/>
+        </p:spPr>
+        <p:txBody>
+          <a:bodyPr wrap="square">
+            <a:spAutoFit/>
+          </a:bodyPr>
+          <a:lstStyle/>
+          <a:p>
+            <a:r>
+              <a:rPr lang="en-US" sz="1400" dirty="0">
+                <a:latin typeface="Arial" panose="020B0604020202020204" pitchFamily="34" charset="0"/>
+                <a:cs typeface="Arial" panose="020B0604020202020204" pitchFamily="34" charset="0"/>
+              </a:rPr>
+              <a:t>2797</a:t>
+            </a:r>
+          </a:p>
+        </p:txBody>
+      </p:sp>
+      <p:sp>
+        <p:nvSpPr>
+          <p:cNvPr id="29" name="TextBox 28">
+            <a:extLst>
+              <a:ext uri="{FF2B5EF4-FFF2-40B4-BE49-F238E27FC236}">
+                <a16:creationId xmlns:a16="http://schemas.microsoft.com/office/drawing/2014/main" id="{7AB6F2E4-61BD-EB2F-B497-0C1C1DAD77C8}"/>
+              </a:ext>
+            </a:extLst>
+          </p:cNvPr>
+          <p:cNvSpPr txBox="1"/>
+          <p:nvPr/>
+        </p:nvSpPr>
+        <p:spPr>
+          <a:xfrm>
+            <a:off x="9371169" y="3683055"/>
+            <a:ext cx="914490" cy="307777"/>
+          </a:xfrm>
+          <a:prstGeom prst="rect">
+            <a:avLst/>
+          </a:prstGeom>
+          <a:noFill/>
+        </p:spPr>
+        <p:txBody>
+          <a:bodyPr wrap="square">
+            <a:spAutoFit/>
+          </a:bodyPr>
+          <a:lstStyle/>
+          <a:p>
+            <a:r>
+              <a:rPr lang="en-US" sz="1400" dirty="0">
+                <a:latin typeface="Arial" panose="020B0604020202020204" pitchFamily="34" charset="0"/>
+                <a:cs typeface="Arial" panose="020B0604020202020204" pitchFamily="34" charset="0"/>
+              </a:rPr>
+              <a:t>1543</a:t>
+            </a:r>
+          </a:p>
+        </p:txBody>
+      </p:sp>
+      <p:sp>
+        <p:nvSpPr>
+          <p:cNvPr id="33" name="TextBox 32">
+            <a:extLst>
+              <a:ext uri="{FF2B5EF4-FFF2-40B4-BE49-F238E27FC236}">
+                <a16:creationId xmlns:a16="http://schemas.microsoft.com/office/drawing/2014/main" id="{78540F7A-759B-9668-82F3-137090497E69}"/>
+              </a:ext>
+            </a:extLst>
+          </p:cNvPr>
+          <p:cNvSpPr txBox="1"/>
+          <p:nvPr/>
+        </p:nvSpPr>
+        <p:spPr>
+          <a:xfrm>
+            <a:off x="9371169" y="4024056"/>
+            <a:ext cx="914490" cy="307777"/>
+          </a:xfrm>
+          <a:prstGeom prst="rect">
+            <a:avLst/>
+          </a:prstGeom>
+          <a:noFill/>
+        </p:spPr>
+        <p:txBody>
+          <a:bodyPr wrap="square">
+            <a:spAutoFit/>
+          </a:bodyPr>
+          <a:lstStyle/>
+          <a:p>
+            <a:r>
+              <a:rPr lang="en-US" sz="1400" dirty="0">
+                <a:latin typeface="Arial" panose="020B0604020202020204" pitchFamily="34" charset="0"/>
+                <a:cs typeface="Arial" panose="020B0604020202020204" pitchFamily="34" charset="0"/>
+              </a:rPr>
+              <a:t>1601</a:t>
+            </a:r>
+          </a:p>
+        </p:txBody>
+      </p:sp>
+      <p:sp>
+        <p:nvSpPr>
+          <p:cNvPr id="34" name="TextBox 33">
+            <a:extLst>
+              <a:ext uri="{FF2B5EF4-FFF2-40B4-BE49-F238E27FC236}">
+                <a16:creationId xmlns:a16="http://schemas.microsoft.com/office/drawing/2014/main" id="{E0A2A43B-A3C8-475A-7EC5-4035FF4E4DEB}"/>
+              </a:ext>
+            </a:extLst>
+          </p:cNvPr>
+          <p:cNvSpPr txBox="1"/>
+          <p:nvPr/>
+        </p:nvSpPr>
+        <p:spPr>
+          <a:xfrm>
+            <a:off x="9371169" y="4365057"/>
+            <a:ext cx="914490" cy="307777"/>
+          </a:xfrm>
+          <a:prstGeom prst="rect">
+            <a:avLst/>
+          </a:prstGeom>
+          <a:noFill/>
+        </p:spPr>
+        <p:txBody>
+          <a:bodyPr wrap="square">
+            <a:spAutoFit/>
+          </a:bodyPr>
+          <a:lstStyle/>
+          <a:p>
+            <a:r>
+              <a:rPr lang="en-US" sz="1400" dirty="0">
+                <a:latin typeface="Arial" panose="020B0604020202020204" pitchFamily="34" charset="0"/>
+                <a:cs typeface="Arial" panose="020B0604020202020204" pitchFamily="34" charset="0"/>
+              </a:rPr>
+              <a:t>532</a:t>
+            </a:r>
+          </a:p>
+        </p:txBody>
+      </p:sp>
+      <p:sp>
+        <p:nvSpPr>
+          <p:cNvPr id="41" name="TextBox 40">
+            <a:extLst>
+              <a:ext uri="{FF2B5EF4-FFF2-40B4-BE49-F238E27FC236}">
+                <a16:creationId xmlns:a16="http://schemas.microsoft.com/office/drawing/2014/main" id="{5E7F21F6-25C5-17DE-33FC-A094B06F7BED}"/>
+              </a:ext>
+            </a:extLst>
+          </p:cNvPr>
+          <p:cNvSpPr txBox="1"/>
+          <p:nvPr/>
+        </p:nvSpPr>
+        <p:spPr>
+          <a:xfrm>
+            <a:off x="9365915" y="4706058"/>
+            <a:ext cx="914490" cy="307777"/>
+          </a:xfrm>
+          <a:prstGeom prst="rect">
+            <a:avLst/>
+          </a:prstGeom>
+          <a:noFill/>
+        </p:spPr>
+        <p:txBody>
+          <a:bodyPr wrap="square">
+            <a:spAutoFit/>
+          </a:bodyPr>
+          <a:lstStyle/>
+          <a:p>
+            <a:r>
+              <a:rPr lang="en-US" sz="1400" dirty="0">
+                <a:latin typeface="Arial" panose="020B0604020202020204" pitchFamily="34" charset="0"/>
+                <a:cs typeface="Arial" panose="020B0604020202020204" pitchFamily="34" charset="0"/>
+              </a:rPr>
+              <a:t>527–609</a:t>
+            </a:r>
+          </a:p>
+        </p:txBody>
+      </p:sp>
+      <p:sp>
+        <p:nvSpPr>
+          <p:cNvPr id="42" name="TextBox 41">
+            <a:extLst>
+              <a:ext uri="{FF2B5EF4-FFF2-40B4-BE49-F238E27FC236}">
+                <a16:creationId xmlns:a16="http://schemas.microsoft.com/office/drawing/2014/main" id="{F317A4F7-715A-4E78-DDF8-75EAB4ED0117}"/>
+              </a:ext>
+            </a:extLst>
+          </p:cNvPr>
+          <p:cNvSpPr txBox="1"/>
+          <p:nvPr/>
+        </p:nvSpPr>
+        <p:spPr>
+          <a:xfrm>
+            <a:off x="9365915" y="5047059"/>
+            <a:ext cx="914490" cy="307777"/>
+          </a:xfrm>
+          <a:prstGeom prst="rect">
+            <a:avLst/>
+          </a:prstGeom>
+          <a:noFill/>
+        </p:spPr>
+        <p:txBody>
+          <a:bodyPr wrap="square">
+            <a:spAutoFit/>
+          </a:bodyPr>
+          <a:lstStyle/>
+          <a:p>
+            <a:r>
+              <a:rPr lang="en-US" sz="1400" dirty="0">
+                <a:latin typeface="Arial" panose="020B0604020202020204" pitchFamily="34" charset="0"/>
+                <a:cs typeface="Arial" panose="020B0604020202020204" pitchFamily="34" charset="0"/>
+              </a:rPr>
+              <a:t>0</a:t>
+            </a:r>
+          </a:p>
+        </p:txBody>
+      </p:sp>
+      <p:sp>
+        <p:nvSpPr>
+          <p:cNvPr id="49" name="TextBox 48">
+            <a:extLst>
+              <a:ext uri="{FF2B5EF4-FFF2-40B4-BE49-F238E27FC236}">
+                <a16:creationId xmlns:a16="http://schemas.microsoft.com/office/drawing/2014/main" id="{56497100-B62C-FECA-CE7A-3FA11331A621}"/>
+              </a:ext>
+            </a:extLst>
+          </p:cNvPr>
+          <p:cNvSpPr txBox="1"/>
+          <p:nvPr/>
+        </p:nvSpPr>
+        <p:spPr>
+          <a:xfrm>
+            <a:off x="9365915" y="5388060"/>
+            <a:ext cx="914490" cy="307777"/>
+          </a:xfrm>
+          <a:prstGeom prst="rect">
+            <a:avLst/>
+          </a:prstGeom>
+          <a:noFill/>
+        </p:spPr>
+        <p:txBody>
+          <a:bodyPr wrap="square">
+            <a:spAutoFit/>
+          </a:bodyPr>
+          <a:lstStyle/>
+          <a:p>
+            <a:r>
+              <a:rPr lang="en-US" sz="1400" dirty="0">
+                <a:latin typeface="Arial" panose="020B0604020202020204" pitchFamily="34" charset="0"/>
+                <a:cs typeface="Arial" panose="020B0604020202020204" pitchFamily="34" charset="0"/>
+              </a:rPr>
+              <a:t>0</a:t>
+            </a:r>
+          </a:p>
+        </p:txBody>
+      </p:sp>
+      <p:sp>
+        <p:nvSpPr>
+          <p:cNvPr id="50" name="TextBox 49">
+            <a:extLst>
+              <a:ext uri="{FF2B5EF4-FFF2-40B4-BE49-F238E27FC236}">
+                <a16:creationId xmlns:a16="http://schemas.microsoft.com/office/drawing/2014/main" id="{DCA320E7-04CA-A040-D39E-E90F14204468}"/>
+              </a:ext>
+            </a:extLst>
+          </p:cNvPr>
+          <p:cNvSpPr txBox="1"/>
+          <p:nvPr/>
+        </p:nvSpPr>
+        <p:spPr>
+          <a:xfrm>
+            <a:off x="9360661" y="5729061"/>
+            <a:ext cx="914490" cy="307777"/>
+          </a:xfrm>
+          <a:prstGeom prst="rect">
+            <a:avLst/>
+          </a:prstGeom>
+          <a:noFill/>
+        </p:spPr>
+        <p:txBody>
+          <a:bodyPr wrap="square">
+            <a:spAutoFit/>
+          </a:bodyPr>
+          <a:lstStyle/>
+          <a:p>
+            <a:r>
+              <a:rPr lang="en-US" sz="1400" dirty="0">
+                <a:latin typeface="Arial" panose="020B0604020202020204" pitchFamily="34" charset="0"/>
+                <a:cs typeface="Arial" panose="020B0604020202020204" pitchFamily="34" charset="0"/>
+              </a:rPr>
+              <a:t>0</a:t>
+            </a:r>
+          </a:p>
+        </p:txBody>
+      </p:sp>
+      <p:sp>
+        <p:nvSpPr>
+          <p:cNvPr id="54" name="TextBox 53">
+            <a:extLst>
+              <a:ext uri="{FF2B5EF4-FFF2-40B4-BE49-F238E27FC236}">
+                <a16:creationId xmlns:a16="http://schemas.microsoft.com/office/drawing/2014/main" id="{474A3AA8-7FE3-7A0B-FEF1-AEC257E19918}"/>
+              </a:ext>
+            </a:extLst>
+          </p:cNvPr>
+          <p:cNvSpPr txBox="1"/>
+          <p:nvPr/>
+        </p:nvSpPr>
+        <p:spPr>
+          <a:xfrm>
+            <a:off x="9360661" y="6070062"/>
+            <a:ext cx="914490" cy="307777"/>
+          </a:xfrm>
+          <a:prstGeom prst="rect">
+            <a:avLst/>
+          </a:prstGeom>
+          <a:noFill/>
+        </p:spPr>
+        <p:txBody>
+          <a:bodyPr wrap="square">
+            <a:spAutoFit/>
+          </a:bodyPr>
+          <a:lstStyle/>
+          <a:p>
+            <a:r>
+              <a:rPr lang="en-US" sz="1400" dirty="0">
+                <a:latin typeface="Arial" panose="020B0604020202020204" pitchFamily="34" charset="0"/>
+                <a:cs typeface="Arial" panose="020B0604020202020204" pitchFamily="34" charset="0"/>
+              </a:rPr>
+              <a:t>1</a:t>
+            </a:r>
+          </a:p>
+        </p:txBody>
+      </p:sp>
+      <p:sp>
+        <p:nvSpPr>
+          <p:cNvPr id="55" name="TextBox 54">
+            <a:extLst>
+              <a:ext uri="{FF2B5EF4-FFF2-40B4-BE49-F238E27FC236}">
+                <a16:creationId xmlns:a16="http://schemas.microsoft.com/office/drawing/2014/main" id="{1EFBBB06-33EB-6975-D787-7B77B9CD0AEC}"/>
+              </a:ext>
+            </a:extLst>
+          </p:cNvPr>
+          <p:cNvSpPr txBox="1"/>
+          <p:nvPr/>
+        </p:nvSpPr>
+        <p:spPr>
+          <a:xfrm>
+            <a:off x="9360661" y="6411062"/>
+            <a:ext cx="914490" cy="307777"/>
+          </a:xfrm>
+          <a:prstGeom prst="rect">
+            <a:avLst/>
+          </a:prstGeom>
+          <a:noFill/>
+        </p:spPr>
+        <p:txBody>
+          <a:bodyPr wrap="square">
+            <a:spAutoFit/>
+          </a:bodyPr>
+          <a:lstStyle/>
+          <a:p>
+            <a:r>
+              <a:rPr lang="en-US" sz="1400" dirty="0">
+                <a:latin typeface="Arial" panose="020B0604020202020204" pitchFamily="34" charset="0"/>
+                <a:cs typeface="Arial" panose="020B0604020202020204" pitchFamily="34" charset="0"/>
+              </a:rPr>
+              <a:t>106-647</a:t>
+            </a:r>
+          </a:p>
+        </p:txBody>
+      </p:sp>
+      <p:sp>
+        <p:nvSpPr>
+          <p:cNvPr id="60" name="TextBox 59">
+            <a:extLst>
+              <a:ext uri="{FF2B5EF4-FFF2-40B4-BE49-F238E27FC236}">
+                <a16:creationId xmlns:a16="http://schemas.microsoft.com/office/drawing/2014/main" id="{3CD61EAF-89DA-8EF3-3EFE-22F6D26AA683}"/>
+              </a:ext>
+            </a:extLst>
+          </p:cNvPr>
+          <p:cNvSpPr txBox="1"/>
+          <p:nvPr/>
+        </p:nvSpPr>
+        <p:spPr>
+          <a:xfrm>
+            <a:off x="7393762" y="5558547"/>
+            <a:ext cx="914490" cy="307777"/>
+          </a:xfrm>
+          <a:prstGeom prst="rect">
+            <a:avLst/>
+          </a:prstGeom>
+          <a:noFill/>
+        </p:spPr>
+        <p:txBody>
+          <a:bodyPr wrap="square">
+            <a:spAutoFit/>
+          </a:bodyPr>
+          <a:lstStyle/>
+          <a:p>
+            <a:r>
+              <a:rPr lang="en-US" sz="1400" dirty="0">
+                <a:latin typeface="Arial" panose="020B0604020202020204" pitchFamily="34" charset="0"/>
+                <a:cs typeface="Arial" panose="020B0604020202020204" pitchFamily="34" charset="0"/>
+              </a:rPr>
+              <a:t>Termites</a:t>
+            </a:r>
+          </a:p>
+        </p:txBody>
+      </p:sp>
+      <p:sp>
+        <p:nvSpPr>
+          <p:cNvPr id="132" name="TextBox 131">
+            <a:extLst>
+              <a:ext uri="{FF2B5EF4-FFF2-40B4-BE49-F238E27FC236}">
+                <a16:creationId xmlns:a16="http://schemas.microsoft.com/office/drawing/2014/main" id="{CA0D268C-885A-4446-8B3C-4318EABB3FE9}"/>
+              </a:ext>
+            </a:extLst>
+          </p:cNvPr>
+          <p:cNvSpPr txBox="1"/>
+          <p:nvPr/>
+        </p:nvSpPr>
+        <p:spPr>
+          <a:xfrm>
+            <a:off x="4041437" y="3663513"/>
+            <a:ext cx="1015279" cy="369332"/>
+          </a:xfrm>
+          <a:prstGeom prst="rect">
+            <a:avLst/>
+          </a:prstGeom>
+          <a:noFill/>
+        </p:spPr>
+        <p:txBody>
+          <a:bodyPr wrap="square" rtlCol="0">
+            <a:spAutoFit/>
+          </a:bodyPr>
+          <a:lstStyle/>
+          <a:p>
+            <a:r>
+              <a:rPr lang="en-US" dirty="0">
+                <a:latin typeface="Arial" panose="020B0604020202020204" pitchFamily="34" charset="0"/>
+                <a:cs typeface="Arial" panose="020B0604020202020204" pitchFamily="34" charset="0"/>
+              </a:rPr>
+              <a:t>1.81</a:t>
+            </a:r>
+          </a:p>
+        </p:txBody>
+      </p:sp>
+      <p:cxnSp>
+        <p:nvCxnSpPr>
+          <p:cNvPr id="65" name="Straight Connector 64">
+            <a:extLst>
+              <a:ext uri="{FF2B5EF4-FFF2-40B4-BE49-F238E27FC236}">
+                <a16:creationId xmlns:a16="http://schemas.microsoft.com/office/drawing/2014/main" id="{0BF97B18-9077-6349-93EF-9C6C224D3524}"/>
+              </a:ext>
+            </a:extLst>
+          </p:cNvPr>
+          <p:cNvCxnSpPr/>
+          <p:nvPr/>
+        </p:nvCxnSpPr>
+        <p:spPr>
+          <a:xfrm>
+            <a:off x="7383252" y="5171960"/>
+            <a:ext cx="0" cy="1152000"/>
+          </a:xfrm>
+          <a:prstGeom prst="line">
+            <a:avLst/>
+          </a:prstGeom>
+          <a:ln w="12700">
+            <a:prstDash val="sysDot"/>
+          </a:ln>
+        </p:spPr>
+        <p:style>
+          <a:lnRef idx="1">
+            <a:schemeClr val="accent1"/>
+          </a:lnRef>
+          <a:fillRef idx="0">
+            <a:schemeClr val="accent1"/>
+          </a:fillRef>
+          <a:effectRef idx="0">
+            <a:schemeClr val="accent1"/>
+          </a:effectRef>
+          <a:fontRef idx="minor">
+            <a:schemeClr val="tx1"/>
+          </a:fontRef>
+        </p:style>
+      </p:cxnSp>
+      <p:sp>
+        <p:nvSpPr>
+          <p:cNvPr id="63" name="TextBox 62">
+            <a:extLst>
+              <a:ext uri="{FF2B5EF4-FFF2-40B4-BE49-F238E27FC236}">
+                <a16:creationId xmlns:a16="http://schemas.microsoft.com/office/drawing/2014/main" id="{AB37B95A-219F-6340-BFC7-8A5E60BEF872}"/>
+              </a:ext>
+            </a:extLst>
+          </p:cNvPr>
+          <p:cNvSpPr txBox="1"/>
+          <p:nvPr/>
+        </p:nvSpPr>
+        <p:spPr>
+          <a:xfrm>
+            <a:off x="10303210" y="1410860"/>
+            <a:ext cx="6061083" cy="646331"/>
+          </a:xfrm>
+          <a:prstGeom prst="rect">
+            <a:avLst/>
+          </a:prstGeom>
+          <a:noFill/>
+        </p:spPr>
+        <p:txBody>
+          <a:bodyPr wrap="none" rtlCol="0">
+            <a:spAutoFit/>
+          </a:bodyPr>
+          <a:lstStyle/>
+          <a:p>
+            <a:r>
+              <a:rPr lang="en-US" dirty="0"/>
+              <a:t>Length distribution</a:t>
+            </a:r>
+          </a:p>
+          <a:p>
+            <a:r>
+              <a:rPr lang="en-US" dirty="0"/>
+              <a:t>Put in total, then put in different </a:t>
+            </a:r>
+            <a:r>
+              <a:rPr lang="en-US" dirty="0" err="1"/>
+              <a:t>colours</a:t>
+            </a:r>
+            <a:r>
+              <a:rPr lang="en-US" dirty="0"/>
+              <a:t> for genic vs non-genic</a:t>
+            </a:r>
+          </a:p>
+        </p:txBody>
+      </p:sp>
+      <p:sp>
+        <p:nvSpPr>
+          <p:cNvPr id="124" name="TextBox 123">
+            <a:extLst>
+              <a:ext uri="{FF2B5EF4-FFF2-40B4-BE49-F238E27FC236}">
+                <a16:creationId xmlns:a16="http://schemas.microsoft.com/office/drawing/2014/main" id="{5942DD00-F635-4248-8CBC-A7D1F6D0732F}"/>
+              </a:ext>
+            </a:extLst>
+          </p:cNvPr>
+          <p:cNvSpPr txBox="1"/>
+          <p:nvPr/>
+        </p:nvSpPr>
+        <p:spPr>
+          <a:xfrm>
+            <a:off x="10659815" y="3640850"/>
+            <a:ext cx="1252779" cy="369332"/>
+          </a:xfrm>
+          <a:prstGeom prst="rect">
+            <a:avLst/>
+          </a:prstGeom>
+          <a:noFill/>
+        </p:spPr>
+        <p:txBody>
+          <a:bodyPr wrap="none" rtlCol="0">
+            <a:spAutoFit/>
+          </a:bodyPr>
+          <a:lstStyle/>
+          <a:p>
+            <a:r>
+              <a:rPr lang="en-US" dirty="0"/>
+              <a:t>Leo’s figure</a:t>
+            </a:r>
+          </a:p>
+        </p:txBody>
+      </p:sp>
+      <p:sp>
+        <p:nvSpPr>
+          <p:cNvPr id="64" name="TextBox 63">
+            <a:extLst>
+              <a:ext uri="{FF2B5EF4-FFF2-40B4-BE49-F238E27FC236}">
+                <a16:creationId xmlns:a16="http://schemas.microsoft.com/office/drawing/2014/main" id="{B2AA615D-7AB6-394F-A7B7-639DCB2479A1}"/>
+              </a:ext>
+            </a:extLst>
+          </p:cNvPr>
+          <p:cNvSpPr txBox="1"/>
+          <p:nvPr/>
+        </p:nvSpPr>
+        <p:spPr>
+          <a:xfrm>
+            <a:off x="152327" y="-28505"/>
+            <a:ext cx="936667" cy="369332"/>
+          </a:xfrm>
+          <a:prstGeom prst="rect">
+            <a:avLst/>
+          </a:prstGeom>
+          <a:noFill/>
+        </p:spPr>
+        <p:txBody>
+          <a:bodyPr wrap="none" rtlCol="0">
+            <a:spAutoFit/>
+          </a:bodyPr>
+          <a:lstStyle/>
+          <a:p>
+            <a:r>
+              <a:rPr lang="en-US" b="1" dirty="0"/>
+              <a:t>Figure 1</a:t>
+            </a:r>
+          </a:p>
+        </p:txBody>
+      </p:sp>
+      <p:sp>
+        <p:nvSpPr>
+          <p:cNvPr id="73" name="TextBox 72">
+            <a:extLst>
+              <a:ext uri="{FF2B5EF4-FFF2-40B4-BE49-F238E27FC236}">
+                <a16:creationId xmlns:a16="http://schemas.microsoft.com/office/drawing/2014/main" id="{14074216-827A-DB43-B696-56F30FFD1249}"/>
+              </a:ext>
+            </a:extLst>
+          </p:cNvPr>
+          <p:cNvSpPr txBox="1"/>
+          <p:nvPr/>
+        </p:nvSpPr>
+        <p:spPr>
+          <a:xfrm>
+            <a:off x="753752" y="595968"/>
+            <a:ext cx="317716" cy="369332"/>
+          </a:xfrm>
+          <a:prstGeom prst="rect">
+            <a:avLst/>
+          </a:prstGeom>
+          <a:noFill/>
+        </p:spPr>
+        <p:txBody>
+          <a:bodyPr wrap="none" rtlCol="0">
+            <a:spAutoFit/>
+          </a:bodyPr>
+          <a:lstStyle/>
+          <a:p>
+            <a:r>
+              <a:rPr lang="en-US" dirty="0"/>
+              <a:t>A</a:t>
+            </a:r>
+          </a:p>
+        </p:txBody>
+      </p:sp>
+    </p:spTree>
+    <p:extLst>
+      <p:ext uri="{BB962C8B-B14F-4D97-AF65-F5344CB8AC3E}">
+        <p14:creationId xmlns:p14="http://schemas.microsoft.com/office/powerpoint/2010/main" val="2172570068"/>
+      </p:ext>
+    </p:extLst>
+  </p:cSld>
+  <p:clrMapOvr>
+    <a:masterClrMapping/>
+  </p:clrMapOvr>
+</p:sld>
+</file>
+
+<file path=ppt/slides/slide5.xml><?xml version="1.0" encoding="utf-8"?>
+<p:sld xmlns:a="http://schemas.openxmlformats.org/drawingml/2006/main" xmlns:r="http://schemas.openxmlformats.org/officeDocument/2006/relationships" xmlns:p="http://schemas.openxmlformats.org/presentationml/2006/main">
+  <p:cSld>
+    <p:spTree>
+      <p:nvGrpSpPr>
+        <p:cNvPr id="1" name=""/>
+        <p:cNvGrpSpPr/>
+        <p:nvPr/>
+      </p:nvGrpSpPr>
+      <p:grpSpPr>
+        <a:xfrm>
+          <a:off x="0" y="0"/>
+          <a:ext cx="0" cy="0"/>
+          <a:chOff x="0" y="0"/>
+          <a:chExt cx="0" cy="0"/>
+        </a:xfrm>
+      </p:grpSpPr>
+      <p:sp>
+        <p:nvSpPr>
+          <p:cNvPr id="4" name="TextBox 3">
+            <a:extLst>
+              <a:ext uri="{FF2B5EF4-FFF2-40B4-BE49-F238E27FC236}">
+                <a16:creationId xmlns:a16="http://schemas.microsoft.com/office/drawing/2014/main" id="{4CBCCAAD-C40A-0540-A342-CC95BED36479}"/>
+              </a:ext>
+            </a:extLst>
+          </p:cNvPr>
+          <p:cNvSpPr txBox="1"/>
+          <p:nvPr/>
+        </p:nvSpPr>
+        <p:spPr>
+          <a:xfrm>
+            <a:off x="152327" y="-28505"/>
+            <a:ext cx="943528" cy="369332"/>
+          </a:xfrm>
+          <a:prstGeom prst="rect">
+            <a:avLst/>
+          </a:prstGeom>
+          <a:noFill/>
+        </p:spPr>
+        <p:txBody>
+          <a:bodyPr wrap="none" rtlCol="0">
+            <a:spAutoFit/>
+          </a:bodyPr>
+          <a:lstStyle/>
+          <a:p>
+            <a:r>
+              <a:rPr lang="en-US" b="1" dirty="0"/>
+              <a:t>Figure 2</a:t>
+            </a:r>
+          </a:p>
+        </p:txBody>
+      </p:sp>
+      <p:sp>
+        <p:nvSpPr>
+          <p:cNvPr id="5" name="TextBox 4">
+            <a:extLst>
+              <a:ext uri="{FF2B5EF4-FFF2-40B4-BE49-F238E27FC236}">
+                <a16:creationId xmlns:a16="http://schemas.microsoft.com/office/drawing/2014/main" id="{C10DAFDE-3EB3-4D4D-8B16-A4102844234F}"/>
+              </a:ext>
+            </a:extLst>
+          </p:cNvPr>
+          <p:cNvSpPr txBox="1"/>
+          <p:nvPr/>
+        </p:nvSpPr>
+        <p:spPr>
+          <a:xfrm>
+            <a:off x="1544595" y="2211859"/>
+            <a:ext cx="4593309" cy="1200329"/>
+          </a:xfrm>
+          <a:prstGeom prst="rect">
+            <a:avLst/>
+          </a:prstGeom>
+          <a:noFill/>
+        </p:spPr>
+        <p:txBody>
+          <a:bodyPr wrap="none" rtlCol="0">
+            <a:spAutoFit/>
+          </a:bodyPr>
+          <a:lstStyle/>
+          <a:p>
+            <a:r>
+              <a:rPr lang="en-US" dirty="0" err="1"/>
+              <a:t>Zhuzhi</a:t>
+            </a:r>
+            <a:r>
+              <a:rPr lang="en-US" dirty="0"/>
+              <a:t> figure.</a:t>
+            </a:r>
+          </a:p>
+          <a:p>
+            <a:endParaRPr lang="en-US" dirty="0"/>
+          </a:p>
+          <a:p>
+            <a:r>
+              <a:rPr lang="en-US" dirty="0"/>
+              <a:t>Also maybe a couple of figure about old inserts</a:t>
+            </a:r>
+          </a:p>
+          <a:p>
+            <a:r>
+              <a:rPr lang="en-US" dirty="0"/>
+              <a:t>- An example from my one, and </a:t>
+            </a:r>
+            <a:r>
+              <a:rPr lang="en-US" dirty="0" err="1"/>
+              <a:t>Zhuzhi’s</a:t>
+            </a:r>
+            <a:r>
+              <a:rPr lang="en-US"/>
+              <a:t> one.</a:t>
+            </a:r>
+            <a:endParaRPr lang="en-US" dirty="0"/>
+          </a:p>
+        </p:txBody>
+      </p:sp>
+    </p:spTree>
+    <p:extLst>
+      <p:ext uri="{BB962C8B-B14F-4D97-AF65-F5344CB8AC3E}">
+        <p14:creationId xmlns:p14="http://schemas.microsoft.com/office/powerpoint/2010/main" val="1936291726"/>
       </p:ext>
     </p:extLst>
   </p:cSld>
@@ -8706,4 +14150,299 @@
     </a:ext>
   </a:extLst>
 </a:theme>
+</file>
+
+<file path=ppt/theme/theme2.xml><?xml version="1.0" encoding="utf-8"?>
+<a:theme xmlns:a="http://schemas.openxmlformats.org/drawingml/2006/main" name="Office Theme">
+  <a:themeElements>
+    <a:clrScheme name="Office">
+      <a:dk1>
+        <a:sysClr val="windowText" lastClr="000000"/>
+      </a:dk1>
+      <a:lt1>
+        <a:sysClr val="window" lastClr="FFFFFF"/>
+      </a:lt1>
+      <a:dk2>
+        <a:srgbClr val="44546A"/>
+      </a:dk2>
+      <a:lt2>
+        <a:srgbClr val="E7E6E6"/>
+      </a:lt2>
+      <a:accent1>
+        <a:srgbClr val="4472C4"/>
+      </a:accent1>
+      <a:accent2>
+        <a:srgbClr val="ED7D31"/>
+      </a:accent2>
+      <a:accent3>
+        <a:srgbClr val="A5A5A5"/>
+      </a:accent3>
+      <a:accent4>
+        <a:srgbClr val="FFC000"/>
+      </a:accent4>
+      <a:accent5>
+        <a:srgbClr val="5B9BD5"/>
+      </a:accent5>
+      <a:accent6>
+        <a:srgbClr val="70AD47"/>
+      </a:accent6>
+      <a:hlink>
+        <a:srgbClr val="0563C1"/>
+      </a:hlink>
+      <a:folHlink>
+        <a:srgbClr val="954F72"/>
+      </a:folHlink>
+    </a:clrScheme>
+    <a:fontScheme name="Office">
+      <a:majorFont>
+        <a:latin typeface="Calibri Light" panose="020F0302020204030204"/>
+        <a:ea typeface=""/>
+        <a:cs typeface=""/>
+        <a:font script="Jpan" typeface="游ゴシック Light"/>
+        <a:font script="Hang" typeface="맑은 고딕"/>
+        <a:font script="Hans" typeface="等线 Light"/>
+        <a:font script="Hant" typeface="新細明體"/>
+        <a:font script="Arab" typeface="Times New Roman"/>
+        <a:font script="Hebr" typeface="Times New Roman"/>
+        <a:font script="Thai" typeface="Angsana New"/>
+        <a:font script="Ethi" typeface="Nyala"/>
+        <a:font script="Beng" typeface="Vrinda"/>
+        <a:font script="Gujr" typeface="Shruti"/>
+        <a:font script="Khmr" typeface="MoolBoran"/>
+        <a:font script="Knda" typeface="Tunga"/>
+        <a:font script="Guru" typeface="Raavi"/>
+        <a:font script="Cans" typeface="Euphemia"/>
+        <a:font script="Cher" typeface="Plantagenet Cherokee"/>
+        <a:font script="Yiii" typeface="Microsoft Yi Baiti"/>
+        <a:font script="Tibt" typeface="Microsoft Himalaya"/>
+        <a:font script="Thaa" typeface="MV Boli"/>
+        <a:font script="Deva" typeface="Mangal"/>
+        <a:font script="Telu" typeface="Gautami"/>
+        <a:font script="Taml" typeface="Latha"/>
+        <a:font script="Syrc" typeface="Estrangelo Edessa"/>
+        <a:font script="Orya" typeface="Kalinga"/>
+        <a:font script="Mlym" typeface="Kartika"/>
+        <a:font script="Laoo" typeface="DokChampa"/>
+        <a:font script="Sinh" typeface="Iskoola Pota"/>
+        <a:font script="Mong" typeface="Mongolian Baiti"/>
+        <a:font script="Viet" typeface="Times New Roman"/>
+        <a:font script="Uigh" typeface="Microsoft Uighur"/>
+        <a:font script="Geor" typeface="Sylfaen"/>
+        <a:font script="Armn" typeface="Arial"/>
+        <a:font script="Bugi" typeface="Leelawadee UI"/>
+        <a:font script="Bopo" typeface="Microsoft JhengHei"/>
+        <a:font script="Java" typeface="Javanese Text"/>
+        <a:font script="Lisu" typeface="Segoe UI"/>
+        <a:font script="Mymr" typeface="Myanmar Text"/>
+        <a:font script="Nkoo" typeface="Ebrima"/>
+        <a:font script="Olck" typeface="Nirmala UI"/>
+        <a:font script="Osma" typeface="Ebrima"/>
+        <a:font script="Phag" typeface="Phagspa"/>
+        <a:font script="Syrn" typeface="Estrangelo Edessa"/>
+        <a:font script="Syrj" typeface="Estrangelo Edessa"/>
+        <a:font script="Syre" typeface="Estrangelo Edessa"/>
+        <a:font script="Sora" typeface="Nirmala UI"/>
+        <a:font script="Tale" typeface="Microsoft Tai Le"/>
+        <a:font script="Talu" typeface="Microsoft New Tai Lue"/>
+        <a:font script="Tfng" typeface="Ebrima"/>
+      </a:majorFont>
+      <a:minorFont>
+        <a:latin typeface="Calibri" panose="020F0502020204030204"/>
+        <a:ea typeface=""/>
+        <a:cs typeface=""/>
+        <a:font script="Jpan" typeface="游ゴシック"/>
+        <a:font script="Hang" typeface="맑은 고딕"/>
+        <a:font script="Hans" typeface="等线"/>
+        <a:font script="Hant" typeface="新細明體"/>
+        <a:font script="Arab" typeface="Arial"/>
+        <a:font script="Hebr" typeface="Arial"/>
+        <a:font script="Thai" typeface="Cordia New"/>
+        <a:font script="Ethi" typeface="Nyala"/>
+        <a:font script="Beng" typeface="Vrinda"/>
+        <a:font script="Gujr" typeface="Shruti"/>
+        <a:font script="Khmr" typeface="DaunPenh"/>
+        <a:font script="Knda" typeface="Tunga"/>
+        <a:font script="Guru" typeface="Raavi"/>
+        <a:font script="Cans" typeface="Euphemia"/>
+        <a:font script="Cher" typeface="Plantagenet Cherokee"/>
+        <a:font script="Yiii" typeface="Microsoft Yi Baiti"/>
+        <a:font script="Tibt" typeface="Microsoft Himalaya"/>
+        <a:font script="Thaa" typeface="MV Boli"/>
+        <a:font script="Deva" typeface="Mangal"/>
+        <a:font script="Telu" typeface="Gautami"/>
+        <a:font script="Taml" typeface="Latha"/>
+        <a:font script="Syrc" typeface="Estrangelo Edessa"/>
+        <a:font script="Orya" typeface="Kalinga"/>
+        <a:font script="Mlym" typeface="Kartika"/>
+        <a:font script="Laoo" typeface="DokChampa"/>
+        <a:font script="Sinh" typeface="Iskoola Pota"/>
+        <a:font script="Mong" typeface="Mongolian Baiti"/>
+        <a:font script="Viet" typeface="Arial"/>
+        <a:font script="Uigh" typeface="Microsoft Uighur"/>
+        <a:font script="Geor" typeface="Sylfaen"/>
+        <a:font script="Armn" typeface="Arial"/>
+        <a:font script="Bugi" typeface="Leelawadee UI"/>
+        <a:font script="Bopo" typeface="Microsoft JhengHei"/>
+        <a:font script="Java" typeface="Javanese Text"/>
+        <a:font script="Lisu" typeface="Segoe UI"/>
+        <a:font script="Mymr" typeface="Myanmar Text"/>
+        <a:font script="Nkoo" typeface="Ebrima"/>
+        <a:font script="Olck" typeface="Nirmala UI"/>
+        <a:font script="Osma" typeface="Ebrima"/>
+        <a:font script="Phag" typeface="Phagspa"/>
+        <a:font script="Syrn" typeface="Estrangelo Edessa"/>
+        <a:font script="Syrj" typeface="Estrangelo Edessa"/>
+        <a:font script="Syre" typeface="Estrangelo Edessa"/>
+        <a:font script="Sora" typeface="Nirmala UI"/>
+        <a:font script="Tale" typeface="Microsoft Tai Le"/>
+        <a:font script="Talu" typeface="Microsoft New Tai Lue"/>
+        <a:font script="Tfng" typeface="Ebrima"/>
+      </a:minorFont>
+    </a:fontScheme>
+    <a:fmtScheme name="Office">
+      <a:fillStyleLst>
+        <a:solidFill>
+          <a:schemeClr val="phClr"/>
+        </a:solidFill>
+        <a:gradFill rotWithShape="1">
+          <a:gsLst>
+            <a:gs pos="0">
+              <a:schemeClr val="phClr">
+                <a:lumMod val="110000"/>
+                <a:satMod val="105000"/>
+                <a:tint val="67000"/>
+              </a:schemeClr>
+            </a:gs>
+            <a:gs pos="50000">
+              <a:schemeClr val="phClr">
+                <a:lumMod val="105000"/>
+                <a:satMod val="103000"/>
+                <a:tint val="73000"/>
+              </a:schemeClr>
+            </a:gs>
+            <a:gs pos="100000">
+              <a:schemeClr val="phClr">
+                <a:lumMod val="105000"/>
+                <a:satMod val="109000"/>
+                <a:tint val="81000"/>
+              </a:schemeClr>
+            </a:gs>
+          </a:gsLst>
+          <a:lin ang="5400000" scaled="0"/>
+        </a:gradFill>
+        <a:gradFill rotWithShape="1">
+          <a:gsLst>
+            <a:gs pos="0">
+              <a:schemeClr val="phClr">
+                <a:satMod val="103000"/>
+                <a:lumMod val="102000"/>
+                <a:tint val="94000"/>
+              </a:schemeClr>
+            </a:gs>
+            <a:gs pos="50000">
+              <a:schemeClr val="phClr">
+                <a:satMod val="110000"/>
+                <a:lumMod val="100000"/>
+                <a:shade val="100000"/>
+              </a:schemeClr>
+            </a:gs>
+            <a:gs pos="100000">
+              <a:schemeClr val="phClr">
+                <a:lumMod val="99000"/>
+                <a:satMod val="120000"/>
+                <a:shade val="78000"/>
+              </a:schemeClr>
+            </a:gs>
+          </a:gsLst>
+          <a:lin ang="5400000" scaled="0"/>
+        </a:gradFill>
+      </a:fillStyleLst>
+      <a:lnStyleLst>
+        <a:ln w="6350" cap="flat" cmpd="sng" algn="ctr">
+          <a:solidFill>
+            <a:schemeClr val="phClr"/>
+          </a:solidFill>
+          <a:prstDash val="solid"/>
+          <a:miter lim="800000"/>
+        </a:ln>
+        <a:ln w="12700" cap="flat" cmpd="sng" algn="ctr">
+          <a:solidFill>
+            <a:schemeClr val="phClr"/>
+          </a:solidFill>
+          <a:prstDash val="solid"/>
+          <a:miter lim="800000"/>
+        </a:ln>
+        <a:ln w="19050" cap="flat" cmpd="sng" algn="ctr">
+          <a:solidFill>
+            <a:schemeClr val="phClr"/>
+          </a:solidFill>
+          <a:prstDash val="solid"/>
+          <a:miter lim="800000"/>
+        </a:ln>
+      </a:lnStyleLst>
+      <a:effectStyleLst>
+        <a:effectStyle>
+          <a:effectLst/>
+        </a:effectStyle>
+        <a:effectStyle>
+          <a:effectLst/>
+        </a:effectStyle>
+        <a:effectStyle>
+          <a:effectLst>
+            <a:outerShdw blurRad="57150" dist="19050" dir="5400000" algn="ctr" rotWithShape="0">
+              <a:srgbClr val="000000">
+                <a:alpha val="63000"/>
+              </a:srgbClr>
+            </a:outerShdw>
+          </a:effectLst>
+        </a:effectStyle>
+      </a:effectStyleLst>
+      <a:bgFillStyleLst>
+        <a:solidFill>
+          <a:schemeClr val="phClr"/>
+        </a:solidFill>
+        <a:solidFill>
+          <a:schemeClr val="phClr">
+            <a:tint val="95000"/>
+            <a:satMod val="170000"/>
+          </a:schemeClr>
+        </a:solidFill>
+        <a:gradFill rotWithShape="1">
+          <a:gsLst>
+            <a:gs pos="0">
+              <a:schemeClr val="phClr">
+                <a:tint val="93000"/>
+                <a:satMod val="150000"/>
+                <a:shade val="98000"/>
+                <a:lumMod val="102000"/>
+              </a:schemeClr>
+            </a:gs>
+            <a:gs pos="50000">
+              <a:schemeClr val="phClr">
+                <a:tint val="98000"/>
+                <a:satMod val="130000"/>
+                <a:shade val="90000"/>
+                <a:lumMod val="103000"/>
+              </a:schemeClr>
+            </a:gs>
+            <a:gs pos="100000">
+              <a:schemeClr val="phClr">
+                <a:shade val="63000"/>
+                <a:satMod val="120000"/>
+              </a:schemeClr>
+            </a:gs>
+          </a:gsLst>
+          <a:lin ang="5400000" scaled="0"/>
+        </a:gradFill>
+      </a:bgFillStyleLst>
+    </a:fmtScheme>
+  </a:themeElements>
+  <a:objectDefaults/>
+  <a:extraClrSchemeLst/>
+  <a:extLst>
+    <a:ext uri="{05A4C25C-085E-4340-85A3-A5531E510DB2}">
+      <thm15:themeFamily xmlns:thm15="http://schemas.microsoft.com/office/thememl/2012/main" name="Office Theme" id="{62F939B6-93AF-4DB8-9C6B-D6C7DFDC589F}" vid="{4A3C46E8-61CC-4603-A589-7422A47A8E4A}"/>
+    </a:ext>
+  </a:extLst>
+</a:theme>
 </file>
--- a/manuscript/Figures/Blattabacterium HGT_figures-working.pptx
+++ b/manuscript/Figures/Blattabacterium HGT_figures-working.pptx
@@ -5,7 +5,7 @@
     <p:sldMasterId id="2147483648" r:id="rId1"/>
   </p:sldMasterIdLst>
   <p:notesMasterIdLst>
-    <p:notesMasterId r:id="rId12"/>
+    <p:notesMasterId r:id="rId14"/>
   </p:notesMasterIdLst>
   <p:sldIdLst>
     <p:sldId id="256" r:id="rId2"/>
@@ -14,10 +14,12 @@
     <p:sldId id="258" r:id="rId5"/>
     <p:sldId id="257" r:id="rId6"/>
     <p:sldId id="263" r:id="rId7"/>
-    <p:sldId id="261" r:id="rId8"/>
-    <p:sldId id="264" r:id="rId9"/>
-    <p:sldId id="265" r:id="rId10"/>
-    <p:sldId id="260" r:id="rId11"/>
+    <p:sldId id="264" r:id="rId8"/>
+    <p:sldId id="265" r:id="rId9"/>
+    <p:sldId id="266" r:id="rId10"/>
+    <p:sldId id="261" r:id="rId11"/>
+    <p:sldId id="260" r:id="rId12"/>
+    <p:sldId id="267" r:id="rId13"/>
   </p:sldIdLst>
   <p:sldSz cx="12192000" cy="6858000"/>
   <p:notesSz cx="6858000" cy="9144000"/>
@@ -206,7 +208,7 @@
           <a:p>
             <a:fld id="{C4FC65C6-6085-4244-82B2-63B076D03E9C}" type="datetimeFigureOut">
               <a:rPr lang="en-US" smtClean="0"/>
-              <a:t>10/28/25</a:t>
+              <a:t>10/29/25</a:t>
             </a:fld>
             <a:endParaRPr lang="en-US"/>
           </a:p>
@@ -534,15 +536,7 @@
             </a:r>
             <a:r>
               <a:rPr lang="en-US" dirty="0"/>
-              <a:t> for </a:t>
-            </a:r>
-            <a:r>
-              <a:rPr lang="en-US" dirty="0" err="1"/>
-              <a:t>Blattabacterium</a:t>
-            </a:r>
-            <a:r>
-              <a:rPr lang="en-US" dirty="0"/>
-              <a:t> HGT events</a:t>
+              <a:t> for Blattabacterium HGT events</a:t>
             </a:r>
           </a:p>
           <a:p>
@@ -686,15 +680,7 @@
             </a:r>
             <a:r>
               <a:rPr lang="en-US" dirty="0"/>
-              <a:t> for </a:t>
-            </a:r>
-            <a:r>
-              <a:rPr lang="en-US" dirty="0" err="1"/>
-              <a:t>Blattabacterium</a:t>
-            </a:r>
-            <a:r>
-              <a:rPr lang="en-US" dirty="0"/>
-              <a:t> HGT events</a:t>
+              <a:t> for Blattabacterium HGT events</a:t>
             </a:r>
           </a:p>
           <a:p>
@@ -902,68 +888,59 @@
           <a:bodyPr/>
           <a:lstStyle/>
           <a:p>
-            <a:r>
-              <a:rPr lang="en-US" dirty="0"/>
-              <a:t>A. Cladogram of taxa </a:t>
-            </a:r>
-            <a:r>
-              <a:rPr lang="en-US" dirty="0" err="1"/>
-              <a:t>analysed</a:t>
-            </a:r>
-            <a:r>
-              <a:rPr lang="en-US" dirty="0"/>
-              <a:t> for </a:t>
-            </a:r>
-            <a:r>
-              <a:rPr lang="en-US" dirty="0" err="1"/>
-              <a:t>Blattabacterium</a:t>
-            </a:r>
-            <a:r>
-              <a:rPr lang="en-US" dirty="0"/>
-              <a:t> HGT events</a:t>
-            </a:r>
-          </a:p>
-          <a:p>
-            <a:r>
-              <a:rPr lang="en-US" dirty="0"/>
-              <a:t>Nodes show divergence times (Ma) from Beasley-Hall et al (2021: for nodes internal to top 12 taxa) and Evangelista et al (2019: for nodes internal to remaining 6 taxa). One exception is value between P. lata and P. cribrata, which is from Adams et al 2024. </a:t>
-            </a:r>
-          </a:p>
-          <a:p>
-            <a:r>
-              <a:rPr lang="en-US" dirty="0"/>
-              <a:t>Comment 1: Could add numbers of genic vs intergenic to (A)</a:t>
-            </a:r>
+            <a:pPr marL="0" marR="0" lvl="0" indent="0" algn="l" defTabSz="914400" rtl="0" eaLnBrk="1" fontAlgn="auto" latinLnBrk="0" hangingPunct="1">
+              <a:lnSpc>
+                <a:spcPct val="100000"/>
+              </a:lnSpc>
+              <a:spcBef>
+                <a:spcPts val="0"/>
+              </a:spcBef>
+              <a:spcAft>
+                <a:spcPts val="0"/>
+              </a:spcAft>
+              <a:buClrTx/>
+              <a:buSzTx/>
+              <a:buFontTx/>
+              <a:buNone/>
+              <a:tabLst/>
+              <a:defRPr/>
+            </a:pPr>
+            <a:r>
+              <a:rPr lang="en-AU" sz="1200" b="1" kern="1200" dirty="0">
+                <a:solidFill>
+                  <a:schemeClr val="tx1"/>
+                </a:solidFill>
+                <a:effectLst/>
+                <a:latin typeface="+mn-lt"/>
+                <a:ea typeface="+mn-ea"/>
+                <a:cs typeface="+mn-cs"/>
+              </a:rPr>
+              <a:t>Figure 4.3</a:t>
+            </a:r>
+            <a:r>
+              <a:rPr lang="en-AU" sz="1200" kern="1200" dirty="0">
+                <a:solidFill>
+                  <a:schemeClr val="tx1"/>
+                </a:solidFill>
+                <a:effectLst/>
+                <a:latin typeface="+mn-lt"/>
+                <a:ea typeface="+mn-ea"/>
+                <a:cs typeface="+mn-cs"/>
+              </a:rPr>
+              <a:t>. Examples of two HGT insertions used for ‘aging’ analysis. The right panel shows homology of each insertion and its 5 kb flanking regions across species: green denotes HGT inserts, blue flanking regions, with red and blue bands indicating forward and inverted homology (darker shades = higher similarity). The left phylogeny is based on Chapter 3; species lacking the insertion are shown as a dashed line. Red arrows indicate the inferred timing of HGT insertions.</a:t>
+            </a:r>
+            <a:endParaRPr lang="en-GB" sz="1200" kern="1200" dirty="0">
+              <a:solidFill>
+                <a:schemeClr val="tx1"/>
+              </a:solidFill>
+              <a:effectLst/>
+              <a:latin typeface="+mn-lt"/>
+              <a:ea typeface="+mn-ea"/>
+              <a:cs typeface="+mn-cs"/>
+            </a:endParaRPr>
           </a:p>
           <a:p>
             <a:endParaRPr lang="en-US" dirty="0"/>
-          </a:p>
-          <a:p>
-            <a:r>
-              <a:rPr lang="en-US" dirty="0"/>
-              <a:t>B. The plot starts at 50 bp, as this was the minimum. I have a maximum cutoff of 1000 bp (75 of the 41103 markers have been excluded).</a:t>
-            </a:r>
-          </a:p>
-          <a:p>
-            <a:r>
-              <a:rPr lang="en-US" dirty="0"/>
-              <a:t>Comment 1: I’m not sure why there are 2 peaks… I can of course fiddle around with the resolution of this graph and flatten out the 2 peaks (not to be dodgy, but just a more coarse summary of the lengths)</a:t>
-            </a:r>
-          </a:p>
-          <a:p>
-            <a:r>
-              <a:rPr lang="en-US" dirty="0"/>
-              <a:t>Comment 2: I’m hoping to add 2 additional curves to the plot (or as additional plots) – 1 for genic and 1 for intergenic.</a:t>
-            </a:r>
-          </a:p>
-          <a:p>
-            <a:endParaRPr lang="en-US" dirty="0"/>
-          </a:p>
-          <a:p>
-            <a:r>
-              <a:rPr lang="en-US" dirty="0"/>
-              <a:t>C. Placeholder for Leo figure</a:t>
-            </a:r>
           </a:p>
         </p:txBody>
       </p:sp>
@@ -993,7 +970,7 @@
     </p:spTree>
     <p:extLst>
       <p:ext uri="{BB962C8B-B14F-4D97-AF65-F5344CB8AC3E}">
-        <p14:creationId xmlns:p14="http://schemas.microsoft.com/office/powerpoint/2010/main" val="2564932199"/>
+        <p14:creationId xmlns:p14="http://schemas.microsoft.com/office/powerpoint/2010/main" val="578356381"/>
       </p:ext>
     </p:extLst>
   </p:cSld>
@@ -1047,59 +1024,10 @@
           <a:bodyPr/>
           <a:lstStyle/>
           <a:p>
-            <a:pPr marL="0" marR="0" lvl="0" indent="0" algn="l" defTabSz="914400" rtl="0" eaLnBrk="1" fontAlgn="auto" latinLnBrk="0" hangingPunct="1">
-              <a:lnSpc>
-                <a:spcPct val="100000"/>
-              </a:lnSpc>
-              <a:spcBef>
-                <a:spcPts val="0"/>
-              </a:spcBef>
-              <a:spcAft>
-                <a:spcPts val="0"/>
-              </a:spcAft>
-              <a:buClrTx/>
-              <a:buSzTx/>
-              <a:buFontTx/>
-              <a:buNone/>
-              <a:tabLst/>
-              <a:defRPr/>
-            </a:pPr>
-            <a:r>
-              <a:rPr lang="en-AU" sz="1200" b="1" kern="1200" dirty="0">
-                <a:solidFill>
-                  <a:schemeClr val="tx1"/>
-                </a:solidFill>
-                <a:effectLst/>
-                <a:latin typeface="+mn-lt"/>
-                <a:ea typeface="+mn-ea"/>
-                <a:cs typeface="+mn-cs"/>
-              </a:rPr>
-              <a:t>Figure 4.3</a:t>
-            </a:r>
-            <a:r>
-              <a:rPr lang="en-AU" sz="1200" kern="1200" dirty="0">
-                <a:solidFill>
-                  <a:schemeClr val="tx1"/>
-                </a:solidFill>
-                <a:effectLst/>
-                <a:latin typeface="+mn-lt"/>
-                <a:ea typeface="+mn-ea"/>
-                <a:cs typeface="+mn-cs"/>
-              </a:rPr>
-              <a:t>. Examples of two HGT insertions used for ‘aging’ analysis. The right panel shows homology of each insertion and its 5 kb flanking regions across species: green denotes HGT inserts, blue flanking regions, with red and blue bands indicating forward and inverted homology (darker shades = higher similarity). The left phylogeny is based on Chapter 3; species lacking the insertion are shown as a dashed line. Red arrows indicate the inferred timing of HGT insertions.</a:t>
-            </a:r>
-            <a:endParaRPr lang="en-GB" sz="1200" kern="1200" dirty="0">
-              <a:solidFill>
-                <a:schemeClr val="tx1"/>
-              </a:solidFill>
-              <a:effectLst/>
-              <a:latin typeface="+mn-lt"/>
-              <a:ea typeface="+mn-ea"/>
-              <a:cs typeface="+mn-cs"/>
-            </a:endParaRPr>
-          </a:p>
-          <a:p>
-            <a:endParaRPr lang="en-US" dirty="0"/>
+            <a:r>
+              <a:rPr lang="en-US" dirty="0"/>
+              <a:t>Example of a chimeric HGT insertion from P. tryoni tegminifera. The top sequence is divided into seven segments, while the circular map below represents the source genome of Blattabacterium cuenoti (CP142624.1). Numbers below the insertion indicate the corresponding genomic positions, with yellow labels marking specific coordinates.</a:t>
+            </a:r>
           </a:p>
         </p:txBody>
       </p:sp>
@@ -1129,7 +1057,7 @@
     </p:spTree>
     <p:extLst>
       <p:ext uri="{BB962C8B-B14F-4D97-AF65-F5344CB8AC3E}">
-        <p14:creationId xmlns:p14="http://schemas.microsoft.com/office/powerpoint/2010/main" val="578356381"/>
+        <p14:creationId xmlns:p14="http://schemas.microsoft.com/office/powerpoint/2010/main" val="2973060748"/>
       </p:ext>
     </p:extLst>
   </p:cSld>
@@ -1185,27 +1113,45 @@
           <a:p>
             <a:r>
               <a:rPr lang="en-US" dirty="0"/>
-              <a:t>Figure 4.4. Example of a chimeric HGT insertion from P. tryoni tegminifera. The top sequence is divided into seven segments, while the circular map below represents the source genome of </a:t>
+              <a:t>A. Cladogram of taxa </a:t>
             </a:r>
             <a:r>
               <a:rPr lang="en-US" dirty="0" err="1"/>
-              <a:t>Blattabacterium</a:t>
+              <a:t>analysed</a:t>
             </a:r>
             <a:r>
               <a:rPr lang="en-US" dirty="0"/>
-              <a:t> </a:t>
-            </a:r>
-            <a:r>
-              <a:rPr lang="en-US" dirty="0" err="1"/>
-              <a:t>cuenoti</a:t>
-            </a:r>
+              <a:t> for Blattabacterium HGT events</a:t>
+            </a:r>
+          </a:p>
+          <a:p>
             <a:r>
               <a:rPr lang="en-US" dirty="0"/>
-              <a:t> (CP142624.1). </a:t>
-            </a:r>
-            <a:r>
-              <a:rPr lang="en-US"/>
-              <a:t>Numbers below the insertion indicate the corresponding genomic positions, with yellow labels marking specific coordinates.</a:t>
+              <a:t>Nodes show divergence times (Ma) from Beasley-Hall et al (2021: for nodes internal to top 12 taxa) and Evangelista et al (2019: for nodes internal to remaining 6 taxa). One exception is value between P. lata and P. cribrata, which is from Adams et al 2024. </a:t>
+            </a:r>
+          </a:p>
+          <a:p>
+            <a:r>
+              <a:rPr lang="en-US" dirty="0"/>
+              <a:t>Comment 1: Could add numbers of genic vs intergenic to (A)</a:t>
+            </a:r>
+          </a:p>
+          <a:p>
+            <a:endParaRPr lang="en-US" dirty="0"/>
+          </a:p>
+          <a:p>
+            <a:r>
+              <a:rPr lang="en-US" dirty="0"/>
+              <a:t>B. The plot starts at 50 bp, as this was the minimum. I have a maximum cutoff of 1000 bp (75 of the 41103 markers have been excluded).</a:t>
+            </a:r>
+          </a:p>
+          <a:p>
+            <a:endParaRPr lang="en-US" dirty="0"/>
+          </a:p>
+          <a:p>
+            <a:r>
+              <a:rPr lang="en-US" dirty="0"/>
+              <a:t>C. Placeholder for Leo figure</a:t>
             </a:r>
           </a:p>
         </p:txBody>
@@ -1227,7 +1173,7 @@
           <a:p>
             <a:fld id="{AFCB7D11-0DA4-4649-ACEB-1F19D5C36BF9}" type="slidenum">
               <a:rPr lang="en-US" smtClean="0"/>
-              <a:t>9</a:t>
+              <a:t>10</a:t>
             </a:fld>
             <a:endParaRPr lang="en-US"/>
           </a:p>
@@ -1236,7 +1182,217 @@
     </p:spTree>
     <p:extLst>
       <p:ext uri="{BB962C8B-B14F-4D97-AF65-F5344CB8AC3E}">
-        <p14:creationId xmlns:p14="http://schemas.microsoft.com/office/powerpoint/2010/main" val="2973060748"/>
+        <p14:creationId xmlns:p14="http://schemas.microsoft.com/office/powerpoint/2010/main" val="2564932199"/>
+      </p:ext>
+    </p:extLst>
+  </p:cSld>
+  <p:clrMapOvr>
+    <a:masterClrMapping/>
+  </p:clrMapOvr>
+</p:notes>
+</file>
+
+<file path=ppt/notesSlides/notesSlide7.xml><?xml version="1.0" encoding="utf-8"?>
+<p:notes xmlns:a="http://schemas.openxmlformats.org/drawingml/2006/main" xmlns:r="http://schemas.openxmlformats.org/officeDocument/2006/relationships" xmlns:p="http://schemas.openxmlformats.org/presentationml/2006/main">
+  <p:cSld>
+    <p:spTree>
+      <p:nvGrpSpPr>
+        <p:cNvPr id="1" name=""/>
+        <p:cNvGrpSpPr/>
+        <p:nvPr/>
+      </p:nvGrpSpPr>
+      <p:grpSpPr>
+        <a:xfrm>
+          <a:off x="0" y="0"/>
+          <a:ext cx="0" cy="0"/>
+          <a:chOff x="0" y="0"/>
+          <a:chExt cx="0" cy="0"/>
+        </a:xfrm>
+      </p:grpSpPr>
+      <p:sp>
+        <p:nvSpPr>
+          <p:cNvPr id="2" name="Slide Image Placeholder 1"/>
+          <p:cNvSpPr>
+            <a:spLocks noGrp="1" noRot="1" noChangeAspect="1"/>
+          </p:cNvSpPr>
+          <p:nvPr>
+            <p:ph type="sldImg"/>
+          </p:nvPr>
+        </p:nvSpPr>
+        <p:spPr/>
+      </p:sp>
+      <p:sp>
+        <p:nvSpPr>
+          <p:cNvPr id="3" name="Notes Placeholder 2"/>
+          <p:cNvSpPr>
+            <a:spLocks noGrp="1"/>
+          </p:cNvSpPr>
+          <p:nvPr>
+            <p:ph type="body" idx="1"/>
+          </p:nvPr>
+        </p:nvSpPr>
+        <p:spPr/>
+        <p:txBody>
+          <a:bodyPr/>
+          <a:lstStyle/>
+          <a:p>
+            <a:pPr marL="228600" indent="-228600">
+              <a:buAutoNum type="alphaUcPeriod"/>
+            </a:pPr>
+            <a:r>
+              <a:rPr lang="en-US" dirty="0"/>
+              <a:t>P-</a:t>
+            </a:r>
+            <a:r>
+              <a:rPr lang="en-US" dirty="0" err="1"/>
+              <a:t>tryoni</a:t>
+            </a:r>
+            <a:r>
+              <a:rPr lang="en-US" dirty="0"/>
+              <a:t>-</a:t>
+            </a:r>
+            <a:r>
+              <a:rPr lang="en-US" dirty="0" err="1"/>
+              <a:t>tryoni</a:t>
+            </a:r>
+            <a:r>
+              <a:rPr lang="en-US" dirty="0"/>
+              <a:t>-</a:t>
+            </a:r>
+            <a:r>
+              <a:rPr lang="en-US" dirty="0" err="1"/>
+              <a:t>Eungella_ageing</a:t>
+            </a:r>
+            <a:r>
+              <a:rPr lang="en-US" dirty="0"/>
+              <a:t>-plot. BLAST %ID against Blattabacterium database - BLAST %ID against insert database </a:t>
+            </a:r>
+          </a:p>
+          <a:p>
+            <a:r>
+              <a:rPr lang="en-US" dirty="0"/>
+              <a:t>B. Examples of one HGT insertions used for ‘aging’ analysis. The right panel shows homology of each insertion and its 5 kb flanking regions across species: green denotes HGT inserts, blue flanking regions, with red and blue bands indicating forward and inverted homology (darker shades = higher similarity). The left phylogeny is based on Chapter 3; species lacking the insertion are shown as a dashed line. Red arrows indicate the inferred timing of HGT insertions.</a:t>
+            </a:r>
+          </a:p>
+          <a:p>
+            <a:endParaRPr lang="en-US" dirty="0"/>
+          </a:p>
+        </p:txBody>
+      </p:sp>
+      <p:sp>
+        <p:nvSpPr>
+          <p:cNvPr id="4" name="Slide Number Placeholder 3"/>
+          <p:cNvSpPr>
+            <a:spLocks noGrp="1"/>
+          </p:cNvSpPr>
+          <p:nvPr>
+            <p:ph type="sldNum" sz="quarter" idx="5"/>
+          </p:nvPr>
+        </p:nvSpPr>
+        <p:spPr/>
+        <p:txBody>
+          <a:bodyPr/>
+          <a:lstStyle/>
+          <a:p>
+            <a:fld id="{AFCB7D11-0DA4-4649-ACEB-1F19D5C36BF9}" type="slidenum">
+              <a:rPr lang="en-US" smtClean="0"/>
+              <a:t>11</a:t>
+            </a:fld>
+            <a:endParaRPr lang="en-US"/>
+          </a:p>
+        </p:txBody>
+      </p:sp>
+    </p:spTree>
+    <p:extLst>
+      <p:ext uri="{BB962C8B-B14F-4D97-AF65-F5344CB8AC3E}">
+        <p14:creationId xmlns:p14="http://schemas.microsoft.com/office/powerpoint/2010/main" val="1427805513"/>
+      </p:ext>
+    </p:extLst>
+  </p:cSld>
+  <p:clrMapOvr>
+    <a:masterClrMapping/>
+  </p:clrMapOvr>
+</p:notes>
+</file>
+
+<file path=ppt/notesSlides/notesSlide8.xml><?xml version="1.0" encoding="utf-8"?>
+<p:notes xmlns:a="http://schemas.openxmlformats.org/drawingml/2006/main" xmlns:r="http://schemas.openxmlformats.org/officeDocument/2006/relationships" xmlns:p="http://schemas.openxmlformats.org/presentationml/2006/main">
+  <p:cSld>
+    <p:spTree>
+      <p:nvGrpSpPr>
+        <p:cNvPr id="1" name=""/>
+        <p:cNvGrpSpPr/>
+        <p:nvPr/>
+      </p:nvGrpSpPr>
+      <p:grpSpPr>
+        <a:xfrm>
+          <a:off x="0" y="0"/>
+          <a:ext cx="0" cy="0"/>
+          <a:chOff x="0" y="0"/>
+          <a:chExt cx="0" cy="0"/>
+        </a:xfrm>
+      </p:grpSpPr>
+      <p:sp>
+        <p:nvSpPr>
+          <p:cNvPr id="2" name="Slide Image Placeholder 1"/>
+          <p:cNvSpPr>
+            <a:spLocks noGrp="1" noRot="1" noChangeAspect="1"/>
+          </p:cNvSpPr>
+          <p:nvPr>
+            <p:ph type="sldImg"/>
+          </p:nvPr>
+        </p:nvSpPr>
+        <p:spPr/>
+      </p:sp>
+      <p:sp>
+        <p:nvSpPr>
+          <p:cNvPr id="3" name="Notes Placeholder 2"/>
+          <p:cNvSpPr>
+            <a:spLocks noGrp="1"/>
+          </p:cNvSpPr>
+          <p:nvPr>
+            <p:ph type="body" idx="1"/>
+          </p:nvPr>
+        </p:nvSpPr>
+        <p:spPr/>
+        <p:txBody>
+          <a:bodyPr/>
+          <a:lstStyle/>
+          <a:p>
+            <a:r>
+              <a:rPr lang="en-US" dirty="0"/>
+              <a:t>Example of a chimeric HGT insertion from P. tryoni tegminifera. The top sequence is divided into seven segments, while the circular map below represents the source genome of Blattabacterium cuenoti (CP142624.1). Numbers below the insertion indicate the corresponding genomic positions, with yellow labels marking specific coordinates.</a:t>
+            </a:r>
+          </a:p>
+        </p:txBody>
+      </p:sp>
+      <p:sp>
+        <p:nvSpPr>
+          <p:cNvPr id="4" name="Slide Number Placeholder 3"/>
+          <p:cNvSpPr>
+            <a:spLocks noGrp="1"/>
+          </p:cNvSpPr>
+          <p:nvPr>
+            <p:ph type="sldNum" sz="quarter" idx="5"/>
+          </p:nvPr>
+        </p:nvSpPr>
+        <p:spPr/>
+        <p:txBody>
+          <a:bodyPr/>
+          <a:lstStyle/>
+          <a:p>
+            <a:fld id="{AFCB7D11-0DA4-4649-ACEB-1F19D5C36BF9}" type="slidenum">
+              <a:rPr lang="en-US" smtClean="0"/>
+              <a:t>12</a:t>
+            </a:fld>
+            <a:endParaRPr lang="en-US"/>
+          </a:p>
+        </p:txBody>
+      </p:sp>
+    </p:spTree>
+    <p:extLst>
+      <p:ext uri="{BB962C8B-B14F-4D97-AF65-F5344CB8AC3E}">
+        <p14:creationId xmlns:p14="http://schemas.microsoft.com/office/powerpoint/2010/main" val="1015573314"/>
       </p:ext>
     </p:extLst>
   </p:cSld>
@@ -1393,7 +1549,7 @@
           <a:p>
             <a:fld id="{C2B98897-90D8-9D4D-95EE-51EF37A9743C}" type="datetimeFigureOut">
               <a:rPr lang="en-US" smtClean="0"/>
-              <a:t>10/28/25</a:t>
+              <a:t>10/29/25</a:t>
             </a:fld>
             <a:endParaRPr lang="en-US"/>
           </a:p>
@@ -1591,7 +1747,7 @@
           <a:p>
             <a:fld id="{C2B98897-90D8-9D4D-95EE-51EF37A9743C}" type="datetimeFigureOut">
               <a:rPr lang="en-US" smtClean="0"/>
-              <a:t>10/28/25</a:t>
+              <a:t>10/29/25</a:t>
             </a:fld>
             <a:endParaRPr lang="en-US"/>
           </a:p>
@@ -1799,7 +1955,7 @@
           <a:p>
             <a:fld id="{C2B98897-90D8-9D4D-95EE-51EF37A9743C}" type="datetimeFigureOut">
               <a:rPr lang="en-US" smtClean="0"/>
-              <a:t>10/28/25</a:t>
+              <a:t>10/29/25</a:t>
             </a:fld>
             <a:endParaRPr lang="en-US"/>
           </a:p>
@@ -1997,7 +2153,7 @@
           <a:p>
             <a:fld id="{C2B98897-90D8-9D4D-95EE-51EF37A9743C}" type="datetimeFigureOut">
               <a:rPr lang="en-US" smtClean="0"/>
-              <a:t>10/28/25</a:t>
+              <a:t>10/29/25</a:t>
             </a:fld>
             <a:endParaRPr lang="en-US"/>
           </a:p>
@@ -2272,7 +2428,7 @@
           <a:p>
             <a:fld id="{C2B98897-90D8-9D4D-95EE-51EF37A9743C}" type="datetimeFigureOut">
               <a:rPr lang="en-US" smtClean="0"/>
-              <a:t>10/28/25</a:t>
+              <a:t>10/29/25</a:t>
             </a:fld>
             <a:endParaRPr lang="en-US"/>
           </a:p>
@@ -2537,7 +2693,7 @@
           <a:p>
             <a:fld id="{C2B98897-90D8-9D4D-95EE-51EF37A9743C}" type="datetimeFigureOut">
               <a:rPr lang="en-US" smtClean="0"/>
-              <a:t>10/28/25</a:t>
+              <a:t>10/29/25</a:t>
             </a:fld>
             <a:endParaRPr lang="en-US"/>
           </a:p>
@@ -2949,7 +3105,7 @@
           <a:p>
             <a:fld id="{C2B98897-90D8-9D4D-95EE-51EF37A9743C}" type="datetimeFigureOut">
               <a:rPr lang="en-US" smtClean="0"/>
-              <a:t>10/28/25</a:t>
+              <a:t>10/29/25</a:t>
             </a:fld>
             <a:endParaRPr lang="en-US"/>
           </a:p>
@@ -3090,7 +3246,7 @@
           <a:p>
             <a:fld id="{C2B98897-90D8-9D4D-95EE-51EF37A9743C}" type="datetimeFigureOut">
               <a:rPr lang="en-US" smtClean="0"/>
-              <a:t>10/28/25</a:t>
+              <a:t>10/29/25</a:t>
             </a:fld>
             <a:endParaRPr lang="en-US"/>
           </a:p>
@@ -3203,7 +3359,7 @@
           <a:p>
             <a:fld id="{C2B98897-90D8-9D4D-95EE-51EF37A9743C}" type="datetimeFigureOut">
               <a:rPr lang="en-US" smtClean="0"/>
-              <a:t>10/28/25</a:t>
+              <a:t>10/29/25</a:t>
             </a:fld>
             <a:endParaRPr lang="en-US"/>
           </a:p>
@@ -3514,7 +3670,7 @@
           <a:p>
             <a:fld id="{C2B98897-90D8-9D4D-95EE-51EF37A9743C}" type="datetimeFigureOut">
               <a:rPr lang="en-US" smtClean="0"/>
-              <a:t>10/28/25</a:t>
+              <a:t>10/29/25</a:t>
             </a:fld>
             <a:endParaRPr lang="en-US"/>
           </a:p>
@@ -3802,7 +3958,7 @@
           <a:p>
             <a:fld id="{C2B98897-90D8-9D4D-95EE-51EF37A9743C}" type="datetimeFigureOut">
               <a:rPr lang="en-US" smtClean="0"/>
-              <a:t>10/28/25</a:t>
+              <a:t>10/29/25</a:t>
             </a:fld>
             <a:endParaRPr lang="en-US"/>
           </a:p>
@@ -4043,7 +4199,7 @@
           <a:p>
             <a:fld id="{C2B98897-90D8-9D4D-95EE-51EF37A9743C}" type="datetimeFigureOut">
               <a:rPr lang="en-US" smtClean="0"/>
-              <a:t>10/28/25</a:t>
+              <a:t>10/29/25</a:t>
             </a:fld>
             <a:endParaRPr lang="en-US"/>
           </a:p>
@@ -8051,7 +8207,7 @@
               <a:t> for </a:t>
             </a:r>
             <a:r>
-              <a:rPr lang="en-US" sz="2400" b="1" i="1" dirty="0" err="1">
+              <a:rPr lang="en-US" sz="2400" b="1" i="1" dirty="0">
                 <a:latin typeface="Arial" panose="020B0604020202020204" pitchFamily="34" charset="0"/>
                 <a:cs typeface="Arial" panose="020B0604020202020204" pitchFamily="34" charset="0"/>
               </a:rPr>
@@ -8920,23 +9076,7 @@
                   <a:srgbClr val="FF0000"/>
                 </a:solidFill>
               </a:rPr>
-              <a:t>right? When I did an audit in early 2025 I found none were </a:t>
-            </a:r>
-            <a:r>
-              <a:rPr lang="en-US" sz="1200" dirty="0" err="1">
-                <a:solidFill>
-                  <a:srgbClr val="FF0000"/>
-                </a:solidFill>
-              </a:rPr>
-              <a:t>Blattabacterium</a:t>
-            </a:r>
-            <a:r>
-              <a:rPr lang="en-US" sz="1200" dirty="0">
-                <a:solidFill>
-                  <a:srgbClr val="FF0000"/>
-                </a:solidFill>
-              </a:rPr>
-              <a:t>?</a:t>
+              <a:t>right? When I did an audit in early 2025 I found none were Blattabacterium?</a:t>
             </a:r>
           </a:p>
         </p:txBody>
@@ -8971,12 +9111,42 @@
           <a:chExt cx="0" cy="0"/>
         </a:xfrm>
       </p:grpSpPr>
-      <p:sp>
-        <p:nvSpPr>
-          <p:cNvPr id="4" name="TextBox 3">
-            <a:extLst>
-              <a:ext uri="{FF2B5EF4-FFF2-40B4-BE49-F238E27FC236}">
-                <a16:creationId xmlns:a16="http://schemas.microsoft.com/office/drawing/2014/main" id="{4CBCCAAD-C40A-0540-A342-CC95BED36479}"/>
+      <p:pic>
+        <p:nvPicPr>
+          <p:cNvPr id="2" name="Picture 1">
+            <a:extLst>
+              <a:ext uri="{FF2B5EF4-FFF2-40B4-BE49-F238E27FC236}">
+                <a16:creationId xmlns:a16="http://schemas.microsoft.com/office/drawing/2014/main" id="{A45A0E29-9F21-FC4B-A4F5-B53517A41FC2}"/>
+              </a:ext>
+            </a:extLst>
+          </p:cNvPr>
+          <p:cNvPicPr>
+            <a:picLocks noChangeAspect="1"/>
+          </p:cNvPicPr>
+          <p:nvPr/>
+        </p:nvPicPr>
+        <p:blipFill>
+          <a:blip r:embed="rId3"/>
+          <a:stretch>
+            <a:fillRect/>
+          </a:stretch>
+        </p:blipFill>
+        <p:spPr>
+          <a:xfrm>
+            <a:off x="75050" y="454968"/>
+            <a:ext cx="6561506" cy="4396430"/>
+          </a:xfrm>
+          <a:prstGeom prst="rect">
+            <a:avLst/>
+          </a:prstGeom>
+        </p:spPr>
+      </p:pic>
+      <p:sp>
+        <p:nvSpPr>
+          <p:cNvPr id="5" name="TextBox 4">
+            <a:extLst>
+              <a:ext uri="{FF2B5EF4-FFF2-40B4-BE49-F238E27FC236}">
+                <a16:creationId xmlns:a16="http://schemas.microsoft.com/office/drawing/2014/main" id="{4F756E17-FE9E-4DC6-F3CF-AABBBF0B49DD}"/>
               </a:ext>
             </a:extLst>
           </p:cNvPr>
@@ -8985,8 +9155,72 @@
         </p:nvSpPr>
         <p:spPr>
           <a:xfrm>
-            <a:off x="152327" y="-28505"/>
-            <a:ext cx="943528" cy="369332"/>
+            <a:off x="7856065" y="3519340"/>
+            <a:ext cx="3343468" cy="830997"/>
+          </a:xfrm>
+          <a:prstGeom prst="rect">
+            <a:avLst/>
+          </a:prstGeom>
+          <a:noFill/>
+        </p:spPr>
+        <p:txBody>
+          <a:bodyPr wrap="square" rtlCol="0">
+            <a:spAutoFit/>
+          </a:bodyPr>
+          <a:lstStyle/>
+          <a:p>
+            <a:pPr algn="ctr"/>
+            <a:r>
+              <a:rPr lang="en-US" sz="1600" b="1" dirty="0">
+                <a:solidFill>
+                  <a:srgbClr val="FF0000"/>
+                </a:solidFill>
+              </a:rPr>
+              <a:t>C. </a:t>
+            </a:r>
+            <a:r>
+              <a:rPr lang="en-US" sz="1600" dirty="0">
+                <a:solidFill>
+                  <a:srgbClr val="FF0000"/>
+                </a:solidFill>
+              </a:rPr>
+              <a:t>Placeholder: depiction of the origin of the insert around the </a:t>
+            </a:r>
+            <a:r>
+              <a:rPr lang="en-US" sz="1600" dirty="0" err="1">
+                <a:solidFill>
+                  <a:srgbClr val="FF0000"/>
+                </a:solidFill>
+              </a:rPr>
+              <a:t>Blatta</a:t>
+            </a:r>
+            <a:r>
+              <a:rPr lang="en-US" sz="1600" dirty="0">
+                <a:solidFill>
+                  <a:srgbClr val="FF0000"/>
+                </a:solidFill>
+              </a:rPr>
+              <a:t> genome (waiting on Leo)</a:t>
+            </a:r>
+          </a:p>
+        </p:txBody>
+      </p:sp>
+      <p:sp>
+        <p:nvSpPr>
+          <p:cNvPr id="7" name="TextBox 6">
+            <a:extLst>
+              <a:ext uri="{FF2B5EF4-FFF2-40B4-BE49-F238E27FC236}">
+                <a16:creationId xmlns:a16="http://schemas.microsoft.com/office/drawing/2014/main" id="{1C0E847B-8FC5-0867-7196-259B77611FF8}"/>
+              </a:ext>
+            </a:extLst>
+          </p:cNvPr>
+          <p:cNvSpPr txBox="1"/>
+          <p:nvPr/>
+        </p:nvSpPr>
+        <p:spPr>
+          <a:xfrm>
+            <a:off x="215683" y="425302"/>
+            <a:ext cx="324128" cy="369332"/>
           </a:xfrm>
           <a:prstGeom prst="rect">
             <a:avLst/>
@@ -9001,17 +9235,48 @@
           <a:p>
             <a:r>
               <a:rPr lang="en-US" b="1" dirty="0"/>
-              <a:t>Figure 2</a:t>
-            </a:r>
-          </a:p>
-        </p:txBody>
-      </p:sp>
-      <p:sp>
-        <p:nvSpPr>
-          <p:cNvPr id="5" name="TextBox 4">
-            <a:extLst>
-              <a:ext uri="{FF2B5EF4-FFF2-40B4-BE49-F238E27FC236}">
-                <a16:creationId xmlns:a16="http://schemas.microsoft.com/office/drawing/2014/main" id="{C10DAFDE-3EB3-4D4D-8B16-A4102844234F}"/>
+              <a:t>A</a:t>
+            </a:r>
+          </a:p>
+        </p:txBody>
+      </p:sp>
+      <p:pic>
+        <p:nvPicPr>
+          <p:cNvPr id="13" name="Picture 12">
+            <a:extLst>
+              <a:ext uri="{FF2B5EF4-FFF2-40B4-BE49-F238E27FC236}">
+                <a16:creationId xmlns:a16="http://schemas.microsoft.com/office/drawing/2014/main" id="{DC883A01-AA48-044E-76DC-460544A87194}"/>
+              </a:ext>
+            </a:extLst>
+          </p:cNvPr>
+          <p:cNvPicPr>
+            <a:picLocks noChangeAspect="1"/>
+          </p:cNvPicPr>
+          <p:nvPr/>
+        </p:nvPicPr>
+        <p:blipFill>
+          <a:blip r:embed="rId4"/>
+          <a:srcRect t="5172"/>
+          <a:stretch>
+            <a:fillRect/>
+          </a:stretch>
+        </p:blipFill>
+        <p:spPr>
+          <a:xfrm>
+            <a:off x="7048374" y="496730"/>
+            <a:ext cx="5104657" cy="2587255"/>
+          </a:xfrm>
+          <a:prstGeom prst="rect">
+            <a:avLst/>
+          </a:prstGeom>
+        </p:spPr>
+      </p:pic>
+      <p:sp>
+        <p:nvSpPr>
+          <p:cNvPr id="14" name="TextBox 13">
+            <a:extLst>
+              <a:ext uri="{FF2B5EF4-FFF2-40B4-BE49-F238E27FC236}">
+                <a16:creationId xmlns:a16="http://schemas.microsoft.com/office/drawing/2014/main" id="{2C6B5942-B39C-46A8-0714-63EF48E22894}"/>
               </a:ext>
             </a:extLst>
           </p:cNvPr>
@@ -9020,8 +9285,8 @@
         </p:nvSpPr>
         <p:spPr>
           <a:xfrm>
-            <a:off x="1544595" y="2211859"/>
-            <a:ext cx="4593309" cy="1200329"/>
+            <a:off x="6720534" y="425302"/>
+            <a:ext cx="314510" cy="369332"/>
           </a:xfrm>
           <a:prstGeom prst="rect">
             <a:avLst/>
@@ -9035,36 +9300,537 @@
           <a:lstStyle/>
           <a:p>
             <a:r>
-              <a:rPr lang="en-US" dirty="0" err="1"/>
-              <a:t>Zhuzhi</a:t>
-            </a:r>
-            <a:r>
-              <a:rPr lang="en-US" dirty="0"/>
-              <a:t> figure.</a:t>
-            </a:r>
-          </a:p>
-          <a:p>
-            <a:endParaRPr lang="en-US" dirty="0"/>
-          </a:p>
-          <a:p>
-            <a:r>
-              <a:rPr lang="en-US" dirty="0"/>
-              <a:t>Also maybe a couple of figure about old inserts</a:t>
-            </a:r>
-          </a:p>
-          <a:p>
-            <a:r>
-              <a:rPr lang="en-US" dirty="0"/>
-              <a:t>- An example from my one, and </a:t>
-            </a:r>
-            <a:r>
-              <a:rPr lang="en-US" dirty="0" err="1"/>
-              <a:t>Zhuzhi’s</a:t>
-            </a:r>
-            <a:r>
-              <a:rPr lang="en-US" dirty="0"/>
-              <a:t> one.</a:t>
-            </a:r>
+              <a:rPr lang="en-US" b="1" dirty="0"/>
+              <a:t>B</a:t>
+            </a:r>
+          </a:p>
+        </p:txBody>
+      </p:sp>
+    </p:spTree>
+    <p:extLst>
+      <p:ext uri="{BB962C8B-B14F-4D97-AF65-F5344CB8AC3E}">
+        <p14:creationId xmlns:p14="http://schemas.microsoft.com/office/powerpoint/2010/main" val="2560380269"/>
+      </p:ext>
+    </p:extLst>
+  </p:cSld>
+  <p:clrMapOvr>
+    <a:masterClrMapping/>
+  </p:clrMapOvr>
+</p:sld>
+</file>
+
+<file path=ppt/slides/slide11.xml><?xml version="1.0" encoding="utf-8"?>
+<p:sld xmlns:a="http://schemas.openxmlformats.org/drawingml/2006/main" xmlns:r="http://schemas.openxmlformats.org/officeDocument/2006/relationships" xmlns:p="http://schemas.openxmlformats.org/presentationml/2006/main">
+  <p:cSld>
+    <p:spTree>
+      <p:nvGrpSpPr>
+        <p:cNvPr id="1" name=""/>
+        <p:cNvGrpSpPr/>
+        <p:nvPr/>
+      </p:nvGrpSpPr>
+      <p:grpSpPr>
+        <a:xfrm>
+          <a:off x="0" y="0"/>
+          <a:ext cx="0" cy="0"/>
+          <a:chOff x="0" y="0"/>
+          <a:chExt cx="0" cy="0"/>
+        </a:xfrm>
+      </p:grpSpPr>
+      <p:sp>
+        <p:nvSpPr>
+          <p:cNvPr id="4" name="TextBox 3">
+            <a:extLst>
+              <a:ext uri="{FF2B5EF4-FFF2-40B4-BE49-F238E27FC236}">
+                <a16:creationId xmlns:a16="http://schemas.microsoft.com/office/drawing/2014/main" id="{4CBCCAAD-C40A-0540-A342-CC95BED36479}"/>
+              </a:ext>
+            </a:extLst>
+          </p:cNvPr>
+          <p:cNvSpPr txBox="1"/>
+          <p:nvPr/>
+        </p:nvSpPr>
+        <p:spPr>
+          <a:xfrm>
+            <a:off x="152327" y="-28505"/>
+            <a:ext cx="943528" cy="369332"/>
+          </a:xfrm>
+          <a:prstGeom prst="rect">
+            <a:avLst/>
+          </a:prstGeom>
+          <a:noFill/>
+        </p:spPr>
+        <p:txBody>
+          <a:bodyPr wrap="none" rtlCol="0">
+            <a:spAutoFit/>
+          </a:bodyPr>
+          <a:lstStyle/>
+          <a:p>
+            <a:r>
+              <a:rPr lang="en-US" b="1" dirty="0"/>
+              <a:t>Figure 2</a:t>
+            </a:r>
+          </a:p>
+        </p:txBody>
+      </p:sp>
+      <p:pic>
+        <p:nvPicPr>
+          <p:cNvPr id="6" name="Picture 5">
+            <a:extLst>
+              <a:ext uri="{FF2B5EF4-FFF2-40B4-BE49-F238E27FC236}">
+                <a16:creationId xmlns:a16="http://schemas.microsoft.com/office/drawing/2014/main" id="{D2107C2B-7AD9-0940-814D-542810A3F058}"/>
+              </a:ext>
+            </a:extLst>
+          </p:cNvPr>
+          <p:cNvPicPr>
+            <a:picLocks noChangeAspect="1"/>
+          </p:cNvPicPr>
+          <p:nvPr/>
+        </p:nvPicPr>
+        <p:blipFill rotWithShape="1">
+          <a:blip r:embed="rId3"/>
+          <a:srcRect t="52525"/>
+          <a:stretch/>
+        </p:blipFill>
+        <p:spPr>
+          <a:xfrm>
+            <a:off x="6369518" y="1648788"/>
+            <a:ext cx="5689283" cy="3981303"/>
+          </a:xfrm>
+          <a:prstGeom prst="rect">
+            <a:avLst/>
+          </a:prstGeom>
+        </p:spPr>
+      </p:pic>
+      <p:pic>
+        <p:nvPicPr>
+          <p:cNvPr id="7" name="Picture 6">
+            <a:extLst>
+              <a:ext uri="{FF2B5EF4-FFF2-40B4-BE49-F238E27FC236}">
+                <a16:creationId xmlns:a16="http://schemas.microsoft.com/office/drawing/2014/main" id="{4D1CA6F0-055A-C240-A4FC-6BEFEB8FFA56}"/>
+              </a:ext>
+            </a:extLst>
+          </p:cNvPr>
+          <p:cNvPicPr>
+            <a:picLocks noChangeAspect="1"/>
+          </p:cNvPicPr>
+          <p:nvPr/>
+        </p:nvPicPr>
+        <p:blipFill rotWithShape="1">
+          <a:blip r:embed="rId4"/>
+          <a:srcRect l="2701" t="7745" r="2136" b="6008"/>
+          <a:stretch/>
+        </p:blipFill>
+        <p:spPr>
+          <a:xfrm>
+            <a:off x="936970" y="1852864"/>
+            <a:ext cx="5423723" cy="3433730"/>
+          </a:xfrm>
+          <a:prstGeom prst="rect">
+            <a:avLst/>
+          </a:prstGeom>
+        </p:spPr>
+      </p:pic>
+      <p:sp>
+        <p:nvSpPr>
+          <p:cNvPr id="2" name="TextBox 1">
+            <a:extLst>
+              <a:ext uri="{FF2B5EF4-FFF2-40B4-BE49-F238E27FC236}">
+                <a16:creationId xmlns:a16="http://schemas.microsoft.com/office/drawing/2014/main" id="{633D4B2A-37ED-CE4F-938D-1864D4E6B025}"/>
+              </a:ext>
+            </a:extLst>
+          </p:cNvPr>
+          <p:cNvSpPr txBox="1"/>
+          <p:nvPr/>
+        </p:nvSpPr>
+        <p:spPr>
+          <a:xfrm>
+            <a:off x="2094074" y="4445366"/>
+            <a:ext cx="1241562" cy="430887"/>
+          </a:xfrm>
+          <a:prstGeom prst="rect">
+            <a:avLst/>
+          </a:prstGeom>
+          <a:noFill/>
+        </p:spPr>
+        <p:txBody>
+          <a:bodyPr wrap="square" rtlCol="0">
+            <a:spAutoFit/>
+          </a:bodyPr>
+          <a:lstStyle/>
+          <a:p>
+            <a:r>
+              <a:rPr lang="en-US" sz="1100" dirty="0"/>
+              <a:t>Putative ancestral inserts</a:t>
+            </a:r>
+          </a:p>
+        </p:txBody>
+      </p:sp>
+      <p:sp>
+        <p:nvSpPr>
+          <p:cNvPr id="8" name="TextBox 7">
+            <a:extLst>
+              <a:ext uri="{FF2B5EF4-FFF2-40B4-BE49-F238E27FC236}">
+                <a16:creationId xmlns:a16="http://schemas.microsoft.com/office/drawing/2014/main" id="{C1A254C8-E221-074A-8EC7-674BF6886A40}"/>
+              </a:ext>
+            </a:extLst>
+          </p:cNvPr>
+          <p:cNvSpPr txBox="1"/>
+          <p:nvPr/>
+        </p:nvSpPr>
+        <p:spPr>
+          <a:xfrm>
+            <a:off x="3862937" y="2027575"/>
+            <a:ext cx="1528056" cy="430887"/>
+          </a:xfrm>
+          <a:prstGeom prst="rect">
+            <a:avLst/>
+          </a:prstGeom>
+          <a:noFill/>
+        </p:spPr>
+        <p:txBody>
+          <a:bodyPr wrap="square" rtlCol="0">
+            <a:spAutoFit/>
+          </a:bodyPr>
+          <a:lstStyle/>
+          <a:p>
+            <a:pPr algn="r"/>
+            <a:r>
+              <a:rPr lang="en-US" sz="1100" dirty="0"/>
+              <a:t>Putative contemporary inserts</a:t>
+            </a:r>
+          </a:p>
+        </p:txBody>
+      </p:sp>
+      <p:sp>
+        <p:nvSpPr>
+          <p:cNvPr id="9" name="TextBox 8">
+            <a:extLst>
+              <a:ext uri="{FF2B5EF4-FFF2-40B4-BE49-F238E27FC236}">
+                <a16:creationId xmlns:a16="http://schemas.microsoft.com/office/drawing/2014/main" id="{A1AB082A-F420-0C48-91D5-4F7BF95C306D}"/>
+              </a:ext>
+            </a:extLst>
+          </p:cNvPr>
+          <p:cNvSpPr txBox="1"/>
+          <p:nvPr/>
+        </p:nvSpPr>
+        <p:spPr>
+          <a:xfrm>
+            <a:off x="4082441" y="3736051"/>
+            <a:ext cx="1281120" cy="261610"/>
+          </a:xfrm>
+          <a:prstGeom prst="rect">
+            <a:avLst/>
+          </a:prstGeom>
+          <a:noFill/>
+        </p:spPr>
+        <p:txBody>
+          <a:bodyPr wrap="none" rtlCol="0">
+            <a:spAutoFit/>
+          </a:bodyPr>
+          <a:lstStyle/>
+          <a:p>
+            <a:r>
+              <a:rPr lang="en-US" sz="1100" dirty="0"/>
+              <a:t>Unable to infer age</a:t>
+            </a:r>
+          </a:p>
+        </p:txBody>
+      </p:sp>
+      <p:sp>
+        <p:nvSpPr>
+          <p:cNvPr id="3" name="TextBox 2">
+            <a:extLst>
+              <a:ext uri="{FF2B5EF4-FFF2-40B4-BE49-F238E27FC236}">
+                <a16:creationId xmlns:a16="http://schemas.microsoft.com/office/drawing/2014/main" id="{56561D6C-B0AC-0E48-A749-34E5EC08CA93}"/>
+              </a:ext>
+            </a:extLst>
+          </p:cNvPr>
+          <p:cNvSpPr txBox="1"/>
+          <p:nvPr/>
+        </p:nvSpPr>
+        <p:spPr>
+          <a:xfrm>
+            <a:off x="3177302" y="5230862"/>
+            <a:ext cx="1064779" cy="307777"/>
+          </a:xfrm>
+          <a:prstGeom prst="rect">
+            <a:avLst/>
+          </a:prstGeom>
+          <a:noFill/>
+        </p:spPr>
+        <p:txBody>
+          <a:bodyPr wrap="none" rtlCol="0">
+            <a:spAutoFit/>
+          </a:bodyPr>
+          <a:lstStyle/>
+          <a:p>
+            <a:r>
+              <a:rPr lang="en-US" sz="1400" dirty="0"/>
+              <a:t>Insert count</a:t>
+            </a:r>
+          </a:p>
+        </p:txBody>
+      </p:sp>
+      <p:sp>
+        <p:nvSpPr>
+          <p:cNvPr id="10" name="TextBox 9">
+            <a:extLst>
+              <a:ext uri="{FF2B5EF4-FFF2-40B4-BE49-F238E27FC236}">
+                <a16:creationId xmlns:a16="http://schemas.microsoft.com/office/drawing/2014/main" id="{90AA9167-B2F4-DB40-8978-942B5407BF84}"/>
+              </a:ext>
+            </a:extLst>
+          </p:cNvPr>
+          <p:cNvSpPr txBox="1"/>
+          <p:nvPr/>
+        </p:nvSpPr>
+        <p:spPr>
+          <a:xfrm rot="16200000">
+            <a:off x="-308369" y="3261666"/>
+            <a:ext cx="2290755" cy="307777"/>
+          </a:xfrm>
+          <a:prstGeom prst="rect">
+            <a:avLst/>
+          </a:prstGeom>
+          <a:noFill/>
+        </p:spPr>
+        <p:txBody>
+          <a:bodyPr wrap="none" rtlCol="0">
+            <a:spAutoFit/>
+          </a:bodyPr>
+          <a:lstStyle/>
+          <a:p>
+            <a:r>
+              <a:rPr lang="en-US" sz="1400" dirty="0"/>
+              <a:t>BLAST identity (%) difference</a:t>
+            </a:r>
+          </a:p>
+        </p:txBody>
+      </p:sp>
+      <p:sp>
+        <p:nvSpPr>
+          <p:cNvPr id="11" name="TextBox 10">
+            <a:extLst>
+              <a:ext uri="{FF2B5EF4-FFF2-40B4-BE49-F238E27FC236}">
+                <a16:creationId xmlns:a16="http://schemas.microsoft.com/office/drawing/2014/main" id="{FDFFE04B-D070-864B-B8B8-CEADF928B4A8}"/>
+              </a:ext>
+            </a:extLst>
+          </p:cNvPr>
+          <p:cNvSpPr txBox="1"/>
+          <p:nvPr/>
+        </p:nvSpPr>
+        <p:spPr>
+          <a:xfrm>
+            <a:off x="563825" y="1753280"/>
+            <a:ext cx="324128" cy="369332"/>
+          </a:xfrm>
+          <a:prstGeom prst="rect">
+            <a:avLst/>
+          </a:prstGeom>
+          <a:noFill/>
+        </p:spPr>
+        <p:txBody>
+          <a:bodyPr wrap="none" rtlCol="0">
+            <a:spAutoFit/>
+          </a:bodyPr>
+          <a:lstStyle/>
+          <a:p>
+            <a:r>
+              <a:rPr lang="en-US" b="1" dirty="0"/>
+              <a:t>A</a:t>
+            </a:r>
+          </a:p>
+        </p:txBody>
+      </p:sp>
+      <p:sp>
+        <p:nvSpPr>
+          <p:cNvPr id="12" name="TextBox 11">
+            <a:extLst>
+              <a:ext uri="{FF2B5EF4-FFF2-40B4-BE49-F238E27FC236}">
+                <a16:creationId xmlns:a16="http://schemas.microsoft.com/office/drawing/2014/main" id="{276F2C94-E046-8F49-A92D-49719149D358}"/>
+              </a:ext>
+            </a:extLst>
+          </p:cNvPr>
+          <p:cNvSpPr txBox="1"/>
+          <p:nvPr/>
+        </p:nvSpPr>
+        <p:spPr>
+          <a:xfrm>
+            <a:off x="6360693" y="1753280"/>
+            <a:ext cx="314510" cy="369332"/>
+          </a:xfrm>
+          <a:prstGeom prst="rect">
+            <a:avLst/>
+          </a:prstGeom>
+          <a:noFill/>
+        </p:spPr>
+        <p:txBody>
+          <a:bodyPr wrap="none" rtlCol="0">
+            <a:spAutoFit/>
+          </a:bodyPr>
+          <a:lstStyle/>
+          <a:p>
+            <a:r>
+              <a:rPr lang="en-US" b="1" dirty="0"/>
+              <a:t>B</a:t>
+            </a:r>
+          </a:p>
+        </p:txBody>
+      </p:sp>
+      <p:sp>
+        <p:nvSpPr>
+          <p:cNvPr id="13" name="Oval 12">
+            <a:extLst>
+              <a:ext uri="{FF2B5EF4-FFF2-40B4-BE49-F238E27FC236}">
+                <a16:creationId xmlns:a16="http://schemas.microsoft.com/office/drawing/2014/main" id="{E421327E-452A-CD40-9CB2-DCE4DADC7EB8}"/>
+              </a:ext>
+            </a:extLst>
+          </p:cNvPr>
+          <p:cNvSpPr/>
+          <p:nvPr/>
+        </p:nvSpPr>
+        <p:spPr>
+          <a:xfrm rot="20764211">
+            <a:off x="1270899" y="4637079"/>
+            <a:ext cx="865164" cy="326542"/>
+          </a:xfrm>
+          <a:prstGeom prst="ellipse">
+            <a:avLst/>
+          </a:prstGeom>
+          <a:noFill/>
+          <a:ln w="9525">
+            <a:solidFill>
+              <a:srgbClr val="FF0000"/>
+            </a:solidFill>
+            <a:prstDash val="dash"/>
+          </a:ln>
+        </p:spPr>
+        <p:style>
+          <a:lnRef idx="2">
+            <a:schemeClr val="accent1">
+              <a:shade val="50000"/>
+            </a:schemeClr>
+          </a:lnRef>
+          <a:fillRef idx="1">
+            <a:schemeClr val="accent1"/>
+          </a:fillRef>
+          <a:effectRef idx="0">
+            <a:schemeClr val="accent1"/>
+          </a:effectRef>
+          <a:fontRef idx="minor">
+            <a:schemeClr val="lt1"/>
+          </a:fontRef>
+        </p:style>
+        <p:txBody>
+          <a:bodyPr rtlCol="0" anchor="ctr"/>
+          <a:lstStyle/>
+          <a:p>
+            <a:pPr algn="ctr"/>
+            <a:endParaRPr lang="en-US"/>
+          </a:p>
+        </p:txBody>
+      </p:sp>
+      <p:sp>
+        <p:nvSpPr>
+          <p:cNvPr id="14" name="Oval 13">
+            <a:extLst>
+              <a:ext uri="{FF2B5EF4-FFF2-40B4-BE49-F238E27FC236}">
+                <a16:creationId xmlns:a16="http://schemas.microsoft.com/office/drawing/2014/main" id="{1DAD5DDC-8234-0745-83AA-125A34ABC016}"/>
+              </a:ext>
+            </a:extLst>
+          </p:cNvPr>
+          <p:cNvSpPr/>
+          <p:nvPr/>
+        </p:nvSpPr>
+        <p:spPr>
+          <a:xfrm rot="20764211">
+            <a:off x="5332359" y="2021240"/>
+            <a:ext cx="865164" cy="326542"/>
+          </a:xfrm>
+          <a:prstGeom prst="ellipse">
+            <a:avLst/>
+          </a:prstGeom>
+          <a:noFill/>
+          <a:ln w="9525">
+            <a:solidFill>
+              <a:srgbClr val="FF0000"/>
+            </a:solidFill>
+            <a:prstDash val="dash"/>
+          </a:ln>
+        </p:spPr>
+        <p:style>
+          <a:lnRef idx="2">
+            <a:schemeClr val="accent1">
+              <a:shade val="50000"/>
+            </a:schemeClr>
+          </a:lnRef>
+          <a:fillRef idx="1">
+            <a:schemeClr val="accent1"/>
+          </a:fillRef>
+          <a:effectRef idx="0">
+            <a:schemeClr val="accent1"/>
+          </a:effectRef>
+          <a:fontRef idx="minor">
+            <a:schemeClr val="lt1"/>
+          </a:fontRef>
+        </p:style>
+        <p:txBody>
+          <a:bodyPr rtlCol="0" anchor="ctr"/>
+          <a:lstStyle/>
+          <a:p>
+            <a:pPr algn="ctr"/>
+            <a:endParaRPr lang="en-US"/>
+          </a:p>
+        </p:txBody>
+      </p:sp>
+      <p:sp>
+        <p:nvSpPr>
+          <p:cNvPr id="15" name="Oval 14">
+            <a:extLst>
+              <a:ext uri="{FF2B5EF4-FFF2-40B4-BE49-F238E27FC236}">
+                <a16:creationId xmlns:a16="http://schemas.microsoft.com/office/drawing/2014/main" id="{08A2940A-50E2-9E4E-B45B-7E8B51C98C89}"/>
+              </a:ext>
+            </a:extLst>
+          </p:cNvPr>
+          <p:cNvSpPr/>
+          <p:nvPr/>
+        </p:nvSpPr>
+        <p:spPr>
+          <a:xfrm rot="21257093">
+            <a:off x="1828726" y="3163471"/>
+            <a:ext cx="3824834" cy="642507"/>
+          </a:xfrm>
+          <a:prstGeom prst="ellipse">
+            <a:avLst/>
+          </a:prstGeom>
+          <a:noFill/>
+          <a:ln w="9525">
+            <a:solidFill>
+              <a:srgbClr val="FF0000"/>
+            </a:solidFill>
+            <a:prstDash val="dash"/>
+          </a:ln>
+        </p:spPr>
+        <p:style>
+          <a:lnRef idx="2">
+            <a:schemeClr val="accent1">
+              <a:shade val="50000"/>
+            </a:schemeClr>
+          </a:lnRef>
+          <a:fillRef idx="1">
+            <a:schemeClr val="accent1"/>
+          </a:fillRef>
+          <a:effectRef idx="0">
+            <a:schemeClr val="accent1"/>
+          </a:effectRef>
+          <a:fontRef idx="minor">
+            <a:schemeClr val="lt1"/>
+          </a:fontRef>
+        </p:style>
+        <p:txBody>
+          <a:bodyPr rtlCol="0" anchor="ctr"/>
+          <a:lstStyle/>
+          <a:p>
+            <a:pPr algn="ctr"/>
+            <a:endParaRPr lang="en-US"/>
           </a:p>
         </p:txBody>
       </p:sp>
@@ -9072,6 +9838,157 @@
     <p:extLst>
       <p:ext uri="{BB962C8B-B14F-4D97-AF65-F5344CB8AC3E}">
         <p14:creationId xmlns:p14="http://schemas.microsoft.com/office/powerpoint/2010/main" val="1936291726"/>
+      </p:ext>
+    </p:extLst>
+  </p:cSld>
+  <p:clrMapOvr>
+    <a:masterClrMapping/>
+  </p:clrMapOvr>
+</p:sld>
+</file>
+
+<file path=ppt/slides/slide12.xml><?xml version="1.0" encoding="utf-8"?>
+<p:sld xmlns:a="http://schemas.openxmlformats.org/drawingml/2006/main" xmlns:r="http://schemas.openxmlformats.org/officeDocument/2006/relationships" xmlns:p="http://schemas.openxmlformats.org/presentationml/2006/main">
+  <p:cSld>
+    <p:spTree>
+      <p:nvGrpSpPr>
+        <p:cNvPr id="1" name=""/>
+        <p:cNvGrpSpPr/>
+        <p:nvPr/>
+      </p:nvGrpSpPr>
+      <p:grpSpPr>
+        <a:xfrm>
+          <a:off x="0" y="0"/>
+          <a:ext cx="0" cy="0"/>
+          <a:chOff x="0" y="0"/>
+          <a:chExt cx="0" cy="0"/>
+        </a:xfrm>
+      </p:grpSpPr>
+      <p:pic>
+        <p:nvPicPr>
+          <p:cNvPr id="4" name="Picture 3">
+            <a:extLst>
+              <a:ext uri="{FF2B5EF4-FFF2-40B4-BE49-F238E27FC236}">
+                <a16:creationId xmlns:a16="http://schemas.microsoft.com/office/drawing/2014/main" id="{61BBB3A3-78CA-A200-3731-AABEB7DD0C3F}"/>
+              </a:ext>
+            </a:extLst>
+          </p:cNvPr>
+          <p:cNvPicPr>
+            <a:picLocks noChangeAspect="1"/>
+          </p:cNvPicPr>
+          <p:nvPr/>
+        </p:nvPicPr>
+        <p:blipFill rotWithShape="1">
+          <a:blip r:embed="rId3"/>
+          <a:srcRect t="4855"/>
+          <a:stretch/>
+        </p:blipFill>
+        <p:spPr>
+          <a:xfrm>
+            <a:off x="3230245" y="719667"/>
+            <a:ext cx="5731510" cy="5710025"/>
+          </a:xfrm>
+          <a:prstGeom prst="rect">
+            <a:avLst/>
+          </a:prstGeom>
+        </p:spPr>
+      </p:pic>
+      <p:sp>
+        <p:nvSpPr>
+          <p:cNvPr id="2" name="TextBox 1">
+            <a:extLst>
+              <a:ext uri="{FF2B5EF4-FFF2-40B4-BE49-F238E27FC236}">
+                <a16:creationId xmlns:a16="http://schemas.microsoft.com/office/drawing/2014/main" id="{FAC75DAA-4E26-9941-B0F2-5BE6D09F93CE}"/>
+              </a:ext>
+            </a:extLst>
+          </p:cNvPr>
+          <p:cNvSpPr txBox="1"/>
+          <p:nvPr/>
+        </p:nvSpPr>
+        <p:spPr>
+          <a:xfrm>
+            <a:off x="4944535" y="3124201"/>
+            <a:ext cx="2142066" cy="523220"/>
+          </a:xfrm>
+          <a:prstGeom prst="rect">
+            <a:avLst/>
+          </a:prstGeom>
+          <a:noFill/>
+        </p:spPr>
+        <p:txBody>
+          <a:bodyPr wrap="square" rtlCol="0">
+            <a:spAutoFit/>
+          </a:bodyPr>
+          <a:lstStyle/>
+          <a:p>
+            <a:pPr algn="ctr"/>
+            <a:r>
+              <a:rPr lang="en-US" sz="1400" i="1" dirty="0">
+                <a:latin typeface="Arial" panose="020B0604020202020204" pitchFamily="34" charset="0"/>
+                <a:cs typeface="Arial" panose="020B0604020202020204" pitchFamily="34" charset="0"/>
+              </a:rPr>
+              <a:t>Blattabacterium cuenoti </a:t>
+            </a:r>
+            <a:r>
+              <a:rPr lang="en-US" sz="1400" dirty="0">
+                <a:latin typeface="Arial" panose="020B0604020202020204" pitchFamily="34" charset="0"/>
+                <a:cs typeface="Arial" panose="020B0604020202020204" pitchFamily="34" charset="0"/>
+              </a:rPr>
+              <a:t>genome </a:t>
+            </a:r>
+          </a:p>
+        </p:txBody>
+      </p:sp>
+      <p:sp>
+        <p:nvSpPr>
+          <p:cNvPr id="5" name="TextBox 4">
+            <a:extLst>
+              <a:ext uri="{FF2B5EF4-FFF2-40B4-BE49-F238E27FC236}">
+                <a16:creationId xmlns:a16="http://schemas.microsoft.com/office/drawing/2014/main" id="{1A655766-8F62-3C48-830A-8A34D4AC274A}"/>
+              </a:ext>
+            </a:extLst>
+          </p:cNvPr>
+          <p:cNvSpPr txBox="1"/>
+          <p:nvPr/>
+        </p:nvSpPr>
+        <p:spPr>
+          <a:xfrm>
+            <a:off x="4351868" y="523443"/>
+            <a:ext cx="3191932" cy="307777"/>
+          </a:xfrm>
+          <a:prstGeom prst="rect">
+            <a:avLst/>
+          </a:prstGeom>
+          <a:noFill/>
+        </p:spPr>
+        <p:txBody>
+          <a:bodyPr wrap="square" rtlCol="0">
+            <a:spAutoFit/>
+          </a:bodyPr>
+          <a:lstStyle/>
+          <a:p>
+            <a:pPr algn="ctr"/>
+            <a:r>
+              <a:rPr lang="en-US" sz="1400" i="1" dirty="0">
+                <a:latin typeface="Arial" panose="020B0604020202020204" pitchFamily="34" charset="0"/>
+                <a:cs typeface="Arial" panose="020B0604020202020204" pitchFamily="34" charset="0"/>
+              </a:rPr>
+              <a:t>Panesthia tryoni tegminifera </a:t>
+            </a:r>
+            <a:r>
+              <a:rPr lang="en-US" sz="1400" dirty="0">
+                <a:latin typeface="Arial" panose="020B0604020202020204" pitchFamily="34" charset="0"/>
+                <a:cs typeface="Arial" panose="020B0604020202020204" pitchFamily="34" charset="0"/>
+              </a:rPr>
+              <a:t>contig</a:t>
+            </a:r>
+          </a:p>
+        </p:txBody>
+      </p:sp>
+    </p:spTree>
+    <p:extLst>
+      <p:ext uri="{BB962C8B-B14F-4D97-AF65-F5344CB8AC3E}">
+        <p14:creationId xmlns:p14="http://schemas.microsoft.com/office/powerpoint/2010/main" val="1535606113"/>
       </p:ext>
     </p:extLst>
   </p:cSld>
@@ -9218,7 +10135,7 @@
                 <a:latin typeface="Arial" panose="020B0604020202020204" pitchFamily="34" charset="0"/>
                 <a:cs typeface="Arial" panose="020B0604020202020204" pitchFamily="34" charset="0"/>
               </a:rPr>
-              <a:t>Panesthia gigantea</a:t>
+              <a:t>Parapanesthia gigantea</a:t>
             </a:r>
             <a:endParaRPr lang="en-US" sz="1400" dirty="0">
               <a:latin typeface="Arial" panose="020B0604020202020204" pitchFamily="34" charset="0"/>
@@ -14119,8 +15036,8 @@
         </p:nvCxnSpPr>
         <p:spPr>
           <a:xfrm>
-            <a:off x="6830431" y="1456582"/>
-            <a:ext cx="1872000" cy="0"/>
+            <a:off x="7184393" y="1441834"/>
+            <a:ext cx="1512000" cy="0"/>
           </a:xfrm>
           <a:prstGeom prst="line">
             <a:avLst/>
@@ -15014,7 +15931,7 @@
                 <a:latin typeface="Arial" panose="020B0604020202020204" pitchFamily="34" charset="0"/>
                 <a:cs typeface="Arial" panose="020B0604020202020204" pitchFamily="34" charset="0"/>
               </a:rPr>
-              <a:t>Panesthia gigantea</a:t>
+              <a:t>Parapanesthia gigantea</a:t>
             </a:r>
             <a:endParaRPr lang="en-US" sz="1400" dirty="0">
               <a:latin typeface="Arial" panose="020B0604020202020204" pitchFamily="34" charset="0"/>
@@ -19915,8 +20832,8 @@
         </p:nvCxnSpPr>
         <p:spPr>
           <a:xfrm>
-            <a:off x="6830431" y="1456582"/>
-            <a:ext cx="1872000" cy="0"/>
+            <a:off x="7199140" y="1441834"/>
+            <a:ext cx="1512000" cy="0"/>
           </a:xfrm>
           <a:prstGeom prst="line">
             <a:avLst/>
@@ -20939,10 +21856,10 @@
       </p:grpSpPr>
       <p:pic>
         <p:nvPicPr>
-          <p:cNvPr id="12" name="Picture 11">
-            <a:extLst>
-              <a:ext uri="{FF2B5EF4-FFF2-40B4-BE49-F238E27FC236}">
-                <a16:creationId xmlns:a16="http://schemas.microsoft.com/office/drawing/2014/main" id="{8333BA2C-1347-6CF7-C733-4204EF41CFA7}"/>
+          <p:cNvPr id="4" name="Picture 3">
+            <a:extLst>
+              <a:ext uri="{FF2B5EF4-FFF2-40B4-BE49-F238E27FC236}">
+                <a16:creationId xmlns:a16="http://schemas.microsoft.com/office/drawing/2014/main" id="{78AC1BD0-7DA5-E9BF-1323-A48980C680F0}"/>
               </a:ext>
             </a:extLst>
           </p:cNvPr>
@@ -20959,183 +21876,18 @@
         </p:blipFill>
         <p:spPr>
           <a:xfrm>
-            <a:off x="38969" y="425302"/>
-            <a:ext cx="6579796" cy="4372700"/>
+            <a:off x="3699510" y="-103505"/>
+            <a:ext cx="4617303" cy="6806057"/>
           </a:xfrm>
           <a:prstGeom prst="rect">
             <a:avLst/>
           </a:prstGeom>
         </p:spPr>
       </p:pic>
-      <p:sp>
-        <p:nvSpPr>
-          <p:cNvPr id="5" name="TextBox 4">
-            <a:extLst>
-              <a:ext uri="{FF2B5EF4-FFF2-40B4-BE49-F238E27FC236}">
-                <a16:creationId xmlns:a16="http://schemas.microsoft.com/office/drawing/2014/main" id="{4F756E17-FE9E-4DC6-F3CF-AABBBF0B49DD}"/>
-              </a:ext>
-            </a:extLst>
-          </p:cNvPr>
-          <p:cNvSpPr txBox="1"/>
-          <p:nvPr/>
-        </p:nvSpPr>
-        <p:spPr>
-          <a:xfrm>
-            <a:off x="7856065" y="3519340"/>
-            <a:ext cx="3343468" cy="830997"/>
-          </a:xfrm>
-          <a:prstGeom prst="rect">
-            <a:avLst/>
-          </a:prstGeom>
-          <a:noFill/>
-        </p:spPr>
-        <p:txBody>
-          <a:bodyPr wrap="square" rtlCol="0">
-            <a:spAutoFit/>
-          </a:bodyPr>
-          <a:lstStyle/>
-          <a:p>
-            <a:pPr algn="ctr"/>
-            <a:r>
-              <a:rPr lang="en-US" sz="1600" b="1" dirty="0">
-                <a:solidFill>
-                  <a:srgbClr val="FF0000"/>
-                </a:solidFill>
-              </a:rPr>
-              <a:t>C. </a:t>
-            </a:r>
-            <a:r>
-              <a:rPr lang="en-US" sz="1600" dirty="0">
-                <a:solidFill>
-                  <a:srgbClr val="FF0000"/>
-                </a:solidFill>
-              </a:rPr>
-              <a:t>Placeholder: depiction of the origin of the insert around the </a:t>
-            </a:r>
-            <a:r>
-              <a:rPr lang="en-US" sz="1600" dirty="0" err="1">
-                <a:solidFill>
-                  <a:srgbClr val="FF0000"/>
-                </a:solidFill>
-              </a:rPr>
-              <a:t>Blatta</a:t>
-            </a:r>
-            <a:r>
-              <a:rPr lang="en-US" sz="1600" dirty="0">
-                <a:solidFill>
-                  <a:srgbClr val="FF0000"/>
-                </a:solidFill>
-              </a:rPr>
-              <a:t> genome (waiting on Leo)</a:t>
-            </a:r>
-          </a:p>
-        </p:txBody>
-      </p:sp>
-      <p:sp>
-        <p:nvSpPr>
-          <p:cNvPr id="7" name="TextBox 6">
-            <a:extLst>
-              <a:ext uri="{FF2B5EF4-FFF2-40B4-BE49-F238E27FC236}">
-                <a16:creationId xmlns:a16="http://schemas.microsoft.com/office/drawing/2014/main" id="{1C0E847B-8FC5-0867-7196-259B77611FF8}"/>
-              </a:ext>
-            </a:extLst>
-          </p:cNvPr>
-          <p:cNvSpPr txBox="1"/>
-          <p:nvPr/>
-        </p:nvSpPr>
-        <p:spPr>
-          <a:xfrm>
-            <a:off x="215683" y="425302"/>
-            <a:ext cx="324128" cy="369332"/>
-          </a:xfrm>
-          <a:prstGeom prst="rect">
-            <a:avLst/>
-          </a:prstGeom>
-          <a:noFill/>
-        </p:spPr>
-        <p:txBody>
-          <a:bodyPr wrap="none" rtlCol="0">
-            <a:spAutoFit/>
-          </a:bodyPr>
-          <a:lstStyle/>
-          <a:p>
-            <a:r>
-              <a:rPr lang="en-US" b="1" dirty="0"/>
-              <a:t>A</a:t>
-            </a:r>
-          </a:p>
-        </p:txBody>
-      </p:sp>
-      <p:pic>
-        <p:nvPicPr>
-          <p:cNvPr id="13" name="Picture 12">
-            <a:extLst>
-              <a:ext uri="{FF2B5EF4-FFF2-40B4-BE49-F238E27FC236}">
-                <a16:creationId xmlns:a16="http://schemas.microsoft.com/office/drawing/2014/main" id="{DC883A01-AA48-044E-76DC-460544A87194}"/>
-              </a:ext>
-            </a:extLst>
-          </p:cNvPr>
-          <p:cNvPicPr>
-            <a:picLocks noChangeAspect="1"/>
-          </p:cNvPicPr>
-          <p:nvPr/>
-        </p:nvPicPr>
-        <p:blipFill>
-          <a:blip r:embed="rId4"/>
-          <a:srcRect t="5172"/>
-          <a:stretch>
-            <a:fillRect/>
-          </a:stretch>
-        </p:blipFill>
-        <p:spPr>
-          <a:xfrm>
-            <a:off x="7048374" y="496730"/>
-            <a:ext cx="5104657" cy="2587255"/>
-          </a:xfrm>
-          <a:prstGeom prst="rect">
-            <a:avLst/>
-          </a:prstGeom>
-        </p:spPr>
-      </p:pic>
-      <p:sp>
-        <p:nvSpPr>
-          <p:cNvPr id="14" name="TextBox 13">
-            <a:extLst>
-              <a:ext uri="{FF2B5EF4-FFF2-40B4-BE49-F238E27FC236}">
-                <a16:creationId xmlns:a16="http://schemas.microsoft.com/office/drawing/2014/main" id="{2C6B5942-B39C-46A8-0714-63EF48E22894}"/>
-              </a:ext>
-            </a:extLst>
-          </p:cNvPr>
-          <p:cNvSpPr txBox="1"/>
-          <p:nvPr/>
-        </p:nvSpPr>
-        <p:spPr>
-          <a:xfrm>
-            <a:off x="6720534" y="425302"/>
-            <a:ext cx="314510" cy="369332"/>
-          </a:xfrm>
-          <a:prstGeom prst="rect">
-            <a:avLst/>
-          </a:prstGeom>
-          <a:noFill/>
-        </p:spPr>
-        <p:txBody>
-          <a:bodyPr wrap="none" rtlCol="0">
-            <a:spAutoFit/>
-          </a:bodyPr>
-          <a:lstStyle/>
-          <a:p>
-            <a:r>
-              <a:rPr lang="en-US" b="1" dirty="0"/>
-              <a:t>B</a:t>
-            </a:r>
-          </a:p>
-        </p:txBody>
-      </p:sp>
     </p:spTree>
     <p:extLst>
       <p:ext uri="{BB962C8B-B14F-4D97-AF65-F5344CB8AC3E}">
-        <p14:creationId xmlns:p14="http://schemas.microsoft.com/office/powerpoint/2010/main" val="2560380269"/>
+        <p14:creationId xmlns:p14="http://schemas.microsoft.com/office/powerpoint/2010/main" val="4199959309"/>
       </p:ext>
     </p:extLst>
   </p:cSld>
@@ -21167,7 +21919,7 @@
           <p:cNvPr id="4" name="Picture 3">
             <a:extLst>
               <a:ext uri="{FF2B5EF4-FFF2-40B4-BE49-F238E27FC236}">
-                <a16:creationId xmlns:a16="http://schemas.microsoft.com/office/drawing/2014/main" id="{78AC1BD0-7DA5-E9BF-1323-A48980C680F0}"/>
+                <a16:creationId xmlns:a16="http://schemas.microsoft.com/office/drawing/2014/main" id="{61BBB3A3-78CA-A200-3731-AABEB7DD0C3F}"/>
               </a:ext>
             </a:extLst>
           </p:cNvPr>
@@ -21184,8 +21936,8 @@
         </p:blipFill>
         <p:spPr>
           <a:xfrm>
-            <a:off x="3699510" y="-103505"/>
-            <a:ext cx="4617303" cy="6806057"/>
+            <a:off x="3230245" y="428307"/>
+            <a:ext cx="5731510" cy="6001385"/>
           </a:xfrm>
           <a:prstGeom prst="rect">
             <a:avLst/>
@@ -21195,7 +21947,7 @@
     </p:spTree>
     <p:extLst>
       <p:ext uri="{BB962C8B-B14F-4D97-AF65-F5344CB8AC3E}">
-        <p14:creationId xmlns:p14="http://schemas.microsoft.com/office/powerpoint/2010/main" val="4199959309"/>
+        <p14:creationId xmlns:p14="http://schemas.microsoft.com/office/powerpoint/2010/main" val="2815334628"/>
       </p:ext>
     </p:extLst>
   </p:cSld>
@@ -21224,10 +21976,10 @@
       </p:grpSpPr>
       <p:pic>
         <p:nvPicPr>
-          <p:cNvPr id="4" name="Picture 3">
-            <a:extLst>
-              <a:ext uri="{FF2B5EF4-FFF2-40B4-BE49-F238E27FC236}">
-                <a16:creationId xmlns:a16="http://schemas.microsoft.com/office/drawing/2014/main" id="{61BBB3A3-78CA-A200-3731-AABEB7DD0C3F}"/>
+          <p:cNvPr id="5" name="Picture 4">
+            <a:extLst>
+              <a:ext uri="{FF2B5EF4-FFF2-40B4-BE49-F238E27FC236}">
+                <a16:creationId xmlns:a16="http://schemas.microsoft.com/office/drawing/2014/main" id="{3F65D913-7192-374F-8DD8-295EDAC76DD3}"/>
               </a:ext>
             </a:extLst>
           </p:cNvPr>
@@ -21237,25 +21989,84 @@
           <p:nvPr/>
         </p:nvPicPr>
         <p:blipFill>
-          <a:blip r:embed="rId3"/>
+          <a:blip r:embed="rId2"/>
           <a:stretch>
             <a:fillRect/>
           </a:stretch>
         </p:blipFill>
         <p:spPr>
           <a:xfrm>
-            <a:off x="3230245" y="428307"/>
-            <a:ext cx="5731510" cy="6001385"/>
+            <a:off x="1689107" y="211874"/>
+            <a:ext cx="8985383" cy="6276794"/>
           </a:xfrm>
           <a:prstGeom prst="rect">
             <a:avLst/>
           </a:prstGeom>
         </p:spPr>
       </p:pic>
+      <p:sp>
+        <p:nvSpPr>
+          <p:cNvPr id="6" name="TextBox 5">
+            <a:extLst>
+              <a:ext uri="{FF2B5EF4-FFF2-40B4-BE49-F238E27FC236}">
+                <a16:creationId xmlns:a16="http://schemas.microsoft.com/office/drawing/2014/main" id="{4247A41C-BF5A-F64D-ABE3-09583767864B}"/>
+              </a:ext>
+            </a:extLst>
+          </p:cNvPr>
+          <p:cNvSpPr txBox="1"/>
+          <p:nvPr/>
+        </p:nvSpPr>
+        <p:spPr>
+          <a:xfrm>
+            <a:off x="624468" y="6488668"/>
+            <a:ext cx="3591689" cy="369332"/>
+          </a:xfrm>
+          <a:prstGeom prst="rect">
+            <a:avLst/>
+          </a:prstGeom>
+          <a:noFill/>
+        </p:spPr>
+        <p:txBody>
+          <a:bodyPr wrap="none" rtlCol="0">
+            <a:spAutoFit/>
+          </a:bodyPr>
+          <a:lstStyle/>
+          <a:p>
+            <a:r>
+              <a:rPr lang="en-US" dirty="0"/>
+              <a:t>P-</a:t>
+            </a:r>
+            <a:r>
+              <a:rPr lang="en-US" dirty="0" err="1"/>
+              <a:t>tryoni</a:t>
+            </a:r>
+            <a:r>
+              <a:rPr lang="en-US" dirty="0"/>
+              <a:t>-</a:t>
+            </a:r>
+            <a:r>
+              <a:rPr lang="en-US" dirty="0" err="1"/>
+              <a:t>tryoni</a:t>
+            </a:r>
+            <a:r>
+              <a:rPr lang="en-US" dirty="0"/>
+              <a:t>-</a:t>
+            </a:r>
+            <a:r>
+              <a:rPr lang="en-US" dirty="0" err="1"/>
+              <a:t>Eungella_ageing</a:t>
+            </a:r>
+            <a:r>
+              <a:rPr lang="en-US" dirty="0"/>
+              <a:t>-plot</a:t>
+            </a:r>
+          </a:p>
+        </p:txBody>
+      </p:sp>
     </p:spTree>
     <p:extLst>
       <p:ext uri="{BB962C8B-B14F-4D97-AF65-F5344CB8AC3E}">
-        <p14:creationId xmlns:p14="http://schemas.microsoft.com/office/powerpoint/2010/main" val="2815334628"/>
+        <p14:creationId xmlns:p14="http://schemas.microsoft.com/office/powerpoint/2010/main" val="82245517"/>
       </p:ext>
     </p:extLst>
   </p:cSld>

--- a/manuscript/Figures/Blattabacterium HGT_figures-working.pptx
+++ b/manuscript/Figures/Blattabacterium HGT_figures-working.pptx
@@ -5,7 +5,7 @@
     <p:sldMasterId id="2147483648" r:id="rId1"/>
   </p:sldMasterIdLst>
   <p:notesMasterIdLst>
-    <p:notesMasterId r:id="rId14"/>
+    <p:notesMasterId r:id="rId16"/>
   </p:notesMasterIdLst>
   <p:sldIdLst>
     <p:sldId id="256" r:id="rId2"/>
@@ -14,12 +14,14 @@
     <p:sldId id="258" r:id="rId5"/>
     <p:sldId id="257" r:id="rId6"/>
     <p:sldId id="263" r:id="rId7"/>
-    <p:sldId id="264" r:id="rId8"/>
-    <p:sldId id="265" r:id="rId9"/>
-    <p:sldId id="266" r:id="rId10"/>
-    <p:sldId id="261" r:id="rId11"/>
-    <p:sldId id="260" r:id="rId12"/>
-    <p:sldId id="267" r:id="rId13"/>
+    <p:sldId id="268" r:id="rId8"/>
+    <p:sldId id="269" r:id="rId9"/>
+    <p:sldId id="261" r:id="rId10"/>
+    <p:sldId id="260" r:id="rId11"/>
+    <p:sldId id="264" r:id="rId12"/>
+    <p:sldId id="265" r:id="rId13"/>
+    <p:sldId id="266" r:id="rId14"/>
+    <p:sldId id="267" r:id="rId15"/>
   </p:sldIdLst>
   <p:sldSz cx="12192000" cy="6858000"/>
   <p:notesSz cx="6858000" cy="9144000"/>
@@ -208,7 +210,7 @@
           <a:p>
             <a:fld id="{C4FC65C6-6085-4244-82B2-63B076D03E9C}" type="datetimeFigureOut">
               <a:rPr lang="en-US" smtClean="0"/>
-              <a:t>10/29/25</a:t>
+              <a:t>11/12/25</a:t>
             </a:fld>
             <a:endParaRPr lang="en-US"/>
           </a:p>
@@ -888,59 +890,48 @@
           <a:bodyPr/>
           <a:lstStyle/>
           <a:p>
-            <a:pPr marL="0" marR="0" lvl="0" indent="0" algn="l" defTabSz="914400" rtl="0" eaLnBrk="1" fontAlgn="auto" latinLnBrk="0" hangingPunct="1">
-              <a:lnSpc>
-                <a:spcPct val="100000"/>
-              </a:lnSpc>
-              <a:spcBef>
-                <a:spcPts val="0"/>
-              </a:spcBef>
-              <a:spcAft>
-                <a:spcPts val="0"/>
-              </a:spcAft>
-              <a:buClrTx/>
-              <a:buSzTx/>
-              <a:buFontTx/>
-              <a:buNone/>
-              <a:tabLst/>
-              <a:defRPr/>
-            </a:pPr>
-            <a:r>
-              <a:rPr lang="en-AU" sz="1200" b="1" kern="1200" dirty="0">
-                <a:solidFill>
-                  <a:schemeClr val="tx1"/>
-                </a:solidFill>
-                <a:effectLst/>
-                <a:latin typeface="+mn-lt"/>
-                <a:ea typeface="+mn-ea"/>
-                <a:cs typeface="+mn-cs"/>
-              </a:rPr>
-              <a:t>Figure 4.3</a:t>
-            </a:r>
-            <a:r>
-              <a:rPr lang="en-AU" sz="1200" kern="1200" dirty="0">
-                <a:solidFill>
-                  <a:schemeClr val="tx1"/>
-                </a:solidFill>
-                <a:effectLst/>
-                <a:latin typeface="+mn-lt"/>
-                <a:ea typeface="+mn-ea"/>
-                <a:cs typeface="+mn-cs"/>
-              </a:rPr>
-              <a:t>. Examples of two HGT insertions used for ‘aging’ analysis. The right panel shows homology of each insertion and its 5 kb flanking regions across species: green denotes HGT inserts, blue flanking regions, with red and blue bands indicating forward and inverted homology (darker shades = higher similarity). The left phylogeny is based on Chapter 3; species lacking the insertion are shown as a dashed line. Red arrows indicate the inferred timing of HGT insertions.</a:t>
-            </a:r>
-            <a:endParaRPr lang="en-GB" sz="1200" kern="1200" dirty="0">
-              <a:solidFill>
-                <a:schemeClr val="tx1"/>
-              </a:solidFill>
-              <a:effectLst/>
-              <a:latin typeface="+mn-lt"/>
-              <a:ea typeface="+mn-ea"/>
-              <a:cs typeface="+mn-cs"/>
-            </a:endParaRPr>
+            <a:r>
+              <a:rPr lang="en-US" dirty="0"/>
+              <a:t>A. Cladogram of taxa </a:t>
+            </a:r>
+            <a:r>
+              <a:rPr lang="en-US" dirty="0" err="1"/>
+              <a:t>analysed</a:t>
+            </a:r>
+            <a:r>
+              <a:rPr lang="en-US" dirty="0"/>
+              <a:t> for Blattabacterium HGT events</a:t>
+            </a:r>
+          </a:p>
+          <a:p>
+            <a:r>
+              <a:rPr lang="en-US" dirty="0"/>
+              <a:t>Nodes show divergence times (Ma) from Beasley-Hall et al (2021: for nodes internal to top 12 taxa) and Evangelista et al (2019: for nodes internal to remaining 6 taxa). One exception is value between P. lata and P. cribrata, which is from Adams et al 2024. </a:t>
+            </a:r>
+          </a:p>
+          <a:p>
+            <a:r>
+              <a:rPr lang="en-US" dirty="0"/>
+              <a:t>Comment 1: Could add numbers of genic vs intergenic to (A)</a:t>
+            </a:r>
           </a:p>
           <a:p>
             <a:endParaRPr lang="en-US" dirty="0"/>
+          </a:p>
+          <a:p>
+            <a:r>
+              <a:rPr lang="en-US" dirty="0"/>
+              <a:t>B. The plot starts at 50 bp, as this was the minimum. I have a maximum cutoff of 1000 bp (75 of the 41103 markers have been excluded).</a:t>
+            </a:r>
+          </a:p>
+          <a:p>
+            <a:endParaRPr lang="en-US" dirty="0"/>
+          </a:p>
+          <a:p>
+            <a:r>
+              <a:rPr lang="en-US" dirty="0"/>
+              <a:t>C. Placeholder for Leo figure</a:t>
+            </a:r>
           </a:p>
         </p:txBody>
       </p:sp>
@@ -961,7 +952,7 @@
           <a:p>
             <a:fld id="{AFCB7D11-0DA4-4649-ACEB-1F19D5C36BF9}" type="slidenum">
               <a:rPr lang="en-US" smtClean="0"/>
-              <a:t>7</a:t>
+              <a:t>9</a:t>
             </a:fld>
             <a:endParaRPr lang="en-US"/>
           </a:p>
@@ -970,7 +961,7 @@
     </p:spTree>
     <p:extLst>
       <p:ext uri="{BB962C8B-B14F-4D97-AF65-F5344CB8AC3E}">
-        <p14:creationId xmlns:p14="http://schemas.microsoft.com/office/powerpoint/2010/main" val="578356381"/>
+        <p14:creationId xmlns:p14="http://schemas.microsoft.com/office/powerpoint/2010/main" val="2564932199"/>
       </p:ext>
     </p:extLst>
   </p:cSld>
@@ -1024,10 +1015,46 @@
           <a:bodyPr/>
           <a:lstStyle/>
           <a:p>
+            <a:pPr marL="228600" indent="-228600">
+              <a:buAutoNum type="alphaUcPeriod"/>
+            </a:pPr>
             <a:r>
               <a:rPr lang="en-US" dirty="0"/>
-              <a:t>Example of a chimeric HGT insertion from P. tryoni tegminifera. The top sequence is divided into seven segments, while the circular map below represents the source genome of Blattabacterium cuenoti (CP142624.1). Numbers below the insertion indicate the corresponding genomic positions, with yellow labels marking specific coordinates.</a:t>
-            </a:r>
+              <a:t>P-</a:t>
+            </a:r>
+            <a:r>
+              <a:rPr lang="en-US" dirty="0" err="1"/>
+              <a:t>tryoni</a:t>
+            </a:r>
+            <a:r>
+              <a:rPr lang="en-US" dirty="0"/>
+              <a:t>-</a:t>
+            </a:r>
+            <a:r>
+              <a:rPr lang="en-US" dirty="0" err="1"/>
+              <a:t>tryoni</a:t>
+            </a:r>
+            <a:r>
+              <a:rPr lang="en-US" dirty="0"/>
+              <a:t>-</a:t>
+            </a:r>
+            <a:r>
+              <a:rPr lang="en-US" dirty="0" err="1"/>
+              <a:t>Eungella_ageing</a:t>
+            </a:r>
+            <a:r>
+              <a:rPr lang="en-US" dirty="0"/>
+              <a:t>-plot. BLAST %ID against Blattabacterium database - BLAST %ID against insert database </a:t>
+            </a:r>
+          </a:p>
+          <a:p>
+            <a:r>
+              <a:rPr lang="en-US" dirty="0"/>
+              <a:t>B. Examples of one HGT insertions used for ‘aging’ analysis. The right panel shows homology of each insertion and its 5 kb flanking regions across species: green denotes HGT inserts, blue flanking regions, with red and blue bands indicating forward and inverted homology (darker shades = higher similarity). The left phylogeny is based on Chapter 3; species lacking the insertion are shown as a dashed line. Red arrows indicate the inferred timing of HGT insertions.</a:t>
+            </a:r>
+          </a:p>
+          <a:p>
+            <a:endParaRPr lang="en-US" dirty="0"/>
           </a:p>
         </p:txBody>
       </p:sp>
@@ -1048,7 +1075,7 @@
           <a:p>
             <a:fld id="{AFCB7D11-0DA4-4649-ACEB-1F19D5C36BF9}" type="slidenum">
               <a:rPr lang="en-US" smtClean="0"/>
-              <a:t>8</a:t>
+              <a:t>10</a:t>
             </a:fld>
             <a:endParaRPr lang="en-US"/>
           </a:p>
@@ -1057,7 +1084,7 @@
     </p:spTree>
     <p:extLst>
       <p:ext uri="{BB962C8B-B14F-4D97-AF65-F5344CB8AC3E}">
-        <p14:creationId xmlns:p14="http://schemas.microsoft.com/office/powerpoint/2010/main" val="2973060748"/>
+        <p14:creationId xmlns:p14="http://schemas.microsoft.com/office/powerpoint/2010/main" val="1427805513"/>
       </p:ext>
     </p:extLst>
   </p:cSld>
@@ -1111,48 +1138,59 @@
           <a:bodyPr/>
           <a:lstStyle/>
           <a:p>
-            <a:r>
-              <a:rPr lang="en-US" dirty="0"/>
-              <a:t>A. Cladogram of taxa </a:t>
-            </a:r>
-            <a:r>
-              <a:rPr lang="en-US" dirty="0" err="1"/>
-              <a:t>analysed</a:t>
-            </a:r>
-            <a:r>
-              <a:rPr lang="en-US" dirty="0"/>
-              <a:t> for Blattabacterium HGT events</a:t>
-            </a:r>
-          </a:p>
-          <a:p>
-            <a:r>
-              <a:rPr lang="en-US" dirty="0"/>
-              <a:t>Nodes show divergence times (Ma) from Beasley-Hall et al (2021: for nodes internal to top 12 taxa) and Evangelista et al (2019: for nodes internal to remaining 6 taxa). One exception is value between P. lata and P. cribrata, which is from Adams et al 2024. </a:t>
-            </a:r>
-          </a:p>
-          <a:p>
-            <a:r>
-              <a:rPr lang="en-US" dirty="0"/>
-              <a:t>Comment 1: Could add numbers of genic vs intergenic to (A)</a:t>
-            </a:r>
+            <a:pPr marL="0" marR="0" lvl="0" indent="0" algn="l" defTabSz="914400" rtl="0" eaLnBrk="1" fontAlgn="auto" latinLnBrk="0" hangingPunct="1">
+              <a:lnSpc>
+                <a:spcPct val="100000"/>
+              </a:lnSpc>
+              <a:spcBef>
+                <a:spcPts val="0"/>
+              </a:spcBef>
+              <a:spcAft>
+                <a:spcPts val="0"/>
+              </a:spcAft>
+              <a:buClrTx/>
+              <a:buSzTx/>
+              <a:buFontTx/>
+              <a:buNone/>
+              <a:tabLst/>
+              <a:defRPr/>
+            </a:pPr>
+            <a:r>
+              <a:rPr lang="en-AU" sz="1200" b="1" kern="1200" dirty="0">
+                <a:solidFill>
+                  <a:schemeClr val="tx1"/>
+                </a:solidFill>
+                <a:effectLst/>
+                <a:latin typeface="+mn-lt"/>
+                <a:ea typeface="+mn-ea"/>
+                <a:cs typeface="+mn-cs"/>
+              </a:rPr>
+              <a:t>Figure 4.3</a:t>
+            </a:r>
+            <a:r>
+              <a:rPr lang="en-AU" sz="1200" kern="1200" dirty="0">
+                <a:solidFill>
+                  <a:schemeClr val="tx1"/>
+                </a:solidFill>
+                <a:effectLst/>
+                <a:latin typeface="+mn-lt"/>
+                <a:ea typeface="+mn-ea"/>
+                <a:cs typeface="+mn-cs"/>
+              </a:rPr>
+              <a:t>. Examples of two HGT insertions used for ‘aging’ analysis. The right panel shows homology of each insertion and its 5 kb flanking regions across species: green denotes HGT inserts, blue flanking regions, with red and blue bands indicating forward and inverted homology (darker shades = higher similarity). The left phylogeny is based on Chapter 3; species lacking the insertion are shown as a dashed line. Red arrows indicate the inferred timing of HGT insertions.</a:t>
+            </a:r>
+            <a:endParaRPr lang="en-GB" sz="1200" kern="1200" dirty="0">
+              <a:solidFill>
+                <a:schemeClr val="tx1"/>
+              </a:solidFill>
+              <a:effectLst/>
+              <a:latin typeface="+mn-lt"/>
+              <a:ea typeface="+mn-ea"/>
+              <a:cs typeface="+mn-cs"/>
+            </a:endParaRPr>
           </a:p>
           <a:p>
             <a:endParaRPr lang="en-US" dirty="0"/>
-          </a:p>
-          <a:p>
-            <a:r>
-              <a:rPr lang="en-US" dirty="0"/>
-              <a:t>B. The plot starts at 50 bp, as this was the minimum. I have a maximum cutoff of 1000 bp (75 of the 41103 markers have been excluded).</a:t>
-            </a:r>
-          </a:p>
-          <a:p>
-            <a:endParaRPr lang="en-US" dirty="0"/>
-          </a:p>
-          <a:p>
-            <a:r>
-              <a:rPr lang="en-US" dirty="0"/>
-              <a:t>C. Placeholder for Leo figure</a:t>
-            </a:r>
           </a:p>
         </p:txBody>
       </p:sp>
@@ -1173,7 +1211,7 @@
           <a:p>
             <a:fld id="{AFCB7D11-0DA4-4649-ACEB-1F19D5C36BF9}" type="slidenum">
               <a:rPr lang="en-US" smtClean="0"/>
-              <a:t>10</a:t>
+              <a:t>11</a:t>
             </a:fld>
             <a:endParaRPr lang="en-US"/>
           </a:p>
@@ -1182,7 +1220,7 @@
     </p:spTree>
     <p:extLst>
       <p:ext uri="{BB962C8B-B14F-4D97-AF65-F5344CB8AC3E}">
-        <p14:creationId xmlns:p14="http://schemas.microsoft.com/office/powerpoint/2010/main" val="2564932199"/>
+        <p14:creationId xmlns:p14="http://schemas.microsoft.com/office/powerpoint/2010/main" val="578356381"/>
       </p:ext>
     </p:extLst>
   </p:cSld>
@@ -1236,46 +1274,10 @@
           <a:bodyPr/>
           <a:lstStyle/>
           <a:p>
-            <a:pPr marL="228600" indent="-228600">
-              <a:buAutoNum type="alphaUcPeriod"/>
-            </a:pPr>
             <a:r>
               <a:rPr lang="en-US" dirty="0"/>
-              <a:t>P-</a:t>
-            </a:r>
-            <a:r>
-              <a:rPr lang="en-US" dirty="0" err="1"/>
-              <a:t>tryoni</a:t>
-            </a:r>
-            <a:r>
-              <a:rPr lang="en-US" dirty="0"/>
-              <a:t>-</a:t>
-            </a:r>
-            <a:r>
-              <a:rPr lang="en-US" dirty="0" err="1"/>
-              <a:t>tryoni</a:t>
-            </a:r>
-            <a:r>
-              <a:rPr lang="en-US" dirty="0"/>
-              <a:t>-</a:t>
-            </a:r>
-            <a:r>
-              <a:rPr lang="en-US" dirty="0" err="1"/>
-              <a:t>Eungella_ageing</a:t>
-            </a:r>
-            <a:r>
-              <a:rPr lang="en-US" dirty="0"/>
-              <a:t>-plot. BLAST %ID against Blattabacterium database - BLAST %ID against insert database </a:t>
-            </a:r>
-          </a:p>
-          <a:p>
-            <a:r>
-              <a:rPr lang="en-US" dirty="0"/>
-              <a:t>B. Examples of one HGT insertions used for ‘aging’ analysis. The right panel shows homology of each insertion and its 5 kb flanking regions across species: green denotes HGT inserts, blue flanking regions, with red and blue bands indicating forward and inverted homology (darker shades = higher similarity). The left phylogeny is based on Chapter 3; species lacking the insertion are shown as a dashed line. Red arrows indicate the inferred timing of HGT insertions.</a:t>
-            </a:r>
-          </a:p>
-          <a:p>
-            <a:endParaRPr lang="en-US" dirty="0"/>
+              <a:t>Example of a chimeric HGT insertion from P. tryoni tegminifera. The top sequence is divided into seven segments, while the circular map below represents the source genome of Blattabacterium cuenoti (CP142624.1). Numbers below the insertion indicate the corresponding genomic positions, with yellow labels marking specific coordinates.</a:t>
+            </a:r>
           </a:p>
         </p:txBody>
       </p:sp>
@@ -1296,7 +1298,7 @@
           <a:p>
             <a:fld id="{AFCB7D11-0DA4-4649-ACEB-1F19D5C36BF9}" type="slidenum">
               <a:rPr lang="en-US" smtClean="0"/>
-              <a:t>11</a:t>
+              <a:t>12</a:t>
             </a:fld>
             <a:endParaRPr lang="en-US"/>
           </a:p>
@@ -1305,7 +1307,7 @@
     </p:spTree>
     <p:extLst>
       <p:ext uri="{BB962C8B-B14F-4D97-AF65-F5344CB8AC3E}">
-        <p14:creationId xmlns:p14="http://schemas.microsoft.com/office/powerpoint/2010/main" val="1427805513"/>
+        <p14:creationId xmlns:p14="http://schemas.microsoft.com/office/powerpoint/2010/main" val="2973060748"/>
       </p:ext>
     </p:extLst>
   </p:cSld>
@@ -1383,7 +1385,7 @@
           <a:p>
             <a:fld id="{AFCB7D11-0DA4-4649-ACEB-1F19D5C36BF9}" type="slidenum">
               <a:rPr lang="en-US" smtClean="0"/>
-              <a:t>12</a:t>
+              <a:t>14</a:t>
             </a:fld>
             <a:endParaRPr lang="en-US"/>
           </a:p>
@@ -1549,7 +1551,7 @@
           <a:p>
             <a:fld id="{C2B98897-90D8-9D4D-95EE-51EF37A9743C}" type="datetimeFigureOut">
               <a:rPr lang="en-US" smtClean="0"/>
-              <a:t>10/29/25</a:t>
+              <a:t>11/12/25</a:t>
             </a:fld>
             <a:endParaRPr lang="en-US"/>
           </a:p>
@@ -1747,7 +1749,7 @@
           <a:p>
             <a:fld id="{C2B98897-90D8-9D4D-95EE-51EF37A9743C}" type="datetimeFigureOut">
               <a:rPr lang="en-US" smtClean="0"/>
-              <a:t>10/29/25</a:t>
+              <a:t>11/12/25</a:t>
             </a:fld>
             <a:endParaRPr lang="en-US"/>
           </a:p>
@@ -1955,7 +1957,7 @@
           <a:p>
             <a:fld id="{C2B98897-90D8-9D4D-95EE-51EF37A9743C}" type="datetimeFigureOut">
               <a:rPr lang="en-US" smtClean="0"/>
-              <a:t>10/29/25</a:t>
+              <a:t>11/12/25</a:t>
             </a:fld>
             <a:endParaRPr lang="en-US"/>
           </a:p>
@@ -2153,7 +2155,7 @@
           <a:p>
             <a:fld id="{C2B98897-90D8-9D4D-95EE-51EF37A9743C}" type="datetimeFigureOut">
               <a:rPr lang="en-US" smtClean="0"/>
-              <a:t>10/29/25</a:t>
+              <a:t>11/12/25</a:t>
             </a:fld>
             <a:endParaRPr lang="en-US"/>
           </a:p>
@@ -2428,7 +2430,7 @@
           <a:p>
             <a:fld id="{C2B98897-90D8-9D4D-95EE-51EF37A9743C}" type="datetimeFigureOut">
               <a:rPr lang="en-US" smtClean="0"/>
-              <a:t>10/29/25</a:t>
+              <a:t>11/12/25</a:t>
             </a:fld>
             <a:endParaRPr lang="en-US"/>
           </a:p>
@@ -2693,7 +2695,7 @@
           <a:p>
             <a:fld id="{C2B98897-90D8-9D4D-95EE-51EF37A9743C}" type="datetimeFigureOut">
               <a:rPr lang="en-US" smtClean="0"/>
-              <a:t>10/29/25</a:t>
+              <a:t>11/12/25</a:t>
             </a:fld>
             <a:endParaRPr lang="en-US"/>
           </a:p>
@@ -3105,7 +3107,7 @@
           <a:p>
             <a:fld id="{C2B98897-90D8-9D4D-95EE-51EF37A9743C}" type="datetimeFigureOut">
               <a:rPr lang="en-US" smtClean="0"/>
-              <a:t>10/29/25</a:t>
+              <a:t>11/12/25</a:t>
             </a:fld>
             <a:endParaRPr lang="en-US"/>
           </a:p>
@@ -3246,7 +3248,7 @@
           <a:p>
             <a:fld id="{C2B98897-90D8-9D4D-95EE-51EF37A9743C}" type="datetimeFigureOut">
               <a:rPr lang="en-US" smtClean="0"/>
-              <a:t>10/29/25</a:t>
+              <a:t>11/12/25</a:t>
             </a:fld>
             <a:endParaRPr lang="en-US"/>
           </a:p>
@@ -3359,7 +3361,7 @@
           <a:p>
             <a:fld id="{C2B98897-90D8-9D4D-95EE-51EF37A9743C}" type="datetimeFigureOut">
               <a:rPr lang="en-US" smtClean="0"/>
-              <a:t>10/29/25</a:t>
+              <a:t>11/12/25</a:t>
             </a:fld>
             <a:endParaRPr lang="en-US"/>
           </a:p>
@@ -3670,7 +3672,7 @@
           <a:p>
             <a:fld id="{C2B98897-90D8-9D4D-95EE-51EF37A9743C}" type="datetimeFigureOut">
               <a:rPr lang="en-US" smtClean="0"/>
-              <a:t>10/29/25</a:t>
+              <a:t>11/12/25</a:t>
             </a:fld>
             <a:endParaRPr lang="en-US"/>
           </a:p>
@@ -3958,7 +3960,7 @@
           <a:p>
             <a:fld id="{C2B98897-90D8-9D4D-95EE-51EF37A9743C}" type="datetimeFigureOut">
               <a:rPr lang="en-US" smtClean="0"/>
-              <a:t>10/29/25</a:t>
+              <a:t>11/12/25</a:t>
             </a:fld>
             <a:endParaRPr lang="en-US"/>
           </a:p>
@@ -4199,7 +4201,7 @@
           <a:p>
             <a:fld id="{C2B98897-90D8-9D4D-95EE-51EF37A9743C}" type="datetimeFigureOut">
               <a:rPr lang="en-US" smtClean="0"/>
-              <a:t>10/29/25</a:t>
+              <a:t>11/12/25</a:t>
             </a:fld>
             <a:endParaRPr lang="en-US"/>
           </a:p>
@@ -9111,12 +9113,47 @@
           <a:chExt cx="0" cy="0"/>
         </a:xfrm>
       </p:grpSpPr>
+      <p:sp>
+        <p:nvSpPr>
+          <p:cNvPr id="4" name="TextBox 3">
+            <a:extLst>
+              <a:ext uri="{FF2B5EF4-FFF2-40B4-BE49-F238E27FC236}">
+                <a16:creationId xmlns:a16="http://schemas.microsoft.com/office/drawing/2014/main" id="{4CBCCAAD-C40A-0540-A342-CC95BED36479}"/>
+              </a:ext>
+            </a:extLst>
+          </p:cNvPr>
+          <p:cNvSpPr txBox="1"/>
+          <p:nvPr/>
+        </p:nvSpPr>
+        <p:spPr>
+          <a:xfrm>
+            <a:off x="152327" y="-28505"/>
+            <a:ext cx="943528" cy="369332"/>
+          </a:xfrm>
+          <a:prstGeom prst="rect">
+            <a:avLst/>
+          </a:prstGeom>
+          <a:noFill/>
+        </p:spPr>
+        <p:txBody>
+          <a:bodyPr wrap="none" rtlCol="0">
+            <a:spAutoFit/>
+          </a:bodyPr>
+          <a:lstStyle/>
+          <a:p>
+            <a:r>
+              <a:rPr lang="en-US" b="1" dirty="0"/>
+              <a:t>Figure 2</a:t>
+            </a:r>
+          </a:p>
+        </p:txBody>
+      </p:sp>
       <p:pic>
         <p:nvPicPr>
-          <p:cNvPr id="2" name="Picture 1">
-            <a:extLst>
-              <a:ext uri="{FF2B5EF4-FFF2-40B4-BE49-F238E27FC236}">
-                <a16:creationId xmlns:a16="http://schemas.microsoft.com/office/drawing/2014/main" id="{A45A0E29-9F21-FC4B-A4F5-B53517A41FC2}"/>
+          <p:cNvPr id="6" name="Picture 5">
+            <a:extLst>
+              <a:ext uri="{FF2B5EF4-FFF2-40B4-BE49-F238E27FC236}">
+                <a16:creationId xmlns:a16="http://schemas.microsoft.com/office/drawing/2014/main" id="{D2107C2B-7AD9-0940-814D-542810A3F058}"/>
               </a:ext>
             </a:extLst>
           </p:cNvPr>
@@ -9125,28 +9162,56 @@
           </p:cNvPicPr>
           <p:nvPr/>
         </p:nvPicPr>
-        <p:blipFill>
+        <p:blipFill rotWithShape="1">
           <a:blip r:embed="rId3"/>
-          <a:stretch>
-            <a:fillRect/>
-          </a:stretch>
+          <a:srcRect t="52525"/>
+          <a:stretch/>
         </p:blipFill>
         <p:spPr>
           <a:xfrm>
-            <a:off x="75050" y="454968"/>
-            <a:ext cx="6561506" cy="4396430"/>
+            <a:off x="6369518" y="1648788"/>
+            <a:ext cx="5689283" cy="3981303"/>
           </a:xfrm>
           <a:prstGeom prst="rect">
             <a:avLst/>
           </a:prstGeom>
         </p:spPr>
       </p:pic>
-      <p:sp>
-        <p:nvSpPr>
-          <p:cNvPr id="5" name="TextBox 4">
-            <a:extLst>
-              <a:ext uri="{FF2B5EF4-FFF2-40B4-BE49-F238E27FC236}">
-                <a16:creationId xmlns:a16="http://schemas.microsoft.com/office/drawing/2014/main" id="{4F756E17-FE9E-4DC6-F3CF-AABBBF0B49DD}"/>
+      <p:pic>
+        <p:nvPicPr>
+          <p:cNvPr id="7" name="Picture 6">
+            <a:extLst>
+              <a:ext uri="{FF2B5EF4-FFF2-40B4-BE49-F238E27FC236}">
+                <a16:creationId xmlns:a16="http://schemas.microsoft.com/office/drawing/2014/main" id="{4D1CA6F0-055A-C240-A4FC-6BEFEB8FFA56}"/>
+              </a:ext>
+            </a:extLst>
+          </p:cNvPr>
+          <p:cNvPicPr>
+            <a:picLocks noChangeAspect="1"/>
+          </p:cNvPicPr>
+          <p:nvPr/>
+        </p:nvPicPr>
+        <p:blipFill rotWithShape="1">
+          <a:blip r:embed="rId4"/>
+          <a:srcRect l="2701" t="7745" r="2136" b="6008"/>
+          <a:stretch/>
+        </p:blipFill>
+        <p:spPr>
+          <a:xfrm>
+            <a:off x="936970" y="1852864"/>
+            <a:ext cx="5423723" cy="3433730"/>
+          </a:xfrm>
+          <a:prstGeom prst="rect">
+            <a:avLst/>
+          </a:prstGeom>
+        </p:spPr>
+      </p:pic>
+      <p:sp>
+        <p:nvSpPr>
+          <p:cNvPr id="2" name="TextBox 1">
+            <a:extLst>
+              <a:ext uri="{FF2B5EF4-FFF2-40B4-BE49-F238E27FC236}">
+                <a16:creationId xmlns:a16="http://schemas.microsoft.com/office/drawing/2014/main" id="{633D4B2A-37ED-CE4F-938D-1864D4E6B025}"/>
               </a:ext>
             </a:extLst>
           </p:cNvPr>
@@ -9155,8 +9220,8 @@
         </p:nvSpPr>
         <p:spPr>
           <a:xfrm>
-            <a:off x="7856065" y="3519340"/>
-            <a:ext cx="3343468" cy="830997"/>
+            <a:off x="2094074" y="4445366"/>
+            <a:ext cx="1241562" cy="430887"/>
           </a:xfrm>
           <a:prstGeom prst="rect">
             <a:avLst/>
@@ -9169,48 +9234,19 @@
           </a:bodyPr>
           <a:lstStyle/>
           <a:p>
-            <a:pPr algn="ctr"/>
-            <a:r>
-              <a:rPr lang="en-US" sz="1600" b="1" dirty="0">
-                <a:solidFill>
-                  <a:srgbClr val="FF0000"/>
-                </a:solidFill>
-              </a:rPr>
-              <a:t>C. </a:t>
-            </a:r>
-            <a:r>
-              <a:rPr lang="en-US" sz="1600" dirty="0">
-                <a:solidFill>
-                  <a:srgbClr val="FF0000"/>
-                </a:solidFill>
-              </a:rPr>
-              <a:t>Placeholder: depiction of the origin of the insert around the </a:t>
-            </a:r>
-            <a:r>
-              <a:rPr lang="en-US" sz="1600" dirty="0" err="1">
-                <a:solidFill>
-                  <a:srgbClr val="FF0000"/>
-                </a:solidFill>
-              </a:rPr>
-              <a:t>Blatta</a:t>
-            </a:r>
-            <a:r>
-              <a:rPr lang="en-US" sz="1600" dirty="0">
-                <a:solidFill>
-                  <a:srgbClr val="FF0000"/>
-                </a:solidFill>
-              </a:rPr>
-              <a:t> genome (waiting on Leo)</a:t>
-            </a:r>
-          </a:p>
-        </p:txBody>
-      </p:sp>
-      <p:sp>
-        <p:nvSpPr>
-          <p:cNvPr id="7" name="TextBox 6">
-            <a:extLst>
-              <a:ext uri="{FF2B5EF4-FFF2-40B4-BE49-F238E27FC236}">
-                <a16:creationId xmlns:a16="http://schemas.microsoft.com/office/drawing/2014/main" id="{1C0E847B-8FC5-0867-7196-259B77611FF8}"/>
+            <a:r>
+              <a:rPr lang="en-US" sz="1100" dirty="0"/>
+              <a:t>Putative ancestral inserts</a:t>
+            </a:r>
+          </a:p>
+        </p:txBody>
+      </p:sp>
+      <p:sp>
+        <p:nvSpPr>
+          <p:cNvPr id="8" name="TextBox 7">
+            <a:extLst>
+              <a:ext uri="{FF2B5EF4-FFF2-40B4-BE49-F238E27FC236}">
+                <a16:creationId xmlns:a16="http://schemas.microsoft.com/office/drawing/2014/main" id="{C1A254C8-E221-074A-8EC7-674BF6886A40}"/>
               </a:ext>
             </a:extLst>
           </p:cNvPr>
@@ -9219,8 +9255,44 @@
         </p:nvSpPr>
         <p:spPr>
           <a:xfrm>
-            <a:off x="215683" y="425302"/>
-            <a:ext cx="324128" cy="369332"/>
+            <a:off x="3862937" y="2027575"/>
+            <a:ext cx="1528056" cy="430887"/>
+          </a:xfrm>
+          <a:prstGeom prst="rect">
+            <a:avLst/>
+          </a:prstGeom>
+          <a:noFill/>
+        </p:spPr>
+        <p:txBody>
+          <a:bodyPr wrap="square" rtlCol="0">
+            <a:spAutoFit/>
+          </a:bodyPr>
+          <a:lstStyle/>
+          <a:p>
+            <a:pPr algn="r"/>
+            <a:r>
+              <a:rPr lang="en-US" sz="1100" dirty="0"/>
+              <a:t>Putative contemporary inserts</a:t>
+            </a:r>
+          </a:p>
+        </p:txBody>
+      </p:sp>
+      <p:sp>
+        <p:nvSpPr>
+          <p:cNvPr id="9" name="TextBox 8">
+            <a:extLst>
+              <a:ext uri="{FF2B5EF4-FFF2-40B4-BE49-F238E27FC236}">
+                <a16:creationId xmlns:a16="http://schemas.microsoft.com/office/drawing/2014/main" id="{A1AB082A-F420-0C48-91D5-4F7BF95C306D}"/>
+              </a:ext>
+            </a:extLst>
+          </p:cNvPr>
+          <p:cNvSpPr txBox="1"/>
+          <p:nvPr/>
+        </p:nvSpPr>
+        <p:spPr>
+          <a:xfrm>
+            <a:off x="4082441" y="3736051"/>
+            <a:ext cx="1281120" cy="261610"/>
           </a:xfrm>
           <a:prstGeom prst="rect">
             <a:avLst/>
@@ -9234,49 +9306,18 @@
           <a:lstStyle/>
           <a:p>
             <a:r>
-              <a:rPr lang="en-US" b="1" dirty="0"/>
-              <a:t>A</a:t>
-            </a:r>
-          </a:p>
-        </p:txBody>
-      </p:sp>
-      <p:pic>
-        <p:nvPicPr>
-          <p:cNvPr id="13" name="Picture 12">
-            <a:extLst>
-              <a:ext uri="{FF2B5EF4-FFF2-40B4-BE49-F238E27FC236}">
-                <a16:creationId xmlns:a16="http://schemas.microsoft.com/office/drawing/2014/main" id="{DC883A01-AA48-044E-76DC-460544A87194}"/>
-              </a:ext>
-            </a:extLst>
-          </p:cNvPr>
-          <p:cNvPicPr>
-            <a:picLocks noChangeAspect="1"/>
-          </p:cNvPicPr>
-          <p:nvPr/>
-        </p:nvPicPr>
-        <p:blipFill>
-          <a:blip r:embed="rId4"/>
-          <a:srcRect t="5172"/>
-          <a:stretch>
-            <a:fillRect/>
-          </a:stretch>
-        </p:blipFill>
-        <p:spPr>
-          <a:xfrm>
-            <a:off x="7048374" y="496730"/>
-            <a:ext cx="5104657" cy="2587255"/>
-          </a:xfrm>
-          <a:prstGeom prst="rect">
-            <a:avLst/>
-          </a:prstGeom>
-        </p:spPr>
-      </p:pic>
-      <p:sp>
-        <p:nvSpPr>
-          <p:cNvPr id="14" name="TextBox 13">
-            <a:extLst>
-              <a:ext uri="{FF2B5EF4-FFF2-40B4-BE49-F238E27FC236}">
-                <a16:creationId xmlns:a16="http://schemas.microsoft.com/office/drawing/2014/main" id="{2C6B5942-B39C-46A8-0714-63EF48E22894}"/>
+              <a:rPr lang="en-US" sz="1100" dirty="0"/>
+              <a:t>Unable to infer age</a:t>
+            </a:r>
+          </a:p>
+        </p:txBody>
+      </p:sp>
+      <p:sp>
+        <p:nvSpPr>
+          <p:cNvPr id="3" name="TextBox 2">
+            <a:extLst>
+              <a:ext uri="{FF2B5EF4-FFF2-40B4-BE49-F238E27FC236}">
+                <a16:creationId xmlns:a16="http://schemas.microsoft.com/office/drawing/2014/main" id="{56561D6C-B0AC-0E48-A749-34E5EC08CA93}"/>
               </a:ext>
             </a:extLst>
           </p:cNvPr>
@@ -9285,8 +9326,8 @@
         </p:nvSpPr>
         <p:spPr>
           <a:xfrm>
-            <a:off x="6720534" y="425302"/>
-            <a:ext cx="314510" cy="369332"/>
+            <a:off x="3177302" y="5230862"/>
+            <a:ext cx="1064779" cy="307777"/>
           </a:xfrm>
           <a:prstGeom prst="rect">
             <a:avLst/>
@@ -9300,16 +9341,280 @@
           <a:lstStyle/>
           <a:p>
             <a:r>
+              <a:rPr lang="en-US" sz="1400" dirty="0"/>
+              <a:t>Insert count</a:t>
+            </a:r>
+          </a:p>
+        </p:txBody>
+      </p:sp>
+      <p:sp>
+        <p:nvSpPr>
+          <p:cNvPr id="10" name="TextBox 9">
+            <a:extLst>
+              <a:ext uri="{FF2B5EF4-FFF2-40B4-BE49-F238E27FC236}">
+                <a16:creationId xmlns:a16="http://schemas.microsoft.com/office/drawing/2014/main" id="{90AA9167-B2F4-DB40-8978-942B5407BF84}"/>
+              </a:ext>
+            </a:extLst>
+          </p:cNvPr>
+          <p:cNvSpPr txBox="1"/>
+          <p:nvPr/>
+        </p:nvSpPr>
+        <p:spPr>
+          <a:xfrm rot="16200000">
+            <a:off x="-308369" y="3261666"/>
+            <a:ext cx="2290755" cy="307777"/>
+          </a:xfrm>
+          <a:prstGeom prst="rect">
+            <a:avLst/>
+          </a:prstGeom>
+          <a:noFill/>
+        </p:spPr>
+        <p:txBody>
+          <a:bodyPr wrap="none" rtlCol="0">
+            <a:spAutoFit/>
+          </a:bodyPr>
+          <a:lstStyle/>
+          <a:p>
+            <a:r>
+              <a:rPr lang="en-US" sz="1400" dirty="0"/>
+              <a:t>BLAST identity (%) difference</a:t>
+            </a:r>
+          </a:p>
+        </p:txBody>
+      </p:sp>
+      <p:sp>
+        <p:nvSpPr>
+          <p:cNvPr id="11" name="TextBox 10">
+            <a:extLst>
+              <a:ext uri="{FF2B5EF4-FFF2-40B4-BE49-F238E27FC236}">
+                <a16:creationId xmlns:a16="http://schemas.microsoft.com/office/drawing/2014/main" id="{FDFFE04B-D070-864B-B8B8-CEADF928B4A8}"/>
+              </a:ext>
+            </a:extLst>
+          </p:cNvPr>
+          <p:cNvSpPr txBox="1"/>
+          <p:nvPr/>
+        </p:nvSpPr>
+        <p:spPr>
+          <a:xfrm>
+            <a:off x="563825" y="1753280"/>
+            <a:ext cx="324128" cy="369332"/>
+          </a:xfrm>
+          <a:prstGeom prst="rect">
+            <a:avLst/>
+          </a:prstGeom>
+          <a:noFill/>
+        </p:spPr>
+        <p:txBody>
+          <a:bodyPr wrap="none" rtlCol="0">
+            <a:spAutoFit/>
+          </a:bodyPr>
+          <a:lstStyle/>
+          <a:p>
+            <a:r>
+              <a:rPr lang="en-US" b="1" dirty="0"/>
+              <a:t>A</a:t>
+            </a:r>
+          </a:p>
+        </p:txBody>
+      </p:sp>
+      <p:sp>
+        <p:nvSpPr>
+          <p:cNvPr id="12" name="TextBox 11">
+            <a:extLst>
+              <a:ext uri="{FF2B5EF4-FFF2-40B4-BE49-F238E27FC236}">
+                <a16:creationId xmlns:a16="http://schemas.microsoft.com/office/drawing/2014/main" id="{276F2C94-E046-8F49-A92D-49719149D358}"/>
+              </a:ext>
+            </a:extLst>
+          </p:cNvPr>
+          <p:cNvSpPr txBox="1"/>
+          <p:nvPr/>
+        </p:nvSpPr>
+        <p:spPr>
+          <a:xfrm>
+            <a:off x="6360693" y="1753280"/>
+            <a:ext cx="314510" cy="369332"/>
+          </a:xfrm>
+          <a:prstGeom prst="rect">
+            <a:avLst/>
+          </a:prstGeom>
+          <a:noFill/>
+        </p:spPr>
+        <p:txBody>
+          <a:bodyPr wrap="none" rtlCol="0">
+            <a:spAutoFit/>
+          </a:bodyPr>
+          <a:lstStyle/>
+          <a:p>
+            <a:r>
               <a:rPr lang="en-US" b="1" dirty="0"/>
               <a:t>B</a:t>
             </a:r>
+          </a:p>
+        </p:txBody>
+      </p:sp>
+      <p:sp>
+        <p:nvSpPr>
+          <p:cNvPr id="13" name="Oval 12">
+            <a:extLst>
+              <a:ext uri="{FF2B5EF4-FFF2-40B4-BE49-F238E27FC236}">
+                <a16:creationId xmlns:a16="http://schemas.microsoft.com/office/drawing/2014/main" id="{E421327E-452A-CD40-9CB2-DCE4DADC7EB8}"/>
+              </a:ext>
+            </a:extLst>
+          </p:cNvPr>
+          <p:cNvSpPr/>
+          <p:nvPr/>
+        </p:nvSpPr>
+        <p:spPr>
+          <a:xfrm rot="20764211">
+            <a:off x="1270899" y="4637079"/>
+            <a:ext cx="865164" cy="326542"/>
+          </a:xfrm>
+          <a:prstGeom prst="ellipse">
+            <a:avLst/>
+          </a:prstGeom>
+          <a:noFill/>
+          <a:ln w="9525">
+            <a:solidFill>
+              <a:srgbClr val="FF0000"/>
+            </a:solidFill>
+            <a:prstDash val="dash"/>
+          </a:ln>
+        </p:spPr>
+        <p:style>
+          <a:lnRef idx="2">
+            <a:schemeClr val="accent1">
+              <a:shade val="50000"/>
+            </a:schemeClr>
+          </a:lnRef>
+          <a:fillRef idx="1">
+            <a:schemeClr val="accent1"/>
+          </a:fillRef>
+          <a:effectRef idx="0">
+            <a:schemeClr val="accent1"/>
+          </a:effectRef>
+          <a:fontRef idx="minor">
+            <a:schemeClr val="lt1"/>
+          </a:fontRef>
+        </p:style>
+        <p:txBody>
+          <a:bodyPr rtlCol="0" anchor="ctr"/>
+          <a:lstStyle/>
+          <a:p>
+            <a:pPr algn="ctr"/>
+            <a:endParaRPr lang="en-US"/>
+          </a:p>
+        </p:txBody>
+      </p:sp>
+      <p:sp>
+        <p:nvSpPr>
+          <p:cNvPr id="14" name="Oval 13">
+            <a:extLst>
+              <a:ext uri="{FF2B5EF4-FFF2-40B4-BE49-F238E27FC236}">
+                <a16:creationId xmlns:a16="http://schemas.microsoft.com/office/drawing/2014/main" id="{1DAD5DDC-8234-0745-83AA-125A34ABC016}"/>
+              </a:ext>
+            </a:extLst>
+          </p:cNvPr>
+          <p:cNvSpPr/>
+          <p:nvPr/>
+        </p:nvSpPr>
+        <p:spPr>
+          <a:xfrm rot="20764211">
+            <a:off x="5332359" y="2021240"/>
+            <a:ext cx="865164" cy="326542"/>
+          </a:xfrm>
+          <a:prstGeom prst="ellipse">
+            <a:avLst/>
+          </a:prstGeom>
+          <a:noFill/>
+          <a:ln w="9525">
+            <a:solidFill>
+              <a:srgbClr val="FF0000"/>
+            </a:solidFill>
+            <a:prstDash val="dash"/>
+          </a:ln>
+        </p:spPr>
+        <p:style>
+          <a:lnRef idx="2">
+            <a:schemeClr val="accent1">
+              <a:shade val="50000"/>
+            </a:schemeClr>
+          </a:lnRef>
+          <a:fillRef idx="1">
+            <a:schemeClr val="accent1"/>
+          </a:fillRef>
+          <a:effectRef idx="0">
+            <a:schemeClr val="accent1"/>
+          </a:effectRef>
+          <a:fontRef idx="minor">
+            <a:schemeClr val="lt1"/>
+          </a:fontRef>
+        </p:style>
+        <p:txBody>
+          <a:bodyPr rtlCol="0" anchor="ctr"/>
+          <a:lstStyle/>
+          <a:p>
+            <a:pPr algn="ctr"/>
+            <a:endParaRPr lang="en-US"/>
+          </a:p>
+        </p:txBody>
+      </p:sp>
+      <p:sp>
+        <p:nvSpPr>
+          <p:cNvPr id="15" name="Oval 14">
+            <a:extLst>
+              <a:ext uri="{FF2B5EF4-FFF2-40B4-BE49-F238E27FC236}">
+                <a16:creationId xmlns:a16="http://schemas.microsoft.com/office/drawing/2014/main" id="{08A2940A-50E2-9E4E-B45B-7E8B51C98C89}"/>
+              </a:ext>
+            </a:extLst>
+          </p:cNvPr>
+          <p:cNvSpPr/>
+          <p:nvPr/>
+        </p:nvSpPr>
+        <p:spPr>
+          <a:xfrm rot="21257093">
+            <a:off x="1828726" y="3163471"/>
+            <a:ext cx="3824834" cy="642507"/>
+          </a:xfrm>
+          <a:prstGeom prst="ellipse">
+            <a:avLst/>
+          </a:prstGeom>
+          <a:noFill/>
+          <a:ln w="9525">
+            <a:solidFill>
+              <a:srgbClr val="FF0000"/>
+            </a:solidFill>
+            <a:prstDash val="dash"/>
+          </a:ln>
+        </p:spPr>
+        <p:style>
+          <a:lnRef idx="2">
+            <a:schemeClr val="accent1">
+              <a:shade val="50000"/>
+            </a:schemeClr>
+          </a:lnRef>
+          <a:fillRef idx="1">
+            <a:schemeClr val="accent1"/>
+          </a:fillRef>
+          <a:effectRef idx="0">
+            <a:schemeClr val="accent1"/>
+          </a:effectRef>
+          <a:fontRef idx="minor">
+            <a:schemeClr val="lt1"/>
+          </a:fontRef>
+        </p:style>
+        <p:txBody>
+          <a:bodyPr rtlCol="0" anchor="ctr"/>
+          <a:lstStyle/>
+          <a:p>
+            <a:pPr algn="ctr"/>
+            <a:endParaRPr lang="en-US"/>
           </a:p>
         </p:txBody>
       </p:sp>
     </p:spTree>
     <p:extLst>
       <p:ext uri="{BB962C8B-B14F-4D97-AF65-F5344CB8AC3E}">
-        <p14:creationId xmlns:p14="http://schemas.microsoft.com/office/powerpoint/2010/main" val="2560380269"/>
+        <p14:creationId xmlns:p14="http://schemas.microsoft.com/office/powerpoint/2010/main" val="1936291726"/>
       </p:ext>
     </p:extLst>
   </p:cSld>
@@ -9336,47 +9641,12 @@
           <a:chExt cx="0" cy="0"/>
         </a:xfrm>
       </p:grpSpPr>
-      <p:sp>
-        <p:nvSpPr>
-          <p:cNvPr id="4" name="TextBox 3">
-            <a:extLst>
-              <a:ext uri="{FF2B5EF4-FFF2-40B4-BE49-F238E27FC236}">
-                <a16:creationId xmlns:a16="http://schemas.microsoft.com/office/drawing/2014/main" id="{4CBCCAAD-C40A-0540-A342-CC95BED36479}"/>
-              </a:ext>
-            </a:extLst>
-          </p:cNvPr>
-          <p:cNvSpPr txBox="1"/>
-          <p:nvPr/>
-        </p:nvSpPr>
-        <p:spPr>
-          <a:xfrm>
-            <a:off x="152327" y="-28505"/>
-            <a:ext cx="943528" cy="369332"/>
-          </a:xfrm>
-          <a:prstGeom prst="rect">
-            <a:avLst/>
-          </a:prstGeom>
-          <a:noFill/>
-        </p:spPr>
-        <p:txBody>
-          <a:bodyPr wrap="none" rtlCol="0">
-            <a:spAutoFit/>
-          </a:bodyPr>
-          <a:lstStyle/>
-          <a:p>
-            <a:r>
-              <a:rPr lang="en-US" b="1" dirty="0"/>
-              <a:t>Figure 2</a:t>
-            </a:r>
-          </a:p>
-        </p:txBody>
-      </p:sp>
       <p:pic>
         <p:nvPicPr>
-          <p:cNvPr id="6" name="Picture 5">
-            <a:extLst>
-              <a:ext uri="{FF2B5EF4-FFF2-40B4-BE49-F238E27FC236}">
-                <a16:creationId xmlns:a16="http://schemas.microsoft.com/office/drawing/2014/main" id="{D2107C2B-7AD9-0940-814D-542810A3F058}"/>
+          <p:cNvPr id="4" name="Picture 3">
+            <a:extLst>
+              <a:ext uri="{FF2B5EF4-FFF2-40B4-BE49-F238E27FC236}">
+                <a16:creationId xmlns:a16="http://schemas.microsoft.com/office/drawing/2014/main" id="{78AC1BD0-7DA5-E9BF-1323-A48980C680F0}"/>
               </a:ext>
             </a:extLst>
           </p:cNvPr>
@@ -9385,459 +9655,26 @@
           </p:cNvPicPr>
           <p:nvPr/>
         </p:nvPicPr>
-        <p:blipFill rotWithShape="1">
+        <p:blipFill>
           <a:blip r:embed="rId3"/>
-          <a:srcRect t="52525"/>
-          <a:stretch/>
+          <a:stretch>
+            <a:fillRect/>
+          </a:stretch>
         </p:blipFill>
         <p:spPr>
           <a:xfrm>
-            <a:off x="6369518" y="1648788"/>
-            <a:ext cx="5689283" cy="3981303"/>
+            <a:off x="3699510" y="-103505"/>
+            <a:ext cx="4617303" cy="6806057"/>
           </a:xfrm>
           <a:prstGeom prst="rect">
             <a:avLst/>
           </a:prstGeom>
         </p:spPr>
       </p:pic>
-      <p:pic>
-        <p:nvPicPr>
-          <p:cNvPr id="7" name="Picture 6">
-            <a:extLst>
-              <a:ext uri="{FF2B5EF4-FFF2-40B4-BE49-F238E27FC236}">
-                <a16:creationId xmlns:a16="http://schemas.microsoft.com/office/drawing/2014/main" id="{4D1CA6F0-055A-C240-A4FC-6BEFEB8FFA56}"/>
-              </a:ext>
-            </a:extLst>
-          </p:cNvPr>
-          <p:cNvPicPr>
-            <a:picLocks noChangeAspect="1"/>
-          </p:cNvPicPr>
-          <p:nvPr/>
-        </p:nvPicPr>
-        <p:blipFill rotWithShape="1">
-          <a:blip r:embed="rId4"/>
-          <a:srcRect l="2701" t="7745" r="2136" b="6008"/>
-          <a:stretch/>
-        </p:blipFill>
-        <p:spPr>
-          <a:xfrm>
-            <a:off x="936970" y="1852864"/>
-            <a:ext cx="5423723" cy="3433730"/>
-          </a:xfrm>
-          <a:prstGeom prst="rect">
-            <a:avLst/>
-          </a:prstGeom>
-        </p:spPr>
-      </p:pic>
-      <p:sp>
-        <p:nvSpPr>
-          <p:cNvPr id="2" name="TextBox 1">
-            <a:extLst>
-              <a:ext uri="{FF2B5EF4-FFF2-40B4-BE49-F238E27FC236}">
-                <a16:creationId xmlns:a16="http://schemas.microsoft.com/office/drawing/2014/main" id="{633D4B2A-37ED-CE4F-938D-1864D4E6B025}"/>
-              </a:ext>
-            </a:extLst>
-          </p:cNvPr>
-          <p:cNvSpPr txBox="1"/>
-          <p:nvPr/>
-        </p:nvSpPr>
-        <p:spPr>
-          <a:xfrm>
-            <a:off x="2094074" y="4445366"/>
-            <a:ext cx="1241562" cy="430887"/>
-          </a:xfrm>
-          <a:prstGeom prst="rect">
-            <a:avLst/>
-          </a:prstGeom>
-          <a:noFill/>
-        </p:spPr>
-        <p:txBody>
-          <a:bodyPr wrap="square" rtlCol="0">
-            <a:spAutoFit/>
-          </a:bodyPr>
-          <a:lstStyle/>
-          <a:p>
-            <a:r>
-              <a:rPr lang="en-US" sz="1100" dirty="0"/>
-              <a:t>Putative ancestral inserts</a:t>
-            </a:r>
-          </a:p>
-        </p:txBody>
-      </p:sp>
-      <p:sp>
-        <p:nvSpPr>
-          <p:cNvPr id="8" name="TextBox 7">
-            <a:extLst>
-              <a:ext uri="{FF2B5EF4-FFF2-40B4-BE49-F238E27FC236}">
-                <a16:creationId xmlns:a16="http://schemas.microsoft.com/office/drawing/2014/main" id="{C1A254C8-E221-074A-8EC7-674BF6886A40}"/>
-              </a:ext>
-            </a:extLst>
-          </p:cNvPr>
-          <p:cNvSpPr txBox="1"/>
-          <p:nvPr/>
-        </p:nvSpPr>
-        <p:spPr>
-          <a:xfrm>
-            <a:off x="3862937" y="2027575"/>
-            <a:ext cx="1528056" cy="430887"/>
-          </a:xfrm>
-          <a:prstGeom prst="rect">
-            <a:avLst/>
-          </a:prstGeom>
-          <a:noFill/>
-        </p:spPr>
-        <p:txBody>
-          <a:bodyPr wrap="square" rtlCol="0">
-            <a:spAutoFit/>
-          </a:bodyPr>
-          <a:lstStyle/>
-          <a:p>
-            <a:pPr algn="r"/>
-            <a:r>
-              <a:rPr lang="en-US" sz="1100" dirty="0"/>
-              <a:t>Putative contemporary inserts</a:t>
-            </a:r>
-          </a:p>
-        </p:txBody>
-      </p:sp>
-      <p:sp>
-        <p:nvSpPr>
-          <p:cNvPr id="9" name="TextBox 8">
-            <a:extLst>
-              <a:ext uri="{FF2B5EF4-FFF2-40B4-BE49-F238E27FC236}">
-                <a16:creationId xmlns:a16="http://schemas.microsoft.com/office/drawing/2014/main" id="{A1AB082A-F420-0C48-91D5-4F7BF95C306D}"/>
-              </a:ext>
-            </a:extLst>
-          </p:cNvPr>
-          <p:cNvSpPr txBox="1"/>
-          <p:nvPr/>
-        </p:nvSpPr>
-        <p:spPr>
-          <a:xfrm>
-            <a:off x="4082441" y="3736051"/>
-            <a:ext cx="1281120" cy="261610"/>
-          </a:xfrm>
-          <a:prstGeom prst="rect">
-            <a:avLst/>
-          </a:prstGeom>
-          <a:noFill/>
-        </p:spPr>
-        <p:txBody>
-          <a:bodyPr wrap="none" rtlCol="0">
-            <a:spAutoFit/>
-          </a:bodyPr>
-          <a:lstStyle/>
-          <a:p>
-            <a:r>
-              <a:rPr lang="en-US" sz="1100" dirty="0"/>
-              <a:t>Unable to infer age</a:t>
-            </a:r>
-          </a:p>
-        </p:txBody>
-      </p:sp>
-      <p:sp>
-        <p:nvSpPr>
-          <p:cNvPr id="3" name="TextBox 2">
-            <a:extLst>
-              <a:ext uri="{FF2B5EF4-FFF2-40B4-BE49-F238E27FC236}">
-                <a16:creationId xmlns:a16="http://schemas.microsoft.com/office/drawing/2014/main" id="{56561D6C-B0AC-0E48-A749-34E5EC08CA93}"/>
-              </a:ext>
-            </a:extLst>
-          </p:cNvPr>
-          <p:cNvSpPr txBox="1"/>
-          <p:nvPr/>
-        </p:nvSpPr>
-        <p:spPr>
-          <a:xfrm>
-            <a:off x="3177302" y="5230862"/>
-            <a:ext cx="1064779" cy="307777"/>
-          </a:xfrm>
-          <a:prstGeom prst="rect">
-            <a:avLst/>
-          </a:prstGeom>
-          <a:noFill/>
-        </p:spPr>
-        <p:txBody>
-          <a:bodyPr wrap="none" rtlCol="0">
-            <a:spAutoFit/>
-          </a:bodyPr>
-          <a:lstStyle/>
-          <a:p>
-            <a:r>
-              <a:rPr lang="en-US" sz="1400" dirty="0"/>
-              <a:t>Insert count</a:t>
-            </a:r>
-          </a:p>
-        </p:txBody>
-      </p:sp>
-      <p:sp>
-        <p:nvSpPr>
-          <p:cNvPr id="10" name="TextBox 9">
-            <a:extLst>
-              <a:ext uri="{FF2B5EF4-FFF2-40B4-BE49-F238E27FC236}">
-                <a16:creationId xmlns:a16="http://schemas.microsoft.com/office/drawing/2014/main" id="{90AA9167-B2F4-DB40-8978-942B5407BF84}"/>
-              </a:ext>
-            </a:extLst>
-          </p:cNvPr>
-          <p:cNvSpPr txBox="1"/>
-          <p:nvPr/>
-        </p:nvSpPr>
-        <p:spPr>
-          <a:xfrm rot="16200000">
-            <a:off x="-308369" y="3261666"/>
-            <a:ext cx="2290755" cy="307777"/>
-          </a:xfrm>
-          <a:prstGeom prst="rect">
-            <a:avLst/>
-          </a:prstGeom>
-          <a:noFill/>
-        </p:spPr>
-        <p:txBody>
-          <a:bodyPr wrap="none" rtlCol="0">
-            <a:spAutoFit/>
-          </a:bodyPr>
-          <a:lstStyle/>
-          <a:p>
-            <a:r>
-              <a:rPr lang="en-US" sz="1400" dirty="0"/>
-              <a:t>BLAST identity (%) difference</a:t>
-            </a:r>
-          </a:p>
-        </p:txBody>
-      </p:sp>
-      <p:sp>
-        <p:nvSpPr>
-          <p:cNvPr id="11" name="TextBox 10">
-            <a:extLst>
-              <a:ext uri="{FF2B5EF4-FFF2-40B4-BE49-F238E27FC236}">
-                <a16:creationId xmlns:a16="http://schemas.microsoft.com/office/drawing/2014/main" id="{FDFFE04B-D070-864B-B8B8-CEADF928B4A8}"/>
-              </a:ext>
-            </a:extLst>
-          </p:cNvPr>
-          <p:cNvSpPr txBox="1"/>
-          <p:nvPr/>
-        </p:nvSpPr>
-        <p:spPr>
-          <a:xfrm>
-            <a:off x="563825" y="1753280"/>
-            <a:ext cx="324128" cy="369332"/>
-          </a:xfrm>
-          <a:prstGeom prst="rect">
-            <a:avLst/>
-          </a:prstGeom>
-          <a:noFill/>
-        </p:spPr>
-        <p:txBody>
-          <a:bodyPr wrap="none" rtlCol="0">
-            <a:spAutoFit/>
-          </a:bodyPr>
-          <a:lstStyle/>
-          <a:p>
-            <a:r>
-              <a:rPr lang="en-US" b="1" dirty="0"/>
-              <a:t>A</a:t>
-            </a:r>
-          </a:p>
-        </p:txBody>
-      </p:sp>
-      <p:sp>
-        <p:nvSpPr>
-          <p:cNvPr id="12" name="TextBox 11">
-            <a:extLst>
-              <a:ext uri="{FF2B5EF4-FFF2-40B4-BE49-F238E27FC236}">
-                <a16:creationId xmlns:a16="http://schemas.microsoft.com/office/drawing/2014/main" id="{276F2C94-E046-8F49-A92D-49719149D358}"/>
-              </a:ext>
-            </a:extLst>
-          </p:cNvPr>
-          <p:cNvSpPr txBox="1"/>
-          <p:nvPr/>
-        </p:nvSpPr>
-        <p:spPr>
-          <a:xfrm>
-            <a:off x="6360693" y="1753280"/>
-            <a:ext cx="314510" cy="369332"/>
-          </a:xfrm>
-          <a:prstGeom prst="rect">
-            <a:avLst/>
-          </a:prstGeom>
-          <a:noFill/>
-        </p:spPr>
-        <p:txBody>
-          <a:bodyPr wrap="none" rtlCol="0">
-            <a:spAutoFit/>
-          </a:bodyPr>
-          <a:lstStyle/>
-          <a:p>
-            <a:r>
-              <a:rPr lang="en-US" b="1" dirty="0"/>
-              <a:t>B</a:t>
-            </a:r>
-          </a:p>
-        </p:txBody>
-      </p:sp>
-      <p:sp>
-        <p:nvSpPr>
-          <p:cNvPr id="13" name="Oval 12">
-            <a:extLst>
-              <a:ext uri="{FF2B5EF4-FFF2-40B4-BE49-F238E27FC236}">
-                <a16:creationId xmlns:a16="http://schemas.microsoft.com/office/drawing/2014/main" id="{E421327E-452A-CD40-9CB2-DCE4DADC7EB8}"/>
-              </a:ext>
-            </a:extLst>
-          </p:cNvPr>
-          <p:cNvSpPr/>
-          <p:nvPr/>
-        </p:nvSpPr>
-        <p:spPr>
-          <a:xfrm rot="20764211">
-            <a:off x="1270899" y="4637079"/>
-            <a:ext cx="865164" cy="326542"/>
-          </a:xfrm>
-          <a:prstGeom prst="ellipse">
-            <a:avLst/>
-          </a:prstGeom>
-          <a:noFill/>
-          <a:ln w="9525">
-            <a:solidFill>
-              <a:srgbClr val="FF0000"/>
-            </a:solidFill>
-            <a:prstDash val="dash"/>
-          </a:ln>
-        </p:spPr>
-        <p:style>
-          <a:lnRef idx="2">
-            <a:schemeClr val="accent1">
-              <a:shade val="50000"/>
-            </a:schemeClr>
-          </a:lnRef>
-          <a:fillRef idx="1">
-            <a:schemeClr val="accent1"/>
-          </a:fillRef>
-          <a:effectRef idx="0">
-            <a:schemeClr val="accent1"/>
-          </a:effectRef>
-          <a:fontRef idx="minor">
-            <a:schemeClr val="lt1"/>
-          </a:fontRef>
-        </p:style>
-        <p:txBody>
-          <a:bodyPr rtlCol="0" anchor="ctr"/>
-          <a:lstStyle/>
-          <a:p>
-            <a:pPr algn="ctr"/>
-            <a:endParaRPr lang="en-US"/>
-          </a:p>
-        </p:txBody>
-      </p:sp>
-      <p:sp>
-        <p:nvSpPr>
-          <p:cNvPr id="14" name="Oval 13">
-            <a:extLst>
-              <a:ext uri="{FF2B5EF4-FFF2-40B4-BE49-F238E27FC236}">
-                <a16:creationId xmlns:a16="http://schemas.microsoft.com/office/drawing/2014/main" id="{1DAD5DDC-8234-0745-83AA-125A34ABC016}"/>
-              </a:ext>
-            </a:extLst>
-          </p:cNvPr>
-          <p:cNvSpPr/>
-          <p:nvPr/>
-        </p:nvSpPr>
-        <p:spPr>
-          <a:xfrm rot="20764211">
-            <a:off x="5332359" y="2021240"/>
-            <a:ext cx="865164" cy="326542"/>
-          </a:xfrm>
-          <a:prstGeom prst="ellipse">
-            <a:avLst/>
-          </a:prstGeom>
-          <a:noFill/>
-          <a:ln w="9525">
-            <a:solidFill>
-              <a:srgbClr val="FF0000"/>
-            </a:solidFill>
-            <a:prstDash val="dash"/>
-          </a:ln>
-        </p:spPr>
-        <p:style>
-          <a:lnRef idx="2">
-            <a:schemeClr val="accent1">
-              <a:shade val="50000"/>
-            </a:schemeClr>
-          </a:lnRef>
-          <a:fillRef idx="1">
-            <a:schemeClr val="accent1"/>
-          </a:fillRef>
-          <a:effectRef idx="0">
-            <a:schemeClr val="accent1"/>
-          </a:effectRef>
-          <a:fontRef idx="minor">
-            <a:schemeClr val="lt1"/>
-          </a:fontRef>
-        </p:style>
-        <p:txBody>
-          <a:bodyPr rtlCol="0" anchor="ctr"/>
-          <a:lstStyle/>
-          <a:p>
-            <a:pPr algn="ctr"/>
-            <a:endParaRPr lang="en-US"/>
-          </a:p>
-        </p:txBody>
-      </p:sp>
-      <p:sp>
-        <p:nvSpPr>
-          <p:cNvPr id="15" name="Oval 14">
-            <a:extLst>
-              <a:ext uri="{FF2B5EF4-FFF2-40B4-BE49-F238E27FC236}">
-                <a16:creationId xmlns:a16="http://schemas.microsoft.com/office/drawing/2014/main" id="{08A2940A-50E2-9E4E-B45B-7E8B51C98C89}"/>
-              </a:ext>
-            </a:extLst>
-          </p:cNvPr>
-          <p:cNvSpPr/>
-          <p:nvPr/>
-        </p:nvSpPr>
-        <p:spPr>
-          <a:xfrm rot="21257093">
-            <a:off x="1828726" y="3163471"/>
-            <a:ext cx="3824834" cy="642507"/>
-          </a:xfrm>
-          <a:prstGeom prst="ellipse">
-            <a:avLst/>
-          </a:prstGeom>
-          <a:noFill/>
-          <a:ln w="9525">
-            <a:solidFill>
-              <a:srgbClr val="FF0000"/>
-            </a:solidFill>
-            <a:prstDash val="dash"/>
-          </a:ln>
-        </p:spPr>
-        <p:style>
-          <a:lnRef idx="2">
-            <a:schemeClr val="accent1">
-              <a:shade val="50000"/>
-            </a:schemeClr>
-          </a:lnRef>
-          <a:fillRef idx="1">
-            <a:schemeClr val="accent1"/>
-          </a:fillRef>
-          <a:effectRef idx="0">
-            <a:schemeClr val="accent1"/>
-          </a:effectRef>
-          <a:fontRef idx="minor">
-            <a:schemeClr val="lt1"/>
-          </a:fontRef>
-        </p:style>
-        <p:txBody>
-          <a:bodyPr rtlCol="0" anchor="ctr"/>
-          <a:lstStyle/>
-          <a:p>
-            <a:pPr algn="ctr"/>
-            <a:endParaRPr lang="en-US"/>
-          </a:p>
-        </p:txBody>
-      </p:sp>
     </p:spTree>
     <p:extLst>
       <p:ext uri="{BB962C8B-B14F-4D97-AF65-F5344CB8AC3E}">
-        <p14:creationId xmlns:p14="http://schemas.microsoft.com/office/powerpoint/2010/main" val="1936291726"/>
+        <p14:creationId xmlns:p14="http://schemas.microsoft.com/office/powerpoint/2010/main" val="4199959309"/>
       </p:ext>
     </p:extLst>
   </p:cSld>
@@ -9848,6 +9685,185 @@
 </file>
 
 <file path=ppt/slides/slide12.xml><?xml version="1.0" encoding="utf-8"?>
+<p:sld xmlns:a="http://schemas.openxmlformats.org/drawingml/2006/main" xmlns:r="http://schemas.openxmlformats.org/officeDocument/2006/relationships" xmlns:p="http://schemas.openxmlformats.org/presentationml/2006/main">
+  <p:cSld>
+    <p:spTree>
+      <p:nvGrpSpPr>
+        <p:cNvPr id="1" name=""/>
+        <p:cNvGrpSpPr/>
+        <p:nvPr/>
+      </p:nvGrpSpPr>
+      <p:grpSpPr>
+        <a:xfrm>
+          <a:off x="0" y="0"/>
+          <a:ext cx="0" cy="0"/>
+          <a:chOff x="0" y="0"/>
+          <a:chExt cx="0" cy="0"/>
+        </a:xfrm>
+      </p:grpSpPr>
+      <p:pic>
+        <p:nvPicPr>
+          <p:cNvPr id="4" name="Picture 3">
+            <a:extLst>
+              <a:ext uri="{FF2B5EF4-FFF2-40B4-BE49-F238E27FC236}">
+                <a16:creationId xmlns:a16="http://schemas.microsoft.com/office/drawing/2014/main" id="{61BBB3A3-78CA-A200-3731-AABEB7DD0C3F}"/>
+              </a:ext>
+            </a:extLst>
+          </p:cNvPr>
+          <p:cNvPicPr>
+            <a:picLocks noChangeAspect="1"/>
+          </p:cNvPicPr>
+          <p:nvPr/>
+        </p:nvPicPr>
+        <p:blipFill>
+          <a:blip r:embed="rId3"/>
+          <a:stretch>
+            <a:fillRect/>
+          </a:stretch>
+        </p:blipFill>
+        <p:spPr>
+          <a:xfrm>
+            <a:off x="3230245" y="428307"/>
+            <a:ext cx="5731510" cy="6001385"/>
+          </a:xfrm>
+          <a:prstGeom prst="rect">
+            <a:avLst/>
+          </a:prstGeom>
+        </p:spPr>
+      </p:pic>
+    </p:spTree>
+    <p:extLst>
+      <p:ext uri="{BB962C8B-B14F-4D97-AF65-F5344CB8AC3E}">
+        <p14:creationId xmlns:p14="http://schemas.microsoft.com/office/powerpoint/2010/main" val="2815334628"/>
+      </p:ext>
+    </p:extLst>
+  </p:cSld>
+  <p:clrMapOvr>
+    <a:masterClrMapping/>
+  </p:clrMapOvr>
+</p:sld>
+</file>
+
+<file path=ppt/slides/slide13.xml><?xml version="1.0" encoding="utf-8"?>
+<p:sld xmlns:a="http://schemas.openxmlformats.org/drawingml/2006/main" xmlns:r="http://schemas.openxmlformats.org/officeDocument/2006/relationships" xmlns:p="http://schemas.openxmlformats.org/presentationml/2006/main">
+  <p:cSld>
+    <p:spTree>
+      <p:nvGrpSpPr>
+        <p:cNvPr id="1" name=""/>
+        <p:cNvGrpSpPr/>
+        <p:nvPr/>
+      </p:nvGrpSpPr>
+      <p:grpSpPr>
+        <a:xfrm>
+          <a:off x="0" y="0"/>
+          <a:ext cx="0" cy="0"/>
+          <a:chOff x="0" y="0"/>
+          <a:chExt cx="0" cy="0"/>
+        </a:xfrm>
+      </p:grpSpPr>
+      <p:pic>
+        <p:nvPicPr>
+          <p:cNvPr id="5" name="Picture 4">
+            <a:extLst>
+              <a:ext uri="{FF2B5EF4-FFF2-40B4-BE49-F238E27FC236}">
+                <a16:creationId xmlns:a16="http://schemas.microsoft.com/office/drawing/2014/main" id="{3F65D913-7192-374F-8DD8-295EDAC76DD3}"/>
+              </a:ext>
+            </a:extLst>
+          </p:cNvPr>
+          <p:cNvPicPr>
+            <a:picLocks noChangeAspect="1"/>
+          </p:cNvPicPr>
+          <p:nvPr/>
+        </p:nvPicPr>
+        <p:blipFill>
+          <a:blip r:embed="rId2"/>
+          <a:stretch>
+            <a:fillRect/>
+          </a:stretch>
+        </p:blipFill>
+        <p:spPr>
+          <a:xfrm>
+            <a:off x="1689107" y="211874"/>
+            <a:ext cx="8985383" cy="6276794"/>
+          </a:xfrm>
+          <a:prstGeom prst="rect">
+            <a:avLst/>
+          </a:prstGeom>
+        </p:spPr>
+      </p:pic>
+      <p:sp>
+        <p:nvSpPr>
+          <p:cNvPr id="6" name="TextBox 5">
+            <a:extLst>
+              <a:ext uri="{FF2B5EF4-FFF2-40B4-BE49-F238E27FC236}">
+                <a16:creationId xmlns:a16="http://schemas.microsoft.com/office/drawing/2014/main" id="{4247A41C-BF5A-F64D-ABE3-09583767864B}"/>
+              </a:ext>
+            </a:extLst>
+          </p:cNvPr>
+          <p:cNvSpPr txBox="1"/>
+          <p:nvPr/>
+        </p:nvSpPr>
+        <p:spPr>
+          <a:xfrm>
+            <a:off x="624468" y="6488668"/>
+            <a:ext cx="3591689" cy="369332"/>
+          </a:xfrm>
+          <a:prstGeom prst="rect">
+            <a:avLst/>
+          </a:prstGeom>
+          <a:noFill/>
+        </p:spPr>
+        <p:txBody>
+          <a:bodyPr wrap="none" rtlCol="0">
+            <a:spAutoFit/>
+          </a:bodyPr>
+          <a:lstStyle/>
+          <a:p>
+            <a:r>
+              <a:rPr lang="en-US" dirty="0"/>
+              <a:t>P-</a:t>
+            </a:r>
+            <a:r>
+              <a:rPr lang="en-US" dirty="0" err="1"/>
+              <a:t>tryoni</a:t>
+            </a:r>
+            <a:r>
+              <a:rPr lang="en-US" dirty="0"/>
+              <a:t>-</a:t>
+            </a:r>
+            <a:r>
+              <a:rPr lang="en-US" dirty="0" err="1"/>
+              <a:t>tryoni</a:t>
+            </a:r>
+            <a:r>
+              <a:rPr lang="en-US" dirty="0"/>
+              <a:t>-</a:t>
+            </a:r>
+            <a:r>
+              <a:rPr lang="en-US" dirty="0" err="1"/>
+              <a:t>Eungella_ageing</a:t>
+            </a:r>
+            <a:r>
+              <a:rPr lang="en-US" dirty="0"/>
+              <a:t>-plot</a:t>
+            </a:r>
+          </a:p>
+        </p:txBody>
+      </p:sp>
+    </p:spTree>
+    <p:extLst>
+      <p:ext uri="{BB962C8B-B14F-4D97-AF65-F5344CB8AC3E}">
+        <p14:creationId xmlns:p14="http://schemas.microsoft.com/office/powerpoint/2010/main" val="82245517"/>
+      </p:ext>
+    </p:extLst>
+  </p:cSld>
+  <p:clrMapOvr>
+    <a:masterClrMapping/>
+  </p:clrMapOvr>
+</p:sld>
+</file>
+
+<file path=ppt/slides/slide14.xml><?xml version="1.0" encoding="utf-8"?>
 <p:sld xmlns:a="http://schemas.openxmlformats.org/drawingml/2006/main" xmlns:r="http://schemas.openxmlformats.org/officeDocument/2006/relationships" xmlns:p="http://schemas.openxmlformats.org/presentationml/2006/main">
   <p:cSld>
     <p:spTree>
@@ -21854,12 +21870,47 @@
           <a:chExt cx="0" cy="0"/>
         </a:xfrm>
       </p:grpSpPr>
+      <p:sp>
+        <p:nvSpPr>
+          <p:cNvPr id="4" name="TextBox 3">
+            <a:extLst>
+              <a:ext uri="{FF2B5EF4-FFF2-40B4-BE49-F238E27FC236}">
+                <a16:creationId xmlns:a16="http://schemas.microsoft.com/office/drawing/2014/main" id="{5F103247-7C81-0D48-AE16-4683CDEE6718}"/>
+              </a:ext>
+            </a:extLst>
+          </p:cNvPr>
+          <p:cNvSpPr txBox="1"/>
+          <p:nvPr/>
+        </p:nvSpPr>
+        <p:spPr>
+          <a:xfrm>
+            <a:off x="1076446" y="486137"/>
+            <a:ext cx="5185137" cy="369332"/>
+          </a:xfrm>
+          <a:prstGeom prst="rect">
+            <a:avLst/>
+          </a:prstGeom>
+          <a:noFill/>
+        </p:spPr>
+        <p:txBody>
+          <a:bodyPr wrap="none" rtlCol="0">
+            <a:spAutoFit/>
+          </a:bodyPr>
+          <a:lstStyle/>
+          <a:p>
+            <a:r>
+              <a:rPr lang="en-US" dirty="0"/>
+              <a:t>Marker length distribution with: inserts_lengths_v3.R</a:t>
+            </a:r>
+          </a:p>
+        </p:txBody>
+      </p:sp>
       <p:pic>
         <p:nvPicPr>
-          <p:cNvPr id="4" name="Picture 3">
-            <a:extLst>
-              <a:ext uri="{FF2B5EF4-FFF2-40B4-BE49-F238E27FC236}">
-                <a16:creationId xmlns:a16="http://schemas.microsoft.com/office/drawing/2014/main" id="{78AC1BD0-7DA5-E9BF-1323-A48980C680F0}"/>
+          <p:cNvPr id="7" name="Picture 6">
+            <a:extLst>
+              <a:ext uri="{FF2B5EF4-FFF2-40B4-BE49-F238E27FC236}">
+                <a16:creationId xmlns:a16="http://schemas.microsoft.com/office/drawing/2014/main" id="{07443F26-38F1-0844-B722-ABAA9831C0E0}"/>
               </a:ext>
             </a:extLst>
           </p:cNvPr>
@@ -21869,15 +21920,15 @@
           <p:nvPr/>
         </p:nvPicPr>
         <p:blipFill>
-          <a:blip r:embed="rId3"/>
+          <a:blip r:embed="rId2"/>
           <a:stretch>
             <a:fillRect/>
           </a:stretch>
         </p:blipFill>
         <p:spPr>
           <a:xfrm>
-            <a:off x="3699510" y="-103505"/>
-            <a:ext cx="4617303" cy="6806057"/>
+            <a:off x="1076446" y="855469"/>
+            <a:ext cx="10172700" cy="5638800"/>
           </a:xfrm>
           <a:prstGeom prst="rect">
             <a:avLst/>
@@ -21887,7 +21938,7 @@
     </p:spTree>
     <p:extLst>
       <p:ext uri="{BB962C8B-B14F-4D97-AF65-F5344CB8AC3E}">
-        <p14:creationId xmlns:p14="http://schemas.microsoft.com/office/powerpoint/2010/main" val="4199959309"/>
+        <p14:creationId xmlns:p14="http://schemas.microsoft.com/office/powerpoint/2010/main" val="3240909723"/>
       </p:ext>
     </p:extLst>
   </p:cSld>
@@ -21914,12 +21965,45 @@
           <a:chExt cx="0" cy="0"/>
         </a:xfrm>
       </p:grpSpPr>
+      <p:sp>
+        <p:nvSpPr>
+          <p:cNvPr id="2" name="Title 1">
+            <a:extLst>
+              <a:ext uri="{FF2B5EF4-FFF2-40B4-BE49-F238E27FC236}">
+                <a16:creationId xmlns:a16="http://schemas.microsoft.com/office/drawing/2014/main" id="{4FE3B51C-B7D4-1A44-8250-3B09C2C353FD}"/>
+              </a:ext>
+            </a:extLst>
+          </p:cNvPr>
+          <p:cNvSpPr>
+            <a:spLocks noGrp="1"/>
+          </p:cNvSpPr>
+          <p:nvPr>
+            <p:ph type="title"/>
+          </p:nvPr>
+        </p:nvSpPr>
+        <p:spPr>
+          <a:xfrm>
+            <a:off x="259466" y="-572424"/>
+            <a:ext cx="10515600" cy="1325563"/>
+          </a:xfrm>
+        </p:spPr>
+        <p:txBody>
+          <a:bodyPr/>
+          <a:lstStyle/>
+          <a:p>
+            <a:r>
+              <a:rPr lang="en-US" dirty="0"/>
+              <a:t>Insert origins</a:t>
+            </a:r>
+          </a:p>
+        </p:txBody>
+      </p:sp>
       <p:pic>
         <p:nvPicPr>
-          <p:cNvPr id="4" name="Picture 3">
-            <a:extLst>
-              <a:ext uri="{FF2B5EF4-FFF2-40B4-BE49-F238E27FC236}">
-                <a16:creationId xmlns:a16="http://schemas.microsoft.com/office/drawing/2014/main" id="{61BBB3A3-78CA-A200-3731-AABEB7DD0C3F}"/>
+          <p:cNvPr id="7" name="Picture 6">
+            <a:extLst>
+              <a:ext uri="{FF2B5EF4-FFF2-40B4-BE49-F238E27FC236}">
+                <a16:creationId xmlns:a16="http://schemas.microsoft.com/office/drawing/2014/main" id="{229A0A07-263F-F143-80BA-F0AE938BAA42}"/>
               </a:ext>
             </a:extLst>
           </p:cNvPr>
@@ -21929,15 +22013,15 @@
           <p:nvPr/>
         </p:nvPicPr>
         <p:blipFill>
-          <a:blip r:embed="rId3"/>
+          <a:blip r:embed="rId2"/>
           <a:stretch>
             <a:fillRect/>
           </a:stretch>
         </p:blipFill>
         <p:spPr>
           <a:xfrm>
-            <a:off x="3230245" y="428307"/>
-            <a:ext cx="5731510" cy="6001385"/>
+            <a:off x="1809750" y="0"/>
+            <a:ext cx="8572500" cy="6858000"/>
           </a:xfrm>
           <a:prstGeom prst="rect">
             <a:avLst/>
@@ -21947,7 +22031,7 @@
     </p:spTree>
     <p:extLst>
       <p:ext uri="{BB962C8B-B14F-4D97-AF65-F5344CB8AC3E}">
-        <p14:creationId xmlns:p14="http://schemas.microsoft.com/office/powerpoint/2010/main" val="2815334628"/>
+        <p14:creationId xmlns:p14="http://schemas.microsoft.com/office/powerpoint/2010/main" val="1284114773"/>
       </p:ext>
     </p:extLst>
   </p:cSld>
@@ -21976,10 +22060,10 @@
       </p:grpSpPr>
       <p:pic>
         <p:nvPicPr>
-          <p:cNvPr id="5" name="Picture 4">
-            <a:extLst>
-              <a:ext uri="{FF2B5EF4-FFF2-40B4-BE49-F238E27FC236}">
-                <a16:creationId xmlns:a16="http://schemas.microsoft.com/office/drawing/2014/main" id="{3F65D913-7192-374F-8DD8-295EDAC76DD3}"/>
+          <p:cNvPr id="2" name="Picture 1">
+            <a:extLst>
+              <a:ext uri="{FF2B5EF4-FFF2-40B4-BE49-F238E27FC236}">
+                <a16:creationId xmlns:a16="http://schemas.microsoft.com/office/drawing/2014/main" id="{A45A0E29-9F21-FC4B-A4F5-B53517A41FC2}"/>
               </a:ext>
             </a:extLst>
           </p:cNvPr>
@@ -21989,15 +22073,15 @@
           <p:nvPr/>
         </p:nvPicPr>
         <p:blipFill>
-          <a:blip r:embed="rId2"/>
+          <a:blip r:embed="rId3"/>
           <a:stretch>
             <a:fillRect/>
           </a:stretch>
         </p:blipFill>
         <p:spPr>
           <a:xfrm>
-            <a:off x="1689107" y="211874"/>
-            <a:ext cx="8985383" cy="6276794"/>
+            <a:off x="75050" y="454968"/>
+            <a:ext cx="6561506" cy="4396430"/>
           </a:xfrm>
           <a:prstGeom prst="rect">
             <a:avLst/>
@@ -22006,10 +22090,10 @@
       </p:pic>
       <p:sp>
         <p:nvSpPr>
-          <p:cNvPr id="6" name="TextBox 5">
-            <a:extLst>
-              <a:ext uri="{FF2B5EF4-FFF2-40B4-BE49-F238E27FC236}">
-                <a16:creationId xmlns:a16="http://schemas.microsoft.com/office/drawing/2014/main" id="{4247A41C-BF5A-F64D-ABE3-09583767864B}"/>
+          <p:cNvPr id="5" name="TextBox 4">
+            <a:extLst>
+              <a:ext uri="{FF2B5EF4-FFF2-40B4-BE49-F238E27FC236}">
+                <a16:creationId xmlns:a16="http://schemas.microsoft.com/office/drawing/2014/main" id="{4F756E17-FE9E-4DC6-F3CF-AABBBF0B49DD}"/>
               </a:ext>
             </a:extLst>
           </p:cNvPr>
@@ -22018,8 +22102,72 @@
         </p:nvSpPr>
         <p:spPr>
           <a:xfrm>
-            <a:off x="624468" y="6488668"/>
-            <a:ext cx="3591689" cy="369332"/>
+            <a:off x="7856065" y="3519340"/>
+            <a:ext cx="3343468" cy="830997"/>
+          </a:xfrm>
+          <a:prstGeom prst="rect">
+            <a:avLst/>
+          </a:prstGeom>
+          <a:noFill/>
+        </p:spPr>
+        <p:txBody>
+          <a:bodyPr wrap="square" rtlCol="0">
+            <a:spAutoFit/>
+          </a:bodyPr>
+          <a:lstStyle/>
+          <a:p>
+            <a:pPr algn="ctr"/>
+            <a:r>
+              <a:rPr lang="en-US" sz="1600" b="1" dirty="0">
+                <a:solidFill>
+                  <a:srgbClr val="FF0000"/>
+                </a:solidFill>
+              </a:rPr>
+              <a:t>C. </a:t>
+            </a:r>
+            <a:r>
+              <a:rPr lang="en-US" sz="1600" dirty="0">
+                <a:solidFill>
+                  <a:srgbClr val="FF0000"/>
+                </a:solidFill>
+              </a:rPr>
+              <a:t>Placeholder: depiction of the origin of the insert around the </a:t>
+            </a:r>
+            <a:r>
+              <a:rPr lang="en-US" sz="1600" dirty="0" err="1">
+                <a:solidFill>
+                  <a:srgbClr val="FF0000"/>
+                </a:solidFill>
+              </a:rPr>
+              <a:t>Blatta</a:t>
+            </a:r>
+            <a:r>
+              <a:rPr lang="en-US" sz="1600" dirty="0">
+                <a:solidFill>
+                  <a:srgbClr val="FF0000"/>
+                </a:solidFill>
+              </a:rPr>
+              <a:t> genome (waiting on Leo)</a:t>
+            </a:r>
+          </a:p>
+        </p:txBody>
+      </p:sp>
+      <p:sp>
+        <p:nvSpPr>
+          <p:cNvPr id="7" name="TextBox 6">
+            <a:extLst>
+              <a:ext uri="{FF2B5EF4-FFF2-40B4-BE49-F238E27FC236}">
+                <a16:creationId xmlns:a16="http://schemas.microsoft.com/office/drawing/2014/main" id="{1C0E847B-8FC5-0867-7196-259B77611FF8}"/>
+              </a:ext>
+            </a:extLst>
+          </p:cNvPr>
+          <p:cNvSpPr txBox="1"/>
+          <p:nvPr/>
+        </p:nvSpPr>
+        <p:spPr>
+          <a:xfrm>
+            <a:off x="215683" y="425302"/>
+            <a:ext cx="324128" cy="369332"/>
           </a:xfrm>
           <a:prstGeom prst="rect">
             <a:avLst/>
@@ -22033,32 +22181,74 @@
           <a:lstStyle/>
           <a:p>
             <a:r>
-              <a:rPr lang="en-US" dirty="0"/>
-              <a:t>P-</a:t>
-            </a:r>
-            <a:r>
-              <a:rPr lang="en-US" dirty="0" err="1"/>
-              <a:t>tryoni</a:t>
-            </a:r>
-            <a:r>
-              <a:rPr lang="en-US" dirty="0"/>
-              <a:t>-</a:t>
-            </a:r>
-            <a:r>
-              <a:rPr lang="en-US" dirty="0" err="1"/>
-              <a:t>tryoni</a:t>
-            </a:r>
-            <a:r>
-              <a:rPr lang="en-US" dirty="0"/>
-              <a:t>-</a:t>
-            </a:r>
-            <a:r>
-              <a:rPr lang="en-US" dirty="0" err="1"/>
-              <a:t>Eungella_ageing</a:t>
-            </a:r>
-            <a:r>
-              <a:rPr lang="en-US" dirty="0"/>
-              <a:t>-plot</a:t>
+              <a:rPr lang="en-US" b="1" dirty="0"/>
+              <a:t>A</a:t>
+            </a:r>
+          </a:p>
+        </p:txBody>
+      </p:sp>
+      <p:pic>
+        <p:nvPicPr>
+          <p:cNvPr id="13" name="Picture 12">
+            <a:extLst>
+              <a:ext uri="{FF2B5EF4-FFF2-40B4-BE49-F238E27FC236}">
+                <a16:creationId xmlns:a16="http://schemas.microsoft.com/office/drawing/2014/main" id="{DC883A01-AA48-044E-76DC-460544A87194}"/>
+              </a:ext>
+            </a:extLst>
+          </p:cNvPr>
+          <p:cNvPicPr>
+            <a:picLocks noChangeAspect="1"/>
+          </p:cNvPicPr>
+          <p:nvPr/>
+        </p:nvPicPr>
+        <p:blipFill>
+          <a:blip r:embed="rId4"/>
+          <a:srcRect t="5172"/>
+          <a:stretch>
+            <a:fillRect/>
+          </a:stretch>
+        </p:blipFill>
+        <p:spPr>
+          <a:xfrm>
+            <a:off x="7048374" y="496730"/>
+            <a:ext cx="5104657" cy="2587255"/>
+          </a:xfrm>
+          <a:prstGeom prst="rect">
+            <a:avLst/>
+          </a:prstGeom>
+        </p:spPr>
+      </p:pic>
+      <p:sp>
+        <p:nvSpPr>
+          <p:cNvPr id="14" name="TextBox 13">
+            <a:extLst>
+              <a:ext uri="{FF2B5EF4-FFF2-40B4-BE49-F238E27FC236}">
+                <a16:creationId xmlns:a16="http://schemas.microsoft.com/office/drawing/2014/main" id="{2C6B5942-B39C-46A8-0714-63EF48E22894}"/>
+              </a:ext>
+            </a:extLst>
+          </p:cNvPr>
+          <p:cNvSpPr txBox="1"/>
+          <p:nvPr/>
+        </p:nvSpPr>
+        <p:spPr>
+          <a:xfrm>
+            <a:off x="6720534" y="425302"/>
+            <a:ext cx="314510" cy="369332"/>
+          </a:xfrm>
+          <a:prstGeom prst="rect">
+            <a:avLst/>
+          </a:prstGeom>
+          <a:noFill/>
+        </p:spPr>
+        <p:txBody>
+          <a:bodyPr wrap="none" rtlCol="0">
+            <a:spAutoFit/>
+          </a:bodyPr>
+          <a:lstStyle/>
+          <a:p>
+            <a:r>
+              <a:rPr lang="en-US" b="1" dirty="0"/>
+              <a:t>B</a:t>
             </a:r>
           </a:p>
         </p:txBody>
@@ -22066,7 +22256,7 @@
     </p:spTree>
     <p:extLst>
       <p:ext uri="{BB962C8B-B14F-4D97-AF65-F5344CB8AC3E}">
-        <p14:creationId xmlns:p14="http://schemas.microsoft.com/office/powerpoint/2010/main" val="82245517"/>
+        <p14:creationId xmlns:p14="http://schemas.microsoft.com/office/powerpoint/2010/main" val="2560380269"/>
       </p:ext>
     </p:extLst>
   </p:cSld>

--- a/manuscript/Figures/Blattabacterium HGT_figures-working.pptx
+++ b/manuscript/Figures/Blattabacterium HGT_figures-working.pptx
@@ -5,7 +5,7 @@
     <p:sldMasterId id="2147483648" r:id="rId1"/>
   </p:sldMasterIdLst>
   <p:notesMasterIdLst>
-    <p:notesMasterId r:id="rId16"/>
+    <p:notesMasterId r:id="rId18"/>
   </p:notesMasterIdLst>
   <p:sldIdLst>
     <p:sldId id="256" r:id="rId2"/>
@@ -16,12 +16,14 @@
     <p:sldId id="263" r:id="rId7"/>
     <p:sldId id="268" r:id="rId8"/>
     <p:sldId id="269" r:id="rId9"/>
-    <p:sldId id="261" r:id="rId10"/>
-    <p:sldId id="260" r:id="rId11"/>
-    <p:sldId id="264" r:id="rId12"/>
-    <p:sldId id="265" r:id="rId13"/>
-    <p:sldId id="266" r:id="rId14"/>
-    <p:sldId id="267" r:id="rId15"/>
+    <p:sldId id="271" r:id="rId10"/>
+    <p:sldId id="261" r:id="rId11"/>
+    <p:sldId id="270" r:id="rId12"/>
+    <p:sldId id="260" r:id="rId13"/>
+    <p:sldId id="264" r:id="rId14"/>
+    <p:sldId id="265" r:id="rId15"/>
+    <p:sldId id="266" r:id="rId16"/>
+    <p:sldId id="267" r:id="rId17"/>
   </p:sldIdLst>
   <p:sldSz cx="12192000" cy="6858000"/>
   <p:notesSz cx="6858000" cy="9144000"/>
@@ -210,7 +212,7 @@
           <a:p>
             <a:fld id="{C4FC65C6-6085-4244-82B2-63B076D03E9C}" type="datetimeFigureOut">
               <a:rPr lang="en-US" smtClean="0"/>
-              <a:t>11/12/25</a:t>
+              <a:t>11/13/25</a:t>
             </a:fld>
             <a:endParaRPr lang="en-US"/>
           </a:p>
@@ -952,7 +954,7 @@
           <a:p>
             <a:fld id="{AFCB7D11-0DA4-4649-ACEB-1F19D5C36BF9}" type="slidenum">
               <a:rPr lang="en-US" smtClean="0"/>
-              <a:t>9</a:t>
+              <a:t>10</a:t>
             </a:fld>
             <a:endParaRPr lang="en-US"/>
           </a:p>
@@ -1075,7 +1077,7 @@
           <a:p>
             <a:fld id="{AFCB7D11-0DA4-4649-ACEB-1F19D5C36BF9}" type="slidenum">
               <a:rPr lang="en-US" smtClean="0"/>
-              <a:t>10</a:t>
+              <a:t>12</a:t>
             </a:fld>
             <a:endParaRPr lang="en-US"/>
           </a:p>
@@ -1211,7 +1213,7 @@
           <a:p>
             <a:fld id="{AFCB7D11-0DA4-4649-ACEB-1F19D5C36BF9}" type="slidenum">
               <a:rPr lang="en-US" smtClean="0"/>
-              <a:t>11</a:t>
+              <a:t>13</a:t>
             </a:fld>
             <a:endParaRPr lang="en-US"/>
           </a:p>
@@ -1298,7 +1300,7 @@
           <a:p>
             <a:fld id="{AFCB7D11-0DA4-4649-ACEB-1F19D5C36BF9}" type="slidenum">
               <a:rPr lang="en-US" smtClean="0"/>
-              <a:t>12</a:t>
+              <a:t>14</a:t>
             </a:fld>
             <a:endParaRPr lang="en-US"/>
           </a:p>
@@ -1385,7 +1387,7 @@
           <a:p>
             <a:fld id="{AFCB7D11-0DA4-4649-ACEB-1F19D5C36BF9}" type="slidenum">
               <a:rPr lang="en-US" smtClean="0"/>
-              <a:t>14</a:t>
+              <a:t>16</a:t>
             </a:fld>
             <a:endParaRPr lang="en-US"/>
           </a:p>
@@ -1551,7 +1553,7 @@
           <a:p>
             <a:fld id="{C2B98897-90D8-9D4D-95EE-51EF37A9743C}" type="datetimeFigureOut">
               <a:rPr lang="en-US" smtClean="0"/>
-              <a:t>11/12/25</a:t>
+              <a:t>11/13/25</a:t>
             </a:fld>
             <a:endParaRPr lang="en-US"/>
           </a:p>
@@ -1749,7 +1751,7 @@
           <a:p>
             <a:fld id="{C2B98897-90D8-9D4D-95EE-51EF37A9743C}" type="datetimeFigureOut">
               <a:rPr lang="en-US" smtClean="0"/>
-              <a:t>11/12/25</a:t>
+              <a:t>11/13/25</a:t>
             </a:fld>
             <a:endParaRPr lang="en-US"/>
           </a:p>
@@ -1957,7 +1959,7 @@
           <a:p>
             <a:fld id="{C2B98897-90D8-9D4D-95EE-51EF37A9743C}" type="datetimeFigureOut">
               <a:rPr lang="en-US" smtClean="0"/>
-              <a:t>11/12/25</a:t>
+              <a:t>11/13/25</a:t>
             </a:fld>
             <a:endParaRPr lang="en-US"/>
           </a:p>
@@ -2155,7 +2157,7 @@
           <a:p>
             <a:fld id="{C2B98897-90D8-9D4D-95EE-51EF37A9743C}" type="datetimeFigureOut">
               <a:rPr lang="en-US" smtClean="0"/>
-              <a:t>11/12/25</a:t>
+              <a:t>11/13/25</a:t>
             </a:fld>
             <a:endParaRPr lang="en-US"/>
           </a:p>
@@ -2430,7 +2432,7 @@
           <a:p>
             <a:fld id="{C2B98897-90D8-9D4D-95EE-51EF37A9743C}" type="datetimeFigureOut">
               <a:rPr lang="en-US" smtClean="0"/>
-              <a:t>11/12/25</a:t>
+              <a:t>11/13/25</a:t>
             </a:fld>
             <a:endParaRPr lang="en-US"/>
           </a:p>
@@ -2695,7 +2697,7 @@
           <a:p>
             <a:fld id="{C2B98897-90D8-9D4D-95EE-51EF37A9743C}" type="datetimeFigureOut">
               <a:rPr lang="en-US" smtClean="0"/>
-              <a:t>11/12/25</a:t>
+              <a:t>11/13/25</a:t>
             </a:fld>
             <a:endParaRPr lang="en-US"/>
           </a:p>
@@ -3107,7 +3109,7 @@
           <a:p>
             <a:fld id="{C2B98897-90D8-9D4D-95EE-51EF37A9743C}" type="datetimeFigureOut">
               <a:rPr lang="en-US" smtClean="0"/>
-              <a:t>11/12/25</a:t>
+              <a:t>11/13/25</a:t>
             </a:fld>
             <a:endParaRPr lang="en-US"/>
           </a:p>
@@ -3248,7 +3250,7 @@
           <a:p>
             <a:fld id="{C2B98897-90D8-9D4D-95EE-51EF37A9743C}" type="datetimeFigureOut">
               <a:rPr lang="en-US" smtClean="0"/>
-              <a:t>11/12/25</a:t>
+              <a:t>11/13/25</a:t>
             </a:fld>
             <a:endParaRPr lang="en-US"/>
           </a:p>
@@ -3361,7 +3363,7 @@
           <a:p>
             <a:fld id="{C2B98897-90D8-9D4D-95EE-51EF37A9743C}" type="datetimeFigureOut">
               <a:rPr lang="en-US" smtClean="0"/>
-              <a:t>11/12/25</a:t>
+              <a:t>11/13/25</a:t>
             </a:fld>
             <a:endParaRPr lang="en-US"/>
           </a:p>
@@ -3672,7 +3674,7 @@
           <a:p>
             <a:fld id="{C2B98897-90D8-9D4D-95EE-51EF37A9743C}" type="datetimeFigureOut">
               <a:rPr lang="en-US" smtClean="0"/>
-              <a:t>11/12/25</a:t>
+              <a:t>11/13/25</a:t>
             </a:fld>
             <a:endParaRPr lang="en-US"/>
           </a:p>
@@ -3960,7 +3962,7 @@
           <a:p>
             <a:fld id="{C2B98897-90D8-9D4D-95EE-51EF37A9743C}" type="datetimeFigureOut">
               <a:rPr lang="en-US" smtClean="0"/>
-              <a:t>11/12/25</a:t>
+              <a:t>11/13/25</a:t>
             </a:fld>
             <a:endParaRPr lang="en-US"/>
           </a:p>
@@ -4201,7 +4203,7 @@
           <a:p>
             <a:fld id="{C2B98897-90D8-9D4D-95EE-51EF37A9743C}" type="datetimeFigureOut">
               <a:rPr lang="en-US" smtClean="0"/>
-              <a:t>11/12/25</a:t>
+              <a:t>11/13/25</a:t>
             </a:fld>
             <a:endParaRPr lang="en-US"/>
           </a:p>
@@ -9113,47 +9115,12 @@
           <a:chExt cx="0" cy="0"/>
         </a:xfrm>
       </p:grpSpPr>
-      <p:sp>
-        <p:nvSpPr>
-          <p:cNvPr id="4" name="TextBox 3">
-            <a:extLst>
-              <a:ext uri="{FF2B5EF4-FFF2-40B4-BE49-F238E27FC236}">
-                <a16:creationId xmlns:a16="http://schemas.microsoft.com/office/drawing/2014/main" id="{4CBCCAAD-C40A-0540-A342-CC95BED36479}"/>
-              </a:ext>
-            </a:extLst>
-          </p:cNvPr>
-          <p:cNvSpPr txBox="1"/>
-          <p:nvPr/>
-        </p:nvSpPr>
-        <p:spPr>
-          <a:xfrm>
-            <a:off x="152327" y="-28505"/>
-            <a:ext cx="943528" cy="369332"/>
-          </a:xfrm>
-          <a:prstGeom prst="rect">
-            <a:avLst/>
-          </a:prstGeom>
-          <a:noFill/>
-        </p:spPr>
-        <p:txBody>
-          <a:bodyPr wrap="none" rtlCol="0">
-            <a:spAutoFit/>
-          </a:bodyPr>
-          <a:lstStyle/>
-          <a:p>
-            <a:r>
-              <a:rPr lang="en-US" b="1" dirty="0"/>
-              <a:t>Figure 2</a:t>
-            </a:r>
-          </a:p>
-        </p:txBody>
-      </p:sp>
       <p:pic>
         <p:nvPicPr>
-          <p:cNvPr id="6" name="Picture 5">
-            <a:extLst>
-              <a:ext uri="{FF2B5EF4-FFF2-40B4-BE49-F238E27FC236}">
-                <a16:creationId xmlns:a16="http://schemas.microsoft.com/office/drawing/2014/main" id="{D2107C2B-7AD9-0940-814D-542810A3F058}"/>
+          <p:cNvPr id="2" name="Picture 1">
+            <a:extLst>
+              <a:ext uri="{FF2B5EF4-FFF2-40B4-BE49-F238E27FC236}">
+                <a16:creationId xmlns:a16="http://schemas.microsoft.com/office/drawing/2014/main" id="{A45A0E29-9F21-FC4B-A4F5-B53517A41FC2}"/>
               </a:ext>
             </a:extLst>
           </p:cNvPr>
@@ -9162,27 +9129,127 @@
           </p:cNvPicPr>
           <p:nvPr/>
         </p:nvPicPr>
-        <p:blipFill rotWithShape="1">
+        <p:blipFill>
           <a:blip r:embed="rId3"/>
-          <a:srcRect t="52525"/>
-          <a:stretch/>
+          <a:stretch>
+            <a:fillRect/>
+          </a:stretch>
         </p:blipFill>
         <p:spPr>
           <a:xfrm>
-            <a:off x="6369518" y="1648788"/>
-            <a:ext cx="5689283" cy="3981303"/>
+            <a:off x="75050" y="454968"/>
+            <a:ext cx="6561506" cy="4396430"/>
           </a:xfrm>
           <a:prstGeom prst="rect">
             <a:avLst/>
           </a:prstGeom>
         </p:spPr>
       </p:pic>
+      <p:sp>
+        <p:nvSpPr>
+          <p:cNvPr id="5" name="TextBox 4">
+            <a:extLst>
+              <a:ext uri="{FF2B5EF4-FFF2-40B4-BE49-F238E27FC236}">
+                <a16:creationId xmlns:a16="http://schemas.microsoft.com/office/drawing/2014/main" id="{4F756E17-FE9E-4DC6-F3CF-AABBBF0B49DD}"/>
+              </a:ext>
+            </a:extLst>
+          </p:cNvPr>
+          <p:cNvSpPr txBox="1"/>
+          <p:nvPr/>
+        </p:nvSpPr>
+        <p:spPr>
+          <a:xfrm>
+            <a:off x="7856065" y="3519340"/>
+            <a:ext cx="3343468" cy="830997"/>
+          </a:xfrm>
+          <a:prstGeom prst="rect">
+            <a:avLst/>
+          </a:prstGeom>
+          <a:noFill/>
+        </p:spPr>
+        <p:txBody>
+          <a:bodyPr wrap="square" rtlCol="0">
+            <a:spAutoFit/>
+          </a:bodyPr>
+          <a:lstStyle/>
+          <a:p>
+            <a:pPr algn="ctr"/>
+            <a:r>
+              <a:rPr lang="en-US" sz="1600" b="1" dirty="0">
+                <a:solidFill>
+                  <a:srgbClr val="FF0000"/>
+                </a:solidFill>
+              </a:rPr>
+              <a:t>C. </a:t>
+            </a:r>
+            <a:r>
+              <a:rPr lang="en-US" sz="1600" dirty="0">
+                <a:solidFill>
+                  <a:srgbClr val="FF0000"/>
+                </a:solidFill>
+              </a:rPr>
+              <a:t>Placeholder: depiction of the origin of the insert around the </a:t>
+            </a:r>
+            <a:r>
+              <a:rPr lang="en-US" sz="1600" dirty="0" err="1">
+                <a:solidFill>
+                  <a:srgbClr val="FF0000"/>
+                </a:solidFill>
+              </a:rPr>
+              <a:t>Blatta</a:t>
+            </a:r>
+            <a:r>
+              <a:rPr lang="en-US" sz="1600" dirty="0">
+                <a:solidFill>
+                  <a:srgbClr val="FF0000"/>
+                </a:solidFill>
+              </a:rPr>
+              <a:t> genome (waiting on Leo)</a:t>
+            </a:r>
+          </a:p>
+        </p:txBody>
+      </p:sp>
+      <p:sp>
+        <p:nvSpPr>
+          <p:cNvPr id="7" name="TextBox 6">
+            <a:extLst>
+              <a:ext uri="{FF2B5EF4-FFF2-40B4-BE49-F238E27FC236}">
+                <a16:creationId xmlns:a16="http://schemas.microsoft.com/office/drawing/2014/main" id="{1C0E847B-8FC5-0867-7196-259B77611FF8}"/>
+              </a:ext>
+            </a:extLst>
+          </p:cNvPr>
+          <p:cNvSpPr txBox="1"/>
+          <p:nvPr/>
+        </p:nvSpPr>
+        <p:spPr>
+          <a:xfrm>
+            <a:off x="215683" y="425302"/>
+            <a:ext cx="324128" cy="369332"/>
+          </a:xfrm>
+          <a:prstGeom prst="rect">
+            <a:avLst/>
+          </a:prstGeom>
+          <a:noFill/>
+        </p:spPr>
+        <p:txBody>
+          <a:bodyPr wrap="none" rtlCol="0">
+            <a:spAutoFit/>
+          </a:bodyPr>
+          <a:lstStyle/>
+          <a:p>
+            <a:r>
+              <a:rPr lang="en-US" b="1" dirty="0"/>
+              <a:t>A</a:t>
+            </a:r>
+          </a:p>
+        </p:txBody>
+      </p:sp>
       <p:pic>
         <p:nvPicPr>
-          <p:cNvPr id="7" name="Picture 6">
-            <a:extLst>
-              <a:ext uri="{FF2B5EF4-FFF2-40B4-BE49-F238E27FC236}">
-                <a16:creationId xmlns:a16="http://schemas.microsoft.com/office/drawing/2014/main" id="{4D1CA6F0-055A-C240-A4FC-6BEFEB8FFA56}"/>
+          <p:cNvPr id="13" name="Picture 12">
+            <a:extLst>
+              <a:ext uri="{FF2B5EF4-FFF2-40B4-BE49-F238E27FC236}">
+                <a16:creationId xmlns:a16="http://schemas.microsoft.com/office/drawing/2014/main" id="{DC883A01-AA48-044E-76DC-460544A87194}"/>
               </a:ext>
             </a:extLst>
           </p:cNvPr>
@@ -9191,15 +9258,17 @@
           </p:cNvPicPr>
           <p:nvPr/>
         </p:nvPicPr>
-        <p:blipFill rotWithShape="1">
+        <p:blipFill>
           <a:blip r:embed="rId4"/>
-          <a:srcRect l="2701" t="7745" r="2136" b="6008"/>
-          <a:stretch/>
+          <a:srcRect t="5172"/>
+          <a:stretch>
+            <a:fillRect/>
+          </a:stretch>
         </p:blipFill>
         <p:spPr>
           <a:xfrm>
-            <a:off x="936970" y="1852864"/>
-            <a:ext cx="5423723" cy="3433730"/>
+            <a:off x="7048374" y="496730"/>
+            <a:ext cx="5104657" cy="2587255"/>
           </a:xfrm>
           <a:prstGeom prst="rect">
             <a:avLst/>
@@ -9208,230 +9277,19 @@
       </p:pic>
       <p:sp>
         <p:nvSpPr>
-          <p:cNvPr id="2" name="TextBox 1">
-            <a:extLst>
-              <a:ext uri="{FF2B5EF4-FFF2-40B4-BE49-F238E27FC236}">
-                <a16:creationId xmlns:a16="http://schemas.microsoft.com/office/drawing/2014/main" id="{633D4B2A-37ED-CE4F-938D-1864D4E6B025}"/>
-              </a:ext>
-            </a:extLst>
-          </p:cNvPr>
-          <p:cNvSpPr txBox="1"/>
-          <p:nvPr/>
-        </p:nvSpPr>
-        <p:spPr>
-          <a:xfrm>
-            <a:off x="2094074" y="4445366"/>
-            <a:ext cx="1241562" cy="430887"/>
-          </a:xfrm>
-          <a:prstGeom prst="rect">
-            <a:avLst/>
-          </a:prstGeom>
-          <a:noFill/>
-        </p:spPr>
-        <p:txBody>
-          <a:bodyPr wrap="square" rtlCol="0">
-            <a:spAutoFit/>
-          </a:bodyPr>
-          <a:lstStyle/>
-          <a:p>
-            <a:r>
-              <a:rPr lang="en-US" sz="1100" dirty="0"/>
-              <a:t>Putative ancestral inserts</a:t>
-            </a:r>
-          </a:p>
-        </p:txBody>
-      </p:sp>
-      <p:sp>
-        <p:nvSpPr>
-          <p:cNvPr id="8" name="TextBox 7">
-            <a:extLst>
-              <a:ext uri="{FF2B5EF4-FFF2-40B4-BE49-F238E27FC236}">
-                <a16:creationId xmlns:a16="http://schemas.microsoft.com/office/drawing/2014/main" id="{C1A254C8-E221-074A-8EC7-674BF6886A40}"/>
-              </a:ext>
-            </a:extLst>
-          </p:cNvPr>
-          <p:cNvSpPr txBox="1"/>
-          <p:nvPr/>
-        </p:nvSpPr>
-        <p:spPr>
-          <a:xfrm>
-            <a:off x="3862937" y="2027575"/>
-            <a:ext cx="1528056" cy="430887"/>
-          </a:xfrm>
-          <a:prstGeom prst="rect">
-            <a:avLst/>
-          </a:prstGeom>
-          <a:noFill/>
-        </p:spPr>
-        <p:txBody>
-          <a:bodyPr wrap="square" rtlCol="0">
-            <a:spAutoFit/>
-          </a:bodyPr>
-          <a:lstStyle/>
-          <a:p>
-            <a:pPr algn="r"/>
-            <a:r>
-              <a:rPr lang="en-US" sz="1100" dirty="0"/>
-              <a:t>Putative contemporary inserts</a:t>
-            </a:r>
-          </a:p>
-        </p:txBody>
-      </p:sp>
-      <p:sp>
-        <p:nvSpPr>
-          <p:cNvPr id="9" name="TextBox 8">
-            <a:extLst>
-              <a:ext uri="{FF2B5EF4-FFF2-40B4-BE49-F238E27FC236}">
-                <a16:creationId xmlns:a16="http://schemas.microsoft.com/office/drawing/2014/main" id="{A1AB082A-F420-0C48-91D5-4F7BF95C306D}"/>
-              </a:ext>
-            </a:extLst>
-          </p:cNvPr>
-          <p:cNvSpPr txBox="1"/>
-          <p:nvPr/>
-        </p:nvSpPr>
-        <p:spPr>
-          <a:xfrm>
-            <a:off x="4082441" y="3736051"/>
-            <a:ext cx="1281120" cy="261610"/>
-          </a:xfrm>
-          <a:prstGeom prst="rect">
-            <a:avLst/>
-          </a:prstGeom>
-          <a:noFill/>
-        </p:spPr>
-        <p:txBody>
-          <a:bodyPr wrap="none" rtlCol="0">
-            <a:spAutoFit/>
-          </a:bodyPr>
-          <a:lstStyle/>
-          <a:p>
-            <a:r>
-              <a:rPr lang="en-US" sz="1100" dirty="0"/>
-              <a:t>Unable to infer age</a:t>
-            </a:r>
-          </a:p>
-        </p:txBody>
-      </p:sp>
-      <p:sp>
-        <p:nvSpPr>
-          <p:cNvPr id="3" name="TextBox 2">
-            <a:extLst>
-              <a:ext uri="{FF2B5EF4-FFF2-40B4-BE49-F238E27FC236}">
-                <a16:creationId xmlns:a16="http://schemas.microsoft.com/office/drawing/2014/main" id="{56561D6C-B0AC-0E48-A749-34E5EC08CA93}"/>
-              </a:ext>
-            </a:extLst>
-          </p:cNvPr>
-          <p:cNvSpPr txBox="1"/>
-          <p:nvPr/>
-        </p:nvSpPr>
-        <p:spPr>
-          <a:xfrm>
-            <a:off x="3177302" y="5230862"/>
-            <a:ext cx="1064779" cy="307777"/>
-          </a:xfrm>
-          <a:prstGeom prst="rect">
-            <a:avLst/>
-          </a:prstGeom>
-          <a:noFill/>
-        </p:spPr>
-        <p:txBody>
-          <a:bodyPr wrap="none" rtlCol="0">
-            <a:spAutoFit/>
-          </a:bodyPr>
-          <a:lstStyle/>
-          <a:p>
-            <a:r>
-              <a:rPr lang="en-US" sz="1400" dirty="0"/>
-              <a:t>Insert count</a:t>
-            </a:r>
-          </a:p>
-        </p:txBody>
-      </p:sp>
-      <p:sp>
-        <p:nvSpPr>
-          <p:cNvPr id="10" name="TextBox 9">
-            <a:extLst>
-              <a:ext uri="{FF2B5EF4-FFF2-40B4-BE49-F238E27FC236}">
-                <a16:creationId xmlns:a16="http://schemas.microsoft.com/office/drawing/2014/main" id="{90AA9167-B2F4-DB40-8978-942B5407BF84}"/>
-              </a:ext>
-            </a:extLst>
-          </p:cNvPr>
-          <p:cNvSpPr txBox="1"/>
-          <p:nvPr/>
-        </p:nvSpPr>
-        <p:spPr>
-          <a:xfrm rot="16200000">
-            <a:off x="-308369" y="3261666"/>
-            <a:ext cx="2290755" cy="307777"/>
-          </a:xfrm>
-          <a:prstGeom prst="rect">
-            <a:avLst/>
-          </a:prstGeom>
-          <a:noFill/>
-        </p:spPr>
-        <p:txBody>
-          <a:bodyPr wrap="none" rtlCol="0">
-            <a:spAutoFit/>
-          </a:bodyPr>
-          <a:lstStyle/>
-          <a:p>
-            <a:r>
-              <a:rPr lang="en-US" sz="1400" dirty="0"/>
-              <a:t>BLAST identity (%) difference</a:t>
-            </a:r>
-          </a:p>
-        </p:txBody>
-      </p:sp>
-      <p:sp>
-        <p:nvSpPr>
-          <p:cNvPr id="11" name="TextBox 10">
-            <a:extLst>
-              <a:ext uri="{FF2B5EF4-FFF2-40B4-BE49-F238E27FC236}">
-                <a16:creationId xmlns:a16="http://schemas.microsoft.com/office/drawing/2014/main" id="{FDFFE04B-D070-864B-B8B8-CEADF928B4A8}"/>
-              </a:ext>
-            </a:extLst>
-          </p:cNvPr>
-          <p:cNvSpPr txBox="1"/>
-          <p:nvPr/>
-        </p:nvSpPr>
-        <p:spPr>
-          <a:xfrm>
-            <a:off x="563825" y="1753280"/>
-            <a:ext cx="324128" cy="369332"/>
-          </a:xfrm>
-          <a:prstGeom prst="rect">
-            <a:avLst/>
-          </a:prstGeom>
-          <a:noFill/>
-        </p:spPr>
-        <p:txBody>
-          <a:bodyPr wrap="none" rtlCol="0">
-            <a:spAutoFit/>
-          </a:bodyPr>
-          <a:lstStyle/>
-          <a:p>
-            <a:r>
-              <a:rPr lang="en-US" b="1" dirty="0"/>
-              <a:t>A</a:t>
-            </a:r>
-          </a:p>
-        </p:txBody>
-      </p:sp>
-      <p:sp>
-        <p:nvSpPr>
-          <p:cNvPr id="12" name="TextBox 11">
-            <a:extLst>
-              <a:ext uri="{FF2B5EF4-FFF2-40B4-BE49-F238E27FC236}">
-                <a16:creationId xmlns:a16="http://schemas.microsoft.com/office/drawing/2014/main" id="{276F2C94-E046-8F49-A92D-49719149D358}"/>
-              </a:ext>
-            </a:extLst>
-          </p:cNvPr>
-          <p:cNvSpPr txBox="1"/>
-          <p:nvPr/>
-        </p:nvSpPr>
-        <p:spPr>
-          <a:xfrm>
-            <a:off x="6360693" y="1753280"/>
+          <p:cNvPr id="14" name="TextBox 13">
+            <a:extLst>
+              <a:ext uri="{FF2B5EF4-FFF2-40B4-BE49-F238E27FC236}">
+                <a16:creationId xmlns:a16="http://schemas.microsoft.com/office/drawing/2014/main" id="{2C6B5942-B39C-46A8-0714-63EF48E22894}"/>
+              </a:ext>
+            </a:extLst>
+          </p:cNvPr>
+          <p:cNvSpPr txBox="1"/>
+          <p:nvPr/>
+        </p:nvSpPr>
+        <p:spPr>
+          <a:xfrm>
+            <a:off x="6720534" y="425302"/>
             <a:ext cx="314510" cy="369332"/>
           </a:xfrm>
           <a:prstGeom prst="rect">
@@ -9449,172 +9307,13 @@
               <a:rPr lang="en-US" b="1" dirty="0"/>
               <a:t>B</a:t>
             </a:r>
-          </a:p>
-        </p:txBody>
-      </p:sp>
-      <p:sp>
-        <p:nvSpPr>
-          <p:cNvPr id="13" name="Oval 12">
-            <a:extLst>
-              <a:ext uri="{FF2B5EF4-FFF2-40B4-BE49-F238E27FC236}">
-                <a16:creationId xmlns:a16="http://schemas.microsoft.com/office/drawing/2014/main" id="{E421327E-452A-CD40-9CB2-DCE4DADC7EB8}"/>
-              </a:ext>
-            </a:extLst>
-          </p:cNvPr>
-          <p:cNvSpPr/>
-          <p:nvPr/>
-        </p:nvSpPr>
-        <p:spPr>
-          <a:xfrm rot="20764211">
-            <a:off x="1270899" y="4637079"/>
-            <a:ext cx="865164" cy="326542"/>
-          </a:xfrm>
-          <a:prstGeom prst="ellipse">
-            <a:avLst/>
-          </a:prstGeom>
-          <a:noFill/>
-          <a:ln w="9525">
-            <a:solidFill>
-              <a:srgbClr val="FF0000"/>
-            </a:solidFill>
-            <a:prstDash val="dash"/>
-          </a:ln>
-        </p:spPr>
-        <p:style>
-          <a:lnRef idx="2">
-            <a:schemeClr val="accent1">
-              <a:shade val="50000"/>
-            </a:schemeClr>
-          </a:lnRef>
-          <a:fillRef idx="1">
-            <a:schemeClr val="accent1"/>
-          </a:fillRef>
-          <a:effectRef idx="0">
-            <a:schemeClr val="accent1"/>
-          </a:effectRef>
-          <a:fontRef idx="minor">
-            <a:schemeClr val="lt1"/>
-          </a:fontRef>
-        </p:style>
-        <p:txBody>
-          <a:bodyPr rtlCol="0" anchor="ctr"/>
-          <a:lstStyle/>
-          <a:p>
-            <a:pPr algn="ctr"/>
-            <a:endParaRPr lang="en-US"/>
-          </a:p>
-        </p:txBody>
-      </p:sp>
-      <p:sp>
-        <p:nvSpPr>
-          <p:cNvPr id="14" name="Oval 13">
-            <a:extLst>
-              <a:ext uri="{FF2B5EF4-FFF2-40B4-BE49-F238E27FC236}">
-                <a16:creationId xmlns:a16="http://schemas.microsoft.com/office/drawing/2014/main" id="{1DAD5DDC-8234-0745-83AA-125A34ABC016}"/>
-              </a:ext>
-            </a:extLst>
-          </p:cNvPr>
-          <p:cNvSpPr/>
-          <p:nvPr/>
-        </p:nvSpPr>
-        <p:spPr>
-          <a:xfrm rot="20764211">
-            <a:off x="5332359" y="2021240"/>
-            <a:ext cx="865164" cy="326542"/>
-          </a:xfrm>
-          <a:prstGeom prst="ellipse">
-            <a:avLst/>
-          </a:prstGeom>
-          <a:noFill/>
-          <a:ln w="9525">
-            <a:solidFill>
-              <a:srgbClr val="FF0000"/>
-            </a:solidFill>
-            <a:prstDash val="dash"/>
-          </a:ln>
-        </p:spPr>
-        <p:style>
-          <a:lnRef idx="2">
-            <a:schemeClr val="accent1">
-              <a:shade val="50000"/>
-            </a:schemeClr>
-          </a:lnRef>
-          <a:fillRef idx="1">
-            <a:schemeClr val="accent1"/>
-          </a:fillRef>
-          <a:effectRef idx="0">
-            <a:schemeClr val="accent1"/>
-          </a:effectRef>
-          <a:fontRef idx="minor">
-            <a:schemeClr val="lt1"/>
-          </a:fontRef>
-        </p:style>
-        <p:txBody>
-          <a:bodyPr rtlCol="0" anchor="ctr"/>
-          <a:lstStyle/>
-          <a:p>
-            <a:pPr algn="ctr"/>
-            <a:endParaRPr lang="en-US"/>
-          </a:p>
-        </p:txBody>
-      </p:sp>
-      <p:sp>
-        <p:nvSpPr>
-          <p:cNvPr id="15" name="Oval 14">
-            <a:extLst>
-              <a:ext uri="{FF2B5EF4-FFF2-40B4-BE49-F238E27FC236}">
-                <a16:creationId xmlns:a16="http://schemas.microsoft.com/office/drawing/2014/main" id="{08A2940A-50E2-9E4E-B45B-7E8B51C98C89}"/>
-              </a:ext>
-            </a:extLst>
-          </p:cNvPr>
-          <p:cNvSpPr/>
-          <p:nvPr/>
-        </p:nvSpPr>
-        <p:spPr>
-          <a:xfrm rot="21257093">
-            <a:off x="1828726" y="3163471"/>
-            <a:ext cx="3824834" cy="642507"/>
-          </a:xfrm>
-          <a:prstGeom prst="ellipse">
-            <a:avLst/>
-          </a:prstGeom>
-          <a:noFill/>
-          <a:ln w="9525">
-            <a:solidFill>
-              <a:srgbClr val="FF0000"/>
-            </a:solidFill>
-            <a:prstDash val="dash"/>
-          </a:ln>
-        </p:spPr>
-        <p:style>
-          <a:lnRef idx="2">
-            <a:schemeClr val="accent1">
-              <a:shade val="50000"/>
-            </a:schemeClr>
-          </a:lnRef>
-          <a:fillRef idx="1">
-            <a:schemeClr val="accent1"/>
-          </a:fillRef>
-          <a:effectRef idx="0">
-            <a:schemeClr val="accent1"/>
-          </a:effectRef>
-          <a:fontRef idx="minor">
-            <a:schemeClr val="lt1"/>
-          </a:fontRef>
-        </p:style>
-        <p:txBody>
-          <a:bodyPr rtlCol="0" anchor="ctr"/>
-          <a:lstStyle/>
-          <a:p>
-            <a:pPr algn="ctr"/>
-            <a:endParaRPr lang="en-US"/>
           </a:p>
         </p:txBody>
       </p:sp>
     </p:spTree>
     <p:extLst>
       <p:ext uri="{BB962C8B-B14F-4D97-AF65-F5344CB8AC3E}">
-        <p14:creationId xmlns:p14="http://schemas.microsoft.com/office/powerpoint/2010/main" val="1936291726"/>
+        <p14:creationId xmlns:p14="http://schemas.microsoft.com/office/powerpoint/2010/main" val="2560380269"/>
       </p:ext>
     </p:extLst>
   </p:cSld>
@@ -9646,7 +9345,7 @@
           <p:cNvPr id="4" name="Picture 3">
             <a:extLst>
               <a:ext uri="{FF2B5EF4-FFF2-40B4-BE49-F238E27FC236}">
-                <a16:creationId xmlns:a16="http://schemas.microsoft.com/office/drawing/2014/main" id="{78AC1BD0-7DA5-E9BF-1323-A48980C680F0}"/>
+                <a16:creationId xmlns:a16="http://schemas.microsoft.com/office/drawing/2014/main" id="{7294DAB9-5922-6E44-A3F5-A540D9060343}"/>
               </a:ext>
             </a:extLst>
           </p:cNvPr>
@@ -9656,25 +9355,276 @@
           <p:nvPr/>
         </p:nvPicPr>
         <p:blipFill>
-          <a:blip r:embed="rId3"/>
+          <a:blip r:embed="rId2"/>
           <a:stretch>
             <a:fillRect/>
           </a:stretch>
         </p:blipFill>
         <p:spPr>
           <a:xfrm>
-            <a:off x="3699510" y="-103505"/>
-            <a:ext cx="4617303" cy="6806057"/>
+            <a:off x="620" y="888103"/>
+            <a:ext cx="7401205" cy="4959057"/>
           </a:xfrm>
           <a:prstGeom prst="rect">
             <a:avLst/>
           </a:prstGeom>
         </p:spPr>
       </p:pic>
+      <p:sp>
+        <p:nvSpPr>
+          <p:cNvPr id="5" name="TextBox 4">
+            <a:extLst>
+              <a:ext uri="{FF2B5EF4-FFF2-40B4-BE49-F238E27FC236}">
+                <a16:creationId xmlns:a16="http://schemas.microsoft.com/office/drawing/2014/main" id="{E58C594A-EE99-F94C-81FE-2D81A39F661D}"/>
+              </a:ext>
+            </a:extLst>
+          </p:cNvPr>
+          <p:cNvSpPr txBox="1"/>
+          <p:nvPr/>
+        </p:nvSpPr>
+        <p:spPr>
+          <a:xfrm>
+            <a:off x="106636" y="774971"/>
+            <a:ext cx="324128" cy="369332"/>
+          </a:xfrm>
+          <a:prstGeom prst="rect">
+            <a:avLst/>
+          </a:prstGeom>
+          <a:noFill/>
+        </p:spPr>
+        <p:txBody>
+          <a:bodyPr wrap="none" rtlCol="0">
+            <a:spAutoFit/>
+          </a:bodyPr>
+          <a:lstStyle/>
+          <a:p>
+            <a:r>
+              <a:rPr lang="en-US" b="1" dirty="0"/>
+              <a:t>A</a:t>
+            </a:r>
+          </a:p>
+        </p:txBody>
+      </p:sp>
+      <p:pic>
+        <p:nvPicPr>
+          <p:cNvPr id="7" name="Picture 6">
+            <a:extLst>
+              <a:ext uri="{FF2B5EF4-FFF2-40B4-BE49-F238E27FC236}">
+                <a16:creationId xmlns:a16="http://schemas.microsoft.com/office/drawing/2014/main" id="{2B338236-E156-FE47-AE70-11C3578780FC}"/>
+              </a:ext>
+            </a:extLst>
+          </p:cNvPr>
+          <p:cNvPicPr>
+            <a:picLocks noChangeAspect="1"/>
+          </p:cNvPicPr>
+          <p:nvPr/>
+        </p:nvPicPr>
+        <p:blipFill rotWithShape="1">
+          <a:blip r:embed="rId3"/>
+          <a:srcRect t="16747"/>
+          <a:stretch/>
+        </p:blipFill>
+        <p:spPr>
+          <a:xfrm>
+            <a:off x="7520673" y="606392"/>
+            <a:ext cx="4621710" cy="2132799"/>
+          </a:xfrm>
+          <a:prstGeom prst="rect">
+            <a:avLst/>
+          </a:prstGeom>
+        </p:spPr>
+      </p:pic>
+      <p:pic>
+        <p:nvPicPr>
+          <p:cNvPr id="8" name="Picture 7">
+            <a:extLst>
+              <a:ext uri="{FF2B5EF4-FFF2-40B4-BE49-F238E27FC236}">
+                <a16:creationId xmlns:a16="http://schemas.microsoft.com/office/drawing/2014/main" id="{5D87A8CC-2D44-F142-AC84-DFDCE2C26908}"/>
+              </a:ext>
+            </a:extLst>
+          </p:cNvPr>
+          <p:cNvPicPr>
+            <a:picLocks noChangeAspect="1"/>
+          </p:cNvPicPr>
+          <p:nvPr/>
+        </p:nvPicPr>
+        <p:blipFill rotWithShape="1">
+          <a:blip r:embed="rId3"/>
+          <a:srcRect l="47205" t="8857" r="46349" b="83744"/>
+          <a:stretch/>
+        </p:blipFill>
+        <p:spPr>
+          <a:xfrm>
+            <a:off x="10616303" y="801475"/>
+            <a:ext cx="384849" cy="244855"/>
+          </a:xfrm>
+          <a:prstGeom prst="rect">
+            <a:avLst/>
+          </a:prstGeom>
+        </p:spPr>
+      </p:pic>
+      <p:pic>
+        <p:nvPicPr>
+          <p:cNvPr id="11" name="Picture 10">
+            <a:extLst>
+              <a:ext uri="{FF2B5EF4-FFF2-40B4-BE49-F238E27FC236}">
+                <a16:creationId xmlns:a16="http://schemas.microsoft.com/office/drawing/2014/main" id="{4F25226D-0620-F947-BABF-235A3925546B}"/>
+              </a:ext>
+            </a:extLst>
+          </p:cNvPr>
+          <p:cNvPicPr>
+            <a:picLocks noChangeAspect="1"/>
+          </p:cNvPicPr>
+          <p:nvPr/>
+        </p:nvPicPr>
+        <p:blipFill rotWithShape="1">
+          <a:blip r:embed="rId3"/>
+          <a:srcRect l="62141" t="9357" r="25096" b="83528"/>
+          <a:stretch/>
+        </p:blipFill>
+        <p:spPr>
+          <a:xfrm>
+            <a:off x="10617959" y="1243961"/>
+            <a:ext cx="762000" cy="235464"/>
+          </a:xfrm>
+          <a:prstGeom prst="rect">
+            <a:avLst/>
+          </a:prstGeom>
+        </p:spPr>
+      </p:pic>
+      <p:pic>
+        <p:nvPicPr>
+          <p:cNvPr id="12" name="Picture 11">
+            <a:extLst>
+              <a:ext uri="{FF2B5EF4-FFF2-40B4-BE49-F238E27FC236}">
+                <a16:creationId xmlns:a16="http://schemas.microsoft.com/office/drawing/2014/main" id="{EAF42107-902A-CB47-8D84-84DF719130E4}"/>
+              </a:ext>
+            </a:extLst>
+          </p:cNvPr>
+          <p:cNvPicPr>
+            <a:picLocks noChangeAspect="1"/>
+          </p:cNvPicPr>
+          <p:nvPr/>
+        </p:nvPicPr>
+        <p:blipFill rotWithShape="1">
+          <a:blip r:embed="rId3"/>
+          <a:srcRect l="53770" t="8857" r="37681" b="84040"/>
+          <a:stretch/>
+        </p:blipFill>
+        <p:spPr>
+          <a:xfrm>
+            <a:off x="10632135" y="1008882"/>
+            <a:ext cx="510362" cy="235079"/>
+          </a:xfrm>
+          <a:prstGeom prst="rect">
+            <a:avLst/>
+          </a:prstGeom>
+        </p:spPr>
+      </p:pic>
+      <p:pic>
+        <p:nvPicPr>
+          <p:cNvPr id="30" name="Picture 29">
+            <a:extLst>
+              <a:ext uri="{FF2B5EF4-FFF2-40B4-BE49-F238E27FC236}">
+                <a16:creationId xmlns:a16="http://schemas.microsoft.com/office/drawing/2014/main" id="{C4E67423-6E82-E441-863A-43B48251193F}"/>
+              </a:ext>
+            </a:extLst>
+          </p:cNvPr>
+          <p:cNvPicPr>
+            <a:picLocks noChangeAspect="1"/>
+          </p:cNvPicPr>
+          <p:nvPr/>
+        </p:nvPicPr>
+        <p:blipFill>
+          <a:blip r:embed="rId4"/>
+          <a:stretch>
+            <a:fillRect/>
+          </a:stretch>
+        </p:blipFill>
+        <p:spPr>
+          <a:xfrm>
+            <a:off x="7365890" y="2974270"/>
+            <a:ext cx="4816249" cy="3234001"/>
+          </a:xfrm>
+          <a:prstGeom prst="rect">
+            <a:avLst/>
+          </a:prstGeom>
+        </p:spPr>
+      </p:pic>
+      <p:sp>
+        <p:nvSpPr>
+          <p:cNvPr id="31" name="TextBox 30">
+            <a:extLst>
+              <a:ext uri="{FF2B5EF4-FFF2-40B4-BE49-F238E27FC236}">
+                <a16:creationId xmlns:a16="http://schemas.microsoft.com/office/drawing/2014/main" id="{3ADE7A3B-324C-1B4E-A883-8BFFC24D1A54}"/>
+              </a:ext>
+            </a:extLst>
+          </p:cNvPr>
+          <p:cNvSpPr txBox="1"/>
+          <p:nvPr/>
+        </p:nvSpPr>
+        <p:spPr>
+          <a:xfrm>
+            <a:off x="7330379" y="554570"/>
+            <a:ext cx="314510" cy="369332"/>
+          </a:xfrm>
+          <a:prstGeom prst="rect">
+            <a:avLst/>
+          </a:prstGeom>
+          <a:noFill/>
+        </p:spPr>
+        <p:txBody>
+          <a:bodyPr wrap="none" rtlCol="0">
+            <a:spAutoFit/>
+          </a:bodyPr>
+          <a:lstStyle/>
+          <a:p>
+            <a:r>
+              <a:rPr lang="en-US" b="1" dirty="0"/>
+              <a:t>B</a:t>
+            </a:r>
+          </a:p>
+        </p:txBody>
+      </p:sp>
+      <p:sp>
+        <p:nvSpPr>
+          <p:cNvPr id="32" name="TextBox 31">
+            <a:extLst>
+              <a:ext uri="{FF2B5EF4-FFF2-40B4-BE49-F238E27FC236}">
+                <a16:creationId xmlns:a16="http://schemas.microsoft.com/office/drawing/2014/main" id="{1F4ACF6B-8B33-5245-8FDF-2805ED4B716D}"/>
+              </a:ext>
+            </a:extLst>
+          </p:cNvPr>
+          <p:cNvSpPr txBox="1"/>
+          <p:nvPr/>
+        </p:nvSpPr>
+        <p:spPr>
+          <a:xfrm>
+            <a:off x="7330379" y="2888058"/>
+            <a:ext cx="306494" cy="369332"/>
+          </a:xfrm>
+          <a:prstGeom prst="rect">
+            <a:avLst/>
+          </a:prstGeom>
+          <a:noFill/>
+        </p:spPr>
+        <p:txBody>
+          <a:bodyPr wrap="none" rtlCol="0">
+            <a:spAutoFit/>
+          </a:bodyPr>
+          <a:lstStyle/>
+          <a:p>
+            <a:r>
+              <a:rPr lang="en-US" b="1" dirty="0"/>
+              <a:t>C</a:t>
+            </a:r>
+          </a:p>
+        </p:txBody>
+      </p:sp>
     </p:spTree>
     <p:extLst>
       <p:ext uri="{BB962C8B-B14F-4D97-AF65-F5344CB8AC3E}">
-        <p14:creationId xmlns:p14="http://schemas.microsoft.com/office/powerpoint/2010/main" val="4199959309"/>
+        <p14:creationId xmlns:p14="http://schemas.microsoft.com/office/powerpoint/2010/main" val="1622815513"/>
       </p:ext>
     </p:extLst>
   </p:cSld>
@@ -9701,12 +9651,47 @@
           <a:chExt cx="0" cy="0"/>
         </a:xfrm>
       </p:grpSpPr>
+      <p:sp>
+        <p:nvSpPr>
+          <p:cNvPr id="4" name="TextBox 3">
+            <a:extLst>
+              <a:ext uri="{FF2B5EF4-FFF2-40B4-BE49-F238E27FC236}">
+                <a16:creationId xmlns:a16="http://schemas.microsoft.com/office/drawing/2014/main" id="{4CBCCAAD-C40A-0540-A342-CC95BED36479}"/>
+              </a:ext>
+            </a:extLst>
+          </p:cNvPr>
+          <p:cNvSpPr txBox="1"/>
+          <p:nvPr/>
+        </p:nvSpPr>
+        <p:spPr>
+          <a:xfrm>
+            <a:off x="152327" y="-28505"/>
+            <a:ext cx="943528" cy="369332"/>
+          </a:xfrm>
+          <a:prstGeom prst="rect">
+            <a:avLst/>
+          </a:prstGeom>
+          <a:noFill/>
+        </p:spPr>
+        <p:txBody>
+          <a:bodyPr wrap="none" rtlCol="0">
+            <a:spAutoFit/>
+          </a:bodyPr>
+          <a:lstStyle/>
+          <a:p>
+            <a:r>
+              <a:rPr lang="en-US" b="1" dirty="0"/>
+              <a:t>Figure 2</a:t>
+            </a:r>
+          </a:p>
+        </p:txBody>
+      </p:sp>
       <p:pic>
         <p:nvPicPr>
-          <p:cNvPr id="4" name="Picture 3">
-            <a:extLst>
-              <a:ext uri="{FF2B5EF4-FFF2-40B4-BE49-F238E27FC236}">
-                <a16:creationId xmlns:a16="http://schemas.microsoft.com/office/drawing/2014/main" id="{61BBB3A3-78CA-A200-3731-AABEB7DD0C3F}"/>
+          <p:cNvPr id="6" name="Picture 5">
+            <a:extLst>
+              <a:ext uri="{FF2B5EF4-FFF2-40B4-BE49-F238E27FC236}">
+                <a16:creationId xmlns:a16="http://schemas.microsoft.com/office/drawing/2014/main" id="{D2107C2B-7AD9-0940-814D-542810A3F058}"/>
               </a:ext>
             </a:extLst>
           </p:cNvPr>
@@ -9715,26 +9700,459 @@
           </p:cNvPicPr>
           <p:nvPr/>
         </p:nvPicPr>
-        <p:blipFill>
+        <p:blipFill rotWithShape="1">
           <a:blip r:embed="rId3"/>
-          <a:stretch>
-            <a:fillRect/>
-          </a:stretch>
+          <a:srcRect t="52525"/>
+          <a:stretch/>
         </p:blipFill>
         <p:spPr>
           <a:xfrm>
-            <a:off x="3230245" y="428307"/>
-            <a:ext cx="5731510" cy="6001385"/>
+            <a:off x="6369518" y="1648788"/>
+            <a:ext cx="5689283" cy="3981303"/>
           </a:xfrm>
           <a:prstGeom prst="rect">
             <a:avLst/>
           </a:prstGeom>
         </p:spPr>
       </p:pic>
+      <p:pic>
+        <p:nvPicPr>
+          <p:cNvPr id="7" name="Picture 6">
+            <a:extLst>
+              <a:ext uri="{FF2B5EF4-FFF2-40B4-BE49-F238E27FC236}">
+                <a16:creationId xmlns:a16="http://schemas.microsoft.com/office/drawing/2014/main" id="{4D1CA6F0-055A-C240-A4FC-6BEFEB8FFA56}"/>
+              </a:ext>
+            </a:extLst>
+          </p:cNvPr>
+          <p:cNvPicPr>
+            <a:picLocks noChangeAspect="1"/>
+          </p:cNvPicPr>
+          <p:nvPr/>
+        </p:nvPicPr>
+        <p:blipFill rotWithShape="1">
+          <a:blip r:embed="rId4"/>
+          <a:srcRect l="2701" t="7745" r="2136" b="6008"/>
+          <a:stretch/>
+        </p:blipFill>
+        <p:spPr>
+          <a:xfrm>
+            <a:off x="936970" y="1852864"/>
+            <a:ext cx="5423723" cy="3433730"/>
+          </a:xfrm>
+          <a:prstGeom prst="rect">
+            <a:avLst/>
+          </a:prstGeom>
+        </p:spPr>
+      </p:pic>
+      <p:sp>
+        <p:nvSpPr>
+          <p:cNvPr id="2" name="TextBox 1">
+            <a:extLst>
+              <a:ext uri="{FF2B5EF4-FFF2-40B4-BE49-F238E27FC236}">
+                <a16:creationId xmlns:a16="http://schemas.microsoft.com/office/drawing/2014/main" id="{633D4B2A-37ED-CE4F-938D-1864D4E6B025}"/>
+              </a:ext>
+            </a:extLst>
+          </p:cNvPr>
+          <p:cNvSpPr txBox="1"/>
+          <p:nvPr/>
+        </p:nvSpPr>
+        <p:spPr>
+          <a:xfrm>
+            <a:off x="2094074" y="4445366"/>
+            <a:ext cx="1241562" cy="430887"/>
+          </a:xfrm>
+          <a:prstGeom prst="rect">
+            <a:avLst/>
+          </a:prstGeom>
+          <a:noFill/>
+        </p:spPr>
+        <p:txBody>
+          <a:bodyPr wrap="square" rtlCol="0">
+            <a:spAutoFit/>
+          </a:bodyPr>
+          <a:lstStyle/>
+          <a:p>
+            <a:r>
+              <a:rPr lang="en-US" sz="1100" dirty="0"/>
+              <a:t>Putative ancestral inserts</a:t>
+            </a:r>
+          </a:p>
+        </p:txBody>
+      </p:sp>
+      <p:sp>
+        <p:nvSpPr>
+          <p:cNvPr id="8" name="TextBox 7">
+            <a:extLst>
+              <a:ext uri="{FF2B5EF4-FFF2-40B4-BE49-F238E27FC236}">
+                <a16:creationId xmlns:a16="http://schemas.microsoft.com/office/drawing/2014/main" id="{C1A254C8-E221-074A-8EC7-674BF6886A40}"/>
+              </a:ext>
+            </a:extLst>
+          </p:cNvPr>
+          <p:cNvSpPr txBox="1"/>
+          <p:nvPr/>
+        </p:nvSpPr>
+        <p:spPr>
+          <a:xfrm>
+            <a:off x="3862937" y="2027575"/>
+            <a:ext cx="1528056" cy="430887"/>
+          </a:xfrm>
+          <a:prstGeom prst="rect">
+            <a:avLst/>
+          </a:prstGeom>
+          <a:noFill/>
+        </p:spPr>
+        <p:txBody>
+          <a:bodyPr wrap="square" rtlCol="0">
+            <a:spAutoFit/>
+          </a:bodyPr>
+          <a:lstStyle/>
+          <a:p>
+            <a:pPr algn="r"/>
+            <a:r>
+              <a:rPr lang="en-US" sz="1100" dirty="0"/>
+              <a:t>Putative contemporary inserts</a:t>
+            </a:r>
+          </a:p>
+        </p:txBody>
+      </p:sp>
+      <p:sp>
+        <p:nvSpPr>
+          <p:cNvPr id="9" name="TextBox 8">
+            <a:extLst>
+              <a:ext uri="{FF2B5EF4-FFF2-40B4-BE49-F238E27FC236}">
+                <a16:creationId xmlns:a16="http://schemas.microsoft.com/office/drawing/2014/main" id="{A1AB082A-F420-0C48-91D5-4F7BF95C306D}"/>
+              </a:ext>
+            </a:extLst>
+          </p:cNvPr>
+          <p:cNvSpPr txBox="1"/>
+          <p:nvPr/>
+        </p:nvSpPr>
+        <p:spPr>
+          <a:xfrm>
+            <a:off x="4082441" y="3736051"/>
+            <a:ext cx="1281120" cy="261610"/>
+          </a:xfrm>
+          <a:prstGeom prst="rect">
+            <a:avLst/>
+          </a:prstGeom>
+          <a:noFill/>
+        </p:spPr>
+        <p:txBody>
+          <a:bodyPr wrap="none" rtlCol="0">
+            <a:spAutoFit/>
+          </a:bodyPr>
+          <a:lstStyle/>
+          <a:p>
+            <a:r>
+              <a:rPr lang="en-US" sz="1100" dirty="0"/>
+              <a:t>Unable to infer age</a:t>
+            </a:r>
+          </a:p>
+        </p:txBody>
+      </p:sp>
+      <p:sp>
+        <p:nvSpPr>
+          <p:cNvPr id="3" name="TextBox 2">
+            <a:extLst>
+              <a:ext uri="{FF2B5EF4-FFF2-40B4-BE49-F238E27FC236}">
+                <a16:creationId xmlns:a16="http://schemas.microsoft.com/office/drawing/2014/main" id="{56561D6C-B0AC-0E48-A749-34E5EC08CA93}"/>
+              </a:ext>
+            </a:extLst>
+          </p:cNvPr>
+          <p:cNvSpPr txBox="1"/>
+          <p:nvPr/>
+        </p:nvSpPr>
+        <p:spPr>
+          <a:xfrm>
+            <a:off x="3177302" y="5230862"/>
+            <a:ext cx="1064779" cy="307777"/>
+          </a:xfrm>
+          <a:prstGeom prst="rect">
+            <a:avLst/>
+          </a:prstGeom>
+          <a:noFill/>
+        </p:spPr>
+        <p:txBody>
+          <a:bodyPr wrap="none" rtlCol="0">
+            <a:spAutoFit/>
+          </a:bodyPr>
+          <a:lstStyle/>
+          <a:p>
+            <a:r>
+              <a:rPr lang="en-US" sz="1400" dirty="0"/>
+              <a:t>Insert count</a:t>
+            </a:r>
+          </a:p>
+        </p:txBody>
+      </p:sp>
+      <p:sp>
+        <p:nvSpPr>
+          <p:cNvPr id="10" name="TextBox 9">
+            <a:extLst>
+              <a:ext uri="{FF2B5EF4-FFF2-40B4-BE49-F238E27FC236}">
+                <a16:creationId xmlns:a16="http://schemas.microsoft.com/office/drawing/2014/main" id="{90AA9167-B2F4-DB40-8978-942B5407BF84}"/>
+              </a:ext>
+            </a:extLst>
+          </p:cNvPr>
+          <p:cNvSpPr txBox="1"/>
+          <p:nvPr/>
+        </p:nvSpPr>
+        <p:spPr>
+          <a:xfrm rot="16200000">
+            <a:off x="-308369" y="3261666"/>
+            <a:ext cx="2290755" cy="307777"/>
+          </a:xfrm>
+          <a:prstGeom prst="rect">
+            <a:avLst/>
+          </a:prstGeom>
+          <a:noFill/>
+        </p:spPr>
+        <p:txBody>
+          <a:bodyPr wrap="none" rtlCol="0">
+            <a:spAutoFit/>
+          </a:bodyPr>
+          <a:lstStyle/>
+          <a:p>
+            <a:r>
+              <a:rPr lang="en-US" sz="1400" dirty="0"/>
+              <a:t>BLAST identity (%) difference</a:t>
+            </a:r>
+          </a:p>
+        </p:txBody>
+      </p:sp>
+      <p:sp>
+        <p:nvSpPr>
+          <p:cNvPr id="11" name="TextBox 10">
+            <a:extLst>
+              <a:ext uri="{FF2B5EF4-FFF2-40B4-BE49-F238E27FC236}">
+                <a16:creationId xmlns:a16="http://schemas.microsoft.com/office/drawing/2014/main" id="{FDFFE04B-D070-864B-B8B8-CEADF928B4A8}"/>
+              </a:ext>
+            </a:extLst>
+          </p:cNvPr>
+          <p:cNvSpPr txBox="1"/>
+          <p:nvPr/>
+        </p:nvSpPr>
+        <p:spPr>
+          <a:xfrm>
+            <a:off x="563825" y="1753280"/>
+            <a:ext cx="324128" cy="369332"/>
+          </a:xfrm>
+          <a:prstGeom prst="rect">
+            <a:avLst/>
+          </a:prstGeom>
+          <a:noFill/>
+        </p:spPr>
+        <p:txBody>
+          <a:bodyPr wrap="none" rtlCol="0">
+            <a:spAutoFit/>
+          </a:bodyPr>
+          <a:lstStyle/>
+          <a:p>
+            <a:r>
+              <a:rPr lang="en-US" b="1" dirty="0"/>
+              <a:t>A</a:t>
+            </a:r>
+          </a:p>
+        </p:txBody>
+      </p:sp>
+      <p:sp>
+        <p:nvSpPr>
+          <p:cNvPr id="12" name="TextBox 11">
+            <a:extLst>
+              <a:ext uri="{FF2B5EF4-FFF2-40B4-BE49-F238E27FC236}">
+                <a16:creationId xmlns:a16="http://schemas.microsoft.com/office/drawing/2014/main" id="{276F2C94-E046-8F49-A92D-49719149D358}"/>
+              </a:ext>
+            </a:extLst>
+          </p:cNvPr>
+          <p:cNvSpPr txBox="1"/>
+          <p:nvPr/>
+        </p:nvSpPr>
+        <p:spPr>
+          <a:xfrm>
+            <a:off x="6360693" y="1753280"/>
+            <a:ext cx="314510" cy="369332"/>
+          </a:xfrm>
+          <a:prstGeom prst="rect">
+            <a:avLst/>
+          </a:prstGeom>
+          <a:noFill/>
+        </p:spPr>
+        <p:txBody>
+          <a:bodyPr wrap="none" rtlCol="0">
+            <a:spAutoFit/>
+          </a:bodyPr>
+          <a:lstStyle/>
+          <a:p>
+            <a:r>
+              <a:rPr lang="en-US" b="1" dirty="0"/>
+              <a:t>B</a:t>
+            </a:r>
+          </a:p>
+        </p:txBody>
+      </p:sp>
+      <p:sp>
+        <p:nvSpPr>
+          <p:cNvPr id="13" name="Oval 12">
+            <a:extLst>
+              <a:ext uri="{FF2B5EF4-FFF2-40B4-BE49-F238E27FC236}">
+                <a16:creationId xmlns:a16="http://schemas.microsoft.com/office/drawing/2014/main" id="{E421327E-452A-CD40-9CB2-DCE4DADC7EB8}"/>
+              </a:ext>
+            </a:extLst>
+          </p:cNvPr>
+          <p:cNvSpPr/>
+          <p:nvPr/>
+        </p:nvSpPr>
+        <p:spPr>
+          <a:xfrm rot="20764211">
+            <a:off x="1270899" y="4637079"/>
+            <a:ext cx="865164" cy="326542"/>
+          </a:xfrm>
+          <a:prstGeom prst="ellipse">
+            <a:avLst/>
+          </a:prstGeom>
+          <a:noFill/>
+          <a:ln w="9525">
+            <a:solidFill>
+              <a:srgbClr val="FF0000"/>
+            </a:solidFill>
+            <a:prstDash val="dash"/>
+          </a:ln>
+        </p:spPr>
+        <p:style>
+          <a:lnRef idx="2">
+            <a:schemeClr val="accent1">
+              <a:shade val="50000"/>
+            </a:schemeClr>
+          </a:lnRef>
+          <a:fillRef idx="1">
+            <a:schemeClr val="accent1"/>
+          </a:fillRef>
+          <a:effectRef idx="0">
+            <a:schemeClr val="accent1"/>
+          </a:effectRef>
+          <a:fontRef idx="minor">
+            <a:schemeClr val="lt1"/>
+          </a:fontRef>
+        </p:style>
+        <p:txBody>
+          <a:bodyPr rtlCol="0" anchor="ctr"/>
+          <a:lstStyle/>
+          <a:p>
+            <a:pPr algn="ctr"/>
+            <a:endParaRPr lang="en-US"/>
+          </a:p>
+        </p:txBody>
+      </p:sp>
+      <p:sp>
+        <p:nvSpPr>
+          <p:cNvPr id="14" name="Oval 13">
+            <a:extLst>
+              <a:ext uri="{FF2B5EF4-FFF2-40B4-BE49-F238E27FC236}">
+                <a16:creationId xmlns:a16="http://schemas.microsoft.com/office/drawing/2014/main" id="{1DAD5DDC-8234-0745-83AA-125A34ABC016}"/>
+              </a:ext>
+            </a:extLst>
+          </p:cNvPr>
+          <p:cNvSpPr/>
+          <p:nvPr/>
+        </p:nvSpPr>
+        <p:spPr>
+          <a:xfrm rot="20764211">
+            <a:off x="5332359" y="2021240"/>
+            <a:ext cx="865164" cy="326542"/>
+          </a:xfrm>
+          <a:prstGeom prst="ellipse">
+            <a:avLst/>
+          </a:prstGeom>
+          <a:noFill/>
+          <a:ln w="9525">
+            <a:solidFill>
+              <a:srgbClr val="FF0000"/>
+            </a:solidFill>
+            <a:prstDash val="dash"/>
+          </a:ln>
+        </p:spPr>
+        <p:style>
+          <a:lnRef idx="2">
+            <a:schemeClr val="accent1">
+              <a:shade val="50000"/>
+            </a:schemeClr>
+          </a:lnRef>
+          <a:fillRef idx="1">
+            <a:schemeClr val="accent1"/>
+          </a:fillRef>
+          <a:effectRef idx="0">
+            <a:schemeClr val="accent1"/>
+          </a:effectRef>
+          <a:fontRef idx="minor">
+            <a:schemeClr val="lt1"/>
+          </a:fontRef>
+        </p:style>
+        <p:txBody>
+          <a:bodyPr rtlCol="0" anchor="ctr"/>
+          <a:lstStyle/>
+          <a:p>
+            <a:pPr algn="ctr"/>
+            <a:endParaRPr lang="en-US"/>
+          </a:p>
+        </p:txBody>
+      </p:sp>
+      <p:sp>
+        <p:nvSpPr>
+          <p:cNvPr id="15" name="Oval 14">
+            <a:extLst>
+              <a:ext uri="{FF2B5EF4-FFF2-40B4-BE49-F238E27FC236}">
+                <a16:creationId xmlns:a16="http://schemas.microsoft.com/office/drawing/2014/main" id="{08A2940A-50E2-9E4E-B45B-7E8B51C98C89}"/>
+              </a:ext>
+            </a:extLst>
+          </p:cNvPr>
+          <p:cNvSpPr/>
+          <p:nvPr/>
+        </p:nvSpPr>
+        <p:spPr>
+          <a:xfrm rot="21257093">
+            <a:off x="1828726" y="3163471"/>
+            <a:ext cx="3824834" cy="642507"/>
+          </a:xfrm>
+          <a:prstGeom prst="ellipse">
+            <a:avLst/>
+          </a:prstGeom>
+          <a:noFill/>
+          <a:ln w="9525">
+            <a:solidFill>
+              <a:srgbClr val="FF0000"/>
+            </a:solidFill>
+            <a:prstDash val="dash"/>
+          </a:ln>
+        </p:spPr>
+        <p:style>
+          <a:lnRef idx="2">
+            <a:schemeClr val="accent1">
+              <a:shade val="50000"/>
+            </a:schemeClr>
+          </a:lnRef>
+          <a:fillRef idx="1">
+            <a:schemeClr val="accent1"/>
+          </a:fillRef>
+          <a:effectRef idx="0">
+            <a:schemeClr val="accent1"/>
+          </a:effectRef>
+          <a:fontRef idx="minor">
+            <a:schemeClr val="lt1"/>
+          </a:fontRef>
+        </p:style>
+        <p:txBody>
+          <a:bodyPr rtlCol="0" anchor="ctr"/>
+          <a:lstStyle/>
+          <a:p>
+            <a:pPr algn="ctr"/>
+            <a:endParaRPr lang="en-US"/>
+          </a:p>
+        </p:txBody>
+      </p:sp>
     </p:spTree>
     <p:extLst>
       <p:ext uri="{BB962C8B-B14F-4D97-AF65-F5344CB8AC3E}">
-        <p14:creationId xmlns:p14="http://schemas.microsoft.com/office/powerpoint/2010/main" val="2815334628"/>
+        <p14:creationId xmlns:p14="http://schemas.microsoft.com/office/powerpoint/2010/main" val="1936291726"/>
       </p:ext>
     </p:extLst>
   </p:cSld>
@@ -9763,6 +10181,126 @@
       </p:grpSpPr>
       <p:pic>
         <p:nvPicPr>
+          <p:cNvPr id="4" name="Picture 3">
+            <a:extLst>
+              <a:ext uri="{FF2B5EF4-FFF2-40B4-BE49-F238E27FC236}">
+                <a16:creationId xmlns:a16="http://schemas.microsoft.com/office/drawing/2014/main" id="{78AC1BD0-7DA5-E9BF-1323-A48980C680F0}"/>
+              </a:ext>
+            </a:extLst>
+          </p:cNvPr>
+          <p:cNvPicPr>
+            <a:picLocks noChangeAspect="1"/>
+          </p:cNvPicPr>
+          <p:nvPr/>
+        </p:nvPicPr>
+        <p:blipFill>
+          <a:blip r:embed="rId3"/>
+          <a:stretch>
+            <a:fillRect/>
+          </a:stretch>
+        </p:blipFill>
+        <p:spPr>
+          <a:xfrm>
+            <a:off x="3699510" y="-103505"/>
+            <a:ext cx="4617303" cy="6806057"/>
+          </a:xfrm>
+          <a:prstGeom prst="rect">
+            <a:avLst/>
+          </a:prstGeom>
+        </p:spPr>
+      </p:pic>
+    </p:spTree>
+    <p:extLst>
+      <p:ext uri="{BB962C8B-B14F-4D97-AF65-F5344CB8AC3E}">
+        <p14:creationId xmlns:p14="http://schemas.microsoft.com/office/powerpoint/2010/main" val="4199959309"/>
+      </p:ext>
+    </p:extLst>
+  </p:cSld>
+  <p:clrMapOvr>
+    <a:masterClrMapping/>
+  </p:clrMapOvr>
+</p:sld>
+</file>
+
+<file path=ppt/slides/slide14.xml><?xml version="1.0" encoding="utf-8"?>
+<p:sld xmlns:a="http://schemas.openxmlformats.org/drawingml/2006/main" xmlns:r="http://schemas.openxmlformats.org/officeDocument/2006/relationships" xmlns:p="http://schemas.openxmlformats.org/presentationml/2006/main">
+  <p:cSld>
+    <p:spTree>
+      <p:nvGrpSpPr>
+        <p:cNvPr id="1" name=""/>
+        <p:cNvGrpSpPr/>
+        <p:nvPr/>
+      </p:nvGrpSpPr>
+      <p:grpSpPr>
+        <a:xfrm>
+          <a:off x="0" y="0"/>
+          <a:ext cx="0" cy="0"/>
+          <a:chOff x="0" y="0"/>
+          <a:chExt cx="0" cy="0"/>
+        </a:xfrm>
+      </p:grpSpPr>
+      <p:pic>
+        <p:nvPicPr>
+          <p:cNvPr id="4" name="Picture 3">
+            <a:extLst>
+              <a:ext uri="{FF2B5EF4-FFF2-40B4-BE49-F238E27FC236}">
+                <a16:creationId xmlns:a16="http://schemas.microsoft.com/office/drawing/2014/main" id="{61BBB3A3-78CA-A200-3731-AABEB7DD0C3F}"/>
+              </a:ext>
+            </a:extLst>
+          </p:cNvPr>
+          <p:cNvPicPr>
+            <a:picLocks noChangeAspect="1"/>
+          </p:cNvPicPr>
+          <p:nvPr/>
+        </p:nvPicPr>
+        <p:blipFill>
+          <a:blip r:embed="rId3"/>
+          <a:stretch>
+            <a:fillRect/>
+          </a:stretch>
+        </p:blipFill>
+        <p:spPr>
+          <a:xfrm>
+            <a:off x="3230245" y="428307"/>
+            <a:ext cx="5731510" cy="6001385"/>
+          </a:xfrm>
+          <a:prstGeom prst="rect">
+            <a:avLst/>
+          </a:prstGeom>
+        </p:spPr>
+      </p:pic>
+    </p:spTree>
+    <p:extLst>
+      <p:ext uri="{BB962C8B-B14F-4D97-AF65-F5344CB8AC3E}">
+        <p14:creationId xmlns:p14="http://schemas.microsoft.com/office/powerpoint/2010/main" val="2815334628"/>
+      </p:ext>
+    </p:extLst>
+  </p:cSld>
+  <p:clrMapOvr>
+    <a:masterClrMapping/>
+  </p:clrMapOvr>
+</p:sld>
+</file>
+
+<file path=ppt/slides/slide15.xml><?xml version="1.0" encoding="utf-8"?>
+<p:sld xmlns:a="http://schemas.openxmlformats.org/drawingml/2006/main" xmlns:r="http://schemas.openxmlformats.org/officeDocument/2006/relationships" xmlns:p="http://schemas.openxmlformats.org/presentationml/2006/main">
+  <p:cSld>
+    <p:spTree>
+      <p:nvGrpSpPr>
+        <p:cNvPr id="1" name=""/>
+        <p:cNvGrpSpPr/>
+        <p:nvPr/>
+      </p:nvGrpSpPr>
+      <p:grpSpPr>
+        <a:xfrm>
+          <a:off x="0" y="0"/>
+          <a:ext cx="0" cy="0"/>
+          <a:chOff x="0" y="0"/>
+          <a:chExt cx="0" cy="0"/>
+        </a:xfrm>
+      </p:grpSpPr>
+      <p:pic>
+        <p:nvPicPr>
           <p:cNvPr id="5" name="Picture 4">
             <a:extLst>
               <a:ext uri="{FF2B5EF4-FFF2-40B4-BE49-F238E27FC236}">
@@ -9863,7 +10401,7 @@
 </p:sld>
 </file>
 
-<file path=ppt/slides/slide14.xml><?xml version="1.0" encoding="utf-8"?>
+<file path=ppt/slides/slide16.xml><?xml version="1.0" encoding="utf-8"?>
 <p:sld xmlns:a="http://schemas.openxmlformats.org/drawingml/2006/main" xmlns:r="http://schemas.openxmlformats.org/officeDocument/2006/relationships" xmlns:p="http://schemas.openxmlformats.org/presentationml/2006/main">
   <p:cSld>
     <p:spTree>
@@ -21767,15 +22305,7 @@
           <a:p>
             <a:r>
               <a:rPr lang="en-US" dirty="0"/>
-              <a:t>Filtered lengths &lt;2500 </a:t>
-            </a:r>
-            <a:r>
-              <a:rPr lang="en-US" dirty="0" err="1"/>
-              <a:t>bp</a:t>
-            </a:r>
-            <a:r>
-              <a:rPr lang="en-US" dirty="0"/>
-              <a:t>, and &lt;1.5 Mb</a:t>
+              <a:t>Filtered lengths &lt;2500 bp, and &lt;1.5 Mb</a:t>
             </a:r>
           </a:p>
         </p:txBody>
@@ -22060,10 +22590,10 @@
       </p:grpSpPr>
       <p:pic>
         <p:nvPicPr>
-          <p:cNvPr id="2" name="Picture 1">
-            <a:extLst>
-              <a:ext uri="{FF2B5EF4-FFF2-40B4-BE49-F238E27FC236}">
-                <a16:creationId xmlns:a16="http://schemas.microsoft.com/office/drawing/2014/main" id="{A45A0E29-9F21-FC4B-A4F5-B53517A41FC2}"/>
+          <p:cNvPr id="6" name="Picture 5">
+            <a:extLst>
+              <a:ext uri="{FF2B5EF4-FFF2-40B4-BE49-F238E27FC236}">
+                <a16:creationId xmlns:a16="http://schemas.microsoft.com/office/drawing/2014/main" id="{0747884F-1637-E940-B3B3-1AF6631B764F}"/>
               </a:ext>
             </a:extLst>
           </p:cNvPr>
@@ -22072,16 +22602,15 @@
           </p:cNvPicPr>
           <p:nvPr/>
         </p:nvPicPr>
-        <p:blipFill>
-          <a:blip r:embed="rId3"/>
-          <a:stretch>
-            <a:fillRect/>
-          </a:stretch>
+        <p:blipFill rotWithShape="1">
+          <a:blip r:embed="rId2"/>
+          <a:srcRect l="7073" t="4504" r="22447" b="6328"/>
+          <a:stretch/>
         </p:blipFill>
         <p:spPr>
           <a:xfrm>
-            <a:off x="75050" y="454968"/>
-            <a:ext cx="6561506" cy="4396430"/>
+            <a:off x="2238555" y="1255567"/>
+            <a:ext cx="3119867" cy="3157683"/>
           </a:xfrm>
           <a:prstGeom prst="rect">
             <a:avLst/>
@@ -22090,84 +22619,20 @@
       </p:pic>
       <p:sp>
         <p:nvSpPr>
-          <p:cNvPr id="5" name="TextBox 4">
-            <a:extLst>
-              <a:ext uri="{FF2B5EF4-FFF2-40B4-BE49-F238E27FC236}">
-                <a16:creationId xmlns:a16="http://schemas.microsoft.com/office/drawing/2014/main" id="{4F756E17-FE9E-4DC6-F3CF-AABBBF0B49DD}"/>
-              </a:ext>
-            </a:extLst>
-          </p:cNvPr>
-          <p:cNvSpPr txBox="1"/>
-          <p:nvPr/>
-        </p:nvSpPr>
-        <p:spPr>
-          <a:xfrm>
-            <a:off x="7856065" y="3519340"/>
-            <a:ext cx="3343468" cy="830997"/>
-          </a:xfrm>
-          <a:prstGeom prst="rect">
-            <a:avLst/>
-          </a:prstGeom>
-          <a:noFill/>
-        </p:spPr>
-        <p:txBody>
-          <a:bodyPr wrap="square" rtlCol="0">
-            <a:spAutoFit/>
-          </a:bodyPr>
-          <a:lstStyle/>
-          <a:p>
-            <a:pPr algn="ctr"/>
-            <a:r>
-              <a:rPr lang="en-US" sz="1600" b="1" dirty="0">
-                <a:solidFill>
-                  <a:srgbClr val="FF0000"/>
-                </a:solidFill>
-              </a:rPr>
-              <a:t>C. </a:t>
-            </a:r>
-            <a:r>
-              <a:rPr lang="en-US" sz="1600" dirty="0">
-                <a:solidFill>
-                  <a:srgbClr val="FF0000"/>
-                </a:solidFill>
-              </a:rPr>
-              <a:t>Placeholder: depiction of the origin of the insert around the </a:t>
-            </a:r>
-            <a:r>
-              <a:rPr lang="en-US" sz="1600" dirty="0" err="1">
-                <a:solidFill>
-                  <a:srgbClr val="FF0000"/>
-                </a:solidFill>
-              </a:rPr>
-              <a:t>Blatta</a:t>
-            </a:r>
-            <a:r>
-              <a:rPr lang="en-US" sz="1600" dirty="0">
-                <a:solidFill>
-                  <a:srgbClr val="FF0000"/>
-                </a:solidFill>
-              </a:rPr>
-              <a:t> genome (waiting on Leo)</a:t>
-            </a:r>
-          </a:p>
-        </p:txBody>
-      </p:sp>
-      <p:sp>
-        <p:nvSpPr>
           <p:cNvPr id="7" name="TextBox 6">
             <a:extLst>
               <a:ext uri="{FF2B5EF4-FFF2-40B4-BE49-F238E27FC236}">
-                <a16:creationId xmlns:a16="http://schemas.microsoft.com/office/drawing/2014/main" id="{1C0E847B-8FC5-0867-7196-259B77611FF8}"/>
-              </a:ext>
-            </a:extLst>
-          </p:cNvPr>
-          <p:cNvSpPr txBox="1"/>
-          <p:nvPr/>
-        </p:nvSpPr>
-        <p:spPr>
-          <a:xfrm>
-            <a:off x="215683" y="425302"/>
-            <a:ext cx="324128" cy="369332"/>
+                <a16:creationId xmlns:a16="http://schemas.microsoft.com/office/drawing/2014/main" id="{5D5F8D69-0C99-1942-B3F4-67111F29D364}"/>
+              </a:ext>
+            </a:extLst>
+          </p:cNvPr>
+          <p:cNvSpPr txBox="1"/>
+          <p:nvPr/>
+        </p:nvSpPr>
+        <p:spPr>
+          <a:xfrm>
+            <a:off x="5077905" y="3917117"/>
+            <a:ext cx="1247457" cy="230832"/>
           </a:xfrm>
           <a:prstGeom prst="rect">
             <a:avLst/>
@@ -22181,18 +22646,382 @@
           <a:lstStyle/>
           <a:p>
             <a:r>
-              <a:rPr lang="en-US" b="1" dirty="0"/>
-              <a:t>A</a:t>
-            </a:r>
+              <a:rPr lang="en-US" sz="900" i="1" dirty="0"/>
+              <a:t>Periplaneta americana</a:t>
+            </a:r>
+          </a:p>
+        </p:txBody>
+      </p:sp>
+      <p:sp>
+        <p:nvSpPr>
+          <p:cNvPr id="9" name="TextBox 8">
+            <a:extLst>
+              <a:ext uri="{FF2B5EF4-FFF2-40B4-BE49-F238E27FC236}">
+                <a16:creationId xmlns:a16="http://schemas.microsoft.com/office/drawing/2014/main" id="{888754E2-E0C8-4E42-A747-78A83BD6B4B6}"/>
+              </a:ext>
+            </a:extLst>
+          </p:cNvPr>
+          <p:cNvSpPr txBox="1"/>
+          <p:nvPr/>
+        </p:nvSpPr>
+        <p:spPr>
+          <a:xfrm>
+            <a:off x="5077905" y="4012860"/>
+            <a:ext cx="1064715" cy="230832"/>
+          </a:xfrm>
+          <a:prstGeom prst="rect">
+            <a:avLst/>
+          </a:prstGeom>
+          <a:noFill/>
+        </p:spPr>
+        <p:txBody>
+          <a:bodyPr wrap="none" rtlCol="0">
+            <a:spAutoFit/>
+          </a:bodyPr>
+          <a:lstStyle/>
+          <a:p>
+            <a:r>
+              <a:rPr lang="en-US" sz="900" i="1" dirty="0"/>
+              <a:t>Blatella germanica</a:t>
+            </a:r>
+          </a:p>
+        </p:txBody>
+      </p:sp>
+      <p:sp>
+        <p:nvSpPr>
+          <p:cNvPr id="10" name="TextBox 9">
+            <a:extLst>
+              <a:ext uri="{FF2B5EF4-FFF2-40B4-BE49-F238E27FC236}">
+                <a16:creationId xmlns:a16="http://schemas.microsoft.com/office/drawing/2014/main" id="{A310BFC1-59A8-0442-A0B2-EF40C37C2A03}"/>
+              </a:ext>
+            </a:extLst>
+          </p:cNvPr>
+          <p:cNvSpPr txBox="1"/>
+          <p:nvPr/>
+        </p:nvSpPr>
+        <p:spPr>
+          <a:xfrm>
+            <a:off x="5015388" y="3810197"/>
+            <a:ext cx="1127232" cy="230832"/>
+          </a:xfrm>
+          <a:prstGeom prst="rect">
+            <a:avLst/>
+          </a:prstGeom>
+          <a:noFill/>
+        </p:spPr>
+        <p:txBody>
+          <a:bodyPr wrap="none" rtlCol="0">
+            <a:spAutoFit/>
+          </a:bodyPr>
+          <a:lstStyle/>
+          <a:p>
+            <a:r>
+              <a:rPr lang="en-US" sz="900" i="1" dirty="0"/>
+              <a:t>Diploptera punctata</a:t>
+            </a:r>
+          </a:p>
+        </p:txBody>
+      </p:sp>
+      <p:sp>
+        <p:nvSpPr>
+          <p:cNvPr id="15" name="TextBox 14">
+            <a:extLst>
+              <a:ext uri="{FF2B5EF4-FFF2-40B4-BE49-F238E27FC236}">
+                <a16:creationId xmlns:a16="http://schemas.microsoft.com/office/drawing/2014/main" id="{009A7E7D-D327-3949-96C6-CBD159935FBA}"/>
+              </a:ext>
+            </a:extLst>
+          </p:cNvPr>
+          <p:cNvSpPr txBox="1"/>
+          <p:nvPr/>
+        </p:nvSpPr>
+        <p:spPr>
+          <a:xfrm>
+            <a:off x="5057325" y="1863752"/>
+            <a:ext cx="1744388" cy="230832"/>
+          </a:xfrm>
+          <a:prstGeom prst="rect">
+            <a:avLst/>
+          </a:prstGeom>
+          <a:noFill/>
+        </p:spPr>
+        <p:txBody>
+          <a:bodyPr wrap="none" rtlCol="0">
+            <a:spAutoFit/>
+          </a:bodyPr>
+          <a:lstStyle/>
+          <a:p>
+            <a:r>
+              <a:rPr lang="en-US" sz="900" i="1" dirty="0"/>
+              <a:t>Panesthia tryoni tryoni </a:t>
+            </a:r>
+            <a:r>
+              <a:rPr lang="en-US" sz="900" dirty="0"/>
+              <a:t>(Eungella)</a:t>
+            </a:r>
+          </a:p>
+        </p:txBody>
+      </p:sp>
+      <p:sp>
+        <p:nvSpPr>
+          <p:cNvPr id="16" name="TextBox 15">
+            <a:extLst>
+              <a:ext uri="{FF2B5EF4-FFF2-40B4-BE49-F238E27FC236}">
+                <a16:creationId xmlns:a16="http://schemas.microsoft.com/office/drawing/2014/main" id="{8167B8E0-2D3D-5D40-92BB-642F4B6C67A6}"/>
+              </a:ext>
+            </a:extLst>
+          </p:cNvPr>
+          <p:cNvSpPr txBox="1"/>
+          <p:nvPr/>
+        </p:nvSpPr>
+        <p:spPr>
+          <a:xfrm>
+            <a:off x="5062802" y="1767941"/>
+            <a:ext cx="2034531" cy="230832"/>
+          </a:xfrm>
+          <a:prstGeom prst="rect">
+            <a:avLst/>
+          </a:prstGeom>
+          <a:noFill/>
+        </p:spPr>
+        <p:txBody>
+          <a:bodyPr wrap="none" rtlCol="0">
+            <a:spAutoFit/>
+          </a:bodyPr>
+          <a:lstStyle/>
+          <a:p>
+            <a:r>
+              <a:rPr lang="en-US" sz="900" i="1" dirty="0"/>
+              <a:t>Panesthia tryoni tryoni </a:t>
+            </a:r>
+            <a:r>
+              <a:rPr lang="en-US" sz="900" dirty="0"/>
+              <a:t>(Kroombit Tops)</a:t>
+            </a:r>
+          </a:p>
+        </p:txBody>
+      </p:sp>
+      <p:sp>
+        <p:nvSpPr>
+          <p:cNvPr id="17" name="TextBox 16">
+            <a:extLst>
+              <a:ext uri="{FF2B5EF4-FFF2-40B4-BE49-F238E27FC236}">
+                <a16:creationId xmlns:a16="http://schemas.microsoft.com/office/drawing/2014/main" id="{7FB259DF-A70A-2849-B653-460C82CDBD8A}"/>
+              </a:ext>
+            </a:extLst>
+          </p:cNvPr>
+          <p:cNvSpPr txBox="1"/>
+          <p:nvPr/>
+        </p:nvSpPr>
+        <p:spPr>
+          <a:xfrm>
+            <a:off x="5053725" y="2077524"/>
+            <a:ext cx="1519968" cy="230832"/>
+          </a:xfrm>
+          <a:prstGeom prst="rect">
+            <a:avLst/>
+          </a:prstGeom>
+          <a:noFill/>
+        </p:spPr>
+        <p:txBody>
+          <a:bodyPr wrap="none" rtlCol="0">
+            <a:spAutoFit/>
+          </a:bodyPr>
+          <a:lstStyle/>
+          <a:p>
+            <a:r>
+              <a:rPr lang="en-US" sz="900" i="1" dirty="0"/>
+              <a:t>Panesthia tryoni tegminifera</a:t>
+            </a:r>
+            <a:endParaRPr lang="en-US" sz="900" dirty="0"/>
+          </a:p>
+        </p:txBody>
+      </p:sp>
+      <p:sp>
+        <p:nvSpPr>
+          <p:cNvPr id="19" name="TextBox 18">
+            <a:extLst>
+              <a:ext uri="{FF2B5EF4-FFF2-40B4-BE49-F238E27FC236}">
+                <a16:creationId xmlns:a16="http://schemas.microsoft.com/office/drawing/2014/main" id="{7BC98F33-9367-044F-863B-1C66DD4CE56A}"/>
+              </a:ext>
+            </a:extLst>
+          </p:cNvPr>
+          <p:cNvSpPr txBox="1"/>
+          <p:nvPr/>
+        </p:nvSpPr>
+        <p:spPr>
+          <a:xfrm>
+            <a:off x="5053725" y="1970604"/>
+            <a:ext cx="1306768" cy="230832"/>
+          </a:xfrm>
+          <a:prstGeom prst="rect">
+            <a:avLst/>
+          </a:prstGeom>
+          <a:noFill/>
+        </p:spPr>
+        <p:txBody>
+          <a:bodyPr wrap="none" rtlCol="0">
+            <a:spAutoFit/>
+          </a:bodyPr>
+          <a:lstStyle/>
+          <a:p>
+            <a:r>
+              <a:rPr lang="en-US" sz="900" i="1" dirty="0"/>
+              <a:t>Parapanesthia gigantea</a:t>
+            </a:r>
+            <a:endParaRPr lang="en-US" sz="900" dirty="0"/>
+          </a:p>
+        </p:txBody>
+      </p:sp>
+      <p:sp>
+        <p:nvSpPr>
+          <p:cNvPr id="20" name="TextBox 19">
+            <a:extLst>
+              <a:ext uri="{FF2B5EF4-FFF2-40B4-BE49-F238E27FC236}">
+                <a16:creationId xmlns:a16="http://schemas.microsoft.com/office/drawing/2014/main" id="{EF32D1E8-3A75-734C-95A0-F89F1A28938E}"/>
+              </a:ext>
+            </a:extLst>
+          </p:cNvPr>
+          <p:cNvSpPr txBox="1"/>
+          <p:nvPr/>
+        </p:nvSpPr>
+        <p:spPr>
+          <a:xfrm>
+            <a:off x="5024770" y="2629343"/>
+            <a:ext cx="1265090" cy="230832"/>
+          </a:xfrm>
+          <a:prstGeom prst="rect">
+            <a:avLst/>
+          </a:prstGeom>
+          <a:noFill/>
+        </p:spPr>
+        <p:txBody>
+          <a:bodyPr wrap="none" rtlCol="0">
+            <a:spAutoFit/>
+          </a:bodyPr>
+          <a:lstStyle/>
+          <a:p>
+            <a:r>
+              <a:rPr lang="en-US" sz="900" i="1" dirty="0"/>
+              <a:t>Neogeoscapheus hanni</a:t>
+            </a:r>
+            <a:endParaRPr lang="en-US" sz="900" dirty="0"/>
+          </a:p>
+        </p:txBody>
+      </p:sp>
+      <p:sp>
+        <p:nvSpPr>
+          <p:cNvPr id="21" name="TextBox 20">
+            <a:extLst>
+              <a:ext uri="{FF2B5EF4-FFF2-40B4-BE49-F238E27FC236}">
+                <a16:creationId xmlns:a16="http://schemas.microsoft.com/office/drawing/2014/main" id="{F2229EA9-5D84-EC4F-84F0-D9409A5959B8}"/>
+              </a:ext>
+            </a:extLst>
+          </p:cNvPr>
+          <p:cNvSpPr txBox="1"/>
+          <p:nvPr/>
+        </p:nvSpPr>
+        <p:spPr>
+          <a:xfrm>
+            <a:off x="5002392" y="1667412"/>
+            <a:ext cx="1239442" cy="230832"/>
+          </a:xfrm>
+          <a:prstGeom prst="rect">
+            <a:avLst/>
+          </a:prstGeom>
+          <a:noFill/>
+        </p:spPr>
+        <p:txBody>
+          <a:bodyPr wrap="none" rtlCol="0">
+            <a:spAutoFit/>
+          </a:bodyPr>
+          <a:lstStyle/>
+          <a:p>
+            <a:r>
+              <a:rPr lang="en-US" sz="900" i="1" dirty="0"/>
+              <a:t>Geoscapheus dilatatus</a:t>
+            </a:r>
+            <a:endParaRPr lang="en-US" sz="900" dirty="0"/>
+          </a:p>
+        </p:txBody>
+      </p:sp>
+      <p:sp>
+        <p:nvSpPr>
+          <p:cNvPr id="22" name="TextBox 21">
+            <a:extLst>
+              <a:ext uri="{FF2B5EF4-FFF2-40B4-BE49-F238E27FC236}">
+                <a16:creationId xmlns:a16="http://schemas.microsoft.com/office/drawing/2014/main" id="{3DB02597-FB85-324D-92F3-60139675F34E}"/>
+              </a:ext>
+            </a:extLst>
+          </p:cNvPr>
+          <p:cNvSpPr txBox="1"/>
+          <p:nvPr/>
+        </p:nvSpPr>
+        <p:spPr>
+          <a:xfrm>
+            <a:off x="5015388" y="1518292"/>
+            <a:ext cx="1342034" cy="230832"/>
+          </a:xfrm>
+          <a:prstGeom prst="rect">
+            <a:avLst/>
+          </a:prstGeom>
+          <a:noFill/>
+        </p:spPr>
+        <p:txBody>
+          <a:bodyPr wrap="none" rtlCol="0">
+            <a:spAutoFit/>
+          </a:bodyPr>
+          <a:lstStyle/>
+          <a:p>
+            <a:r>
+              <a:rPr lang="en-US" sz="900" i="1" dirty="0"/>
+              <a:t>Neogeoscapheus dahmsi</a:t>
+            </a:r>
+            <a:endParaRPr lang="en-US" sz="900" dirty="0"/>
+          </a:p>
+        </p:txBody>
+      </p:sp>
+      <p:sp>
+        <p:nvSpPr>
+          <p:cNvPr id="23" name="TextBox 22">
+            <a:extLst>
+              <a:ext uri="{FF2B5EF4-FFF2-40B4-BE49-F238E27FC236}">
+                <a16:creationId xmlns:a16="http://schemas.microsoft.com/office/drawing/2014/main" id="{9275BADF-4D78-0746-B2AC-2D33520AC854}"/>
+              </a:ext>
+            </a:extLst>
+          </p:cNvPr>
+          <p:cNvSpPr txBox="1"/>
+          <p:nvPr/>
+        </p:nvSpPr>
+        <p:spPr>
+          <a:xfrm>
+            <a:off x="5049291" y="1294551"/>
+            <a:ext cx="1470274" cy="230832"/>
+          </a:xfrm>
+          <a:prstGeom prst="rect">
+            <a:avLst/>
+          </a:prstGeom>
+          <a:noFill/>
+        </p:spPr>
+        <p:txBody>
+          <a:bodyPr wrap="none" rtlCol="0">
+            <a:spAutoFit/>
+          </a:bodyPr>
+          <a:lstStyle/>
+          <a:p>
+            <a:r>
+              <a:rPr lang="en-US" sz="900" i="1" dirty="0"/>
+              <a:t>Macropanesthia lithgowae </a:t>
+            </a:r>
+            <a:endParaRPr lang="en-US" sz="900" dirty="0"/>
           </a:p>
         </p:txBody>
       </p:sp>
       <p:pic>
         <p:nvPicPr>
-          <p:cNvPr id="13" name="Picture 12">
-            <a:extLst>
-              <a:ext uri="{FF2B5EF4-FFF2-40B4-BE49-F238E27FC236}">
-                <a16:creationId xmlns:a16="http://schemas.microsoft.com/office/drawing/2014/main" id="{DC883A01-AA48-044E-76DC-460544A87194}"/>
+          <p:cNvPr id="24" name="Picture 23">
+            <a:extLst>
+              <a:ext uri="{FF2B5EF4-FFF2-40B4-BE49-F238E27FC236}">
+                <a16:creationId xmlns:a16="http://schemas.microsoft.com/office/drawing/2014/main" id="{B59F7878-8D31-2F41-A3A6-F7FBEE2CDA0D}"/>
               </a:ext>
             </a:extLst>
           </p:cNvPr>
@@ -22201,17 +23030,15 @@
           </p:cNvPicPr>
           <p:nvPr/>
         </p:nvPicPr>
-        <p:blipFill>
-          <a:blip r:embed="rId4"/>
-          <a:srcRect t="5172"/>
-          <a:stretch>
-            <a:fillRect/>
-          </a:stretch>
+        <p:blipFill rotWithShape="1">
+          <a:blip r:embed="rId2"/>
+          <a:srcRect l="76918" t="4504"/>
+          <a:stretch/>
         </p:blipFill>
         <p:spPr>
           <a:xfrm>
-            <a:off x="7048374" y="496730"/>
-            <a:ext cx="5104657" cy="2587255"/>
+            <a:off x="9005671" y="-167862"/>
+            <a:ext cx="2316478" cy="7666996"/>
           </a:xfrm>
           <a:prstGeom prst="rect">
             <a:avLst/>
@@ -22220,20 +23047,20 @@
       </p:pic>
       <p:sp>
         <p:nvSpPr>
-          <p:cNvPr id="14" name="TextBox 13">
-            <a:extLst>
-              <a:ext uri="{FF2B5EF4-FFF2-40B4-BE49-F238E27FC236}">
-                <a16:creationId xmlns:a16="http://schemas.microsoft.com/office/drawing/2014/main" id="{2C6B5942-B39C-46A8-0714-63EF48E22894}"/>
-              </a:ext>
-            </a:extLst>
-          </p:cNvPr>
-          <p:cNvSpPr txBox="1"/>
-          <p:nvPr/>
-        </p:nvSpPr>
-        <p:spPr>
-          <a:xfrm>
-            <a:off x="6720534" y="425302"/>
-            <a:ext cx="314510" cy="369332"/>
+          <p:cNvPr id="25" name="TextBox 24">
+            <a:extLst>
+              <a:ext uri="{FF2B5EF4-FFF2-40B4-BE49-F238E27FC236}">
+                <a16:creationId xmlns:a16="http://schemas.microsoft.com/office/drawing/2014/main" id="{2B13983A-9E9E-C34E-AD72-EC882581478D}"/>
+              </a:ext>
+            </a:extLst>
+          </p:cNvPr>
+          <p:cNvSpPr txBox="1"/>
+          <p:nvPr/>
+        </p:nvSpPr>
+        <p:spPr>
+          <a:xfrm>
+            <a:off x="2271805" y="4366272"/>
+            <a:ext cx="250390" cy="246221"/>
           </a:xfrm>
           <a:prstGeom prst="rect">
             <a:avLst/>
@@ -22247,8 +23074,397 @@
           <a:lstStyle/>
           <a:p>
             <a:r>
-              <a:rPr lang="en-US" b="1" dirty="0"/>
-              <a:t>B</a:t>
+              <a:rPr lang="en-US" sz="1000" dirty="0"/>
+              <a:t>0</a:t>
+            </a:r>
+          </a:p>
+        </p:txBody>
+      </p:sp>
+      <p:sp>
+        <p:nvSpPr>
+          <p:cNvPr id="26" name="TextBox 25">
+            <a:extLst>
+              <a:ext uri="{FF2B5EF4-FFF2-40B4-BE49-F238E27FC236}">
+                <a16:creationId xmlns:a16="http://schemas.microsoft.com/office/drawing/2014/main" id="{55E5B9DB-CC9B-6449-8A90-45E12F33807B}"/>
+              </a:ext>
+            </a:extLst>
+          </p:cNvPr>
+          <p:cNvSpPr txBox="1"/>
+          <p:nvPr/>
+        </p:nvSpPr>
+        <p:spPr>
+          <a:xfrm>
+            <a:off x="2423545" y="4533373"/>
+            <a:ext cx="2578847" cy="276999"/>
+          </a:xfrm>
+          <a:prstGeom prst="rect">
+            <a:avLst/>
+          </a:prstGeom>
+          <a:noFill/>
+        </p:spPr>
+        <p:txBody>
+          <a:bodyPr wrap="none" rtlCol="0">
+            <a:spAutoFit/>
+          </a:bodyPr>
+          <a:lstStyle/>
+          <a:p>
+            <a:r>
+              <a:rPr lang="en-US" sz="1200" i="1" dirty="0"/>
+              <a:t>Blattabacterium</a:t>
+            </a:r>
+            <a:r>
+              <a:rPr lang="en-US" sz="1200" dirty="0"/>
+              <a:t> genome position (kb)</a:t>
+            </a:r>
+          </a:p>
+        </p:txBody>
+      </p:sp>
+      <p:sp>
+        <p:nvSpPr>
+          <p:cNvPr id="27" name="TextBox 26">
+            <a:extLst>
+              <a:ext uri="{FF2B5EF4-FFF2-40B4-BE49-F238E27FC236}">
+                <a16:creationId xmlns:a16="http://schemas.microsoft.com/office/drawing/2014/main" id="{9E98D433-EB95-A642-9565-62D70FCBA984}"/>
+              </a:ext>
+            </a:extLst>
+          </p:cNvPr>
+          <p:cNvSpPr txBox="1"/>
+          <p:nvPr/>
+        </p:nvSpPr>
+        <p:spPr>
+          <a:xfrm rot="16200000">
+            <a:off x="934547" y="2554989"/>
+            <a:ext cx="1673087" cy="276999"/>
+          </a:xfrm>
+          <a:prstGeom prst="rect">
+            <a:avLst/>
+          </a:prstGeom>
+          <a:noFill/>
+        </p:spPr>
+        <p:txBody>
+          <a:bodyPr wrap="none" rtlCol="0">
+            <a:spAutoFit/>
+          </a:bodyPr>
+          <a:lstStyle/>
+          <a:p>
+            <a:r>
+              <a:rPr lang="en-US" sz="1200" dirty="0"/>
+              <a:t>Cumulative insert count</a:t>
+            </a:r>
+          </a:p>
+        </p:txBody>
+      </p:sp>
+      <p:sp>
+        <p:nvSpPr>
+          <p:cNvPr id="28" name="TextBox 27">
+            <a:extLst>
+              <a:ext uri="{FF2B5EF4-FFF2-40B4-BE49-F238E27FC236}">
+                <a16:creationId xmlns:a16="http://schemas.microsoft.com/office/drawing/2014/main" id="{BD336D30-FE22-1445-8F1F-00531F581154}"/>
+              </a:ext>
+            </a:extLst>
+          </p:cNvPr>
+          <p:cNvSpPr txBox="1"/>
+          <p:nvPr/>
+        </p:nvSpPr>
+        <p:spPr>
+          <a:xfrm>
+            <a:off x="3059847" y="4366271"/>
+            <a:ext cx="381836" cy="246221"/>
+          </a:xfrm>
+          <a:prstGeom prst="rect">
+            <a:avLst/>
+          </a:prstGeom>
+          <a:noFill/>
+        </p:spPr>
+        <p:txBody>
+          <a:bodyPr wrap="none" rtlCol="0">
+            <a:spAutoFit/>
+          </a:bodyPr>
+          <a:lstStyle/>
+          <a:p>
+            <a:r>
+              <a:rPr lang="en-US" sz="1000" dirty="0"/>
+              <a:t>200</a:t>
+            </a:r>
+          </a:p>
+        </p:txBody>
+      </p:sp>
+      <p:sp>
+        <p:nvSpPr>
+          <p:cNvPr id="29" name="TextBox 28">
+            <a:extLst>
+              <a:ext uri="{FF2B5EF4-FFF2-40B4-BE49-F238E27FC236}">
+                <a16:creationId xmlns:a16="http://schemas.microsoft.com/office/drawing/2014/main" id="{1E402040-B2DC-A141-B977-7348C38E08B1}"/>
+              </a:ext>
+            </a:extLst>
+          </p:cNvPr>
+          <p:cNvSpPr txBox="1"/>
+          <p:nvPr/>
+        </p:nvSpPr>
+        <p:spPr>
+          <a:xfrm>
+            <a:off x="3927412" y="4366270"/>
+            <a:ext cx="381836" cy="246221"/>
+          </a:xfrm>
+          <a:prstGeom prst="rect">
+            <a:avLst/>
+          </a:prstGeom>
+          <a:noFill/>
+        </p:spPr>
+        <p:txBody>
+          <a:bodyPr wrap="none" rtlCol="0">
+            <a:spAutoFit/>
+          </a:bodyPr>
+          <a:lstStyle/>
+          <a:p>
+            <a:r>
+              <a:rPr lang="en-US" sz="1000" dirty="0"/>
+              <a:t>400</a:t>
+            </a:r>
+          </a:p>
+        </p:txBody>
+      </p:sp>
+      <p:sp>
+        <p:nvSpPr>
+          <p:cNvPr id="30" name="TextBox 29">
+            <a:extLst>
+              <a:ext uri="{FF2B5EF4-FFF2-40B4-BE49-F238E27FC236}">
+                <a16:creationId xmlns:a16="http://schemas.microsoft.com/office/drawing/2014/main" id="{AB01D96E-DF4A-C247-B4B9-44558E41F7A3}"/>
+              </a:ext>
+            </a:extLst>
+          </p:cNvPr>
+          <p:cNvSpPr txBox="1"/>
+          <p:nvPr/>
+        </p:nvSpPr>
+        <p:spPr>
+          <a:xfrm>
+            <a:off x="4797211" y="4367848"/>
+            <a:ext cx="381836" cy="246221"/>
+          </a:xfrm>
+          <a:prstGeom prst="rect">
+            <a:avLst/>
+          </a:prstGeom>
+          <a:noFill/>
+        </p:spPr>
+        <p:txBody>
+          <a:bodyPr wrap="none" rtlCol="0">
+            <a:spAutoFit/>
+          </a:bodyPr>
+          <a:lstStyle/>
+          <a:p>
+            <a:r>
+              <a:rPr lang="en-US" sz="1000" dirty="0"/>
+              <a:t>600</a:t>
+            </a:r>
+          </a:p>
+        </p:txBody>
+      </p:sp>
+      <p:sp>
+        <p:nvSpPr>
+          <p:cNvPr id="31" name="TextBox 30">
+            <a:extLst>
+              <a:ext uri="{FF2B5EF4-FFF2-40B4-BE49-F238E27FC236}">
+                <a16:creationId xmlns:a16="http://schemas.microsoft.com/office/drawing/2014/main" id="{ECCD8C77-D49A-0548-B9F2-93EE8175AA82}"/>
+              </a:ext>
+            </a:extLst>
+          </p:cNvPr>
+          <p:cNvSpPr txBox="1"/>
+          <p:nvPr/>
+        </p:nvSpPr>
+        <p:spPr>
+          <a:xfrm>
+            <a:off x="1846957" y="3530032"/>
+            <a:ext cx="447558" cy="246221"/>
+          </a:xfrm>
+          <a:prstGeom prst="rect">
+            <a:avLst/>
+          </a:prstGeom>
+          <a:noFill/>
+        </p:spPr>
+        <p:txBody>
+          <a:bodyPr wrap="none" rtlCol="0">
+            <a:spAutoFit/>
+          </a:bodyPr>
+          <a:lstStyle/>
+          <a:p>
+            <a:r>
+              <a:rPr lang="en-US" sz="1000" dirty="0"/>
+              <a:t>1000</a:t>
+            </a:r>
+          </a:p>
+        </p:txBody>
+      </p:sp>
+      <p:sp>
+        <p:nvSpPr>
+          <p:cNvPr id="32" name="TextBox 31">
+            <a:extLst>
+              <a:ext uri="{FF2B5EF4-FFF2-40B4-BE49-F238E27FC236}">
+                <a16:creationId xmlns:a16="http://schemas.microsoft.com/office/drawing/2014/main" id="{015FF4CD-2239-7141-8F5D-4FEE2AD4D2FB}"/>
+              </a:ext>
+            </a:extLst>
+          </p:cNvPr>
+          <p:cNvSpPr txBox="1"/>
+          <p:nvPr/>
+        </p:nvSpPr>
+        <p:spPr>
+          <a:xfrm>
+            <a:off x="2045636" y="4120049"/>
+            <a:ext cx="250390" cy="246221"/>
+          </a:xfrm>
+          <a:prstGeom prst="rect">
+            <a:avLst/>
+          </a:prstGeom>
+          <a:noFill/>
+        </p:spPr>
+        <p:txBody>
+          <a:bodyPr wrap="none" rtlCol="0">
+            <a:spAutoFit/>
+          </a:bodyPr>
+          <a:lstStyle/>
+          <a:p>
+            <a:r>
+              <a:rPr lang="en-US" sz="1000" dirty="0"/>
+              <a:t>0</a:t>
+            </a:r>
+          </a:p>
+        </p:txBody>
+      </p:sp>
+      <p:sp>
+        <p:nvSpPr>
+          <p:cNvPr id="33" name="TextBox 32">
+            <a:extLst>
+              <a:ext uri="{FF2B5EF4-FFF2-40B4-BE49-F238E27FC236}">
+                <a16:creationId xmlns:a16="http://schemas.microsoft.com/office/drawing/2014/main" id="{2C468C45-8AC9-5346-B2CD-AF4FA1D8086E}"/>
+              </a:ext>
+            </a:extLst>
+          </p:cNvPr>
+          <p:cNvSpPr txBox="1"/>
+          <p:nvPr/>
+        </p:nvSpPr>
+        <p:spPr>
+          <a:xfrm>
+            <a:off x="1846957" y="2940015"/>
+            <a:ext cx="447558" cy="246221"/>
+          </a:xfrm>
+          <a:prstGeom prst="rect">
+            <a:avLst/>
+          </a:prstGeom>
+          <a:noFill/>
+        </p:spPr>
+        <p:txBody>
+          <a:bodyPr wrap="none" rtlCol="0">
+            <a:spAutoFit/>
+          </a:bodyPr>
+          <a:lstStyle/>
+          <a:p>
+            <a:r>
+              <a:rPr lang="en-US" sz="1000" dirty="0"/>
+              <a:t>2000</a:t>
+            </a:r>
+          </a:p>
+        </p:txBody>
+      </p:sp>
+      <p:sp>
+        <p:nvSpPr>
+          <p:cNvPr id="34" name="TextBox 33">
+            <a:extLst>
+              <a:ext uri="{FF2B5EF4-FFF2-40B4-BE49-F238E27FC236}">
+                <a16:creationId xmlns:a16="http://schemas.microsoft.com/office/drawing/2014/main" id="{72252476-28B4-FF4D-A044-D94ED69096A2}"/>
+              </a:ext>
+            </a:extLst>
+          </p:cNvPr>
+          <p:cNvSpPr txBox="1"/>
+          <p:nvPr/>
+        </p:nvSpPr>
+        <p:spPr>
+          <a:xfrm>
+            <a:off x="1851234" y="2349998"/>
+            <a:ext cx="447558" cy="246221"/>
+          </a:xfrm>
+          <a:prstGeom prst="rect">
+            <a:avLst/>
+          </a:prstGeom>
+          <a:noFill/>
+        </p:spPr>
+        <p:txBody>
+          <a:bodyPr wrap="none" rtlCol="0">
+            <a:spAutoFit/>
+          </a:bodyPr>
+          <a:lstStyle/>
+          <a:p>
+            <a:r>
+              <a:rPr lang="en-US" sz="1000" dirty="0"/>
+              <a:t>3000</a:t>
+            </a:r>
+          </a:p>
+        </p:txBody>
+      </p:sp>
+      <p:sp>
+        <p:nvSpPr>
+          <p:cNvPr id="35" name="TextBox 34">
+            <a:extLst>
+              <a:ext uri="{FF2B5EF4-FFF2-40B4-BE49-F238E27FC236}">
+                <a16:creationId xmlns:a16="http://schemas.microsoft.com/office/drawing/2014/main" id="{BB31DA1A-2493-BF49-B5BC-D9BAEF784CBC}"/>
+              </a:ext>
+            </a:extLst>
+          </p:cNvPr>
+          <p:cNvSpPr txBox="1"/>
+          <p:nvPr/>
+        </p:nvSpPr>
+        <p:spPr>
+          <a:xfrm>
+            <a:off x="1845791" y="1755977"/>
+            <a:ext cx="447558" cy="246221"/>
+          </a:xfrm>
+          <a:prstGeom prst="rect">
+            <a:avLst/>
+          </a:prstGeom>
+          <a:noFill/>
+        </p:spPr>
+        <p:txBody>
+          <a:bodyPr wrap="none" rtlCol="0">
+            <a:spAutoFit/>
+          </a:bodyPr>
+          <a:lstStyle/>
+          <a:p>
+            <a:r>
+              <a:rPr lang="en-US" sz="1000" dirty="0"/>
+              <a:t>4000</a:t>
+            </a:r>
+          </a:p>
+        </p:txBody>
+      </p:sp>
+      <p:sp>
+        <p:nvSpPr>
+          <p:cNvPr id="36" name="TextBox 35">
+            <a:extLst>
+              <a:ext uri="{FF2B5EF4-FFF2-40B4-BE49-F238E27FC236}">
+                <a16:creationId xmlns:a16="http://schemas.microsoft.com/office/drawing/2014/main" id="{AC8B5727-94CA-614A-A234-0A09649CFF2D}"/>
+              </a:ext>
+            </a:extLst>
+          </p:cNvPr>
+          <p:cNvSpPr txBox="1"/>
+          <p:nvPr/>
+        </p:nvSpPr>
+        <p:spPr>
+          <a:xfrm>
+            <a:off x="1851234" y="1167399"/>
+            <a:ext cx="447558" cy="246221"/>
+          </a:xfrm>
+          <a:prstGeom prst="rect">
+            <a:avLst/>
+          </a:prstGeom>
+          <a:noFill/>
+        </p:spPr>
+        <p:txBody>
+          <a:bodyPr wrap="none" rtlCol="0">
+            <a:spAutoFit/>
+          </a:bodyPr>
+          <a:lstStyle/>
+          <a:p>
+            <a:r>
+              <a:rPr lang="en-US" sz="1000" dirty="0"/>
+              <a:t>5000</a:t>
             </a:r>
           </a:p>
         </p:txBody>
@@ -22256,7 +23472,7 @@
     </p:spTree>
     <p:extLst>
       <p:ext uri="{BB962C8B-B14F-4D97-AF65-F5344CB8AC3E}">
-        <p14:creationId xmlns:p14="http://schemas.microsoft.com/office/powerpoint/2010/main" val="2560380269"/>
+        <p14:creationId xmlns:p14="http://schemas.microsoft.com/office/powerpoint/2010/main" val="4280742187"/>
       </p:ext>
     </p:extLst>
   </p:cSld>
